--- a/docs/Tiny-Robot-Setup-Guide-TH.pptx
+++ b/docs/Tiny-Robot-Setup-Guide-TH.pptx
@@ -25,9 +25,10 @@
     <p:sldId id="273" r:id="rId19"/>
     <p:sldId id="274" r:id="rId20"/>
     <p:sldId id="275" r:id="rId21"/>
+    <p:sldId id="276" r:id="rId22"/>
   </p:sldIdLst>
   <p:notesMasterIdLst>
-    <p:notesMasterId r:id="rId22"/>
+    <p:notesMasterId r:id="rId23"/>
   </p:notesMasterIdLst>
   <p:sldSz cx="12192000" cy="6858000"/>
   <p:notesSz cx="6858000" cy="12192000"/>
@@ -126,7 +127,7 @@
   <p:extLst>
     <p:ext uri="{521415D9-36F7-43E2-AB2F-B90AF26B5E84}">
       <p14:sectionLst xmlns:p14="http://schemas.microsoft.com/office/powerpoint/2010/main">
-        <p14:section name="ภาพรวม" id="{e1bfca61-92ea-e312-d1b8-2f9ceb8336ea}">
+        <p14:section name="ภาพรวม" id="{7ead69f6-9c8d-67f5-d75f-12fa1a1265f5}">
           <p14:sldIdLst>
             <p14:sldId id="256"/>
             <p14:sldId id="257"/>
@@ -134,32 +135,33 @@
             <p14:sldId id="259"/>
           </p14:sldIdLst>
         </p14:section>
-        <p14:section name="ติดตั้ง" id="{d8073577-6192-4360-476f-810d7d16a2c4}">
+        <p14:section name="ติดตั้ง" id="{afb158ae-9641-b1ef-e5e6-fb9ec0d0da2a}">
           <p14:sldIdLst>
             <p14:sldId id="260"/>
             <p14:sldId id="261"/>
             <p14:sldId id="262"/>
             <p14:sldId id="263"/>
             <p14:sldId id="264"/>
+            <p14:sldId id="265"/>
           </p14:sldIdLst>
         </p14:section>
-        <p14:section name="ใช้งานจริง" id="{055b6d97-c510-7cb1-06ca-8e46bb7b5016}">
+        <p14:section name="ใช้งานจริง" id="{c34882cb-0f6a-df83-38aa-835f1ce11468}">
           <p14:sldIdLst>
-            <p14:sldId id="265"/>
             <p14:sldId id="266"/>
             <p14:sldId id="267"/>
             <p14:sldId id="268"/>
             <p14:sldId id="269"/>
+            <p14:sldId id="270"/>
           </p14:sldIdLst>
         </p14:section>
-        <p14:section name="ปรับแต่งและแก้ปัญหา" id="{3a995077-d28d-576a-aaf1-8745b81896ca}">
+        <p14:section name="ปรับแต่งและแก้ปัญหา" id="{8ad999ac-0901-758d-f24a-656e7118db69}">
           <p14:sldIdLst>
-            <p14:sldId id="270"/>
             <p14:sldId id="271"/>
             <p14:sldId id="272"/>
             <p14:sldId id="273"/>
             <p14:sldId id="274"/>
             <p14:sldId id="275"/>
+            <p14:sldId id="276"/>
           </p14:sldIdLst>
         </p14:section>
       </p14:sectionLst>
@@ -655,7 +657,9 @@
           <a:p>
             <a:r>
               <a:rPr lang="en-US" dirty="0"/>
-              <a:t/>
+              <a:t>ลำดับการอัปไม่สำคัญ แต่ที่สำคัญคือต้องเปลี่ยน Tools &gt; Board ให้ตรงกับบอร์ดที่กำลังจะอัปทุกครั้ง
+ลืมเปลี่ยนแล้วกดอัปคือความผิดพลาดที่เจอบ่อยที่สุด โค้ดจะถูกคอมไพล์ด้วยบอร์ดผิด ซึ่งบางทีก็อัปติดด้วยแล้วไปเพี้ยนตอนรัน
+ถ้าแก้แค่โค้ดฝั่งกล้อง ก็อัปแค่ esp32_camera_server พอ ไม่ต้องอัปใหม่ทั้งสามตัว</a:t>
             </a:r>
             <a:endParaRPr lang="en-US" dirty="0"/>
           </a:p>
@@ -743,8 +747,7 @@
           <a:p>
             <a:r>
               <a:rPr lang="en-US" dirty="0"/>
-              <a:t>ข้อ 4 เป็นข้อที่คนใหม่พลาดบ่อยที่สุด เห็นหุ่นไม่ขยับแล้วคิดว่าเสีย ทั้งที่แค่ยังไม่ได้เลื่อนความเร็วขึ้นจากศูนย์
-ที่ตั้งให้เริ่มที่ 0 เพราะไม่อยากให้หุ่นพุ่งทันทีที่เปิดหน้าเว็บ</a:t>
+              <a:t/>
             </a:r>
             <a:endParaRPr lang="en-US" dirty="0"/>
           </a:p>
@@ -832,8 +835,8 @@
           <a:p>
             <a:r>
               <a:rPr lang="en-US" dirty="0"/>
-              <a:t>ทุกหน้ายกเว้นหน้าสถานะเป็นรูปบิตแมปเต็มจอ 128x64 ที่วาดตัวหนังสือไว้ในรูปแล้ว
-ถ้าอยากเปลี่ยนรูป ให้แก้ไฟล์ PNG ใน assets/oled แล้วสั่ง py tools/png_to_bitmaps.py</a:t>
+              <a:t>ข้อ 4 เป็นข้อที่คนใหม่พลาดบ่อยที่สุด เห็นหุ่นไม่ขยับแล้วคิดว่าเสีย ทั้งที่แค่ยังไม่ได้เลื่อนความเร็วขึ้นจากศูนย์
+ที่ตั้งให้เริ่มที่ 0 เพราะไม่อยากให้หุ่นพุ่งทันทีที่เปิดหน้าเว็บ</a:t>
             </a:r>
             <a:endParaRPr lang="en-US" dirty="0"/>
           </a:p>
@@ -921,8 +924,8 @@
           <a:p>
             <a:r>
               <a:rPr lang="en-US" dirty="0"/>
-              <a:t>ถ้าเปิดหน้าเว็บไม่ขึ้น ให้เช็กว่ามือถือต่อ Wi-Fi ชื่อ My_Robot2 อยู่จริงไหม
-มือถือบางรุ่นเห็นว่า Wi-Fi วงนี้ไม่มีอินเทอร์เน็ตแล้วแอบสลับกลับไปใช้เน็ตมือถือเอง ต้องเข้าไปปิดการสลับอัตโนมัติก่อน</a:t>
+              <a:t>ทุกหน้ายกเว้นหน้าสถานะเป็นรูปบิตแมปเต็มจอ 128x64 ที่วาดตัวหนังสือไว้ในรูปแล้ว
+ถ้าอยากเปลี่ยนรูป ให้แก้ไฟล์ PNG ใน assets/oled แล้วสั่ง py tools/png_to_bitmaps.py</a:t>
             </a:r>
             <a:endParaRPr lang="en-US" dirty="0"/>
           </a:p>
@@ -1010,8 +1013,8 @@
           <a:p>
             <a:r>
               <a:rPr lang="en-US" dirty="0"/>
-              <a:t>ที่แยกเซนเซอร์เป็นคอลัมน์ละดวง เพราะถ้ายุบเป็น 00100 ช่องเดียว Excel จะอ่านเป็นตัวเลขแล้วตัดศูนย์หน้าทิ้งจนเหลือ 100
-เอาคอลัมน์ Turn ไปพล็อตกราฟเทียบกับเวลา จะเห็นเลยว่าหุ่นออกแรงสู้ตรงไหนของสนามมากที่สุด</a:t>
+              <a:t>ถ้าเปิดหน้าเว็บไม่ขึ้น ให้เช็กว่ามือถือต่อ Wi-Fi ชื่อ My_Robot2 อยู่จริงไหม
+มือถือบางรุ่นเห็นว่า Wi-Fi วงนี้ไม่มีอินเทอร์เน็ตแล้วแอบสลับกลับไปใช้เน็ตมือถือเอง ต้องเข้าไปปิดการสลับอัตโนมัติก่อน</a:t>
             </a:r>
             <a:endParaRPr lang="en-US" dirty="0"/>
           </a:p>
@@ -1099,7 +1102,8 @@
           <a:p>
             <a:r>
               <a:rPr lang="en-US" dirty="0"/>
-              <a:t/>
+              <a:t>ที่แยกเซนเซอร์เป็นคอลัมน์ละดวง เพราะถ้ายุบเป็น 00100 ช่องเดียว Excel จะอ่านเป็นตัวเลขแล้วตัดศูนย์หน้าทิ้งจนเหลือ 100
+เอาคอลัมน์ Turn ไปพล็อตกราฟเทียบกับเวลา จะเห็นเลยว่าหุ่นออกแรงสู้ตรงไหนของสนามมากที่สุด</a:t>
             </a:r>
             <a:endParaRPr lang="en-US" dirty="0"/>
           </a:p>
@@ -1187,8 +1191,7 @@
           <a:p>
             <a:r>
               <a:rPr lang="en-US" dirty="0"/>
-              <a:t>ปรับทีละค่า แล้วลองวิ่งจริงทุกครั้ง อย่าปรับพร้อมกันหลายค่า เพราะจะแยกไม่ออกว่าอันไหนช่วย
-ค่า Kp กับ Kd ถูกเก็บลง CSV ทุกแถว เปิดไฟล์เก่ามาดูแล้วรู้ทันทีว่ารอบนั้นจูนด้วยค่าอะไร</a:t>
+              <a:t/>
             </a:r>
             <a:endParaRPr lang="en-US" dirty="0"/>
           </a:p>
@@ -1276,8 +1279,8 @@
           <a:p>
             <a:r>
               <a:rPr lang="en-US" dirty="0"/>
-              <a:t>การกวาดหาเส้นตั้งใจให้ช้ากว่าการเลี้ยวปกติ ถ้าหมุนเร็วเกิน เส้นจะวิ่งผ่านใต้แถวเซนเซอร์เร็วกว่าที่เซนเซอร์จะอ่านทัน แล้วหุ่นจะเลยจุดที่ข้ามเส้นไปแล้วโดยไม่รู้ตัว
-ทิศที่กวาดรอบแรกถูกเลือกครั้งเดียวตอนเริ่มหา ไม่คำนวณใหม่ระหว่างทาง ไม่งั้นจะกวาดไปทางเดิมซ้ำๆ แล้วเดินห่างจากเส้นออกไปเรื่อยๆ</a:t>
+              <a:t>ปรับทีละค่า แล้วลองวิ่งจริงทุกครั้ง อย่าปรับพร้อมกันหลายค่า เพราะจะแยกไม่ออกว่าอันไหนช่วย
+ค่า Kp กับ Kd ถูกเก็บลง CSV ทุกแถว เปิดไฟล์เก่ามาดูแล้วรู้ทันทีว่ารอบนั้นจูนด้วยค่าอะไร</a:t>
             </a:r>
             <a:endParaRPr lang="en-US" dirty="0"/>
           </a:p>
@@ -1365,8 +1368,8 @@
           <a:p>
             <a:r>
               <a:rPr lang="en-US" dirty="0"/>
-              <a:t>หน้านี้คือหน้าที่คนใหม่จะเปิดดูบ่อยที่สุด บอกให้เขาถ่ายรูปเก็บไว้ในมือถือได้เลย
-ทุกข้อในตารางนี้เคยเกิดขึ้นจริงมาแล้วทั้งหมด ไม่ใช่กรณีสมมติ</a:t>
+              <a:t>การกวาดหาเส้นตั้งใจให้ช้ากว่าการเลี้ยวปกติ ถ้าหมุนเร็วเกิน เส้นจะวิ่งผ่านใต้แถวเซนเซอร์เร็วกว่าที่เซนเซอร์จะอ่านทัน แล้วหุ่นจะเลยจุดที่ข้ามเส้นไปแล้วโดยไม่รู้ตัว
+ทิศที่กวาดรอบแรกถูกเลือกครั้งเดียวตอนเริ่มหา ไม่คำนวณใหม่ระหว่างทาง ไม่งั้นจะกวาดไปทางเดิมซ้ำๆ แล้วเดินห่างจากเส้นออกไปเรื่อยๆ</a:t>
             </a:r>
             <a:endParaRPr lang="en-US" dirty="0"/>
           </a:p>
@@ -1454,7 +1457,8 @@
           <a:p>
             <a:r>
               <a:rPr lang="en-US" dirty="0"/>
-              <a:t>แนะนำให้พิมพ์หน้านี้แปะไว้ข้างสนามทดสอบ</a:t>
+              <a:t>หน้านี้คือหน้าที่คนใหม่จะเปิดดูบ่อยที่สุด บอกให้เขาถ่ายรูปเก็บไว้ในมือถือได้เลย
+ทุกข้อในตารางนี้เคยเกิดขึ้นจริงมาแล้วทั้งหมด ไม่ใช่กรณีสมมติ</a:t>
             </a:r>
             <a:endParaRPr lang="en-US" dirty="0"/>
           </a:p>
@@ -1631,7 +1635,7 @@
           <a:p>
             <a:r>
               <a:rPr lang="en-US" dirty="0"/>
-              <a:t>ปิดท้ายด้วยการเปิด README.md ให้ดูจริงสักรอบ จะได้รู้ว่าเวลาติดปัญหาต้องไปเปิดที่ไหน</a:t>
+              <a:t>แนะนำให้พิมพ์หน้านี้แปะไว้ข้างสนามทดสอบ</a:t>
             </a:r>
             <a:endParaRPr lang="en-US" dirty="0"/>
           </a:p>
@@ -1655,6 +1659,94 @@
             <a:fld id="{F7021451-1387-4CA6-816F-3879F97B5CBC}" type="slidenum">
               <a:rPr lang="en-US"/>
               <a:t>20</a:t>
+            </a:fld>
+            <a:endParaRPr lang="en-US"/>
+          </a:p>
+        </p:txBody>
+      </p:sp>
+    </p:spTree>
+    <p:extLst>
+      <p:ext uri="{BB962C8B-B14F-4D97-AF65-F5344CB8AC3E}">
+        <p14:creationId xmlns:p14="http://schemas.microsoft.com/office/powerpoint/2010/main" val="1024086991"/>
+      </p:ext>
+    </p:extLst>
+  </p:cSld>
+  <p:clrMapOvr>
+    <a:masterClrMapping/>
+  </p:clrMapOvr>
+</p:notes>
+</file>
+
+<file path=ppt/notesSlides/notesSlide21.xml><?xml version="1.0" encoding="utf-8"?>
+<p:notes xmlns:a="http://schemas.openxmlformats.org/drawingml/2006/main" xmlns:r="http://schemas.openxmlformats.org/officeDocument/2006/relationships" xmlns:p="http://schemas.openxmlformats.org/presentationml/2006/main">
+  <p:cSld>
+    <p:spTree>
+      <p:nvGrpSpPr>
+        <p:cNvPr id="1" name=""/>
+        <p:cNvGrpSpPr/>
+        <p:nvPr/>
+      </p:nvGrpSpPr>
+      <p:grpSpPr>
+        <a:xfrm>
+          <a:off x="0" y="0"/>
+          <a:ext cx="0" cy="0"/>
+          <a:chOff x="0" y="0"/>
+          <a:chExt cx="0" cy="0"/>
+        </a:xfrm>
+      </p:grpSpPr>
+      <p:sp>
+        <p:nvSpPr>
+          <p:cNvPr id="2" name="Slide Image Placeholder 1"/>
+          <p:cNvSpPr>
+            <a:spLocks noGrp="1" noRot="1" noChangeAspect="1"/>
+          </p:cNvSpPr>
+          <p:nvPr>
+            <p:ph type="sldImg"/>
+          </p:nvPr>
+        </p:nvSpPr>
+        <p:spPr/>
+      </p:sp>
+      <p:sp>
+        <p:nvSpPr>
+          <p:cNvPr id="3" name="Notes Placeholder 2"/>
+          <p:cNvSpPr>
+            <a:spLocks noGrp="1"/>
+          </p:cNvSpPr>
+          <p:nvPr>
+            <p:ph type="body" idx="1"/>
+          </p:nvPr>
+        </p:nvSpPr>
+        <p:spPr/>
+        <p:txBody>
+          <a:bodyPr/>
+          <a:lstStyle/>
+          <a:p>
+            <a:r>
+              <a:rPr lang="en-US" dirty="0"/>
+              <a:t>ปิดท้ายด้วยการเปิด README.md ให้ดูจริงสักรอบ จะได้รู้ว่าเวลาติดปัญหาต้องไปเปิดที่ไหน</a:t>
+            </a:r>
+            <a:endParaRPr lang="en-US" dirty="0"/>
+          </a:p>
+        </p:txBody>
+      </p:sp>
+      <p:sp>
+        <p:nvSpPr>
+          <p:cNvPr id="4" name="Slide Number Placeholder 3"/>
+          <p:cNvSpPr>
+            <a:spLocks noGrp="1"/>
+          </p:cNvSpPr>
+          <p:nvPr>
+            <p:ph type="sldNum" sz="quarter" idx="10"/>
+          </p:nvPr>
+        </p:nvSpPr>
+        <p:spPr/>
+        <p:txBody>
+          <a:bodyPr/>
+          <a:lstStyle/>
+          <a:p>
+            <a:fld id="{F7021451-1387-4CA6-816F-3879F97B5CBC}" type="slidenum">
+              <a:rPr lang="en-US"/>
+              <a:t>21</a:t>
             </a:fld>
             <a:endParaRPr lang="en-US"/>
           </a:p>
@@ -2249,8 +2341,8 @@
           <a:p>
             <a:r>
               <a:rPr lang="en-US" dirty="0"/>
-              <a:t>ลำดับการอัปไม่สำคัญ แต่ที่สำคัญคืออย่าอัปโค้ดผิดบอร์ด เพราะทั้งสามโฟลเดอร์หน้าตาคล้ายกัน
-ถ้าแก้แค่โค้ดฝั่งกล้อง ก็อัปแค่ esp32_camera_server พอ ไม่ต้องอัปใหม่ทั้งสามตัว</a:t>
+              <a:t>สองเรื่องนี้คือต้นเหตุที่ทำให้อัป STM32 ไม่ติดมาตลอดในวิธีเดิม คือลืมสลับ BOOT0 กลับ กับ Serial Monitor จองพอร์ตค้างไว้
+พอเปลี่ยนมาใช้ ST-Link ทั้งสองเรื่องหายไปพร้อมกัน เสียบ ST-Link ค้างไว้ได้ตลอดด้วย เพราะ PA13 PA14 ไม่ได้ถูกใช้ที่ไหนในโค้ดหุ่นเลย</a:t>
             </a:r>
             <a:endParaRPr lang="en-US" dirty="0"/>
           </a:p>
@@ -3294,13 +3386,13 @@
           <p:cNvPr id="2" name="Text 0"/>
           <p:cNvSpPr/>
           <p:nvPr>
-            <p:ph idx="100" type="body" hasCustomPrompt="1"/>
+            <p:ph idx="100" type="title" hasCustomPrompt="1"/>
           </p:nvPr>
         </p:nvSpPr>
         <p:spPr>
           <a:xfrm>
-            <a:off x="548640" y="2377440"/>
-            <a:ext cx="11064240" cy="457200"/>
+            <a:off x="548640" y="384048"/>
+            <a:ext cx="11064240" cy="685800"/>
           </a:xfrm>
           <a:prstGeom prst="rect">
             <a:avLst/>
@@ -3316,29 +3408,52 @@
               <a:buNone/>
             </a:pPr>
             <a:r>
-              <a:rPr lang="en-US" sz="6000" b="1" dirty="0">
-                <a:solidFill>
-                  <a:srgbClr val="E8803A"/>
+              <a:rPr lang="en-US" sz="3200" b="1" dirty="0">
+                <a:solidFill>
+                  <a:schemeClr val="tx1"/>
                 </a:solidFill>
               </a:rPr>
-              <a:t>02</a:t>
-            </a:r>
-            <a:endParaRPr lang="en-US" sz="6000" dirty="0"/>
-          </a:p>
-        </p:txBody>
-      </p:sp>
-      <p:sp>
-        <p:nvSpPr>
-          <p:cNvPr id="3" name="Text 0"/>
+              <a:t>อัปเฟิร์มแวร์ทีละบอร์ด</a:t>
+            </a:r>
+            <a:endParaRPr lang="en-US" sz="3200" dirty="0"/>
+          </a:p>
+        </p:txBody>
+      </p:sp>
+      <p:sp>
+        <p:nvSpPr>
+          <p:cNvPr id="3" name="dot-1"/>
           <p:cNvSpPr/>
-          <p:nvPr>
-            <p:ph idx="101" type="title" hasCustomPrompt="1"/>
-          </p:nvPr>
-        </p:nvSpPr>
-        <p:spPr>
-          <a:xfrm>
-            <a:off x="548640" y="3200400"/>
-            <a:ext cx="11064240" cy="914400"/>
+          <p:nvPr/>
+        </p:nvSpPr>
+        <p:spPr>
+          <a:xfrm>
+            <a:off x="548640" y="1463040"/>
+            <a:ext cx="475488" cy="475488"/>
+          </a:xfrm>
+          <a:prstGeom prst="ellipse">
+            <a:avLst/>
+          </a:prstGeom>
+          <a:solidFill>
+            <a:srgbClr val="E8803A"/>
+          </a:solidFill>
+          <a:ln w="12700">
+            <a:solidFill>
+              <a:srgbClr val="E8803A"/>
+            </a:solidFill>
+            <a:prstDash val="solid"/>
+          </a:ln>
+        </p:spPr>
+      </p:sp>
+      <p:sp>
+        <p:nvSpPr>
+          <p:cNvPr id="4" name="Text 2"/>
+          <p:cNvSpPr txBox="1"/>
+          <p:nvPr/>
+        </p:nvSpPr>
+        <p:spPr>
+          <a:xfrm>
+            <a:off x="548640" y="1463040"/>
+            <a:ext cx="475488" cy="475488"/>
           </a:xfrm>
           <a:prstGeom prst="rect">
             <a:avLst/>
@@ -3347,36 +3462,34 @@
           <a:ln/>
         </p:spPr>
         <p:txBody>
-          <a:bodyPr wrap="square" rtlCol="0"/>
-          <a:lstStyle/>
-          <a:p>
-            <a:pPr algn="l" indent="0" marL="0">
+          <a:bodyPr wrap="square" lIns="0" tIns="0" rIns="0" bIns="0" rtlCol="0" anchor="ctr"/>
+          <a:lstStyle/>
+          <a:p>
+            <a:pPr algn="ctr" indent="0" marL="0">
               <a:buNone/>
             </a:pPr>
             <a:r>
-              <a:rPr lang="en-US" sz="4000" b="1" dirty="0">
-                <a:solidFill>
-                  <a:schemeClr val="bg1"/>
+              <a:rPr lang="en-US" sz="1500" b="1" dirty="0">
+                <a:solidFill>
+                  <a:srgbClr val="FFFFFF"/>
                 </a:solidFill>
               </a:rPr>
-              <a:t>เปิดใช้งานจริง</a:t>
-            </a:r>
-            <a:endParaRPr lang="en-US" sz="4000" dirty="0"/>
-          </a:p>
-        </p:txBody>
-      </p:sp>
-      <p:sp>
-        <p:nvSpPr>
-          <p:cNvPr id="4" name="Text 0"/>
-          <p:cNvSpPr/>
-          <p:nvPr>
-            <p:ph idx="102" type="body" hasCustomPrompt="1"/>
-          </p:nvPr>
-        </p:nvSpPr>
-        <p:spPr>
-          <a:xfrm>
-            <a:off x="548640" y="4206240"/>
-            <a:ext cx="8686800" cy="914400"/>
+              <a:t>1</a:t>
+            </a:r>
+            <a:endParaRPr lang="en-US" sz="1500" dirty="0"/>
+          </a:p>
+        </p:txBody>
+      </p:sp>
+      <p:sp>
+        <p:nvSpPr>
+          <p:cNvPr id="5" name="Text 3"/>
+          <p:cNvSpPr txBox="1"/>
+          <p:nvPr/>
+        </p:nvSpPr>
+        <p:spPr>
+          <a:xfrm>
+            <a:off x="1207008" y="1444752"/>
+            <a:ext cx="4553712" cy="301752"/>
           </a:xfrm>
           <a:prstGeom prst="rect">
             <a:avLst/>
@@ -3385,21 +3498,607 @@
           <a:ln/>
         </p:spPr>
         <p:txBody>
-          <a:bodyPr wrap="square" rtlCol="0"/>
+          <a:bodyPr wrap="square" lIns="0" tIns="0" rIns="0" bIns="0" rtlCol="0" anchor="t"/>
           <a:lstStyle/>
           <a:p>
             <a:pPr algn="l" indent="0" marL="0">
               <a:buNone/>
             </a:pPr>
             <a:r>
-              <a:rPr lang="en-US" sz="1600" dirty="0">
-                <a:solidFill>
-                  <a:srgbClr val="B9C6D4"/>
+              <a:rPr lang="en-US" sz="1600" b="1" dirty="0">
+                <a:solidFill>
+                  <a:schemeClr val="tx1"/>
                 </a:solidFill>
               </a:rPr>
-              <a:t>ลำดับการเปิด สิ่งที่เห็นบนจอ หน้าเว็บควบคุม และข้อมูลที่เก็บได้</a:t>
+              <a:t>STM32  ผ่าน ST-Link</a:t>
             </a:r>
             <a:endParaRPr lang="en-US" sz="1600" dirty="0"/>
+          </a:p>
+        </p:txBody>
+      </p:sp>
+      <p:sp>
+        <p:nvSpPr>
+          <p:cNvPr id="6" name="Text 4"/>
+          <p:cNvSpPr txBox="1"/>
+          <p:nvPr/>
+        </p:nvSpPr>
+        <p:spPr>
+          <a:xfrm>
+            <a:off x="1207008" y="1773936"/>
+            <a:ext cx="4553712" cy="822960"/>
+          </a:xfrm>
+          <a:prstGeom prst="rect">
+            <a:avLst/>
+          </a:prstGeom>
+          <a:noFill/>
+          <a:ln/>
+        </p:spPr>
+        <p:txBody>
+          <a:bodyPr wrap="square" lIns="0" tIns="0" rIns="0" bIns="0" rtlCol="0" anchor="t"/>
+          <a:lstStyle/>
+          <a:p>
+            <a:pPr algn="l" indent="0" marL="0">
+              <a:lnSpc>
+                <a:spcPct val="125000"/>
+              </a:lnSpc>
+              <a:buNone/>
+            </a:pPr>
+            <a:r>
+              <a:rPr lang="en-US" sz="1300" dirty="0">
+                <a:solidFill>
+                  <a:srgbClr val="4A5568"/>
+                </a:solidFill>
+              </a:rPr>
+              <a:t>เปิดโฟลเดอร์ stm32_robot_controller  เลือกบอร์ด Generic STM32F1 series แล้วกด Upload ได้เลย ไม่ต้องแตะ BOOT0 และไม่ต้องเลือก Port</a:t>
+            </a:r>
+            <a:endParaRPr lang="en-US" sz="1300" dirty="0"/>
+          </a:p>
+        </p:txBody>
+      </p:sp>
+      <p:sp>
+        <p:nvSpPr>
+          <p:cNvPr id="7" name="dot-2"/>
+          <p:cNvSpPr/>
+          <p:nvPr/>
+        </p:nvSpPr>
+        <p:spPr>
+          <a:xfrm>
+            <a:off x="548640" y="2834640"/>
+            <a:ext cx="475488" cy="475488"/>
+          </a:xfrm>
+          <a:prstGeom prst="ellipse">
+            <a:avLst/>
+          </a:prstGeom>
+          <a:solidFill>
+            <a:srgbClr val="E8803A"/>
+          </a:solidFill>
+          <a:ln w="12700">
+            <a:solidFill>
+              <a:srgbClr val="E8803A"/>
+            </a:solidFill>
+            <a:prstDash val="solid"/>
+          </a:ln>
+        </p:spPr>
+      </p:sp>
+      <p:sp>
+        <p:nvSpPr>
+          <p:cNvPr id="8" name="Text 6"/>
+          <p:cNvSpPr txBox="1"/>
+          <p:nvPr/>
+        </p:nvSpPr>
+        <p:spPr>
+          <a:xfrm>
+            <a:off x="548640" y="2834640"/>
+            <a:ext cx="475488" cy="475488"/>
+          </a:xfrm>
+          <a:prstGeom prst="rect">
+            <a:avLst/>
+          </a:prstGeom>
+          <a:noFill/>
+          <a:ln/>
+        </p:spPr>
+        <p:txBody>
+          <a:bodyPr wrap="square" lIns="0" tIns="0" rIns="0" bIns="0" rtlCol="0" anchor="ctr"/>
+          <a:lstStyle/>
+          <a:p>
+            <a:pPr algn="ctr" indent="0" marL="0">
+              <a:buNone/>
+            </a:pPr>
+            <a:r>
+              <a:rPr lang="en-US" sz="1500" b="1" dirty="0">
+                <a:solidFill>
+                  <a:srgbClr val="FFFFFF"/>
+                </a:solidFill>
+              </a:rPr>
+              <a:t>2</a:t>
+            </a:r>
+            <a:endParaRPr lang="en-US" sz="1500" dirty="0"/>
+          </a:p>
+        </p:txBody>
+      </p:sp>
+      <p:sp>
+        <p:nvSpPr>
+          <p:cNvPr id="9" name="Text 7"/>
+          <p:cNvSpPr txBox="1"/>
+          <p:nvPr/>
+        </p:nvSpPr>
+        <p:spPr>
+          <a:xfrm>
+            <a:off x="1207008" y="2816352"/>
+            <a:ext cx="4553712" cy="301752"/>
+          </a:xfrm>
+          <a:prstGeom prst="rect">
+            <a:avLst/>
+          </a:prstGeom>
+          <a:noFill/>
+          <a:ln/>
+        </p:spPr>
+        <p:txBody>
+          <a:bodyPr wrap="square" lIns="0" tIns="0" rIns="0" bIns="0" rtlCol="0" anchor="t"/>
+          <a:lstStyle/>
+          <a:p>
+            <a:pPr algn="l" indent="0" marL="0">
+              <a:buNone/>
+            </a:pPr>
+            <a:r>
+              <a:rPr lang="en-US" sz="1600" b="1" dirty="0">
+                <a:solidFill>
+                  <a:schemeClr val="tx1"/>
+                </a:solidFill>
+              </a:rPr>
+              <a:t>ESP32 รีโมท  ผ่านสาย USB</a:t>
+            </a:r>
+            <a:endParaRPr lang="en-US" sz="1600" dirty="0"/>
+          </a:p>
+        </p:txBody>
+      </p:sp>
+      <p:sp>
+        <p:nvSpPr>
+          <p:cNvPr id="10" name="Text 8"/>
+          <p:cNvSpPr txBox="1"/>
+          <p:nvPr/>
+        </p:nvSpPr>
+        <p:spPr>
+          <a:xfrm>
+            <a:off x="1207008" y="3145536"/>
+            <a:ext cx="4553712" cy="822960"/>
+          </a:xfrm>
+          <a:prstGeom prst="rect">
+            <a:avLst/>
+          </a:prstGeom>
+          <a:noFill/>
+          <a:ln/>
+        </p:spPr>
+        <p:txBody>
+          <a:bodyPr wrap="square" lIns="0" tIns="0" rIns="0" bIns="0" rtlCol="0" anchor="t"/>
+          <a:lstStyle/>
+          <a:p>
+            <a:pPr algn="l" indent="0" marL="0">
+              <a:lnSpc>
+                <a:spcPct val="125000"/>
+              </a:lnSpc>
+              <a:buNone/>
+            </a:pPr>
+            <a:r>
+              <a:rPr lang="en-US" sz="1300" dirty="0">
+                <a:solidFill>
+                  <a:srgbClr val="4A5568"/>
+                </a:solidFill>
+              </a:rPr>
+              <a:t>เปิดโฟลเดอร์ esp32_remote_controller  เลือกบอร์ด ESP32 Dev Module  ต้องลงไลบรารี Adafruit GFX และ Adafruit SH110X ก่อน ไม่งั้นคอมไพล์ไม่ผ่าน</a:t>
+            </a:r>
+            <a:endParaRPr lang="en-US" sz="1300" dirty="0"/>
+          </a:p>
+        </p:txBody>
+      </p:sp>
+      <p:sp>
+        <p:nvSpPr>
+          <p:cNvPr id="11" name="dot-3"/>
+          <p:cNvSpPr/>
+          <p:nvPr/>
+        </p:nvSpPr>
+        <p:spPr>
+          <a:xfrm>
+            <a:off x="548640" y="4206240"/>
+            <a:ext cx="475488" cy="475488"/>
+          </a:xfrm>
+          <a:prstGeom prst="ellipse">
+            <a:avLst/>
+          </a:prstGeom>
+          <a:solidFill>
+            <a:srgbClr val="E8803A"/>
+          </a:solidFill>
+          <a:ln w="12700">
+            <a:solidFill>
+              <a:srgbClr val="E8803A"/>
+            </a:solidFill>
+            <a:prstDash val="solid"/>
+          </a:ln>
+        </p:spPr>
+      </p:sp>
+      <p:sp>
+        <p:nvSpPr>
+          <p:cNvPr id="12" name="Text 10"/>
+          <p:cNvSpPr txBox="1"/>
+          <p:nvPr/>
+        </p:nvSpPr>
+        <p:spPr>
+          <a:xfrm>
+            <a:off x="548640" y="4206240"/>
+            <a:ext cx="475488" cy="475488"/>
+          </a:xfrm>
+          <a:prstGeom prst="rect">
+            <a:avLst/>
+          </a:prstGeom>
+          <a:noFill/>
+          <a:ln/>
+        </p:spPr>
+        <p:txBody>
+          <a:bodyPr wrap="square" lIns="0" tIns="0" rIns="0" bIns="0" rtlCol="0" anchor="ctr"/>
+          <a:lstStyle/>
+          <a:p>
+            <a:pPr algn="ctr" indent="0" marL="0">
+              <a:buNone/>
+            </a:pPr>
+            <a:r>
+              <a:rPr lang="en-US" sz="1500" b="1" dirty="0">
+                <a:solidFill>
+                  <a:srgbClr val="FFFFFF"/>
+                </a:solidFill>
+              </a:rPr>
+              <a:t>3</a:t>
+            </a:r>
+            <a:endParaRPr lang="en-US" sz="1500" dirty="0"/>
+          </a:p>
+        </p:txBody>
+      </p:sp>
+      <p:sp>
+        <p:nvSpPr>
+          <p:cNvPr id="13" name="Text 11"/>
+          <p:cNvSpPr txBox="1"/>
+          <p:nvPr/>
+        </p:nvSpPr>
+        <p:spPr>
+          <a:xfrm>
+            <a:off x="1207008" y="4187952"/>
+            <a:ext cx="4553712" cy="301752"/>
+          </a:xfrm>
+          <a:prstGeom prst="rect">
+            <a:avLst/>
+          </a:prstGeom>
+          <a:noFill/>
+          <a:ln/>
+        </p:spPr>
+        <p:txBody>
+          <a:bodyPr wrap="square" lIns="0" tIns="0" rIns="0" bIns="0" rtlCol="0" anchor="t"/>
+          <a:lstStyle/>
+          <a:p>
+            <a:pPr algn="l" indent="0" marL="0">
+              <a:buNone/>
+            </a:pPr>
+            <a:r>
+              <a:rPr lang="en-US" sz="1600" b="1" dirty="0">
+                <a:solidFill>
+                  <a:schemeClr val="tx1"/>
+                </a:solidFill>
+              </a:rPr>
+              <a:t>ESP32-CAM  ผ่าน USB-TTL</a:t>
+            </a:r>
+            <a:endParaRPr lang="en-US" sz="1600" dirty="0"/>
+          </a:p>
+        </p:txBody>
+      </p:sp>
+      <p:sp>
+        <p:nvSpPr>
+          <p:cNvPr id="14" name="Text 12"/>
+          <p:cNvSpPr txBox="1"/>
+          <p:nvPr/>
+        </p:nvSpPr>
+        <p:spPr>
+          <a:xfrm>
+            <a:off x="1207008" y="4517136"/>
+            <a:ext cx="4553712" cy="822960"/>
+          </a:xfrm>
+          <a:prstGeom prst="rect">
+            <a:avLst/>
+          </a:prstGeom>
+          <a:noFill/>
+          <a:ln/>
+        </p:spPr>
+        <p:txBody>
+          <a:bodyPr wrap="square" lIns="0" tIns="0" rIns="0" bIns="0" rtlCol="0" anchor="t"/>
+          <a:lstStyle/>
+          <a:p>
+            <a:pPr algn="l" indent="0" marL="0">
+              <a:lnSpc>
+                <a:spcPct val="125000"/>
+              </a:lnSpc>
+              <a:buNone/>
+            </a:pPr>
+            <a:r>
+              <a:rPr lang="en-US" sz="1300" dirty="0">
+                <a:solidFill>
+                  <a:srgbClr val="4A5568"/>
+                </a:solidFill>
+              </a:rPr>
+              <a:t>บอร์ดนี้ไม่มีช่อง USB  ต้องต่อ IO0 ลง GND ก่อนกดอัป แล้วถอดออกเมื่ออัปเสร็จ  เลือกบอร์ด AI Thinker ESP32-CAM</a:t>
+            </a:r>
+            <a:endParaRPr lang="en-US" sz="1300" dirty="0"/>
+          </a:p>
+        </p:txBody>
+      </p:sp>
+      <p:sp>
+        <p:nvSpPr>
+          <p:cNvPr id="15" name="callout"/>
+          <p:cNvSpPr/>
+          <p:nvPr/>
+        </p:nvSpPr>
+        <p:spPr>
+          <a:xfrm>
+            <a:off x="6309360" y="1463040"/>
+            <a:ext cx="5303520" cy="1371600"/>
+          </a:xfrm>
+          <a:prstGeom prst="roundRect">
+            <a:avLst>
+              <a:gd name="adj" fmla="val 5333"/>
+            </a:avLst>
+          </a:prstGeom>
+          <a:solidFill>
+            <a:srgbClr val="FBEEEC"/>
+          </a:solidFill>
+          <a:ln w="12700">
+            <a:solidFill>
+              <a:srgbClr val="F0D3CE"/>
+            </a:solidFill>
+            <a:prstDash val="solid"/>
+          </a:ln>
+        </p:spPr>
+      </p:sp>
+      <p:sp>
+        <p:nvSpPr>
+          <p:cNvPr id="16" name="Text 14"/>
+          <p:cNvSpPr txBox="1"/>
+          <p:nvPr/>
+        </p:nvSpPr>
+        <p:spPr>
+          <a:xfrm>
+            <a:off x="6537960" y="1591056"/>
+            <a:ext cx="4846320" cy="274320"/>
+          </a:xfrm>
+          <a:prstGeom prst="rect">
+            <a:avLst/>
+          </a:prstGeom>
+          <a:noFill/>
+          <a:ln/>
+        </p:spPr>
+        <p:txBody>
+          <a:bodyPr wrap="square" lIns="0" tIns="0" rIns="0" bIns="0" rtlCol="0" anchor="t"/>
+          <a:lstStyle/>
+          <a:p>
+            <a:pPr algn="l" indent="0" marL="0">
+              <a:buNone/>
+            </a:pPr>
+            <a:r>
+              <a:rPr lang="en-US" sz="1400" b="1" dirty="0">
+                <a:solidFill>
+                  <a:srgbClr val="B3261E"/>
+                </a:solidFill>
+              </a:rPr>
+              <a:t>ขึ้นว่า undefined reference to 'Serial2'</a:t>
+            </a:r>
+            <a:endParaRPr lang="en-US" sz="1400" dirty="0"/>
+          </a:p>
+        </p:txBody>
+      </p:sp>
+      <p:sp>
+        <p:nvSpPr>
+          <p:cNvPr id="17" name="Text 15"/>
+          <p:cNvSpPr txBox="1"/>
+          <p:nvPr/>
+        </p:nvSpPr>
+        <p:spPr>
+          <a:xfrm>
+            <a:off x="6537960" y="1901952"/>
+            <a:ext cx="4846320" cy="804672"/>
+          </a:xfrm>
+          <a:prstGeom prst="rect">
+            <a:avLst/>
+          </a:prstGeom>
+          <a:noFill/>
+          <a:ln/>
+        </p:spPr>
+        <p:txBody>
+          <a:bodyPr wrap="square" lIns="0" tIns="0" rIns="0" bIns="0" rtlCol="0" anchor="t"/>
+          <a:lstStyle/>
+          <a:p>
+            <a:pPr algn="l" indent="0" marL="0">
+              <a:lnSpc>
+                <a:spcPct val="120000"/>
+              </a:lnSpc>
+              <a:buNone/>
+            </a:pPr>
+            <a:r>
+              <a:rPr lang="en-US" sz="1250" dirty="0">
+                <a:solidFill>
+                  <a:srgbClr val="4A5568"/>
+                </a:solidFill>
+              </a:rPr>
+              <a:t>ไม่ใช่โค้ดผิด  คอร์ STM32 ตัวทางการไม่ได้สร้าง Serial2 กับ Serial3 ให้เอง สเก็ตช์จึงสร้างไว้ให้แล้วสองบรรทัดตรงหัวไฟล์  ห้ามลบทิ้ง</a:t>
+            </a:r>
+            <a:endParaRPr lang="en-US" sz="1250" dirty="0"/>
+          </a:p>
+        </p:txBody>
+      </p:sp>
+      <p:sp>
+        <p:nvSpPr>
+          <p:cNvPr id="18" name="callout"/>
+          <p:cNvSpPr/>
+          <p:nvPr/>
+        </p:nvSpPr>
+        <p:spPr>
+          <a:xfrm>
+            <a:off x="6309360" y="3017520"/>
+            <a:ext cx="5303520" cy="1828800"/>
+          </a:xfrm>
+          <a:prstGeom prst="roundRect">
+            <a:avLst>
+              <a:gd name="adj" fmla="val 4000"/>
+            </a:avLst>
+          </a:prstGeom>
+          <a:solidFill>
+            <a:srgbClr val="E8F1F5"/>
+          </a:solidFill>
+          <a:ln w="12700">
+            <a:solidFill>
+              <a:srgbClr val="CBE0E9"/>
+            </a:solidFill>
+            <a:prstDash val="solid"/>
+          </a:ln>
+        </p:spPr>
+      </p:sp>
+      <p:sp>
+        <p:nvSpPr>
+          <p:cNvPr id="19" name="Text 17"/>
+          <p:cNvSpPr txBox="1"/>
+          <p:nvPr/>
+        </p:nvSpPr>
+        <p:spPr>
+          <a:xfrm>
+            <a:off x="6537960" y="3145536"/>
+            <a:ext cx="4846320" cy="274320"/>
+          </a:xfrm>
+          <a:prstGeom prst="rect">
+            <a:avLst/>
+          </a:prstGeom>
+          <a:noFill/>
+          <a:ln/>
+        </p:spPr>
+        <p:txBody>
+          <a:bodyPr wrap="square" lIns="0" tIns="0" rIns="0" bIns="0" rtlCol="0" anchor="t"/>
+          <a:lstStyle/>
+          <a:p>
+            <a:pPr algn="l" indent="0" marL="0">
+              <a:buNone/>
+            </a:pPr>
+            <a:r>
+              <a:rPr lang="en-US" sz="1400" b="1" dirty="0">
+                <a:solidFill>
+                  <a:srgbClr val="1C7293"/>
+                </a:solidFill>
+              </a:rPr>
+              <a:t>เช็กว่าอัปติดจริงไหม</a:t>
+            </a:r>
+            <a:endParaRPr lang="en-US" sz="1400" dirty="0"/>
+          </a:p>
+        </p:txBody>
+      </p:sp>
+      <p:sp>
+        <p:nvSpPr>
+          <p:cNvPr id="20" name="Text 18"/>
+          <p:cNvSpPr txBox="1"/>
+          <p:nvPr/>
+        </p:nvSpPr>
+        <p:spPr>
+          <a:xfrm>
+            <a:off x="6537960" y="3456432"/>
+            <a:ext cx="4846320" cy="1261872"/>
+          </a:xfrm>
+          <a:prstGeom prst="rect">
+            <a:avLst/>
+          </a:prstGeom>
+          <a:noFill/>
+          <a:ln/>
+        </p:spPr>
+        <p:txBody>
+          <a:bodyPr wrap="square" lIns="0" tIns="0" rIns="0" bIns="0" rtlCol="0" anchor="t"/>
+          <a:lstStyle/>
+          <a:p>
+            <a:pPr algn="l" indent="0" marL="0">
+              <a:lnSpc>
+                <a:spcPct val="120000"/>
+              </a:lnSpc>
+              <a:buNone/>
+            </a:pPr>
+            <a:r>
+              <a:rPr lang="en-US" sz="1250" dirty="0">
+                <a:solidFill>
+                  <a:srgbClr val="4A5568"/>
+                </a:solidFill>
+              </a:rPr>
+              <a:t>ฝั่ง ST-Link จะขึ้นคำว่า Download verified successfully ซึ่งแปลว่าอ่านกลับมาเทียบแล้วตรงทุกไบต์</a:t>
+            </a:r>
+            <a:endParaRPr lang="en-US" sz="1250" dirty="0"/>
+          </a:p>
+          <a:p>
+            <a:pPr algn="l" indent="0" marL="0">
+              <a:lnSpc>
+                <a:spcPct val="120000"/>
+              </a:lnSpc>
+              <a:buNone/>
+            </a:pPr>
+            <a:endParaRPr lang="en-US" sz="1250" dirty="0"/>
+          </a:p>
+          <a:p>
+            <a:pPr algn="l" indent="0" marL="0">
+              <a:lnSpc>
+                <a:spcPct val="120000"/>
+              </a:lnSpc>
+              <a:buNone/>
+            </a:pPr>
+            <a:r>
+              <a:rPr lang="en-US" sz="1250" dirty="0">
+                <a:solidFill>
+                  <a:srgbClr val="4A5568"/>
+                </a:solidFill>
+              </a:rPr>
+              <a:t>อีกทางคือเปิด Serial Monitor ที่ 115200 แล้วกดรีเซ็ต ดูว่าวันเวลาคอมไพล์ตรงกับที่เพิ่งอัปไหม</a:t>
+            </a:r>
+            <a:endParaRPr lang="en-US" sz="1250" dirty="0"/>
+          </a:p>
+        </p:txBody>
+      </p:sp>
+      <p:sp>
+        <p:nvSpPr>
+          <p:cNvPr id="25" name="Slide Number Placeholder 0"/>
+          <p:cNvSpPr>
+            <a:spLocks noGrp="1"/>
+          </p:cNvSpPr>
+          <p:nvPr>
+            <p:ph type="sldNum" sz="quarter" idx="4294967295"/>
+          </p:nvPr>
+        </p:nvSpPr>
+        <p:spPr>
+          <a:xfrm>
+            <a:off x="11338560" y="6263640"/>
+            <a:ext cx="457200" cy="274320"/>
+          </a:xfrm>
+          <a:prstGeom prst="rect">
+            <a:avLst/>
+          </a:prstGeom>
+          <a:extLst>
+            <a:ext uri="{C572A759-6A51-4108-AA02-DFA0A04FC94B}">
+              <ma14:wrappingTextBoxFlag xmlns:ma14="http://schemas.microsoft.com/office/mac/drawingml/2011/main" val="0"/>
+            </a:ext>
+          </a:extLst>
+        </p:spPr>
+        <p:txBody>
+          <a:bodyPr/>
+          <a:lstStyle>
+            <a:lvl1pPr>
+              <a:defRPr sz="1000">
+                <a:solidFill>
+                  <a:srgbClr val="6B7E93"/>
+                </a:solidFill>
+              </a:defRPr>
+            </a:lvl1pPr>
+          </a:lstStyle>
+          <a:p>
+            <a:pPr algn="r"/>
+            <a:fld id="{F7021451-1387-4CA6-816F-3879F97B5CBC}" type="slidenum">
+              <a:rPr b="0" lang="en-US"/>
+              <a:t>10</a:t>
+            </a:fld>
+            <a:endParaRPr lang="en-US"/>
           </a:p>
         </p:txBody>
       </p:sp>
@@ -3433,13 +4132,13 @@
           <p:cNvPr id="2" name="Text 0"/>
           <p:cNvSpPr/>
           <p:nvPr>
-            <p:ph idx="100" type="title" hasCustomPrompt="1"/>
+            <p:ph idx="100" type="body" hasCustomPrompt="1"/>
           </p:nvPr>
         </p:nvSpPr>
         <p:spPr>
           <a:xfrm>
-            <a:off x="548640" y="384048"/>
-            <a:ext cx="11064240" cy="685800"/>
+            <a:off x="548640" y="2377440"/>
+            <a:ext cx="11064240" cy="457200"/>
           </a:xfrm>
           <a:prstGeom prst="rect">
             <a:avLst/>
@@ -3455,52 +4154,29 @@
               <a:buNone/>
             </a:pPr>
             <a:r>
-              <a:rPr lang="en-US" sz="3200" b="1" dirty="0">
-                <a:solidFill>
-                  <a:schemeClr val="tx1"/>
+              <a:rPr lang="en-US" sz="6000" b="1" dirty="0">
+                <a:solidFill>
+                  <a:srgbClr val="E8803A"/>
                 </a:solidFill>
               </a:rPr>
-              <a:t>เปิดใช้งาน 6 ขั้นตอน</a:t>
-            </a:r>
-            <a:endParaRPr lang="en-US" sz="3200" dirty="0"/>
-          </a:p>
-        </p:txBody>
-      </p:sp>
-      <p:sp>
-        <p:nvSpPr>
-          <p:cNvPr id="3" name="dot-1"/>
+              <a:t>02</a:t>
+            </a:r>
+            <a:endParaRPr lang="en-US" sz="6000" dirty="0"/>
+          </a:p>
+        </p:txBody>
+      </p:sp>
+      <p:sp>
+        <p:nvSpPr>
+          <p:cNvPr id="3" name="Text 0"/>
           <p:cNvSpPr/>
-          <p:nvPr/>
-        </p:nvSpPr>
-        <p:spPr>
-          <a:xfrm>
-            <a:off x="548640" y="1463040"/>
-            <a:ext cx="475488" cy="475488"/>
-          </a:xfrm>
-          <a:prstGeom prst="ellipse">
-            <a:avLst/>
-          </a:prstGeom>
-          <a:solidFill>
-            <a:srgbClr val="E8803A"/>
-          </a:solidFill>
-          <a:ln w="12700">
-            <a:solidFill>
-              <a:srgbClr val="E8803A"/>
-            </a:solidFill>
-            <a:prstDash val="solid"/>
-          </a:ln>
-        </p:spPr>
-      </p:sp>
-      <p:sp>
-        <p:nvSpPr>
-          <p:cNvPr id="4" name="Text 2"/>
-          <p:cNvSpPr txBox="1"/>
-          <p:nvPr/>
-        </p:nvSpPr>
-        <p:spPr>
-          <a:xfrm>
-            <a:off x="548640" y="1463040"/>
-            <a:ext cx="475488" cy="475488"/>
+          <p:nvPr>
+            <p:ph idx="101" type="title" hasCustomPrompt="1"/>
+          </p:nvPr>
+        </p:nvSpPr>
+        <p:spPr>
+          <a:xfrm>
+            <a:off x="548640" y="3200400"/>
+            <a:ext cx="11064240" cy="914400"/>
           </a:xfrm>
           <a:prstGeom prst="rect">
             <a:avLst/>
@@ -3509,34 +4185,36 @@
           <a:ln/>
         </p:spPr>
         <p:txBody>
-          <a:bodyPr wrap="square" lIns="0" tIns="0" rIns="0" bIns="0" rtlCol="0" anchor="ctr"/>
-          <a:lstStyle/>
-          <a:p>
-            <a:pPr algn="ctr" indent="0" marL="0">
+          <a:bodyPr wrap="square" rtlCol="0"/>
+          <a:lstStyle/>
+          <a:p>
+            <a:pPr algn="l" indent="0" marL="0">
               <a:buNone/>
             </a:pPr>
             <a:r>
-              <a:rPr lang="en-US" sz="1500" b="1" dirty="0">
-                <a:solidFill>
-                  <a:srgbClr val="FFFFFF"/>
+              <a:rPr lang="en-US" sz="4000" b="1" dirty="0">
+                <a:solidFill>
+                  <a:schemeClr val="bg1"/>
                 </a:solidFill>
               </a:rPr>
-              <a:t>1</a:t>
-            </a:r>
-            <a:endParaRPr lang="en-US" sz="1500" dirty="0"/>
-          </a:p>
-        </p:txBody>
-      </p:sp>
-      <p:sp>
-        <p:nvSpPr>
-          <p:cNvPr id="5" name="Text 3"/>
-          <p:cNvSpPr txBox="1"/>
-          <p:nvPr/>
-        </p:nvSpPr>
-        <p:spPr>
-          <a:xfrm>
-            <a:off x="1207008" y="1444752"/>
-            <a:ext cx="4553712" cy="301752"/>
+              <a:t>เปิดใช้งานจริง</a:t>
+            </a:r>
+            <a:endParaRPr lang="en-US" sz="4000" dirty="0"/>
+          </a:p>
+        </p:txBody>
+      </p:sp>
+      <p:sp>
+        <p:nvSpPr>
+          <p:cNvPr id="4" name="Text 0"/>
+          <p:cNvSpPr/>
+          <p:nvPr>
+            <p:ph idx="102" type="body" hasCustomPrompt="1"/>
+          </p:nvPr>
+        </p:nvSpPr>
+        <p:spPr>
+          <a:xfrm>
+            <a:off x="548640" y="4206240"/>
+            <a:ext cx="8686800" cy="914400"/>
           </a:xfrm>
           <a:prstGeom prst="rect">
             <a:avLst/>
@@ -3545,887 +4223,21 @@
           <a:ln/>
         </p:spPr>
         <p:txBody>
-          <a:bodyPr wrap="square" lIns="0" tIns="0" rIns="0" bIns="0" rtlCol="0" anchor="t"/>
+          <a:bodyPr wrap="square" rtlCol="0"/>
           <a:lstStyle/>
           <a:p>
             <a:pPr algn="l" indent="0" marL="0">
               <a:buNone/>
             </a:pPr>
             <a:r>
-              <a:rPr lang="en-US" sz="1600" b="1" dirty="0">
-                <a:solidFill>
-                  <a:schemeClr val="tx1"/>
+              <a:rPr lang="en-US" sz="1600" dirty="0">
+                <a:solidFill>
+                  <a:srgbClr val="B9C6D4"/>
                 </a:solidFill>
               </a:rPr>
-              <a:t>เปิดไฟหุ่น</a:t>
+              <a:t>ลำดับการเปิด สิ่งที่เห็นบนจอ หน้าเว็บควบคุม และข้อมูลที่เก็บได้</a:t>
             </a:r>
             <a:endParaRPr lang="en-US" sz="1600" dirty="0"/>
-          </a:p>
-        </p:txBody>
-      </p:sp>
-      <p:sp>
-        <p:nvSpPr>
-          <p:cNvPr id="6" name="Text 4"/>
-          <p:cNvSpPr txBox="1"/>
-          <p:nvPr/>
-        </p:nvSpPr>
-        <p:spPr>
-          <a:xfrm>
-            <a:off x="1207008" y="1773936"/>
-            <a:ext cx="4553712" cy="822960"/>
-          </a:xfrm>
-          <a:prstGeom prst="rect">
-            <a:avLst/>
-          </a:prstGeom>
-          <a:noFill/>
-          <a:ln/>
-        </p:spPr>
-        <p:txBody>
-          <a:bodyPr wrap="square" lIns="0" tIns="0" rIns="0" bIns="0" rtlCol="0" anchor="t"/>
-          <a:lstStyle/>
-          <a:p>
-            <a:pPr algn="l" indent="0" marL="0">
-              <a:lnSpc>
-                <a:spcPct val="125000"/>
-              </a:lnSpc>
-              <a:buNone/>
-            </a:pPr>
-            <a:r>
-              <a:rPr lang="en-US" sz="1300" dirty="0">
-                <a:solidFill>
-                  <a:srgbClr val="4A5568"/>
-                </a:solidFill>
-              </a:rPr>
-              <a:t>จอจะขึ้นหน้าต้อนรับ 2.5 วินาที แล้วเปลี่ยนเป็นหน้าสถานะเอง</a:t>
-            </a:r>
-            <a:endParaRPr lang="en-US" sz="1300" dirty="0"/>
-          </a:p>
-        </p:txBody>
-      </p:sp>
-      <p:sp>
-        <p:nvSpPr>
-          <p:cNvPr id="7" name="dot-2"/>
-          <p:cNvSpPr/>
-          <p:nvPr/>
-        </p:nvSpPr>
-        <p:spPr>
-          <a:xfrm>
-            <a:off x="6400800" y="1463040"/>
-            <a:ext cx="475488" cy="475488"/>
-          </a:xfrm>
-          <a:prstGeom prst="ellipse">
-            <a:avLst/>
-          </a:prstGeom>
-          <a:solidFill>
-            <a:srgbClr val="E8803A"/>
-          </a:solidFill>
-          <a:ln w="12700">
-            <a:solidFill>
-              <a:srgbClr val="E8803A"/>
-            </a:solidFill>
-            <a:prstDash val="solid"/>
-          </a:ln>
-        </p:spPr>
-      </p:sp>
-      <p:sp>
-        <p:nvSpPr>
-          <p:cNvPr id="8" name="Text 6"/>
-          <p:cNvSpPr txBox="1"/>
-          <p:nvPr/>
-        </p:nvSpPr>
-        <p:spPr>
-          <a:xfrm>
-            <a:off x="6400800" y="1463040"/>
-            <a:ext cx="475488" cy="475488"/>
-          </a:xfrm>
-          <a:prstGeom prst="rect">
-            <a:avLst/>
-          </a:prstGeom>
-          <a:noFill/>
-          <a:ln/>
-        </p:spPr>
-        <p:txBody>
-          <a:bodyPr wrap="square" lIns="0" tIns="0" rIns="0" bIns="0" rtlCol="0" anchor="ctr"/>
-          <a:lstStyle/>
-          <a:p>
-            <a:pPr algn="ctr" indent="0" marL="0">
-              <a:buNone/>
-            </a:pPr>
-            <a:r>
-              <a:rPr lang="en-US" sz="1500" b="1" dirty="0">
-                <a:solidFill>
-                  <a:srgbClr val="FFFFFF"/>
-                </a:solidFill>
-              </a:rPr>
-              <a:t>2</a:t>
-            </a:r>
-            <a:endParaRPr lang="en-US" sz="1500" dirty="0"/>
-          </a:p>
-        </p:txBody>
-      </p:sp>
-      <p:sp>
-        <p:nvSpPr>
-          <p:cNvPr id="9" name="Text 7"/>
-          <p:cNvSpPr txBox="1"/>
-          <p:nvPr/>
-        </p:nvSpPr>
-        <p:spPr>
-          <a:xfrm>
-            <a:off x="7059168" y="1444752"/>
-            <a:ext cx="4553712" cy="301752"/>
-          </a:xfrm>
-          <a:prstGeom prst="rect">
-            <a:avLst/>
-          </a:prstGeom>
-          <a:noFill/>
-          <a:ln/>
-        </p:spPr>
-        <p:txBody>
-          <a:bodyPr wrap="square" lIns="0" tIns="0" rIns="0" bIns="0" rtlCol="0" anchor="t"/>
-          <a:lstStyle/>
-          <a:p>
-            <a:pPr algn="l" indent="0" marL="0">
-              <a:buNone/>
-            </a:pPr>
-            <a:r>
-              <a:rPr lang="en-US" sz="1600" b="1" dirty="0">
-                <a:solidFill>
-                  <a:schemeClr val="tx1"/>
-                </a:solidFill>
-              </a:rPr>
-              <a:t>ต่อ Wi-Fi ของหุ่น</a:t>
-            </a:r>
-            <a:endParaRPr lang="en-US" sz="1600" dirty="0"/>
-          </a:p>
-        </p:txBody>
-      </p:sp>
-      <p:sp>
-        <p:nvSpPr>
-          <p:cNvPr id="10" name="Text 8"/>
-          <p:cNvSpPr txBox="1"/>
-          <p:nvPr/>
-        </p:nvSpPr>
-        <p:spPr>
-          <a:xfrm>
-            <a:off x="7059168" y="1773936"/>
-            <a:ext cx="4553712" cy="822960"/>
-          </a:xfrm>
-          <a:prstGeom prst="rect">
-            <a:avLst/>
-          </a:prstGeom>
-          <a:noFill/>
-          <a:ln/>
-        </p:spPr>
-        <p:txBody>
-          <a:bodyPr wrap="square" lIns="0" tIns="0" rIns="0" bIns="0" rtlCol="0" anchor="t"/>
-          <a:lstStyle/>
-          <a:p>
-            <a:pPr algn="l" indent="0" marL="0">
-              <a:lnSpc>
-                <a:spcPct val="125000"/>
-              </a:lnSpc>
-              <a:buNone/>
-            </a:pPr>
-            <a:r>
-              <a:rPr lang="en-US" sz="1300" dirty="0">
-                <a:solidFill>
-                  <a:srgbClr val="4A5568"/>
-                </a:solidFill>
-              </a:rPr>
-              <a:t>ชื่อ My_Robot2 รหัส password1234  ต่อทั้งมือถือและเครื่อง PC</a:t>
-            </a:r>
-            <a:endParaRPr lang="en-US" sz="1300" dirty="0"/>
-          </a:p>
-        </p:txBody>
-      </p:sp>
-      <p:sp>
-        <p:nvSpPr>
-          <p:cNvPr id="11" name="dot-3"/>
-          <p:cNvSpPr/>
-          <p:nvPr/>
-        </p:nvSpPr>
-        <p:spPr>
-          <a:xfrm>
-            <a:off x="548640" y="2761488"/>
-            <a:ext cx="475488" cy="475488"/>
-          </a:xfrm>
-          <a:prstGeom prst="ellipse">
-            <a:avLst/>
-          </a:prstGeom>
-          <a:solidFill>
-            <a:srgbClr val="E8803A"/>
-          </a:solidFill>
-          <a:ln w="12700">
-            <a:solidFill>
-              <a:srgbClr val="E8803A"/>
-            </a:solidFill>
-            <a:prstDash val="solid"/>
-          </a:ln>
-        </p:spPr>
-      </p:sp>
-      <p:sp>
-        <p:nvSpPr>
-          <p:cNvPr id="12" name="Text 10"/>
-          <p:cNvSpPr txBox="1"/>
-          <p:nvPr/>
-        </p:nvSpPr>
-        <p:spPr>
-          <a:xfrm>
-            <a:off x="548640" y="2761488"/>
-            <a:ext cx="475488" cy="475488"/>
-          </a:xfrm>
-          <a:prstGeom prst="rect">
-            <a:avLst/>
-          </a:prstGeom>
-          <a:noFill/>
-          <a:ln/>
-        </p:spPr>
-        <p:txBody>
-          <a:bodyPr wrap="square" lIns="0" tIns="0" rIns="0" bIns="0" rtlCol="0" anchor="ctr"/>
-          <a:lstStyle/>
-          <a:p>
-            <a:pPr algn="ctr" indent="0" marL="0">
-              <a:buNone/>
-            </a:pPr>
-            <a:r>
-              <a:rPr lang="en-US" sz="1500" b="1" dirty="0">
-                <a:solidFill>
-                  <a:srgbClr val="FFFFFF"/>
-                </a:solidFill>
-              </a:rPr>
-              <a:t>3</a:t>
-            </a:r>
-            <a:endParaRPr lang="en-US" sz="1500" dirty="0"/>
-          </a:p>
-        </p:txBody>
-      </p:sp>
-      <p:sp>
-        <p:nvSpPr>
-          <p:cNvPr id="13" name="Text 11"/>
-          <p:cNvSpPr txBox="1"/>
-          <p:nvPr/>
-        </p:nvSpPr>
-        <p:spPr>
-          <a:xfrm>
-            <a:off x="1207008" y="2743200"/>
-            <a:ext cx="4553712" cy="301752"/>
-          </a:xfrm>
-          <a:prstGeom prst="rect">
-            <a:avLst/>
-          </a:prstGeom>
-          <a:noFill/>
-          <a:ln/>
-        </p:spPr>
-        <p:txBody>
-          <a:bodyPr wrap="square" lIns="0" tIns="0" rIns="0" bIns="0" rtlCol="0" anchor="t"/>
-          <a:lstStyle/>
-          <a:p>
-            <a:pPr algn="l" indent="0" marL="0">
-              <a:buNone/>
-            </a:pPr>
-            <a:r>
-              <a:rPr lang="en-US" sz="1600" b="1" dirty="0">
-                <a:solidFill>
-                  <a:schemeClr val="tx1"/>
-                </a:solidFill>
-              </a:rPr>
-              <a:t>เปิดหน้าเว็บ</a:t>
-            </a:r>
-            <a:endParaRPr lang="en-US" sz="1600" dirty="0"/>
-          </a:p>
-        </p:txBody>
-      </p:sp>
-      <p:sp>
-        <p:nvSpPr>
-          <p:cNvPr id="14" name="Text 12"/>
-          <p:cNvSpPr txBox="1"/>
-          <p:nvPr/>
-        </p:nvSpPr>
-        <p:spPr>
-          <a:xfrm>
-            <a:off x="1207008" y="3072384"/>
-            <a:ext cx="4553712" cy="822960"/>
-          </a:xfrm>
-          <a:prstGeom prst="rect">
-            <a:avLst/>
-          </a:prstGeom>
-          <a:noFill/>
-          <a:ln/>
-        </p:spPr>
-        <p:txBody>
-          <a:bodyPr wrap="square" lIns="0" tIns="0" rIns="0" bIns="0" rtlCol="0" anchor="t"/>
-          <a:lstStyle/>
-          <a:p>
-            <a:pPr algn="l" indent="0" marL="0">
-              <a:lnSpc>
-                <a:spcPct val="125000"/>
-              </a:lnSpc>
-              <a:buNone/>
-            </a:pPr>
-            <a:r>
-              <a:rPr lang="en-US" sz="1300" dirty="0">
-                <a:solidFill>
-                  <a:srgbClr val="4A5568"/>
-                </a:solidFill>
-              </a:rPr>
-              <a:t>พิมพ์ 192.168.4.1 ในเบราว์เซอร์  ภาพกล้องจะขึ้นเองเมื่อกล้องเกาะ Wi-Fi ได้</a:t>
-            </a:r>
-            <a:endParaRPr lang="en-US" sz="1300" dirty="0"/>
-          </a:p>
-        </p:txBody>
-      </p:sp>
-      <p:sp>
-        <p:nvSpPr>
-          <p:cNvPr id="15" name="dot-4"/>
-          <p:cNvSpPr/>
-          <p:nvPr/>
-        </p:nvSpPr>
-        <p:spPr>
-          <a:xfrm>
-            <a:off x="6400800" y="2761488"/>
-            <a:ext cx="475488" cy="475488"/>
-          </a:xfrm>
-          <a:prstGeom prst="ellipse">
-            <a:avLst/>
-          </a:prstGeom>
-          <a:solidFill>
-            <a:srgbClr val="E8803A"/>
-          </a:solidFill>
-          <a:ln w="12700">
-            <a:solidFill>
-              <a:srgbClr val="E8803A"/>
-            </a:solidFill>
-            <a:prstDash val="solid"/>
-          </a:ln>
-        </p:spPr>
-      </p:sp>
-      <p:sp>
-        <p:nvSpPr>
-          <p:cNvPr id="16" name="Text 14"/>
-          <p:cNvSpPr txBox="1"/>
-          <p:nvPr/>
-        </p:nvSpPr>
-        <p:spPr>
-          <a:xfrm>
-            <a:off x="6400800" y="2761488"/>
-            <a:ext cx="475488" cy="475488"/>
-          </a:xfrm>
-          <a:prstGeom prst="rect">
-            <a:avLst/>
-          </a:prstGeom>
-          <a:noFill/>
-          <a:ln/>
-        </p:spPr>
-        <p:txBody>
-          <a:bodyPr wrap="square" lIns="0" tIns="0" rIns="0" bIns="0" rtlCol="0" anchor="ctr"/>
-          <a:lstStyle/>
-          <a:p>
-            <a:pPr algn="ctr" indent="0" marL="0">
-              <a:buNone/>
-            </a:pPr>
-            <a:r>
-              <a:rPr lang="en-US" sz="1500" b="1" dirty="0">
-                <a:solidFill>
-                  <a:srgbClr val="FFFFFF"/>
-                </a:solidFill>
-              </a:rPr>
-              <a:t>4</a:t>
-            </a:r>
-            <a:endParaRPr lang="en-US" sz="1500" dirty="0"/>
-          </a:p>
-        </p:txBody>
-      </p:sp>
-      <p:sp>
-        <p:nvSpPr>
-          <p:cNvPr id="17" name="Text 15"/>
-          <p:cNvSpPr txBox="1"/>
-          <p:nvPr/>
-        </p:nvSpPr>
-        <p:spPr>
-          <a:xfrm>
-            <a:off x="7059168" y="2743200"/>
-            <a:ext cx="4553712" cy="301752"/>
-          </a:xfrm>
-          <a:prstGeom prst="rect">
-            <a:avLst/>
-          </a:prstGeom>
-          <a:noFill/>
-          <a:ln/>
-        </p:spPr>
-        <p:txBody>
-          <a:bodyPr wrap="square" lIns="0" tIns="0" rIns="0" bIns="0" rtlCol="0" anchor="t"/>
-          <a:lstStyle/>
-          <a:p>
-            <a:pPr algn="l" indent="0" marL="0">
-              <a:buNone/>
-            </a:pPr>
-            <a:r>
-              <a:rPr lang="en-US" sz="1600" b="1" dirty="0">
-                <a:solidFill>
-                  <a:schemeClr val="tx1"/>
-                </a:solidFill>
-              </a:rPr>
-              <a:t>เลื่อนความเร็ว</a:t>
-            </a:r>
-            <a:endParaRPr lang="en-US" sz="1600" dirty="0"/>
-          </a:p>
-        </p:txBody>
-      </p:sp>
-      <p:sp>
-        <p:nvSpPr>
-          <p:cNvPr id="18" name="Text 16"/>
-          <p:cNvSpPr txBox="1"/>
-          <p:nvPr/>
-        </p:nvSpPr>
-        <p:spPr>
-          <a:xfrm>
-            <a:off x="7059168" y="3072384"/>
-            <a:ext cx="4553712" cy="822960"/>
-          </a:xfrm>
-          <a:prstGeom prst="rect">
-            <a:avLst/>
-          </a:prstGeom>
-          <a:noFill/>
-          <a:ln/>
-        </p:spPr>
-        <p:txBody>
-          <a:bodyPr wrap="square" lIns="0" tIns="0" rIns="0" bIns="0" rtlCol="0" anchor="t"/>
-          <a:lstStyle/>
-          <a:p>
-            <a:pPr algn="l" indent="0" marL="0">
-              <a:lnSpc>
-                <a:spcPct val="125000"/>
-              </a:lnSpc>
-              <a:buNone/>
-            </a:pPr>
-            <a:r>
-              <a:rPr lang="en-US" sz="1300" dirty="0">
-                <a:solidFill>
-                  <a:srgbClr val="4A5568"/>
-                </a:solidFill>
-              </a:rPr>
-              <a:t>แถบเลื่อนเริ่มที่ 0 เสมอ ถ้าไม่เลื่อนขึ้นหุ่นจะไม่ขยับแม้อยู่ในโหมด Auto</a:t>
-            </a:r>
-            <a:endParaRPr lang="en-US" sz="1300" dirty="0"/>
-          </a:p>
-        </p:txBody>
-      </p:sp>
-      <p:sp>
-        <p:nvSpPr>
-          <p:cNvPr id="19" name="dot-5"/>
-          <p:cNvSpPr/>
-          <p:nvPr/>
-        </p:nvSpPr>
-        <p:spPr>
-          <a:xfrm>
-            <a:off x="548640" y="4059936"/>
-            <a:ext cx="475488" cy="475488"/>
-          </a:xfrm>
-          <a:prstGeom prst="ellipse">
-            <a:avLst/>
-          </a:prstGeom>
-          <a:solidFill>
-            <a:srgbClr val="E8803A"/>
-          </a:solidFill>
-          <a:ln w="12700">
-            <a:solidFill>
-              <a:srgbClr val="E8803A"/>
-            </a:solidFill>
-            <a:prstDash val="solid"/>
-          </a:ln>
-        </p:spPr>
-      </p:sp>
-      <p:sp>
-        <p:nvSpPr>
-          <p:cNvPr id="20" name="Text 18"/>
-          <p:cNvSpPr txBox="1"/>
-          <p:nvPr/>
-        </p:nvSpPr>
-        <p:spPr>
-          <a:xfrm>
-            <a:off x="548640" y="4059936"/>
-            <a:ext cx="475488" cy="475488"/>
-          </a:xfrm>
-          <a:prstGeom prst="rect">
-            <a:avLst/>
-          </a:prstGeom>
-          <a:noFill/>
-          <a:ln/>
-        </p:spPr>
-        <p:txBody>
-          <a:bodyPr wrap="square" lIns="0" tIns="0" rIns="0" bIns="0" rtlCol="0" anchor="ctr"/>
-          <a:lstStyle/>
-          <a:p>
-            <a:pPr algn="ctr" indent="0" marL="0">
-              <a:buNone/>
-            </a:pPr>
-            <a:r>
-              <a:rPr lang="en-US" sz="1500" b="1" dirty="0">
-                <a:solidFill>
-                  <a:srgbClr val="FFFFFF"/>
-                </a:solidFill>
-              </a:rPr>
-              <a:t>5</a:t>
-            </a:r>
-            <a:endParaRPr lang="en-US" sz="1500" dirty="0"/>
-          </a:p>
-        </p:txBody>
-      </p:sp>
-      <p:sp>
-        <p:nvSpPr>
-          <p:cNvPr id="21" name="Text 19"/>
-          <p:cNvSpPr txBox="1"/>
-          <p:nvPr/>
-        </p:nvSpPr>
-        <p:spPr>
-          <a:xfrm>
-            <a:off x="1207008" y="4041648"/>
-            <a:ext cx="4553712" cy="301752"/>
-          </a:xfrm>
-          <a:prstGeom prst="rect">
-            <a:avLst/>
-          </a:prstGeom>
-          <a:noFill/>
-          <a:ln/>
-        </p:spPr>
-        <p:txBody>
-          <a:bodyPr wrap="square" lIns="0" tIns="0" rIns="0" bIns="0" rtlCol="0" anchor="t"/>
-          <a:lstStyle/>
-          <a:p>
-            <a:pPr algn="l" indent="0" marL="0">
-              <a:buNone/>
-            </a:pPr>
-            <a:r>
-              <a:rPr lang="en-US" sz="1600" b="1" dirty="0">
-                <a:solidFill>
-                  <a:schemeClr val="tx1"/>
-                </a:solidFill>
-              </a:rPr>
-              <a:t>รันสคริปต์บน PC</a:t>
-            </a:r>
-            <a:endParaRPr lang="en-US" sz="1600" dirty="0"/>
-          </a:p>
-        </p:txBody>
-      </p:sp>
-      <p:sp>
-        <p:nvSpPr>
-          <p:cNvPr id="22" name="Text 20"/>
-          <p:cNvSpPr txBox="1"/>
-          <p:nvPr/>
-        </p:nvSpPr>
-        <p:spPr>
-          <a:xfrm>
-            <a:off x="1207008" y="4370832"/>
-            <a:ext cx="4553712" cy="822960"/>
-          </a:xfrm>
-          <a:prstGeom prst="rect">
-            <a:avLst/>
-          </a:prstGeom>
-          <a:noFill/>
-          <a:ln/>
-        </p:spPr>
-        <p:txBody>
-          <a:bodyPr wrap="square" lIns="0" tIns="0" rIns="0" bIns="0" rtlCol="0" anchor="t"/>
-          <a:lstStyle/>
-          <a:p>
-            <a:pPr algn="l" indent="0" marL="0">
-              <a:lnSpc>
-                <a:spcPct val="125000"/>
-              </a:lnSpc>
-              <a:buNone/>
-            </a:pPr>
-            <a:r>
-              <a:rPr lang="en-US" sz="1300" dirty="0">
-                <a:solidFill>
-                  <a:srgbClr val="4A5568"/>
-                </a:solidFill>
-              </a:rPr>
-              <a:t>สั่ง py pc_qr_scanner/qr_scanner.py  สคริปต์จะไล่หากล้องเองในวง</a:t>
-            </a:r>
-            <a:endParaRPr lang="en-US" sz="1300" dirty="0"/>
-          </a:p>
-        </p:txBody>
-      </p:sp>
-      <p:sp>
-        <p:nvSpPr>
-          <p:cNvPr id="23" name="dot-6"/>
-          <p:cNvSpPr/>
-          <p:nvPr/>
-        </p:nvSpPr>
-        <p:spPr>
-          <a:xfrm>
-            <a:off x="6400800" y="4059936"/>
-            <a:ext cx="475488" cy="475488"/>
-          </a:xfrm>
-          <a:prstGeom prst="ellipse">
-            <a:avLst/>
-          </a:prstGeom>
-          <a:solidFill>
-            <a:srgbClr val="E8803A"/>
-          </a:solidFill>
-          <a:ln w="12700">
-            <a:solidFill>
-              <a:srgbClr val="E8803A"/>
-            </a:solidFill>
-            <a:prstDash val="solid"/>
-          </a:ln>
-        </p:spPr>
-      </p:sp>
-      <p:sp>
-        <p:nvSpPr>
-          <p:cNvPr id="24" name="Text 22"/>
-          <p:cNvSpPr txBox="1"/>
-          <p:nvPr/>
-        </p:nvSpPr>
-        <p:spPr>
-          <a:xfrm>
-            <a:off x="6400800" y="4059936"/>
-            <a:ext cx="475488" cy="475488"/>
-          </a:xfrm>
-          <a:prstGeom prst="rect">
-            <a:avLst/>
-          </a:prstGeom>
-          <a:noFill/>
-          <a:ln/>
-        </p:spPr>
-        <p:txBody>
-          <a:bodyPr wrap="square" lIns="0" tIns="0" rIns="0" bIns="0" rtlCol="0" anchor="ctr"/>
-          <a:lstStyle/>
-          <a:p>
-            <a:pPr algn="ctr" indent="0" marL="0">
-              <a:buNone/>
-            </a:pPr>
-            <a:r>
-              <a:rPr lang="en-US" sz="1500" b="1" dirty="0">
-                <a:solidFill>
-                  <a:srgbClr val="FFFFFF"/>
-                </a:solidFill>
-              </a:rPr>
-              <a:t>6</a:t>
-            </a:r>
-            <a:endParaRPr lang="en-US" sz="1500" dirty="0"/>
-          </a:p>
-        </p:txBody>
-      </p:sp>
-      <p:sp>
-        <p:nvSpPr>
-          <p:cNvPr id="25" name="Text 23"/>
-          <p:cNvSpPr txBox="1"/>
-          <p:nvPr/>
-        </p:nvSpPr>
-        <p:spPr>
-          <a:xfrm>
-            <a:off x="7059168" y="4041648"/>
-            <a:ext cx="4553712" cy="301752"/>
-          </a:xfrm>
-          <a:prstGeom prst="rect">
-            <a:avLst/>
-          </a:prstGeom>
-          <a:noFill/>
-          <a:ln/>
-        </p:spPr>
-        <p:txBody>
-          <a:bodyPr wrap="square" lIns="0" tIns="0" rIns="0" bIns="0" rtlCol="0" anchor="t"/>
-          <a:lstStyle/>
-          <a:p>
-            <a:pPr algn="l" indent="0" marL="0">
-              <a:buNone/>
-            </a:pPr>
-            <a:r>
-              <a:rPr lang="en-US" sz="1600" b="1" dirty="0">
-                <a:solidFill>
-                  <a:schemeClr val="tx1"/>
-                </a:solidFill>
-              </a:rPr>
-              <a:t>วางหุ่นบนเส้น</a:t>
-            </a:r>
-            <a:endParaRPr lang="en-US" sz="1600" dirty="0"/>
-          </a:p>
-        </p:txBody>
-      </p:sp>
-      <p:sp>
-        <p:nvSpPr>
-          <p:cNvPr id="26" name="Text 24"/>
-          <p:cNvSpPr txBox="1"/>
-          <p:nvPr/>
-        </p:nvSpPr>
-        <p:spPr>
-          <a:xfrm>
-            <a:off x="7059168" y="4370832"/>
-            <a:ext cx="4553712" cy="822960"/>
-          </a:xfrm>
-          <a:prstGeom prst="rect">
-            <a:avLst/>
-          </a:prstGeom>
-          <a:noFill/>
-          <a:ln/>
-        </p:spPr>
-        <p:txBody>
-          <a:bodyPr wrap="square" lIns="0" tIns="0" rIns="0" bIns="0" rtlCol="0" anchor="t"/>
-          <a:lstStyle/>
-          <a:p>
-            <a:pPr algn="l" indent="0" marL="0">
-              <a:lnSpc>
-                <a:spcPct val="125000"/>
-              </a:lnSpc>
-              <a:buNone/>
-            </a:pPr>
-            <a:r>
-              <a:rPr lang="en-US" sz="1300" dirty="0">
-                <a:solidFill>
-                  <a:srgbClr val="4A5568"/>
-                </a:solidFill>
-              </a:rPr>
-              <a:t>ให้เซนเซอร์ตัวกลางทับเส้นดำ แล้วสลับไปโหมด Auto</a:t>
-            </a:r>
-            <a:endParaRPr lang="en-US" sz="1300" dirty="0"/>
-          </a:p>
-        </p:txBody>
-      </p:sp>
-      <p:sp>
-        <p:nvSpPr>
-          <p:cNvPr id="27" name="callout"/>
-          <p:cNvSpPr/>
-          <p:nvPr/>
-        </p:nvSpPr>
-        <p:spPr>
-          <a:xfrm>
-            <a:off x="548640" y="5257800"/>
-            <a:ext cx="11064240" cy="822960"/>
-          </a:xfrm>
-          <a:prstGeom prst="roundRect">
-            <a:avLst>
-              <a:gd name="adj" fmla="val 8889"/>
-            </a:avLst>
-          </a:prstGeom>
-          <a:solidFill>
-            <a:srgbClr val="E8F1F5"/>
-          </a:solidFill>
-          <a:ln w="12700">
-            <a:solidFill>
-              <a:srgbClr val="CBE0E9"/>
-            </a:solidFill>
-            <a:prstDash val="solid"/>
-          </a:ln>
-        </p:spPr>
-      </p:sp>
-      <p:sp>
-        <p:nvSpPr>
-          <p:cNvPr id="28" name="Text 26"/>
-          <p:cNvSpPr txBox="1"/>
-          <p:nvPr/>
-        </p:nvSpPr>
-        <p:spPr>
-          <a:xfrm>
-            <a:off x="777240" y="5385816"/>
-            <a:ext cx="10607040" cy="274320"/>
-          </a:xfrm>
-          <a:prstGeom prst="rect">
-            <a:avLst/>
-          </a:prstGeom>
-          <a:noFill/>
-          <a:ln/>
-        </p:spPr>
-        <p:txBody>
-          <a:bodyPr wrap="square" lIns="0" tIns="0" rIns="0" bIns="0" rtlCol="0" anchor="t"/>
-          <a:lstStyle/>
-          <a:p>
-            <a:pPr algn="l" indent="0" marL="0">
-              <a:buNone/>
-            </a:pPr>
-            <a:r>
-              <a:rPr lang="en-US" sz="1400" b="1" dirty="0">
-                <a:solidFill>
-                  <a:srgbClr val="1C7293"/>
-                </a:solidFill>
-              </a:rPr>
-              <a:t>ไม่มีกล้องก็รันสคริปต์ได้</a:t>
-            </a:r>
-            <a:endParaRPr lang="en-US" sz="1400" dirty="0"/>
-          </a:p>
-        </p:txBody>
-      </p:sp>
-      <p:sp>
-        <p:nvSpPr>
-          <p:cNvPr id="29" name="Text 27"/>
-          <p:cNvSpPr txBox="1"/>
-          <p:nvPr/>
-        </p:nvSpPr>
-        <p:spPr>
-          <a:xfrm>
-            <a:off x="777240" y="5696712"/>
-            <a:ext cx="10607040" cy="256032"/>
-          </a:xfrm>
-          <a:prstGeom prst="rect">
-            <a:avLst/>
-          </a:prstGeom>
-          <a:noFill/>
-          <a:ln/>
-        </p:spPr>
-        <p:txBody>
-          <a:bodyPr wrap="square" lIns="0" tIns="0" rIns="0" bIns="0" rtlCol="0" anchor="t"/>
-          <a:lstStyle/>
-          <a:p>
-            <a:pPr algn="l" indent="0" marL="0">
-              <a:lnSpc>
-                <a:spcPct val="120000"/>
-              </a:lnSpc>
-              <a:buNone/>
-            </a:pPr>
-            <a:r>
-              <a:rPr lang="en-US" sz="1250" dirty="0">
-                <a:solidFill>
-                  <a:srgbClr val="4A5568"/>
-                </a:solidFill>
-              </a:rPr>
-              <a:t>ถ้าหากล้องไม่เจอ สคริปต์จะทำงานต่อโดยไม่อ่าน QR แต่ยังเก็บข้อมูลการวิ่งลง CSV ครบเหมือนเดิม</a:t>
-            </a:r>
-            <a:endParaRPr lang="en-US" sz="1250" dirty="0"/>
-          </a:p>
-        </p:txBody>
-      </p:sp>
-      <p:sp>
-        <p:nvSpPr>
-          <p:cNvPr id="25" name="Slide Number Placeholder 0"/>
-          <p:cNvSpPr>
-            <a:spLocks noGrp="1"/>
-          </p:cNvSpPr>
-          <p:nvPr>
-            <p:ph type="sldNum" sz="quarter" idx="4294967295"/>
-          </p:nvPr>
-        </p:nvSpPr>
-        <p:spPr>
-          <a:xfrm>
-            <a:off x="11338560" y="6263640"/>
-            <a:ext cx="457200" cy="274320"/>
-          </a:xfrm>
-          <a:prstGeom prst="rect">
-            <a:avLst/>
-          </a:prstGeom>
-          <a:extLst>
-            <a:ext uri="{C572A759-6A51-4108-AA02-DFA0A04FC94B}">
-              <ma14:wrappingTextBoxFlag xmlns:ma14="http://schemas.microsoft.com/office/mac/drawingml/2011/main" val="0"/>
-            </a:ext>
-          </a:extLst>
-        </p:spPr>
-        <p:txBody>
-          <a:bodyPr/>
-          <a:lstStyle>
-            <a:lvl1pPr>
-              <a:defRPr sz="1000">
-                <a:solidFill>
-                  <a:srgbClr val="6B7E93"/>
-                </a:solidFill>
-              </a:defRPr>
-            </a:lvl1pPr>
-          </a:lstStyle>
-          <a:p>
-            <a:pPr algn="r"/>
-            <a:fld id="{F7021451-1387-4CA6-816F-3879F97B5CBC}" type="slidenum">
-              <a:rPr b="0" lang="en-US"/>
-              <a:t>11</a:t>
-            </a:fld>
-            <a:endParaRPr lang="en-US"/>
           </a:p>
         </p:txBody>
       </p:sp>
@@ -4486,6 +4298,1032 @@
                   <a:schemeClr val="tx1"/>
                 </a:solidFill>
               </a:rPr>
+              <a:t>เปิดใช้งาน 6 ขั้นตอน</a:t>
+            </a:r>
+            <a:endParaRPr lang="en-US" sz="3200" dirty="0"/>
+          </a:p>
+        </p:txBody>
+      </p:sp>
+      <p:sp>
+        <p:nvSpPr>
+          <p:cNvPr id="3" name="dot-1"/>
+          <p:cNvSpPr/>
+          <p:nvPr/>
+        </p:nvSpPr>
+        <p:spPr>
+          <a:xfrm>
+            <a:off x="548640" y="1463040"/>
+            <a:ext cx="475488" cy="475488"/>
+          </a:xfrm>
+          <a:prstGeom prst="ellipse">
+            <a:avLst/>
+          </a:prstGeom>
+          <a:solidFill>
+            <a:srgbClr val="E8803A"/>
+          </a:solidFill>
+          <a:ln w="12700">
+            <a:solidFill>
+              <a:srgbClr val="E8803A"/>
+            </a:solidFill>
+            <a:prstDash val="solid"/>
+          </a:ln>
+        </p:spPr>
+      </p:sp>
+      <p:sp>
+        <p:nvSpPr>
+          <p:cNvPr id="4" name="Text 2"/>
+          <p:cNvSpPr txBox="1"/>
+          <p:nvPr/>
+        </p:nvSpPr>
+        <p:spPr>
+          <a:xfrm>
+            <a:off x="548640" y="1463040"/>
+            <a:ext cx="475488" cy="475488"/>
+          </a:xfrm>
+          <a:prstGeom prst="rect">
+            <a:avLst/>
+          </a:prstGeom>
+          <a:noFill/>
+          <a:ln/>
+        </p:spPr>
+        <p:txBody>
+          <a:bodyPr wrap="square" lIns="0" tIns="0" rIns="0" bIns="0" rtlCol="0" anchor="ctr"/>
+          <a:lstStyle/>
+          <a:p>
+            <a:pPr algn="ctr" indent="0" marL="0">
+              <a:buNone/>
+            </a:pPr>
+            <a:r>
+              <a:rPr lang="en-US" sz="1500" b="1" dirty="0">
+                <a:solidFill>
+                  <a:srgbClr val="FFFFFF"/>
+                </a:solidFill>
+              </a:rPr>
+              <a:t>1</a:t>
+            </a:r>
+            <a:endParaRPr lang="en-US" sz="1500" dirty="0"/>
+          </a:p>
+        </p:txBody>
+      </p:sp>
+      <p:sp>
+        <p:nvSpPr>
+          <p:cNvPr id="5" name="Text 3"/>
+          <p:cNvSpPr txBox="1"/>
+          <p:nvPr/>
+        </p:nvSpPr>
+        <p:spPr>
+          <a:xfrm>
+            <a:off x="1207008" y="1444752"/>
+            <a:ext cx="4553712" cy="301752"/>
+          </a:xfrm>
+          <a:prstGeom prst="rect">
+            <a:avLst/>
+          </a:prstGeom>
+          <a:noFill/>
+          <a:ln/>
+        </p:spPr>
+        <p:txBody>
+          <a:bodyPr wrap="square" lIns="0" tIns="0" rIns="0" bIns="0" rtlCol="0" anchor="t"/>
+          <a:lstStyle/>
+          <a:p>
+            <a:pPr algn="l" indent="0" marL="0">
+              <a:buNone/>
+            </a:pPr>
+            <a:r>
+              <a:rPr lang="en-US" sz="1600" b="1" dirty="0">
+                <a:solidFill>
+                  <a:schemeClr val="tx1"/>
+                </a:solidFill>
+              </a:rPr>
+              <a:t>เปิดไฟหุ่น</a:t>
+            </a:r>
+            <a:endParaRPr lang="en-US" sz="1600" dirty="0"/>
+          </a:p>
+        </p:txBody>
+      </p:sp>
+      <p:sp>
+        <p:nvSpPr>
+          <p:cNvPr id="6" name="Text 4"/>
+          <p:cNvSpPr txBox="1"/>
+          <p:nvPr/>
+        </p:nvSpPr>
+        <p:spPr>
+          <a:xfrm>
+            <a:off x="1207008" y="1773936"/>
+            <a:ext cx="4553712" cy="822960"/>
+          </a:xfrm>
+          <a:prstGeom prst="rect">
+            <a:avLst/>
+          </a:prstGeom>
+          <a:noFill/>
+          <a:ln/>
+        </p:spPr>
+        <p:txBody>
+          <a:bodyPr wrap="square" lIns="0" tIns="0" rIns="0" bIns="0" rtlCol="0" anchor="t"/>
+          <a:lstStyle/>
+          <a:p>
+            <a:pPr algn="l" indent="0" marL="0">
+              <a:lnSpc>
+                <a:spcPct val="125000"/>
+              </a:lnSpc>
+              <a:buNone/>
+            </a:pPr>
+            <a:r>
+              <a:rPr lang="en-US" sz="1300" dirty="0">
+                <a:solidFill>
+                  <a:srgbClr val="4A5568"/>
+                </a:solidFill>
+              </a:rPr>
+              <a:t>จอจะขึ้นหน้าต้อนรับ 2.5 วินาที แล้วเปลี่ยนเป็นหน้าสถานะเอง</a:t>
+            </a:r>
+            <a:endParaRPr lang="en-US" sz="1300" dirty="0"/>
+          </a:p>
+        </p:txBody>
+      </p:sp>
+      <p:sp>
+        <p:nvSpPr>
+          <p:cNvPr id="7" name="dot-2"/>
+          <p:cNvSpPr/>
+          <p:nvPr/>
+        </p:nvSpPr>
+        <p:spPr>
+          <a:xfrm>
+            <a:off x="6400800" y="1463040"/>
+            <a:ext cx="475488" cy="475488"/>
+          </a:xfrm>
+          <a:prstGeom prst="ellipse">
+            <a:avLst/>
+          </a:prstGeom>
+          <a:solidFill>
+            <a:srgbClr val="E8803A"/>
+          </a:solidFill>
+          <a:ln w="12700">
+            <a:solidFill>
+              <a:srgbClr val="E8803A"/>
+            </a:solidFill>
+            <a:prstDash val="solid"/>
+          </a:ln>
+        </p:spPr>
+      </p:sp>
+      <p:sp>
+        <p:nvSpPr>
+          <p:cNvPr id="8" name="Text 6"/>
+          <p:cNvSpPr txBox="1"/>
+          <p:nvPr/>
+        </p:nvSpPr>
+        <p:spPr>
+          <a:xfrm>
+            <a:off x="6400800" y="1463040"/>
+            <a:ext cx="475488" cy="475488"/>
+          </a:xfrm>
+          <a:prstGeom prst="rect">
+            <a:avLst/>
+          </a:prstGeom>
+          <a:noFill/>
+          <a:ln/>
+        </p:spPr>
+        <p:txBody>
+          <a:bodyPr wrap="square" lIns="0" tIns="0" rIns="0" bIns="0" rtlCol="0" anchor="ctr"/>
+          <a:lstStyle/>
+          <a:p>
+            <a:pPr algn="ctr" indent="0" marL="0">
+              <a:buNone/>
+            </a:pPr>
+            <a:r>
+              <a:rPr lang="en-US" sz="1500" b="1" dirty="0">
+                <a:solidFill>
+                  <a:srgbClr val="FFFFFF"/>
+                </a:solidFill>
+              </a:rPr>
+              <a:t>2</a:t>
+            </a:r>
+            <a:endParaRPr lang="en-US" sz="1500" dirty="0"/>
+          </a:p>
+        </p:txBody>
+      </p:sp>
+      <p:sp>
+        <p:nvSpPr>
+          <p:cNvPr id="9" name="Text 7"/>
+          <p:cNvSpPr txBox="1"/>
+          <p:nvPr/>
+        </p:nvSpPr>
+        <p:spPr>
+          <a:xfrm>
+            <a:off x="7059168" y="1444752"/>
+            <a:ext cx="4553712" cy="301752"/>
+          </a:xfrm>
+          <a:prstGeom prst="rect">
+            <a:avLst/>
+          </a:prstGeom>
+          <a:noFill/>
+          <a:ln/>
+        </p:spPr>
+        <p:txBody>
+          <a:bodyPr wrap="square" lIns="0" tIns="0" rIns="0" bIns="0" rtlCol="0" anchor="t"/>
+          <a:lstStyle/>
+          <a:p>
+            <a:pPr algn="l" indent="0" marL="0">
+              <a:buNone/>
+            </a:pPr>
+            <a:r>
+              <a:rPr lang="en-US" sz="1600" b="1" dirty="0">
+                <a:solidFill>
+                  <a:schemeClr val="tx1"/>
+                </a:solidFill>
+              </a:rPr>
+              <a:t>ต่อ Wi-Fi ของหุ่น</a:t>
+            </a:r>
+            <a:endParaRPr lang="en-US" sz="1600" dirty="0"/>
+          </a:p>
+        </p:txBody>
+      </p:sp>
+      <p:sp>
+        <p:nvSpPr>
+          <p:cNvPr id="10" name="Text 8"/>
+          <p:cNvSpPr txBox="1"/>
+          <p:nvPr/>
+        </p:nvSpPr>
+        <p:spPr>
+          <a:xfrm>
+            <a:off x="7059168" y="1773936"/>
+            <a:ext cx="4553712" cy="822960"/>
+          </a:xfrm>
+          <a:prstGeom prst="rect">
+            <a:avLst/>
+          </a:prstGeom>
+          <a:noFill/>
+          <a:ln/>
+        </p:spPr>
+        <p:txBody>
+          <a:bodyPr wrap="square" lIns="0" tIns="0" rIns="0" bIns="0" rtlCol="0" anchor="t"/>
+          <a:lstStyle/>
+          <a:p>
+            <a:pPr algn="l" indent="0" marL="0">
+              <a:lnSpc>
+                <a:spcPct val="125000"/>
+              </a:lnSpc>
+              <a:buNone/>
+            </a:pPr>
+            <a:r>
+              <a:rPr lang="en-US" sz="1300" dirty="0">
+                <a:solidFill>
+                  <a:srgbClr val="4A5568"/>
+                </a:solidFill>
+              </a:rPr>
+              <a:t>ชื่อ My_Robot2 รหัส password1234  ต่อทั้งมือถือและเครื่อง PC</a:t>
+            </a:r>
+            <a:endParaRPr lang="en-US" sz="1300" dirty="0"/>
+          </a:p>
+        </p:txBody>
+      </p:sp>
+      <p:sp>
+        <p:nvSpPr>
+          <p:cNvPr id="11" name="dot-3"/>
+          <p:cNvSpPr/>
+          <p:nvPr/>
+        </p:nvSpPr>
+        <p:spPr>
+          <a:xfrm>
+            <a:off x="548640" y="2761488"/>
+            <a:ext cx="475488" cy="475488"/>
+          </a:xfrm>
+          <a:prstGeom prst="ellipse">
+            <a:avLst/>
+          </a:prstGeom>
+          <a:solidFill>
+            <a:srgbClr val="E8803A"/>
+          </a:solidFill>
+          <a:ln w="12700">
+            <a:solidFill>
+              <a:srgbClr val="E8803A"/>
+            </a:solidFill>
+            <a:prstDash val="solid"/>
+          </a:ln>
+        </p:spPr>
+      </p:sp>
+      <p:sp>
+        <p:nvSpPr>
+          <p:cNvPr id="12" name="Text 10"/>
+          <p:cNvSpPr txBox="1"/>
+          <p:nvPr/>
+        </p:nvSpPr>
+        <p:spPr>
+          <a:xfrm>
+            <a:off x="548640" y="2761488"/>
+            <a:ext cx="475488" cy="475488"/>
+          </a:xfrm>
+          <a:prstGeom prst="rect">
+            <a:avLst/>
+          </a:prstGeom>
+          <a:noFill/>
+          <a:ln/>
+        </p:spPr>
+        <p:txBody>
+          <a:bodyPr wrap="square" lIns="0" tIns="0" rIns="0" bIns="0" rtlCol="0" anchor="ctr"/>
+          <a:lstStyle/>
+          <a:p>
+            <a:pPr algn="ctr" indent="0" marL="0">
+              <a:buNone/>
+            </a:pPr>
+            <a:r>
+              <a:rPr lang="en-US" sz="1500" b="1" dirty="0">
+                <a:solidFill>
+                  <a:srgbClr val="FFFFFF"/>
+                </a:solidFill>
+              </a:rPr>
+              <a:t>3</a:t>
+            </a:r>
+            <a:endParaRPr lang="en-US" sz="1500" dirty="0"/>
+          </a:p>
+        </p:txBody>
+      </p:sp>
+      <p:sp>
+        <p:nvSpPr>
+          <p:cNvPr id="13" name="Text 11"/>
+          <p:cNvSpPr txBox="1"/>
+          <p:nvPr/>
+        </p:nvSpPr>
+        <p:spPr>
+          <a:xfrm>
+            <a:off x="1207008" y="2743200"/>
+            <a:ext cx="4553712" cy="301752"/>
+          </a:xfrm>
+          <a:prstGeom prst="rect">
+            <a:avLst/>
+          </a:prstGeom>
+          <a:noFill/>
+          <a:ln/>
+        </p:spPr>
+        <p:txBody>
+          <a:bodyPr wrap="square" lIns="0" tIns="0" rIns="0" bIns="0" rtlCol="0" anchor="t"/>
+          <a:lstStyle/>
+          <a:p>
+            <a:pPr algn="l" indent="0" marL="0">
+              <a:buNone/>
+            </a:pPr>
+            <a:r>
+              <a:rPr lang="en-US" sz="1600" b="1" dirty="0">
+                <a:solidFill>
+                  <a:schemeClr val="tx1"/>
+                </a:solidFill>
+              </a:rPr>
+              <a:t>เปิดหน้าเว็บ</a:t>
+            </a:r>
+            <a:endParaRPr lang="en-US" sz="1600" dirty="0"/>
+          </a:p>
+        </p:txBody>
+      </p:sp>
+      <p:sp>
+        <p:nvSpPr>
+          <p:cNvPr id="14" name="Text 12"/>
+          <p:cNvSpPr txBox="1"/>
+          <p:nvPr/>
+        </p:nvSpPr>
+        <p:spPr>
+          <a:xfrm>
+            <a:off x="1207008" y="3072384"/>
+            <a:ext cx="4553712" cy="822960"/>
+          </a:xfrm>
+          <a:prstGeom prst="rect">
+            <a:avLst/>
+          </a:prstGeom>
+          <a:noFill/>
+          <a:ln/>
+        </p:spPr>
+        <p:txBody>
+          <a:bodyPr wrap="square" lIns="0" tIns="0" rIns="0" bIns="0" rtlCol="0" anchor="t"/>
+          <a:lstStyle/>
+          <a:p>
+            <a:pPr algn="l" indent="0" marL="0">
+              <a:lnSpc>
+                <a:spcPct val="125000"/>
+              </a:lnSpc>
+              <a:buNone/>
+            </a:pPr>
+            <a:r>
+              <a:rPr lang="en-US" sz="1300" dirty="0">
+                <a:solidFill>
+                  <a:srgbClr val="4A5568"/>
+                </a:solidFill>
+              </a:rPr>
+              <a:t>พิมพ์ 192.168.4.1 ในเบราว์เซอร์  ภาพกล้องจะขึ้นเองเมื่อกล้องเกาะ Wi-Fi ได้</a:t>
+            </a:r>
+            <a:endParaRPr lang="en-US" sz="1300" dirty="0"/>
+          </a:p>
+        </p:txBody>
+      </p:sp>
+      <p:sp>
+        <p:nvSpPr>
+          <p:cNvPr id="15" name="dot-4"/>
+          <p:cNvSpPr/>
+          <p:nvPr/>
+        </p:nvSpPr>
+        <p:spPr>
+          <a:xfrm>
+            <a:off x="6400800" y="2761488"/>
+            <a:ext cx="475488" cy="475488"/>
+          </a:xfrm>
+          <a:prstGeom prst="ellipse">
+            <a:avLst/>
+          </a:prstGeom>
+          <a:solidFill>
+            <a:srgbClr val="E8803A"/>
+          </a:solidFill>
+          <a:ln w="12700">
+            <a:solidFill>
+              <a:srgbClr val="E8803A"/>
+            </a:solidFill>
+            <a:prstDash val="solid"/>
+          </a:ln>
+        </p:spPr>
+      </p:sp>
+      <p:sp>
+        <p:nvSpPr>
+          <p:cNvPr id="16" name="Text 14"/>
+          <p:cNvSpPr txBox="1"/>
+          <p:nvPr/>
+        </p:nvSpPr>
+        <p:spPr>
+          <a:xfrm>
+            <a:off x="6400800" y="2761488"/>
+            <a:ext cx="475488" cy="475488"/>
+          </a:xfrm>
+          <a:prstGeom prst="rect">
+            <a:avLst/>
+          </a:prstGeom>
+          <a:noFill/>
+          <a:ln/>
+        </p:spPr>
+        <p:txBody>
+          <a:bodyPr wrap="square" lIns="0" tIns="0" rIns="0" bIns="0" rtlCol="0" anchor="ctr"/>
+          <a:lstStyle/>
+          <a:p>
+            <a:pPr algn="ctr" indent="0" marL="0">
+              <a:buNone/>
+            </a:pPr>
+            <a:r>
+              <a:rPr lang="en-US" sz="1500" b="1" dirty="0">
+                <a:solidFill>
+                  <a:srgbClr val="FFFFFF"/>
+                </a:solidFill>
+              </a:rPr>
+              <a:t>4</a:t>
+            </a:r>
+            <a:endParaRPr lang="en-US" sz="1500" dirty="0"/>
+          </a:p>
+        </p:txBody>
+      </p:sp>
+      <p:sp>
+        <p:nvSpPr>
+          <p:cNvPr id="17" name="Text 15"/>
+          <p:cNvSpPr txBox="1"/>
+          <p:nvPr/>
+        </p:nvSpPr>
+        <p:spPr>
+          <a:xfrm>
+            <a:off x="7059168" y="2743200"/>
+            <a:ext cx="4553712" cy="301752"/>
+          </a:xfrm>
+          <a:prstGeom prst="rect">
+            <a:avLst/>
+          </a:prstGeom>
+          <a:noFill/>
+          <a:ln/>
+        </p:spPr>
+        <p:txBody>
+          <a:bodyPr wrap="square" lIns="0" tIns="0" rIns="0" bIns="0" rtlCol="0" anchor="t"/>
+          <a:lstStyle/>
+          <a:p>
+            <a:pPr algn="l" indent="0" marL="0">
+              <a:buNone/>
+            </a:pPr>
+            <a:r>
+              <a:rPr lang="en-US" sz="1600" b="1" dirty="0">
+                <a:solidFill>
+                  <a:schemeClr val="tx1"/>
+                </a:solidFill>
+              </a:rPr>
+              <a:t>เลื่อนความเร็ว</a:t>
+            </a:r>
+            <a:endParaRPr lang="en-US" sz="1600" dirty="0"/>
+          </a:p>
+        </p:txBody>
+      </p:sp>
+      <p:sp>
+        <p:nvSpPr>
+          <p:cNvPr id="18" name="Text 16"/>
+          <p:cNvSpPr txBox="1"/>
+          <p:nvPr/>
+        </p:nvSpPr>
+        <p:spPr>
+          <a:xfrm>
+            <a:off x="7059168" y="3072384"/>
+            <a:ext cx="4553712" cy="822960"/>
+          </a:xfrm>
+          <a:prstGeom prst="rect">
+            <a:avLst/>
+          </a:prstGeom>
+          <a:noFill/>
+          <a:ln/>
+        </p:spPr>
+        <p:txBody>
+          <a:bodyPr wrap="square" lIns="0" tIns="0" rIns="0" bIns="0" rtlCol="0" anchor="t"/>
+          <a:lstStyle/>
+          <a:p>
+            <a:pPr algn="l" indent="0" marL="0">
+              <a:lnSpc>
+                <a:spcPct val="125000"/>
+              </a:lnSpc>
+              <a:buNone/>
+            </a:pPr>
+            <a:r>
+              <a:rPr lang="en-US" sz="1300" dirty="0">
+                <a:solidFill>
+                  <a:srgbClr val="4A5568"/>
+                </a:solidFill>
+              </a:rPr>
+              <a:t>แถบเลื่อนเริ่มที่ 0 เสมอ ถ้าไม่เลื่อนขึ้นหุ่นจะไม่ขยับแม้อยู่ในโหมด Auto</a:t>
+            </a:r>
+            <a:endParaRPr lang="en-US" sz="1300" dirty="0"/>
+          </a:p>
+        </p:txBody>
+      </p:sp>
+      <p:sp>
+        <p:nvSpPr>
+          <p:cNvPr id="19" name="dot-5"/>
+          <p:cNvSpPr/>
+          <p:nvPr/>
+        </p:nvSpPr>
+        <p:spPr>
+          <a:xfrm>
+            <a:off x="548640" y="4059936"/>
+            <a:ext cx="475488" cy="475488"/>
+          </a:xfrm>
+          <a:prstGeom prst="ellipse">
+            <a:avLst/>
+          </a:prstGeom>
+          <a:solidFill>
+            <a:srgbClr val="E8803A"/>
+          </a:solidFill>
+          <a:ln w="12700">
+            <a:solidFill>
+              <a:srgbClr val="E8803A"/>
+            </a:solidFill>
+            <a:prstDash val="solid"/>
+          </a:ln>
+        </p:spPr>
+      </p:sp>
+      <p:sp>
+        <p:nvSpPr>
+          <p:cNvPr id="20" name="Text 18"/>
+          <p:cNvSpPr txBox="1"/>
+          <p:nvPr/>
+        </p:nvSpPr>
+        <p:spPr>
+          <a:xfrm>
+            <a:off x="548640" y="4059936"/>
+            <a:ext cx="475488" cy="475488"/>
+          </a:xfrm>
+          <a:prstGeom prst="rect">
+            <a:avLst/>
+          </a:prstGeom>
+          <a:noFill/>
+          <a:ln/>
+        </p:spPr>
+        <p:txBody>
+          <a:bodyPr wrap="square" lIns="0" tIns="0" rIns="0" bIns="0" rtlCol="0" anchor="ctr"/>
+          <a:lstStyle/>
+          <a:p>
+            <a:pPr algn="ctr" indent="0" marL="0">
+              <a:buNone/>
+            </a:pPr>
+            <a:r>
+              <a:rPr lang="en-US" sz="1500" b="1" dirty="0">
+                <a:solidFill>
+                  <a:srgbClr val="FFFFFF"/>
+                </a:solidFill>
+              </a:rPr>
+              <a:t>5</a:t>
+            </a:r>
+            <a:endParaRPr lang="en-US" sz="1500" dirty="0"/>
+          </a:p>
+        </p:txBody>
+      </p:sp>
+      <p:sp>
+        <p:nvSpPr>
+          <p:cNvPr id="21" name="Text 19"/>
+          <p:cNvSpPr txBox="1"/>
+          <p:nvPr/>
+        </p:nvSpPr>
+        <p:spPr>
+          <a:xfrm>
+            <a:off x="1207008" y="4041648"/>
+            <a:ext cx="4553712" cy="301752"/>
+          </a:xfrm>
+          <a:prstGeom prst="rect">
+            <a:avLst/>
+          </a:prstGeom>
+          <a:noFill/>
+          <a:ln/>
+        </p:spPr>
+        <p:txBody>
+          <a:bodyPr wrap="square" lIns="0" tIns="0" rIns="0" bIns="0" rtlCol="0" anchor="t"/>
+          <a:lstStyle/>
+          <a:p>
+            <a:pPr algn="l" indent="0" marL="0">
+              <a:buNone/>
+            </a:pPr>
+            <a:r>
+              <a:rPr lang="en-US" sz="1600" b="1" dirty="0">
+                <a:solidFill>
+                  <a:schemeClr val="tx1"/>
+                </a:solidFill>
+              </a:rPr>
+              <a:t>รันสคริปต์บน PC</a:t>
+            </a:r>
+            <a:endParaRPr lang="en-US" sz="1600" dirty="0"/>
+          </a:p>
+        </p:txBody>
+      </p:sp>
+      <p:sp>
+        <p:nvSpPr>
+          <p:cNvPr id="22" name="Text 20"/>
+          <p:cNvSpPr txBox="1"/>
+          <p:nvPr/>
+        </p:nvSpPr>
+        <p:spPr>
+          <a:xfrm>
+            <a:off x="1207008" y="4370832"/>
+            <a:ext cx="4553712" cy="822960"/>
+          </a:xfrm>
+          <a:prstGeom prst="rect">
+            <a:avLst/>
+          </a:prstGeom>
+          <a:noFill/>
+          <a:ln/>
+        </p:spPr>
+        <p:txBody>
+          <a:bodyPr wrap="square" lIns="0" tIns="0" rIns="0" bIns="0" rtlCol="0" anchor="t"/>
+          <a:lstStyle/>
+          <a:p>
+            <a:pPr algn="l" indent="0" marL="0">
+              <a:lnSpc>
+                <a:spcPct val="125000"/>
+              </a:lnSpc>
+              <a:buNone/>
+            </a:pPr>
+            <a:r>
+              <a:rPr lang="en-US" sz="1300" dirty="0">
+                <a:solidFill>
+                  <a:srgbClr val="4A5568"/>
+                </a:solidFill>
+              </a:rPr>
+              <a:t>สั่ง py pc_qr_scanner/qr_scanner.py  สคริปต์จะไล่หากล้องเองในวง</a:t>
+            </a:r>
+            <a:endParaRPr lang="en-US" sz="1300" dirty="0"/>
+          </a:p>
+        </p:txBody>
+      </p:sp>
+      <p:sp>
+        <p:nvSpPr>
+          <p:cNvPr id="23" name="dot-6"/>
+          <p:cNvSpPr/>
+          <p:nvPr/>
+        </p:nvSpPr>
+        <p:spPr>
+          <a:xfrm>
+            <a:off x="6400800" y="4059936"/>
+            <a:ext cx="475488" cy="475488"/>
+          </a:xfrm>
+          <a:prstGeom prst="ellipse">
+            <a:avLst/>
+          </a:prstGeom>
+          <a:solidFill>
+            <a:srgbClr val="E8803A"/>
+          </a:solidFill>
+          <a:ln w="12700">
+            <a:solidFill>
+              <a:srgbClr val="E8803A"/>
+            </a:solidFill>
+            <a:prstDash val="solid"/>
+          </a:ln>
+        </p:spPr>
+      </p:sp>
+      <p:sp>
+        <p:nvSpPr>
+          <p:cNvPr id="24" name="Text 22"/>
+          <p:cNvSpPr txBox="1"/>
+          <p:nvPr/>
+        </p:nvSpPr>
+        <p:spPr>
+          <a:xfrm>
+            <a:off x="6400800" y="4059936"/>
+            <a:ext cx="475488" cy="475488"/>
+          </a:xfrm>
+          <a:prstGeom prst="rect">
+            <a:avLst/>
+          </a:prstGeom>
+          <a:noFill/>
+          <a:ln/>
+        </p:spPr>
+        <p:txBody>
+          <a:bodyPr wrap="square" lIns="0" tIns="0" rIns="0" bIns="0" rtlCol="0" anchor="ctr"/>
+          <a:lstStyle/>
+          <a:p>
+            <a:pPr algn="ctr" indent="0" marL="0">
+              <a:buNone/>
+            </a:pPr>
+            <a:r>
+              <a:rPr lang="en-US" sz="1500" b="1" dirty="0">
+                <a:solidFill>
+                  <a:srgbClr val="FFFFFF"/>
+                </a:solidFill>
+              </a:rPr>
+              <a:t>6</a:t>
+            </a:r>
+            <a:endParaRPr lang="en-US" sz="1500" dirty="0"/>
+          </a:p>
+        </p:txBody>
+      </p:sp>
+      <p:sp>
+        <p:nvSpPr>
+          <p:cNvPr id="25" name="Text 23"/>
+          <p:cNvSpPr txBox="1"/>
+          <p:nvPr/>
+        </p:nvSpPr>
+        <p:spPr>
+          <a:xfrm>
+            <a:off x="7059168" y="4041648"/>
+            <a:ext cx="4553712" cy="301752"/>
+          </a:xfrm>
+          <a:prstGeom prst="rect">
+            <a:avLst/>
+          </a:prstGeom>
+          <a:noFill/>
+          <a:ln/>
+        </p:spPr>
+        <p:txBody>
+          <a:bodyPr wrap="square" lIns="0" tIns="0" rIns="0" bIns="0" rtlCol="0" anchor="t"/>
+          <a:lstStyle/>
+          <a:p>
+            <a:pPr algn="l" indent="0" marL="0">
+              <a:buNone/>
+            </a:pPr>
+            <a:r>
+              <a:rPr lang="en-US" sz="1600" b="1" dirty="0">
+                <a:solidFill>
+                  <a:schemeClr val="tx1"/>
+                </a:solidFill>
+              </a:rPr>
+              <a:t>วางหุ่นบนเส้น</a:t>
+            </a:r>
+            <a:endParaRPr lang="en-US" sz="1600" dirty="0"/>
+          </a:p>
+        </p:txBody>
+      </p:sp>
+      <p:sp>
+        <p:nvSpPr>
+          <p:cNvPr id="26" name="Text 24"/>
+          <p:cNvSpPr txBox="1"/>
+          <p:nvPr/>
+        </p:nvSpPr>
+        <p:spPr>
+          <a:xfrm>
+            <a:off x="7059168" y="4370832"/>
+            <a:ext cx="4553712" cy="822960"/>
+          </a:xfrm>
+          <a:prstGeom prst="rect">
+            <a:avLst/>
+          </a:prstGeom>
+          <a:noFill/>
+          <a:ln/>
+        </p:spPr>
+        <p:txBody>
+          <a:bodyPr wrap="square" lIns="0" tIns="0" rIns="0" bIns="0" rtlCol="0" anchor="t"/>
+          <a:lstStyle/>
+          <a:p>
+            <a:pPr algn="l" indent="0" marL="0">
+              <a:lnSpc>
+                <a:spcPct val="125000"/>
+              </a:lnSpc>
+              <a:buNone/>
+            </a:pPr>
+            <a:r>
+              <a:rPr lang="en-US" sz="1300" dirty="0">
+                <a:solidFill>
+                  <a:srgbClr val="4A5568"/>
+                </a:solidFill>
+              </a:rPr>
+              <a:t>ให้เซนเซอร์ตัวกลางทับเส้นดำ แล้วสลับไปโหมด Auto</a:t>
+            </a:r>
+            <a:endParaRPr lang="en-US" sz="1300" dirty="0"/>
+          </a:p>
+        </p:txBody>
+      </p:sp>
+      <p:sp>
+        <p:nvSpPr>
+          <p:cNvPr id="27" name="callout"/>
+          <p:cNvSpPr/>
+          <p:nvPr/>
+        </p:nvSpPr>
+        <p:spPr>
+          <a:xfrm>
+            <a:off x="548640" y="5257800"/>
+            <a:ext cx="11064240" cy="822960"/>
+          </a:xfrm>
+          <a:prstGeom prst="roundRect">
+            <a:avLst>
+              <a:gd name="adj" fmla="val 8889"/>
+            </a:avLst>
+          </a:prstGeom>
+          <a:solidFill>
+            <a:srgbClr val="E8F1F5"/>
+          </a:solidFill>
+          <a:ln w="12700">
+            <a:solidFill>
+              <a:srgbClr val="CBE0E9"/>
+            </a:solidFill>
+            <a:prstDash val="solid"/>
+          </a:ln>
+        </p:spPr>
+      </p:sp>
+      <p:sp>
+        <p:nvSpPr>
+          <p:cNvPr id="28" name="Text 26"/>
+          <p:cNvSpPr txBox="1"/>
+          <p:nvPr/>
+        </p:nvSpPr>
+        <p:spPr>
+          <a:xfrm>
+            <a:off x="777240" y="5385816"/>
+            <a:ext cx="10607040" cy="274320"/>
+          </a:xfrm>
+          <a:prstGeom prst="rect">
+            <a:avLst/>
+          </a:prstGeom>
+          <a:noFill/>
+          <a:ln/>
+        </p:spPr>
+        <p:txBody>
+          <a:bodyPr wrap="square" lIns="0" tIns="0" rIns="0" bIns="0" rtlCol="0" anchor="t"/>
+          <a:lstStyle/>
+          <a:p>
+            <a:pPr algn="l" indent="0" marL="0">
+              <a:buNone/>
+            </a:pPr>
+            <a:r>
+              <a:rPr lang="en-US" sz="1400" b="1" dirty="0">
+                <a:solidFill>
+                  <a:srgbClr val="1C7293"/>
+                </a:solidFill>
+              </a:rPr>
+              <a:t>ไม่มีกล้องก็รันสคริปต์ได้</a:t>
+            </a:r>
+            <a:endParaRPr lang="en-US" sz="1400" dirty="0"/>
+          </a:p>
+        </p:txBody>
+      </p:sp>
+      <p:sp>
+        <p:nvSpPr>
+          <p:cNvPr id="29" name="Text 27"/>
+          <p:cNvSpPr txBox="1"/>
+          <p:nvPr/>
+        </p:nvSpPr>
+        <p:spPr>
+          <a:xfrm>
+            <a:off x="777240" y="5696712"/>
+            <a:ext cx="10607040" cy="256032"/>
+          </a:xfrm>
+          <a:prstGeom prst="rect">
+            <a:avLst/>
+          </a:prstGeom>
+          <a:noFill/>
+          <a:ln/>
+        </p:spPr>
+        <p:txBody>
+          <a:bodyPr wrap="square" lIns="0" tIns="0" rIns="0" bIns="0" rtlCol="0" anchor="t"/>
+          <a:lstStyle/>
+          <a:p>
+            <a:pPr algn="l" indent="0" marL="0">
+              <a:lnSpc>
+                <a:spcPct val="120000"/>
+              </a:lnSpc>
+              <a:buNone/>
+            </a:pPr>
+            <a:r>
+              <a:rPr lang="en-US" sz="1250" dirty="0">
+                <a:solidFill>
+                  <a:srgbClr val="4A5568"/>
+                </a:solidFill>
+              </a:rPr>
+              <a:t>ถ้าหากล้องไม่เจอ สคริปต์จะทำงานต่อโดยไม่อ่าน QR แต่ยังเก็บข้อมูลการวิ่งลง CSV ครบเหมือนเดิม</a:t>
+            </a:r>
+            <a:endParaRPr lang="en-US" sz="1250" dirty="0"/>
+          </a:p>
+        </p:txBody>
+      </p:sp>
+      <p:sp>
+        <p:nvSpPr>
+          <p:cNvPr id="25" name="Slide Number Placeholder 0"/>
+          <p:cNvSpPr>
+            <a:spLocks noGrp="1"/>
+          </p:cNvSpPr>
+          <p:nvPr>
+            <p:ph type="sldNum" sz="quarter" idx="4294967295"/>
+          </p:nvPr>
+        </p:nvSpPr>
+        <p:spPr>
+          <a:xfrm>
+            <a:off x="11338560" y="6263640"/>
+            <a:ext cx="457200" cy="274320"/>
+          </a:xfrm>
+          <a:prstGeom prst="rect">
+            <a:avLst/>
+          </a:prstGeom>
+          <a:extLst>
+            <a:ext uri="{C572A759-6A51-4108-AA02-DFA0A04FC94B}">
+              <ma14:wrappingTextBoxFlag xmlns:ma14="http://schemas.microsoft.com/office/mac/drawingml/2011/main" val="0"/>
+            </a:ext>
+          </a:extLst>
+        </p:spPr>
+        <p:txBody>
+          <a:bodyPr/>
+          <a:lstStyle>
+            <a:lvl1pPr>
+              <a:defRPr sz="1000">
+                <a:solidFill>
+                  <a:srgbClr val="6B7E93"/>
+                </a:solidFill>
+              </a:defRPr>
+            </a:lvl1pPr>
+          </a:lstStyle>
+          <a:p>
+            <a:pPr algn="r"/>
+            <a:fld id="{F7021451-1387-4CA6-816F-3879F97B5CBC}" type="slidenum">
+              <a:rPr b="0" lang="en-US"/>
+              <a:t>12</a:t>
+            </a:fld>
+            <a:endParaRPr lang="en-US"/>
+          </a:p>
+        </p:txBody>
+      </p:sp>
+    </p:spTree>
+  </p:cSld>
+  <p:clrMapOvr>
+    <a:masterClrMapping/>
+  </p:clrMapOvr>
+</p:sld>
+</file>
+
+<file path=ppt/slides/slide13.xml><?xml version="1.0" encoding="utf-8"?>
+<p:sld xmlns:a="http://schemas.openxmlformats.org/drawingml/2006/main" xmlns:r="http://schemas.openxmlformats.org/officeDocument/2006/relationships" xmlns:p="http://schemas.openxmlformats.org/presentationml/2006/main">
+  <p:cSld name="Slide 13">
+    <p:spTree>
+      <p:nvGrpSpPr>
+        <p:cNvPr id="1" name=""/>
+        <p:cNvGrpSpPr/>
+        <p:nvPr/>
+      </p:nvGrpSpPr>
+      <p:grpSpPr>
+        <a:xfrm>
+          <a:off x="0" y="0"/>
+          <a:ext cx="0" cy="0"/>
+          <a:chOff x="0" y="0"/>
+          <a:chExt cx="0" cy="0"/>
+        </a:xfrm>
+      </p:grpSpPr>
+      <p:sp>
+        <p:nvSpPr>
+          <p:cNvPr id="2" name="Text 0"/>
+          <p:cNvSpPr/>
+          <p:nvPr>
+            <p:ph idx="100" type="title" hasCustomPrompt="1"/>
+          </p:nvPr>
+        </p:nvSpPr>
+        <p:spPr>
+          <a:xfrm>
+            <a:off x="548640" y="384048"/>
+            <a:ext cx="11064240" cy="685800"/>
+          </a:xfrm>
+          <a:prstGeom prst="rect">
+            <a:avLst/>
+          </a:prstGeom>
+          <a:noFill/>
+          <a:ln/>
+        </p:spPr>
+        <p:txBody>
+          <a:bodyPr wrap="square" rtlCol="0"/>
+          <a:lstStyle/>
+          <a:p>
+            <a:pPr algn="l" indent="0" marL="0">
+              <a:buNone/>
+            </a:pPr>
+            <a:r>
+              <a:rPr lang="en-US" sz="3200" b="1" dirty="0">
+                <a:solidFill>
+                  <a:schemeClr val="tx1"/>
+                </a:solidFill>
+              </a:rPr>
               <a:t>จอบอกอะไรเราบ้าง</a:t>
             </a:r>
             <a:endParaRPr lang="en-US" sz="3200" dirty="0"/>
@@ -4494,7 +5332,7 @@
       </p:sp>
       <p:graphicFrame>
         <p:nvGraphicFramePr>
-          <p:cNvPr id="13" name="Table 0"/>
+          <p:cNvPr id="14" name="Table 0"/>
           <p:cNvGraphicFramePr>
             <a:graphicFrameLocks noGrp="1"/>
           </p:cNvGraphicFramePr>
@@ -5774,828 +6612,6 @@
             <a:pPr algn="r"/>
             <a:fld id="{F7021451-1387-4CA6-816F-3879F97B5CBC}" type="slidenum">
               <a:rPr b="0" lang="en-US"/>
-              <a:t>12</a:t>
-            </a:fld>
-            <a:endParaRPr lang="en-US"/>
-          </a:p>
-        </p:txBody>
-      </p:sp>
-    </p:spTree>
-  </p:cSld>
-  <p:clrMapOvr>
-    <a:masterClrMapping/>
-  </p:clrMapOvr>
-</p:sld>
-</file>
-
-<file path=ppt/slides/slide13.xml><?xml version="1.0" encoding="utf-8"?>
-<p:sld xmlns:a="http://schemas.openxmlformats.org/drawingml/2006/main" xmlns:r="http://schemas.openxmlformats.org/officeDocument/2006/relationships" xmlns:p="http://schemas.openxmlformats.org/presentationml/2006/main">
-  <p:cSld name="Slide 13">
-    <p:spTree>
-      <p:nvGrpSpPr>
-        <p:cNvPr id="1" name=""/>
-        <p:cNvGrpSpPr/>
-        <p:nvPr/>
-      </p:nvGrpSpPr>
-      <p:grpSpPr>
-        <a:xfrm>
-          <a:off x="0" y="0"/>
-          <a:ext cx="0" cy="0"/>
-          <a:chOff x="0" y="0"/>
-          <a:chExt cx="0" cy="0"/>
-        </a:xfrm>
-      </p:grpSpPr>
-      <p:sp>
-        <p:nvSpPr>
-          <p:cNvPr id="2" name="Text 0"/>
-          <p:cNvSpPr/>
-          <p:nvPr>
-            <p:ph idx="100" type="title" hasCustomPrompt="1"/>
-          </p:nvPr>
-        </p:nvSpPr>
-        <p:spPr>
-          <a:xfrm>
-            <a:off x="548640" y="384048"/>
-            <a:ext cx="11064240" cy="685800"/>
-          </a:xfrm>
-          <a:prstGeom prst="rect">
-            <a:avLst/>
-          </a:prstGeom>
-          <a:noFill/>
-          <a:ln/>
-        </p:spPr>
-        <p:txBody>
-          <a:bodyPr wrap="square" rtlCol="0"/>
-          <a:lstStyle/>
-          <a:p>
-            <a:pPr algn="l" indent="0" marL="0">
-              <a:buNone/>
-            </a:pPr>
-            <a:r>
-              <a:rPr lang="en-US" sz="3200" b="1" dirty="0">
-                <a:solidFill>
-                  <a:schemeClr val="tx1"/>
-                </a:solidFill>
-              </a:rPr>
-              <a:t>หน้าเว็บควบคุม</a:t>
-            </a:r>
-            <a:endParaRPr lang="en-US" sz="3200" dirty="0"/>
-          </a:p>
-        </p:txBody>
-      </p:sp>
-      <p:sp>
-        <p:nvSpPr>
-          <p:cNvPr id="3" name="card-ปุ่มทิศทาง"/>
-          <p:cNvSpPr/>
-          <p:nvPr/>
-        </p:nvSpPr>
-        <p:spPr>
-          <a:xfrm>
-            <a:off x="548640" y="1417320"/>
-            <a:ext cx="3444240" cy="1572768"/>
-          </a:xfrm>
-          <a:prstGeom prst="roundRect">
-            <a:avLst>
-              <a:gd name="adj" fmla="val 5814"/>
-            </a:avLst>
-          </a:prstGeom>
-          <a:solidFill>
-            <a:schemeClr val="bg2"/>
-          </a:solidFill>
-          <a:ln w="12700">
-            <a:solidFill>
-              <a:srgbClr val="D9E0E8"/>
-            </a:solidFill>
-            <a:prstDash val="solid"/>
-          </a:ln>
-        </p:spPr>
-      </p:sp>
-      <p:sp>
-        <p:nvSpPr>
-          <p:cNvPr id="4" name="Text 2"/>
-          <p:cNvSpPr txBox="1"/>
-          <p:nvPr/>
-        </p:nvSpPr>
-        <p:spPr>
-          <a:xfrm>
-            <a:off x="804672" y="1600200"/>
-            <a:ext cx="2932176" cy="365760"/>
-          </a:xfrm>
-          <a:prstGeom prst="rect">
-            <a:avLst/>
-          </a:prstGeom>
-          <a:noFill/>
-          <a:ln/>
-        </p:spPr>
-        <p:txBody>
-          <a:bodyPr wrap="square" lIns="0" tIns="0" rIns="0" bIns="0" rtlCol="0" anchor="t"/>
-          <a:lstStyle/>
-          <a:p>
-            <a:pPr algn="l" indent="0" marL="0">
-              <a:buNone/>
-            </a:pPr>
-            <a:r>
-              <a:rPr lang="en-US" sz="1600" b="1" dirty="0">
-                <a:solidFill>
-                  <a:srgbClr val="E8803A"/>
-                </a:solidFill>
-              </a:rPr>
-              <a:t>ปุ่มทิศทาง</a:t>
-            </a:r>
-            <a:endParaRPr lang="en-US" sz="1600" dirty="0"/>
-          </a:p>
-        </p:txBody>
-      </p:sp>
-      <p:sp>
-        <p:nvSpPr>
-          <p:cNvPr id="5" name="Text 3"/>
-          <p:cNvSpPr txBox="1"/>
-          <p:nvPr/>
-        </p:nvSpPr>
-        <p:spPr>
-          <a:xfrm>
-            <a:off x="804672" y="2075688"/>
-            <a:ext cx="2932176" cy="704088"/>
-          </a:xfrm>
-          <a:prstGeom prst="rect">
-            <a:avLst/>
-          </a:prstGeom>
-          <a:noFill/>
-          <a:ln/>
-        </p:spPr>
-        <p:txBody>
-          <a:bodyPr wrap="square" lIns="0" tIns="0" rIns="0" bIns="0" rtlCol="0" anchor="t"/>
-          <a:lstStyle/>
-          <a:p>
-            <a:pPr algn="l" indent="0" marL="0">
-              <a:lnSpc>
-                <a:spcPct val="125000"/>
-              </a:lnSpc>
-              <a:buNone/>
-            </a:pPr>
-            <a:r>
-              <a:rPr lang="en-US" sz="1300" dirty="0">
-                <a:solidFill>
-                  <a:srgbClr val="4A5568"/>
-                </a:solidFill>
-              </a:rPr>
-              <a:t>เดินหน้า ถอยหลัง เลี้ยวซ้าย เลี้ยวขวา และหยุด ใช้ได้เฉพาะในโหมด Manual</a:t>
-            </a:r>
-            <a:endParaRPr lang="en-US" sz="1300" dirty="0"/>
-          </a:p>
-        </p:txBody>
-      </p:sp>
-      <p:sp>
-        <p:nvSpPr>
-          <p:cNvPr id="6" name="card-แถบความเร็ว"/>
-          <p:cNvSpPr/>
-          <p:nvPr/>
-        </p:nvSpPr>
-        <p:spPr>
-          <a:xfrm>
-            <a:off x="4358640" y="1417320"/>
-            <a:ext cx="3444240" cy="1572768"/>
-          </a:xfrm>
-          <a:prstGeom prst="roundRect">
-            <a:avLst>
-              <a:gd name="adj" fmla="val 5814"/>
-            </a:avLst>
-          </a:prstGeom>
-          <a:solidFill>
-            <a:schemeClr val="bg2"/>
-          </a:solidFill>
-          <a:ln w="12700">
-            <a:solidFill>
-              <a:srgbClr val="D9E0E8"/>
-            </a:solidFill>
-            <a:prstDash val="solid"/>
-          </a:ln>
-        </p:spPr>
-      </p:sp>
-      <p:sp>
-        <p:nvSpPr>
-          <p:cNvPr id="7" name="Text 5"/>
-          <p:cNvSpPr txBox="1"/>
-          <p:nvPr/>
-        </p:nvSpPr>
-        <p:spPr>
-          <a:xfrm>
-            <a:off x="4614672" y="1600200"/>
-            <a:ext cx="2932176" cy="365760"/>
-          </a:xfrm>
-          <a:prstGeom prst="rect">
-            <a:avLst/>
-          </a:prstGeom>
-          <a:noFill/>
-          <a:ln/>
-        </p:spPr>
-        <p:txBody>
-          <a:bodyPr wrap="square" lIns="0" tIns="0" rIns="0" bIns="0" rtlCol="0" anchor="t"/>
-          <a:lstStyle/>
-          <a:p>
-            <a:pPr algn="l" indent="0" marL="0">
-              <a:buNone/>
-            </a:pPr>
-            <a:r>
-              <a:rPr lang="en-US" sz="1600" b="1" dirty="0">
-                <a:solidFill>
-                  <a:srgbClr val="E8803A"/>
-                </a:solidFill>
-              </a:rPr>
-              <a:t>แถบความเร็ว</a:t>
-            </a:r>
-            <a:endParaRPr lang="en-US" sz="1600" dirty="0"/>
-          </a:p>
-        </p:txBody>
-      </p:sp>
-      <p:sp>
-        <p:nvSpPr>
-          <p:cNvPr id="8" name="Text 6"/>
-          <p:cNvSpPr txBox="1"/>
-          <p:nvPr/>
-        </p:nvSpPr>
-        <p:spPr>
-          <a:xfrm>
-            <a:off x="4614672" y="2075688"/>
-            <a:ext cx="2932176" cy="704088"/>
-          </a:xfrm>
-          <a:prstGeom prst="rect">
-            <a:avLst/>
-          </a:prstGeom>
-          <a:noFill/>
-          <a:ln/>
-        </p:spPr>
-        <p:txBody>
-          <a:bodyPr wrap="square" lIns="0" tIns="0" rIns="0" bIns="0" rtlCol="0" anchor="t"/>
-          <a:lstStyle/>
-          <a:p>
-            <a:pPr algn="l" indent="0" marL="0">
-              <a:lnSpc>
-                <a:spcPct val="125000"/>
-              </a:lnSpc>
-              <a:buNone/>
-            </a:pPr>
-            <a:r>
-              <a:rPr lang="en-US" sz="1300" dirty="0">
-                <a:solidFill>
-                  <a:srgbClr val="4A5568"/>
-                </a:solidFill>
-              </a:rPr>
-              <a:t>เริ่มที่ 0 เสมอ ค่าที่ตั้งคือค่าที่มอเตอร์ได้รับจริง ไม่มีการปัดขึ้นให้</a:t>
-            </a:r>
-            <a:endParaRPr lang="en-US" sz="1300" dirty="0"/>
-          </a:p>
-        </p:txBody>
-      </p:sp>
-      <p:sp>
-        <p:nvSpPr>
-          <p:cNvPr id="9" name="card-แถบ Trim"/>
-          <p:cNvSpPr/>
-          <p:nvPr/>
-        </p:nvSpPr>
-        <p:spPr>
-          <a:xfrm>
-            <a:off x="8168640" y="1417320"/>
-            <a:ext cx="3444240" cy="1572768"/>
-          </a:xfrm>
-          <a:prstGeom prst="roundRect">
-            <a:avLst>
-              <a:gd name="adj" fmla="val 5814"/>
-            </a:avLst>
-          </a:prstGeom>
-          <a:solidFill>
-            <a:schemeClr val="bg2"/>
-          </a:solidFill>
-          <a:ln w="12700">
-            <a:solidFill>
-              <a:srgbClr val="D9E0E8"/>
-            </a:solidFill>
-            <a:prstDash val="solid"/>
-          </a:ln>
-        </p:spPr>
-      </p:sp>
-      <p:sp>
-        <p:nvSpPr>
-          <p:cNvPr id="10" name="Text 8"/>
-          <p:cNvSpPr txBox="1"/>
-          <p:nvPr/>
-        </p:nvSpPr>
-        <p:spPr>
-          <a:xfrm>
-            <a:off x="8424672" y="1600200"/>
-            <a:ext cx="2932176" cy="365760"/>
-          </a:xfrm>
-          <a:prstGeom prst="rect">
-            <a:avLst/>
-          </a:prstGeom>
-          <a:noFill/>
-          <a:ln/>
-        </p:spPr>
-        <p:txBody>
-          <a:bodyPr wrap="square" lIns="0" tIns="0" rIns="0" bIns="0" rtlCol="0" anchor="t"/>
-          <a:lstStyle/>
-          <a:p>
-            <a:pPr algn="l" indent="0" marL="0">
-              <a:buNone/>
-            </a:pPr>
-            <a:r>
-              <a:rPr lang="en-US" sz="1600" b="1" dirty="0">
-                <a:solidFill>
-                  <a:srgbClr val="E8803A"/>
-                </a:solidFill>
-              </a:rPr>
-              <a:t>แถบ Trim</a:t>
-            </a:r>
-            <a:endParaRPr lang="en-US" sz="1600" dirty="0"/>
-          </a:p>
-        </p:txBody>
-      </p:sp>
-      <p:sp>
-        <p:nvSpPr>
-          <p:cNvPr id="11" name="Text 9"/>
-          <p:cNvSpPr txBox="1"/>
-          <p:nvPr/>
-        </p:nvSpPr>
-        <p:spPr>
-          <a:xfrm>
-            <a:off x="8424672" y="2075688"/>
-            <a:ext cx="2932176" cy="704088"/>
-          </a:xfrm>
-          <a:prstGeom prst="rect">
-            <a:avLst/>
-          </a:prstGeom>
-          <a:noFill/>
-          <a:ln/>
-        </p:spPr>
-        <p:txBody>
-          <a:bodyPr wrap="square" lIns="0" tIns="0" rIns="0" bIns="0" rtlCol="0" anchor="t"/>
-          <a:lstStyle/>
-          <a:p>
-            <a:pPr algn="l" indent="0" marL="0">
-              <a:lnSpc>
-                <a:spcPct val="125000"/>
-              </a:lnSpc>
-              <a:buNone/>
-            </a:pPr>
-            <a:r>
-              <a:rPr lang="en-US" sz="1300" dirty="0">
-                <a:solidFill>
-                  <a:srgbClr val="4A5568"/>
-                </a:solidFill>
-              </a:rPr>
-              <a:t>แก้อาการหุ่นเบี่ยงข้างเดียว ปรับได้ขณะหุ่นกำลังวิ่ง ไม่ต้องอัปโค้ดใหม่</a:t>
-            </a:r>
-            <a:endParaRPr lang="en-US" sz="1300" dirty="0"/>
-          </a:p>
-        </p:txBody>
-      </p:sp>
-      <p:sp>
-        <p:nvSpPr>
-          <p:cNvPr id="12" name="card-สวิตช์ Auto / "/>
-          <p:cNvSpPr/>
-          <p:nvPr/>
-        </p:nvSpPr>
-        <p:spPr>
-          <a:xfrm>
-            <a:off x="548640" y="3282696"/>
-            <a:ext cx="3444240" cy="1572768"/>
-          </a:xfrm>
-          <a:prstGeom prst="roundRect">
-            <a:avLst>
-              <a:gd name="adj" fmla="val 5814"/>
-            </a:avLst>
-          </a:prstGeom>
-          <a:solidFill>
-            <a:schemeClr val="bg2"/>
-          </a:solidFill>
-          <a:ln w="12700">
-            <a:solidFill>
-              <a:srgbClr val="D9E0E8"/>
-            </a:solidFill>
-            <a:prstDash val="solid"/>
-          </a:ln>
-        </p:spPr>
-      </p:sp>
-      <p:sp>
-        <p:nvSpPr>
-          <p:cNvPr id="13" name="Text 11"/>
-          <p:cNvSpPr txBox="1"/>
-          <p:nvPr/>
-        </p:nvSpPr>
-        <p:spPr>
-          <a:xfrm>
-            <a:off x="804672" y="3465576"/>
-            <a:ext cx="2932176" cy="365760"/>
-          </a:xfrm>
-          <a:prstGeom prst="rect">
-            <a:avLst/>
-          </a:prstGeom>
-          <a:noFill/>
-          <a:ln/>
-        </p:spPr>
-        <p:txBody>
-          <a:bodyPr wrap="square" lIns="0" tIns="0" rIns="0" bIns="0" rtlCol="0" anchor="t"/>
-          <a:lstStyle/>
-          <a:p>
-            <a:pPr algn="l" indent="0" marL="0">
-              <a:buNone/>
-            </a:pPr>
-            <a:r>
-              <a:rPr lang="en-US" sz="1600" b="1" dirty="0">
-                <a:solidFill>
-                  <a:srgbClr val="1C7293"/>
-                </a:solidFill>
-              </a:rPr>
-              <a:t>สวิตช์ Auto / Manual</a:t>
-            </a:r>
-            <a:endParaRPr lang="en-US" sz="1600" dirty="0"/>
-          </a:p>
-        </p:txBody>
-      </p:sp>
-      <p:sp>
-        <p:nvSpPr>
-          <p:cNvPr id="14" name="Text 12"/>
-          <p:cNvSpPr txBox="1"/>
-          <p:nvPr/>
-        </p:nvSpPr>
-        <p:spPr>
-          <a:xfrm>
-            <a:off x="804672" y="3941064"/>
-            <a:ext cx="2932176" cy="704088"/>
-          </a:xfrm>
-          <a:prstGeom prst="rect">
-            <a:avLst/>
-          </a:prstGeom>
-          <a:noFill/>
-          <a:ln/>
-        </p:spPr>
-        <p:txBody>
-          <a:bodyPr wrap="square" lIns="0" tIns="0" rIns="0" bIns="0" rtlCol="0" anchor="t"/>
-          <a:lstStyle/>
-          <a:p>
-            <a:pPr algn="l" indent="0" marL="0">
-              <a:lnSpc>
-                <a:spcPct val="125000"/>
-              </a:lnSpc>
-              <a:buNone/>
-            </a:pPr>
-            <a:r>
-              <a:rPr lang="en-US" sz="1300" dirty="0">
-                <a:solidFill>
-                  <a:srgbClr val="4A5568"/>
-                </a:solidFill>
-              </a:rPr>
-              <a:t>Auto คือเดินตามเส้นเอง  Manual คือสั่งด้วยปุ่ม  สลับได้ตลอดเวลา</a:t>
-            </a:r>
-            <a:endParaRPr lang="en-US" sz="1300" dirty="0"/>
-          </a:p>
-        </p:txBody>
-      </p:sp>
-      <p:sp>
-        <p:nvSpPr>
-          <p:cNvPr id="15" name="card-ภาพจากกล้อง"/>
-          <p:cNvSpPr/>
-          <p:nvPr/>
-        </p:nvSpPr>
-        <p:spPr>
-          <a:xfrm>
-            <a:off x="4358640" y="3282696"/>
-            <a:ext cx="3444240" cy="1572768"/>
-          </a:xfrm>
-          <a:prstGeom prst="roundRect">
-            <a:avLst>
-              <a:gd name="adj" fmla="val 5814"/>
-            </a:avLst>
-          </a:prstGeom>
-          <a:solidFill>
-            <a:schemeClr val="bg2"/>
-          </a:solidFill>
-          <a:ln w="12700">
-            <a:solidFill>
-              <a:srgbClr val="D9E0E8"/>
-            </a:solidFill>
-            <a:prstDash val="solid"/>
-          </a:ln>
-        </p:spPr>
-      </p:sp>
-      <p:sp>
-        <p:nvSpPr>
-          <p:cNvPr id="16" name="Text 14"/>
-          <p:cNvSpPr txBox="1"/>
-          <p:nvPr/>
-        </p:nvSpPr>
-        <p:spPr>
-          <a:xfrm>
-            <a:off x="4614672" y="3465576"/>
-            <a:ext cx="2932176" cy="365760"/>
-          </a:xfrm>
-          <a:prstGeom prst="rect">
-            <a:avLst/>
-          </a:prstGeom>
-          <a:noFill/>
-          <a:ln/>
-        </p:spPr>
-        <p:txBody>
-          <a:bodyPr wrap="square" lIns="0" tIns="0" rIns="0" bIns="0" rtlCol="0" anchor="t"/>
-          <a:lstStyle/>
-          <a:p>
-            <a:pPr algn="l" indent="0" marL="0">
-              <a:buNone/>
-            </a:pPr>
-            <a:r>
-              <a:rPr lang="en-US" sz="1600" b="1" dirty="0">
-                <a:solidFill>
-                  <a:srgbClr val="1C7293"/>
-                </a:solidFill>
-              </a:rPr>
-              <a:t>ภาพจากกล้อง</a:t>
-            </a:r>
-            <a:endParaRPr lang="en-US" sz="1600" dirty="0"/>
-          </a:p>
-        </p:txBody>
-      </p:sp>
-      <p:sp>
-        <p:nvSpPr>
-          <p:cNvPr id="17" name="Text 15"/>
-          <p:cNvSpPr txBox="1"/>
-          <p:nvPr/>
-        </p:nvSpPr>
-        <p:spPr>
-          <a:xfrm>
-            <a:off x="4614672" y="3941064"/>
-            <a:ext cx="2932176" cy="704088"/>
-          </a:xfrm>
-          <a:prstGeom prst="rect">
-            <a:avLst/>
-          </a:prstGeom>
-          <a:noFill/>
-          <a:ln/>
-        </p:spPr>
-        <p:txBody>
-          <a:bodyPr wrap="square" lIns="0" tIns="0" rIns="0" bIns="0" rtlCol="0" anchor="t"/>
-          <a:lstStyle/>
-          <a:p>
-            <a:pPr algn="l" indent="0" marL="0">
-              <a:lnSpc>
-                <a:spcPct val="125000"/>
-              </a:lnSpc>
-              <a:buNone/>
-            </a:pPr>
-            <a:r>
-              <a:rPr lang="en-US" sz="1300" dirty="0">
-                <a:solidFill>
-                  <a:srgbClr val="4A5568"/>
-                </a:solidFill>
-              </a:rPr>
-              <a:t>ขึ้นเองเมื่อกล้องเกาะ Wi-Fi ได้แล้ว ถ้ากล้องเงียบไปนานภาพจะหายไปเอง</a:t>
-            </a:r>
-            <a:endParaRPr lang="en-US" sz="1300" dirty="0"/>
-          </a:p>
-        </p:txBody>
-      </p:sp>
-      <p:sp>
-        <p:nvSpPr>
-          <p:cNvPr id="18" name="card-ไม่มีตัวเลขสถา"/>
-          <p:cNvSpPr/>
-          <p:nvPr/>
-        </p:nvSpPr>
-        <p:spPr>
-          <a:xfrm>
-            <a:off x="8168640" y="3282696"/>
-            <a:ext cx="3444240" cy="1572768"/>
-          </a:xfrm>
-          <a:prstGeom prst="roundRect">
-            <a:avLst>
-              <a:gd name="adj" fmla="val 5814"/>
-            </a:avLst>
-          </a:prstGeom>
-          <a:solidFill>
-            <a:schemeClr val="tx1"/>
-          </a:solidFill>
-          <a:ln w="12700">
-            <a:solidFill>
-              <a:schemeClr val="tx1"/>
-            </a:solidFill>
-            <a:prstDash val="solid"/>
-          </a:ln>
-        </p:spPr>
-      </p:sp>
-      <p:sp>
-        <p:nvSpPr>
-          <p:cNvPr id="19" name="Text 17"/>
-          <p:cNvSpPr txBox="1"/>
-          <p:nvPr/>
-        </p:nvSpPr>
-        <p:spPr>
-          <a:xfrm>
-            <a:off x="8424672" y="3465576"/>
-            <a:ext cx="2932176" cy="365760"/>
-          </a:xfrm>
-          <a:prstGeom prst="rect">
-            <a:avLst/>
-          </a:prstGeom>
-          <a:noFill/>
-          <a:ln/>
-        </p:spPr>
-        <p:txBody>
-          <a:bodyPr wrap="square" lIns="0" tIns="0" rIns="0" bIns="0" rtlCol="0" anchor="t"/>
-          <a:lstStyle/>
-          <a:p>
-            <a:pPr algn="l" indent="0" marL="0">
-              <a:buNone/>
-            </a:pPr>
-            <a:r>
-              <a:rPr lang="en-US" sz="1600" b="1" dirty="0">
-                <a:solidFill>
-                  <a:srgbClr val="E8803A"/>
-                </a:solidFill>
-              </a:rPr>
-              <a:t>ไม่มีตัวเลขสถานะ</a:t>
-            </a:r>
-            <a:endParaRPr lang="en-US" sz="1600" dirty="0"/>
-          </a:p>
-        </p:txBody>
-      </p:sp>
-      <p:sp>
-        <p:nvSpPr>
-          <p:cNvPr id="20" name="Text 18"/>
-          <p:cNvSpPr txBox="1"/>
-          <p:nvPr/>
-        </p:nvSpPr>
-        <p:spPr>
-          <a:xfrm>
-            <a:off x="8424672" y="3941064"/>
-            <a:ext cx="2932176" cy="704088"/>
-          </a:xfrm>
-          <a:prstGeom prst="rect">
-            <a:avLst/>
-          </a:prstGeom>
-          <a:noFill/>
-          <a:ln/>
-        </p:spPr>
-        <p:txBody>
-          <a:bodyPr wrap="square" lIns="0" tIns="0" rIns="0" bIns="0" rtlCol="0" anchor="t"/>
-          <a:lstStyle/>
-          <a:p>
-            <a:pPr algn="l" indent="0" marL="0">
-              <a:lnSpc>
-                <a:spcPct val="125000"/>
-              </a:lnSpc>
-              <a:buNone/>
-            </a:pPr>
-            <a:r>
-              <a:rPr lang="en-US" sz="1300" dirty="0">
-                <a:solidFill>
-                  <a:srgbClr val="B9C6D4"/>
-                </a:solidFill>
-              </a:rPr>
-              <a:t>ตั้งใจไม่ใส่ เพราะหน้านี้มีไว้ขับ ส่วนตัวเลขทั้งหมดไปอยู่ในไฟล์ Excel แทน</a:t>
-            </a:r>
-            <a:endParaRPr lang="en-US" sz="1300" dirty="0"/>
-          </a:p>
-        </p:txBody>
-      </p:sp>
-      <p:sp>
-        <p:nvSpPr>
-          <p:cNvPr id="21" name="callout"/>
-          <p:cNvSpPr/>
-          <p:nvPr/>
-        </p:nvSpPr>
-        <p:spPr>
-          <a:xfrm>
-            <a:off x="548640" y="5257800"/>
-            <a:ext cx="11064240" cy="822960"/>
-          </a:xfrm>
-          <a:prstGeom prst="roundRect">
-            <a:avLst>
-              <a:gd name="adj" fmla="val 8889"/>
-            </a:avLst>
-          </a:prstGeom>
-          <a:solidFill>
-            <a:srgbClr val="FBEEEC"/>
-          </a:solidFill>
-          <a:ln w="12700">
-            <a:solidFill>
-              <a:srgbClr val="F0D3CE"/>
-            </a:solidFill>
-            <a:prstDash val="solid"/>
-          </a:ln>
-        </p:spPr>
-      </p:sp>
-      <p:sp>
-        <p:nvSpPr>
-          <p:cNvPr id="22" name="Text 20"/>
-          <p:cNvSpPr txBox="1"/>
-          <p:nvPr/>
-        </p:nvSpPr>
-        <p:spPr>
-          <a:xfrm>
-            <a:off x="777240" y="5385816"/>
-            <a:ext cx="10607040" cy="274320"/>
-          </a:xfrm>
-          <a:prstGeom prst="rect">
-            <a:avLst/>
-          </a:prstGeom>
-          <a:noFill/>
-          <a:ln/>
-        </p:spPr>
-        <p:txBody>
-          <a:bodyPr wrap="square" lIns="0" tIns="0" rIns="0" bIns="0" rtlCol="0" anchor="t"/>
-          <a:lstStyle/>
-          <a:p>
-            <a:pPr algn="l" indent="0" marL="0">
-              <a:buNone/>
-            </a:pPr>
-            <a:r>
-              <a:rPr lang="en-US" sz="1400" b="1" dirty="0">
-                <a:solidFill>
-                  <a:srgbClr val="B3261E"/>
-                </a:solidFill>
-              </a:rPr>
-              <a:t>เปิดหน้าเว็บแล้วหมุนค้าง ทั้งที่ต่อ Wi-Fi ถูกแล้ว</a:t>
-            </a:r>
-            <a:endParaRPr lang="en-US" sz="1400" dirty="0"/>
-          </a:p>
-        </p:txBody>
-      </p:sp>
-      <p:sp>
-        <p:nvSpPr>
-          <p:cNvPr id="23" name="Text 21"/>
-          <p:cNvSpPr txBox="1"/>
-          <p:nvPr/>
-        </p:nvSpPr>
-        <p:spPr>
-          <a:xfrm>
-            <a:off x="777240" y="5696712"/>
-            <a:ext cx="10607040" cy="256032"/>
-          </a:xfrm>
-          <a:prstGeom prst="rect">
-            <a:avLst/>
-          </a:prstGeom>
-          <a:noFill/>
-          <a:ln/>
-        </p:spPr>
-        <p:txBody>
-          <a:bodyPr wrap="square" lIns="0" tIns="0" rIns="0" bIns="0" rtlCol="0" anchor="t"/>
-          <a:lstStyle/>
-          <a:p>
-            <a:pPr algn="l" indent="0" marL="0">
-              <a:lnSpc>
-                <a:spcPct val="120000"/>
-              </a:lnSpc>
-              <a:buNone/>
-            </a:pPr>
-            <a:r>
-              <a:rPr lang="en-US" sz="1250" dirty="0">
-                <a:solidFill>
-                  <a:srgbClr val="4A5568"/>
-                </a:solidFill>
-              </a:rPr>
-              <a:t>มือถือบางรุ่นเห็นว่าวงนี้ไม่มีอินเทอร์เน็ตแล้วแอบสลับกลับไปใช้เน็ตมือถือเอง ต้องเข้าไปปิดการสลับอัตโนมัติก่อน</a:t>
-            </a:r>
-            <a:endParaRPr lang="en-US" sz="1250" dirty="0"/>
-          </a:p>
-        </p:txBody>
-      </p:sp>
-      <p:sp>
-        <p:nvSpPr>
-          <p:cNvPr id="25" name="Slide Number Placeholder 0"/>
-          <p:cNvSpPr>
-            <a:spLocks noGrp="1"/>
-          </p:cNvSpPr>
-          <p:nvPr>
-            <p:ph type="sldNum" sz="quarter" idx="4294967295"/>
-          </p:nvPr>
-        </p:nvSpPr>
-        <p:spPr>
-          <a:xfrm>
-            <a:off x="11338560" y="6263640"/>
-            <a:ext cx="457200" cy="274320"/>
-          </a:xfrm>
-          <a:prstGeom prst="rect">
-            <a:avLst/>
-          </a:prstGeom>
-          <a:extLst>
-            <a:ext uri="{C572A759-6A51-4108-AA02-DFA0A04FC94B}">
-              <ma14:wrappingTextBoxFlag xmlns:ma14="http://schemas.microsoft.com/office/mac/drawingml/2011/main" val="0"/>
-            </a:ext>
-          </a:extLst>
-        </p:spPr>
-        <p:txBody>
-          <a:bodyPr/>
-          <a:lstStyle>
-            <a:lvl1pPr>
-              <a:defRPr sz="1000">
-                <a:solidFill>
-                  <a:srgbClr val="6B7E93"/>
-                </a:solidFill>
-              </a:defRPr>
-            </a:lvl1pPr>
-          </a:lstStyle>
-          <a:p>
-            <a:pPr algn="r"/>
-            <a:fld id="{F7021451-1387-4CA6-816F-3879F97B5CBC}" type="slidenum">
-              <a:rPr b="0" lang="en-US"/>
               <a:t>13</a:t>
             </a:fld>
             <a:endParaRPr lang="en-US"/>
@@ -6659,6 +6675,828 @@
                   <a:schemeClr val="tx1"/>
                 </a:solidFill>
               </a:rPr>
+              <a:t>หน้าเว็บควบคุม</a:t>
+            </a:r>
+            <a:endParaRPr lang="en-US" sz="3200" dirty="0"/>
+          </a:p>
+        </p:txBody>
+      </p:sp>
+      <p:sp>
+        <p:nvSpPr>
+          <p:cNvPr id="3" name="card-ปุ่มทิศทาง"/>
+          <p:cNvSpPr/>
+          <p:nvPr/>
+        </p:nvSpPr>
+        <p:spPr>
+          <a:xfrm>
+            <a:off x="548640" y="1417320"/>
+            <a:ext cx="3444240" cy="1572768"/>
+          </a:xfrm>
+          <a:prstGeom prst="roundRect">
+            <a:avLst>
+              <a:gd name="adj" fmla="val 5814"/>
+            </a:avLst>
+          </a:prstGeom>
+          <a:solidFill>
+            <a:schemeClr val="bg2"/>
+          </a:solidFill>
+          <a:ln w="12700">
+            <a:solidFill>
+              <a:srgbClr val="D9E0E8"/>
+            </a:solidFill>
+            <a:prstDash val="solid"/>
+          </a:ln>
+        </p:spPr>
+      </p:sp>
+      <p:sp>
+        <p:nvSpPr>
+          <p:cNvPr id="4" name="Text 2"/>
+          <p:cNvSpPr txBox="1"/>
+          <p:nvPr/>
+        </p:nvSpPr>
+        <p:spPr>
+          <a:xfrm>
+            <a:off x="804672" y="1600200"/>
+            <a:ext cx="2932176" cy="365760"/>
+          </a:xfrm>
+          <a:prstGeom prst="rect">
+            <a:avLst/>
+          </a:prstGeom>
+          <a:noFill/>
+          <a:ln/>
+        </p:spPr>
+        <p:txBody>
+          <a:bodyPr wrap="square" lIns="0" tIns="0" rIns="0" bIns="0" rtlCol="0" anchor="t"/>
+          <a:lstStyle/>
+          <a:p>
+            <a:pPr algn="l" indent="0" marL="0">
+              <a:buNone/>
+            </a:pPr>
+            <a:r>
+              <a:rPr lang="en-US" sz="1600" b="1" dirty="0">
+                <a:solidFill>
+                  <a:srgbClr val="E8803A"/>
+                </a:solidFill>
+              </a:rPr>
+              <a:t>ปุ่มทิศทาง</a:t>
+            </a:r>
+            <a:endParaRPr lang="en-US" sz="1600" dirty="0"/>
+          </a:p>
+        </p:txBody>
+      </p:sp>
+      <p:sp>
+        <p:nvSpPr>
+          <p:cNvPr id="5" name="Text 3"/>
+          <p:cNvSpPr txBox="1"/>
+          <p:nvPr/>
+        </p:nvSpPr>
+        <p:spPr>
+          <a:xfrm>
+            <a:off x="804672" y="2075688"/>
+            <a:ext cx="2932176" cy="704088"/>
+          </a:xfrm>
+          <a:prstGeom prst="rect">
+            <a:avLst/>
+          </a:prstGeom>
+          <a:noFill/>
+          <a:ln/>
+        </p:spPr>
+        <p:txBody>
+          <a:bodyPr wrap="square" lIns="0" tIns="0" rIns="0" bIns="0" rtlCol="0" anchor="t"/>
+          <a:lstStyle/>
+          <a:p>
+            <a:pPr algn="l" indent="0" marL="0">
+              <a:lnSpc>
+                <a:spcPct val="125000"/>
+              </a:lnSpc>
+              <a:buNone/>
+            </a:pPr>
+            <a:r>
+              <a:rPr lang="en-US" sz="1300" dirty="0">
+                <a:solidFill>
+                  <a:srgbClr val="4A5568"/>
+                </a:solidFill>
+              </a:rPr>
+              <a:t>เดินหน้า ถอยหลัง เลี้ยวซ้าย เลี้ยวขวา และหยุด ใช้ได้เฉพาะในโหมด Manual</a:t>
+            </a:r>
+            <a:endParaRPr lang="en-US" sz="1300" dirty="0"/>
+          </a:p>
+        </p:txBody>
+      </p:sp>
+      <p:sp>
+        <p:nvSpPr>
+          <p:cNvPr id="6" name="card-แถบความเร็ว"/>
+          <p:cNvSpPr/>
+          <p:nvPr/>
+        </p:nvSpPr>
+        <p:spPr>
+          <a:xfrm>
+            <a:off x="4358640" y="1417320"/>
+            <a:ext cx="3444240" cy="1572768"/>
+          </a:xfrm>
+          <a:prstGeom prst="roundRect">
+            <a:avLst>
+              <a:gd name="adj" fmla="val 5814"/>
+            </a:avLst>
+          </a:prstGeom>
+          <a:solidFill>
+            <a:schemeClr val="bg2"/>
+          </a:solidFill>
+          <a:ln w="12700">
+            <a:solidFill>
+              <a:srgbClr val="D9E0E8"/>
+            </a:solidFill>
+            <a:prstDash val="solid"/>
+          </a:ln>
+        </p:spPr>
+      </p:sp>
+      <p:sp>
+        <p:nvSpPr>
+          <p:cNvPr id="7" name="Text 5"/>
+          <p:cNvSpPr txBox="1"/>
+          <p:nvPr/>
+        </p:nvSpPr>
+        <p:spPr>
+          <a:xfrm>
+            <a:off x="4614672" y="1600200"/>
+            <a:ext cx="2932176" cy="365760"/>
+          </a:xfrm>
+          <a:prstGeom prst="rect">
+            <a:avLst/>
+          </a:prstGeom>
+          <a:noFill/>
+          <a:ln/>
+        </p:spPr>
+        <p:txBody>
+          <a:bodyPr wrap="square" lIns="0" tIns="0" rIns="0" bIns="0" rtlCol="0" anchor="t"/>
+          <a:lstStyle/>
+          <a:p>
+            <a:pPr algn="l" indent="0" marL="0">
+              <a:buNone/>
+            </a:pPr>
+            <a:r>
+              <a:rPr lang="en-US" sz="1600" b="1" dirty="0">
+                <a:solidFill>
+                  <a:srgbClr val="E8803A"/>
+                </a:solidFill>
+              </a:rPr>
+              <a:t>แถบความเร็ว</a:t>
+            </a:r>
+            <a:endParaRPr lang="en-US" sz="1600" dirty="0"/>
+          </a:p>
+        </p:txBody>
+      </p:sp>
+      <p:sp>
+        <p:nvSpPr>
+          <p:cNvPr id="8" name="Text 6"/>
+          <p:cNvSpPr txBox="1"/>
+          <p:nvPr/>
+        </p:nvSpPr>
+        <p:spPr>
+          <a:xfrm>
+            <a:off x="4614672" y="2075688"/>
+            <a:ext cx="2932176" cy="704088"/>
+          </a:xfrm>
+          <a:prstGeom prst="rect">
+            <a:avLst/>
+          </a:prstGeom>
+          <a:noFill/>
+          <a:ln/>
+        </p:spPr>
+        <p:txBody>
+          <a:bodyPr wrap="square" lIns="0" tIns="0" rIns="0" bIns="0" rtlCol="0" anchor="t"/>
+          <a:lstStyle/>
+          <a:p>
+            <a:pPr algn="l" indent="0" marL="0">
+              <a:lnSpc>
+                <a:spcPct val="125000"/>
+              </a:lnSpc>
+              <a:buNone/>
+            </a:pPr>
+            <a:r>
+              <a:rPr lang="en-US" sz="1300" dirty="0">
+                <a:solidFill>
+                  <a:srgbClr val="4A5568"/>
+                </a:solidFill>
+              </a:rPr>
+              <a:t>เริ่มที่ 0 เสมอ ค่าที่ตั้งคือค่าที่มอเตอร์ได้รับจริง ไม่มีการปัดขึ้นให้</a:t>
+            </a:r>
+            <a:endParaRPr lang="en-US" sz="1300" dirty="0"/>
+          </a:p>
+        </p:txBody>
+      </p:sp>
+      <p:sp>
+        <p:nvSpPr>
+          <p:cNvPr id="9" name="card-แถบ Trim"/>
+          <p:cNvSpPr/>
+          <p:nvPr/>
+        </p:nvSpPr>
+        <p:spPr>
+          <a:xfrm>
+            <a:off x="8168640" y="1417320"/>
+            <a:ext cx="3444240" cy="1572768"/>
+          </a:xfrm>
+          <a:prstGeom prst="roundRect">
+            <a:avLst>
+              <a:gd name="adj" fmla="val 5814"/>
+            </a:avLst>
+          </a:prstGeom>
+          <a:solidFill>
+            <a:schemeClr val="bg2"/>
+          </a:solidFill>
+          <a:ln w="12700">
+            <a:solidFill>
+              <a:srgbClr val="D9E0E8"/>
+            </a:solidFill>
+            <a:prstDash val="solid"/>
+          </a:ln>
+        </p:spPr>
+      </p:sp>
+      <p:sp>
+        <p:nvSpPr>
+          <p:cNvPr id="10" name="Text 8"/>
+          <p:cNvSpPr txBox="1"/>
+          <p:nvPr/>
+        </p:nvSpPr>
+        <p:spPr>
+          <a:xfrm>
+            <a:off x="8424672" y="1600200"/>
+            <a:ext cx="2932176" cy="365760"/>
+          </a:xfrm>
+          <a:prstGeom prst="rect">
+            <a:avLst/>
+          </a:prstGeom>
+          <a:noFill/>
+          <a:ln/>
+        </p:spPr>
+        <p:txBody>
+          <a:bodyPr wrap="square" lIns="0" tIns="0" rIns="0" bIns="0" rtlCol="0" anchor="t"/>
+          <a:lstStyle/>
+          <a:p>
+            <a:pPr algn="l" indent="0" marL="0">
+              <a:buNone/>
+            </a:pPr>
+            <a:r>
+              <a:rPr lang="en-US" sz="1600" b="1" dirty="0">
+                <a:solidFill>
+                  <a:srgbClr val="E8803A"/>
+                </a:solidFill>
+              </a:rPr>
+              <a:t>แถบ Trim</a:t>
+            </a:r>
+            <a:endParaRPr lang="en-US" sz="1600" dirty="0"/>
+          </a:p>
+        </p:txBody>
+      </p:sp>
+      <p:sp>
+        <p:nvSpPr>
+          <p:cNvPr id="11" name="Text 9"/>
+          <p:cNvSpPr txBox="1"/>
+          <p:nvPr/>
+        </p:nvSpPr>
+        <p:spPr>
+          <a:xfrm>
+            <a:off x="8424672" y="2075688"/>
+            <a:ext cx="2932176" cy="704088"/>
+          </a:xfrm>
+          <a:prstGeom prst="rect">
+            <a:avLst/>
+          </a:prstGeom>
+          <a:noFill/>
+          <a:ln/>
+        </p:spPr>
+        <p:txBody>
+          <a:bodyPr wrap="square" lIns="0" tIns="0" rIns="0" bIns="0" rtlCol="0" anchor="t"/>
+          <a:lstStyle/>
+          <a:p>
+            <a:pPr algn="l" indent="0" marL="0">
+              <a:lnSpc>
+                <a:spcPct val="125000"/>
+              </a:lnSpc>
+              <a:buNone/>
+            </a:pPr>
+            <a:r>
+              <a:rPr lang="en-US" sz="1300" dirty="0">
+                <a:solidFill>
+                  <a:srgbClr val="4A5568"/>
+                </a:solidFill>
+              </a:rPr>
+              <a:t>แก้อาการหุ่นเบี่ยงข้างเดียว ปรับได้ขณะหุ่นกำลังวิ่ง ไม่ต้องอัปโค้ดใหม่</a:t>
+            </a:r>
+            <a:endParaRPr lang="en-US" sz="1300" dirty="0"/>
+          </a:p>
+        </p:txBody>
+      </p:sp>
+      <p:sp>
+        <p:nvSpPr>
+          <p:cNvPr id="12" name="card-สวิตช์ Auto / "/>
+          <p:cNvSpPr/>
+          <p:nvPr/>
+        </p:nvSpPr>
+        <p:spPr>
+          <a:xfrm>
+            <a:off x="548640" y="3282696"/>
+            <a:ext cx="3444240" cy="1572768"/>
+          </a:xfrm>
+          <a:prstGeom prst="roundRect">
+            <a:avLst>
+              <a:gd name="adj" fmla="val 5814"/>
+            </a:avLst>
+          </a:prstGeom>
+          <a:solidFill>
+            <a:schemeClr val="bg2"/>
+          </a:solidFill>
+          <a:ln w="12700">
+            <a:solidFill>
+              <a:srgbClr val="D9E0E8"/>
+            </a:solidFill>
+            <a:prstDash val="solid"/>
+          </a:ln>
+        </p:spPr>
+      </p:sp>
+      <p:sp>
+        <p:nvSpPr>
+          <p:cNvPr id="13" name="Text 11"/>
+          <p:cNvSpPr txBox="1"/>
+          <p:nvPr/>
+        </p:nvSpPr>
+        <p:spPr>
+          <a:xfrm>
+            <a:off x="804672" y="3465576"/>
+            <a:ext cx="2932176" cy="365760"/>
+          </a:xfrm>
+          <a:prstGeom prst="rect">
+            <a:avLst/>
+          </a:prstGeom>
+          <a:noFill/>
+          <a:ln/>
+        </p:spPr>
+        <p:txBody>
+          <a:bodyPr wrap="square" lIns="0" tIns="0" rIns="0" bIns="0" rtlCol="0" anchor="t"/>
+          <a:lstStyle/>
+          <a:p>
+            <a:pPr algn="l" indent="0" marL="0">
+              <a:buNone/>
+            </a:pPr>
+            <a:r>
+              <a:rPr lang="en-US" sz="1600" b="1" dirty="0">
+                <a:solidFill>
+                  <a:srgbClr val="1C7293"/>
+                </a:solidFill>
+              </a:rPr>
+              <a:t>สวิตช์ Auto / Manual</a:t>
+            </a:r>
+            <a:endParaRPr lang="en-US" sz="1600" dirty="0"/>
+          </a:p>
+        </p:txBody>
+      </p:sp>
+      <p:sp>
+        <p:nvSpPr>
+          <p:cNvPr id="14" name="Text 12"/>
+          <p:cNvSpPr txBox="1"/>
+          <p:nvPr/>
+        </p:nvSpPr>
+        <p:spPr>
+          <a:xfrm>
+            <a:off x="804672" y="3941064"/>
+            <a:ext cx="2932176" cy="704088"/>
+          </a:xfrm>
+          <a:prstGeom prst="rect">
+            <a:avLst/>
+          </a:prstGeom>
+          <a:noFill/>
+          <a:ln/>
+        </p:spPr>
+        <p:txBody>
+          <a:bodyPr wrap="square" lIns="0" tIns="0" rIns="0" bIns="0" rtlCol="0" anchor="t"/>
+          <a:lstStyle/>
+          <a:p>
+            <a:pPr algn="l" indent="0" marL="0">
+              <a:lnSpc>
+                <a:spcPct val="125000"/>
+              </a:lnSpc>
+              <a:buNone/>
+            </a:pPr>
+            <a:r>
+              <a:rPr lang="en-US" sz="1300" dirty="0">
+                <a:solidFill>
+                  <a:srgbClr val="4A5568"/>
+                </a:solidFill>
+              </a:rPr>
+              <a:t>Auto คือเดินตามเส้นเอง  Manual คือสั่งด้วยปุ่ม  สลับได้ตลอดเวลา</a:t>
+            </a:r>
+            <a:endParaRPr lang="en-US" sz="1300" dirty="0"/>
+          </a:p>
+        </p:txBody>
+      </p:sp>
+      <p:sp>
+        <p:nvSpPr>
+          <p:cNvPr id="15" name="card-ภาพจากกล้อง"/>
+          <p:cNvSpPr/>
+          <p:nvPr/>
+        </p:nvSpPr>
+        <p:spPr>
+          <a:xfrm>
+            <a:off x="4358640" y="3282696"/>
+            <a:ext cx="3444240" cy="1572768"/>
+          </a:xfrm>
+          <a:prstGeom prst="roundRect">
+            <a:avLst>
+              <a:gd name="adj" fmla="val 5814"/>
+            </a:avLst>
+          </a:prstGeom>
+          <a:solidFill>
+            <a:schemeClr val="bg2"/>
+          </a:solidFill>
+          <a:ln w="12700">
+            <a:solidFill>
+              <a:srgbClr val="D9E0E8"/>
+            </a:solidFill>
+            <a:prstDash val="solid"/>
+          </a:ln>
+        </p:spPr>
+      </p:sp>
+      <p:sp>
+        <p:nvSpPr>
+          <p:cNvPr id="16" name="Text 14"/>
+          <p:cNvSpPr txBox="1"/>
+          <p:nvPr/>
+        </p:nvSpPr>
+        <p:spPr>
+          <a:xfrm>
+            <a:off x="4614672" y="3465576"/>
+            <a:ext cx="2932176" cy="365760"/>
+          </a:xfrm>
+          <a:prstGeom prst="rect">
+            <a:avLst/>
+          </a:prstGeom>
+          <a:noFill/>
+          <a:ln/>
+        </p:spPr>
+        <p:txBody>
+          <a:bodyPr wrap="square" lIns="0" tIns="0" rIns="0" bIns="0" rtlCol="0" anchor="t"/>
+          <a:lstStyle/>
+          <a:p>
+            <a:pPr algn="l" indent="0" marL="0">
+              <a:buNone/>
+            </a:pPr>
+            <a:r>
+              <a:rPr lang="en-US" sz="1600" b="1" dirty="0">
+                <a:solidFill>
+                  <a:srgbClr val="1C7293"/>
+                </a:solidFill>
+              </a:rPr>
+              <a:t>ภาพจากกล้อง</a:t>
+            </a:r>
+            <a:endParaRPr lang="en-US" sz="1600" dirty="0"/>
+          </a:p>
+        </p:txBody>
+      </p:sp>
+      <p:sp>
+        <p:nvSpPr>
+          <p:cNvPr id="17" name="Text 15"/>
+          <p:cNvSpPr txBox="1"/>
+          <p:nvPr/>
+        </p:nvSpPr>
+        <p:spPr>
+          <a:xfrm>
+            <a:off x="4614672" y="3941064"/>
+            <a:ext cx="2932176" cy="704088"/>
+          </a:xfrm>
+          <a:prstGeom prst="rect">
+            <a:avLst/>
+          </a:prstGeom>
+          <a:noFill/>
+          <a:ln/>
+        </p:spPr>
+        <p:txBody>
+          <a:bodyPr wrap="square" lIns="0" tIns="0" rIns="0" bIns="0" rtlCol="0" anchor="t"/>
+          <a:lstStyle/>
+          <a:p>
+            <a:pPr algn="l" indent="0" marL="0">
+              <a:lnSpc>
+                <a:spcPct val="125000"/>
+              </a:lnSpc>
+              <a:buNone/>
+            </a:pPr>
+            <a:r>
+              <a:rPr lang="en-US" sz="1300" dirty="0">
+                <a:solidFill>
+                  <a:srgbClr val="4A5568"/>
+                </a:solidFill>
+              </a:rPr>
+              <a:t>ขึ้นเองเมื่อกล้องเกาะ Wi-Fi ได้แล้ว ถ้ากล้องเงียบไปนานภาพจะหายไปเอง</a:t>
+            </a:r>
+            <a:endParaRPr lang="en-US" sz="1300" dirty="0"/>
+          </a:p>
+        </p:txBody>
+      </p:sp>
+      <p:sp>
+        <p:nvSpPr>
+          <p:cNvPr id="18" name="card-ไม่มีตัวเลขสถา"/>
+          <p:cNvSpPr/>
+          <p:nvPr/>
+        </p:nvSpPr>
+        <p:spPr>
+          <a:xfrm>
+            <a:off x="8168640" y="3282696"/>
+            <a:ext cx="3444240" cy="1572768"/>
+          </a:xfrm>
+          <a:prstGeom prst="roundRect">
+            <a:avLst>
+              <a:gd name="adj" fmla="val 5814"/>
+            </a:avLst>
+          </a:prstGeom>
+          <a:solidFill>
+            <a:schemeClr val="tx1"/>
+          </a:solidFill>
+          <a:ln w="12700">
+            <a:solidFill>
+              <a:schemeClr val="tx1"/>
+            </a:solidFill>
+            <a:prstDash val="solid"/>
+          </a:ln>
+        </p:spPr>
+      </p:sp>
+      <p:sp>
+        <p:nvSpPr>
+          <p:cNvPr id="19" name="Text 17"/>
+          <p:cNvSpPr txBox="1"/>
+          <p:nvPr/>
+        </p:nvSpPr>
+        <p:spPr>
+          <a:xfrm>
+            <a:off x="8424672" y="3465576"/>
+            <a:ext cx="2932176" cy="365760"/>
+          </a:xfrm>
+          <a:prstGeom prst="rect">
+            <a:avLst/>
+          </a:prstGeom>
+          <a:noFill/>
+          <a:ln/>
+        </p:spPr>
+        <p:txBody>
+          <a:bodyPr wrap="square" lIns="0" tIns="0" rIns="0" bIns="0" rtlCol="0" anchor="t"/>
+          <a:lstStyle/>
+          <a:p>
+            <a:pPr algn="l" indent="0" marL="0">
+              <a:buNone/>
+            </a:pPr>
+            <a:r>
+              <a:rPr lang="en-US" sz="1600" b="1" dirty="0">
+                <a:solidFill>
+                  <a:srgbClr val="E8803A"/>
+                </a:solidFill>
+              </a:rPr>
+              <a:t>ไม่มีตัวเลขสถานะ</a:t>
+            </a:r>
+            <a:endParaRPr lang="en-US" sz="1600" dirty="0"/>
+          </a:p>
+        </p:txBody>
+      </p:sp>
+      <p:sp>
+        <p:nvSpPr>
+          <p:cNvPr id="20" name="Text 18"/>
+          <p:cNvSpPr txBox="1"/>
+          <p:nvPr/>
+        </p:nvSpPr>
+        <p:spPr>
+          <a:xfrm>
+            <a:off x="8424672" y="3941064"/>
+            <a:ext cx="2932176" cy="704088"/>
+          </a:xfrm>
+          <a:prstGeom prst="rect">
+            <a:avLst/>
+          </a:prstGeom>
+          <a:noFill/>
+          <a:ln/>
+        </p:spPr>
+        <p:txBody>
+          <a:bodyPr wrap="square" lIns="0" tIns="0" rIns="0" bIns="0" rtlCol="0" anchor="t"/>
+          <a:lstStyle/>
+          <a:p>
+            <a:pPr algn="l" indent="0" marL="0">
+              <a:lnSpc>
+                <a:spcPct val="125000"/>
+              </a:lnSpc>
+              <a:buNone/>
+            </a:pPr>
+            <a:r>
+              <a:rPr lang="en-US" sz="1300" dirty="0">
+                <a:solidFill>
+                  <a:srgbClr val="B9C6D4"/>
+                </a:solidFill>
+              </a:rPr>
+              <a:t>ตั้งใจไม่ใส่ เพราะหน้านี้มีไว้ขับ ส่วนตัวเลขทั้งหมดไปอยู่ในไฟล์ Excel แทน</a:t>
+            </a:r>
+            <a:endParaRPr lang="en-US" sz="1300" dirty="0"/>
+          </a:p>
+        </p:txBody>
+      </p:sp>
+      <p:sp>
+        <p:nvSpPr>
+          <p:cNvPr id="21" name="callout"/>
+          <p:cNvSpPr/>
+          <p:nvPr/>
+        </p:nvSpPr>
+        <p:spPr>
+          <a:xfrm>
+            <a:off x="548640" y="5257800"/>
+            <a:ext cx="11064240" cy="822960"/>
+          </a:xfrm>
+          <a:prstGeom prst="roundRect">
+            <a:avLst>
+              <a:gd name="adj" fmla="val 8889"/>
+            </a:avLst>
+          </a:prstGeom>
+          <a:solidFill>
+            <a:srgbClr val="FBEEEC"/>
+          </a:solidFill>
+          <a:ln w="12700">
+            <a:solidFill>
+              <a:srgbClr val="F0D3CE"/>
+            </a:solidFill>
+            <a:prstDash val="solid"/>
+          </a:ln>
+        </p:spPr>
+      </p:sp>
+      <p:sp>
+        <p:nvSpPr>
+          <p:cNvPr id="22" name="Text 20"/>
+          <p:cNvSpPr txBox="1"/>
+          <p:nvPr/>
+        </p:nvSpPr>
+        <p:spPr>
+          <a:xfrm>
+            <a:off x="777240" y="5385816"/>
+            <a:ext cx="10607040" cy="274320"/>
+          </a:xfrm>
+          <a:prstGeom prst="rect">
+            <a:avLst/>
+          </a:prstGeom>
+          <a:noFill/>
+          <a:ln/>
+        </p:spPr>
+        <p:txBody>
+          <a:bodyPr wrap="square" lIns="0" tIns="0" rIns="0" bIns="0" rtlCol="0" anchor="t"/>
+          <a:lstStyle/>
+          <a:p>
+            <a:pPr algn="l" indent="0" marL="0">
+              <a:buNone/>
+            </a:pPr>
+            <a:r>
+              <a:rPr lang="en-US" sz="1400" b="1" dirty="0">
+                <a:solidFill>
+                  <a:srgbClr val="B3261E"/>
+                </a:solidFill>
+              </a:rPr>
+              <a:t>เปิดหน้าเว็บแล้วหมุนค้าง ทั้งที่ต่อ Wi-Fi ถูกแล้ว</a:t>
+            </a:r>
+            <a:endParaRPr lang="en-US" sz="1400" dirty="0"/>
+          </a:p>
+        </p:txBody>
+      </p:sp>
+      <p:sp>
+        <p:nvSpPr>
+          <p:cNvPr id="23" name="Text 21"/>
+          <p:cNvSpPr txBox="1"/>
+          <p:nvPr/>
+        </p:nvSpPr>
+        <p:spPr>
+          <a:xfrm>
+            <a:off x="777240" y="5696712"/>
+            <a:ext cx="10607040" cy="256032"/>
+          </a:xfrm>
+          <a:prstGeom prst="rect">
+            <a:avLst/>
+          </a:prstGeom>
+          <a:noFill/>
+          <a:ln/>
+        </p:spPr>
+        <p:txBody>
+          <a:bodyPr wrap="square" lIns="0" tIns="0" rIns="0" bIns="0" rtlCol="0" anchor="t"/>
+          <a:lstStyle/>
+          <a:p>
+            <a:pPr algn="l" indent="0" marL="0">
+              <a:lnSpc>
+                <a:spcPct val="120000"/>
+              </a:lnSpc>
+              <a:buNone/>
+            </a:pPr>
+            <a:r>
+              <a:rPr lang="en-US" sz="1250" dirty="0">
+                <a:solidFill>
+                  <a:srgbClr val="4A5568"/>
+                </a:solidFill>
+              </a:rPr>
+              <a:t>มือถือบางรุ่นเห็นว่าวงนี้ไม่มีอินเทอร์เน็ตแล้วแอบสลับกลับไปใช้เน็ตมือถือเอง ต้องเข้าไปปิดการสลับอัตโนมัติก่อน</a:t>
+            </a:r>
+            <a:endParaRPr lang="en-US" sz="1250" dirty="0"/>
+          </a:p>
+        </p:txBody>
+      </p:sp>
+      <p:sp>
+        <p:nvSpPr>
+          <p:cNvPr id="25" name="Slide Number Placeholder 0"/>
+          <p:cNvSpPr>
+            <a:spLocks noGrp="1"/>
+          </p:cNvSpPr>
+          <p:nvPr>
+            <p:ph type="sldNum" sz="quarter" idx="4294967295"/>
+          </p:nvPr>
+        </p:nvSpPr>
+        <p:spPr>
+          <a:xfrm>
+            <a:off x="11338560" y="6263640"/>
+            <a:ext cx="457200" cy="274320"/>
+          </a:xfrm>
+          <a:prstGeom prst="rect">
+            <a:avLst/>
+          </a:prstGeom>
+          <a:extLst>
+            <a:ext uri="{C572A759-6A51-4108-AA02-DFA0A04FC94B}">
+              <ma14:wrappingTextBoxFlag xmlns:ma14="http://schemas.microsoft.com/office/mac/drawingml/2011/main" val="0"/>
+            </a:ext>
+          </a:extLst>
+        </p:spPr>
+        <p:txBody>
+          <a:bodyPr/>
+          <a:lstStyle>
+            <a:lvl1pPr>
+              <a:defRPr sz="1000">
+                <a:solidFill>
+                  <a:srgbClr val="6B7E93"/>
+                </a:solidFill>
+              </a:defRPr>
+            </a:lvl1pPr>
+          </a:lstStyle>
+          <a:p>
+            <a:pPr algn="r"/>
+            <a:fld id="{F7021451-1387-4CA6-816F-3879F97B5CBC}" type="slidenum">
+              <a:rPr b="0" lang="en-US"/>
+              <a:t>14</a:t>
+            </a:fld>
+            <a:endParaRPr lang="en-US"/>
+          </a:p>
+        </p:txBody>
+      </p:sp>
+    </p:spTree>
+  </p:cSld>
+  <p:clrMapOvr>
+    <a:masterClrMapping/>
+  </p:clrMapOvr>
+</p:sld>
+</file>
+
+<file path=ppt/slides/slide15.xml><?xml version="1.0" encoding="utf-8"?>
+<p:sld xmlns:a="http://schemas.openxmlformats.org/drawingml/2006/main" xmlns:r="http://schemas.openxmlformats.org/officeDocument/2006/relationships" xmlns:p="http://schemas.openxmlformats.org/presentationml/2006/main">
+  <p:cSld name="Slide 15">
+    <p:spTree>
+      <p:nvGrpSpPr>
+        <p:cNvPr id="1" name=""/>
+        <p:cNvGrpSpPr/>
+        <p:nvPr/>
+      </p:nvGrpSpPr>
+      <p:grpSpPr>
+        <a:xfrm>
+          <a:off x="0" y="0"/>
+          <a:ext cx="0" cy="0"/>
+          <a:chOff x="0" y="0"/>
+          <a:chExt cx="0" cy="0"/>
+        </a:xfrm>
+      </p:grpSpPr>
+      <p:sp>
+        <p:nvSpPr>
+          <p:cNvPr id="2" name="Text 0"/>
+          <p:cNvSpPr/>
+          <p:nvPr>
+            <p:ph idx="100" type="title" hasCustomPrompt="1"/>
+          </p:nvPr>
+        </p:nvSpPr>
+        <p:spPr>
+          <a:xfrm>
+            <a:off x="548640" y="384048"/>
+            <a:ext cx="11064240" cy="685800"/>
+          </a:xfrm>
+          <a:prstGeom prst="rect">
+            <a:avLst/>
+          </a:prstGeom>
+          <a:noFill/>
+          <a:ln/>
+        </p:spPr>
+        <p:txBody>
+          <a:bodyPr wrap="square" rtlCol="0"/>
+          <a:lstStyle/>
+          <a:p>
+            <a:pPr algn="l" indent="0" marL="0">
+              <a:buNone/>
+            </a:pPr>
+            <a:r>
+              <a:rPr lang="en-US" sz="3200" b="1" dirty="0">
+                <a:solidFill>
+                  <a:schemeClr val="tx1"/>
+                </a:solidFill>
+              </a:rPr>
               <a:t>ข้อมูลที่เก็บลง Excel</a:t>
             </a:r>
             <a:endParaRPr lang="en-US" sz="3200" dirty="0"/>
@@ -6667,7 +7505,7 @@
       </p:sp>
       <p:graphicFrame>
         <p:nvGraphicFramePr>
-          <p:cNvPr id="15" name="Table 0"/>
+          <p:cNvPr id="16" name="Table 0"/>
           <p:cNvGraphicFramePr>
             <a:graphicFrameLocks noGrp="1"/>
           </p:cNvGraphicFramePr>
@@ -7969,148 +8807,9 @@
             <a:pPr algn="r"/>
             <a:fld id="{F7021451-1387-4CA6-816F-3879F97B5CBC}" type="slidenum">
               <a:rPr b="0" lang="en-US"/>
-              <a:t>14</a:t>
+              <a:t>15</a:t>
             </a:fld>
             <a:endParaRPr lang="en-US"/>
-          </a:p>
-        </p:txBody>
-      </p:sp>
-    </p:spTree>
-  </p:cSld>
-  <p:clrMapOvr>
-    <a:masterClrMapping/>
-  </p:clrMapOvr>
-</p:sld>
-</file>
-
-<file path=ppt/slides/slide15.xml><?xml version="1.0" encoding="utf-8"?>
-<p:sld xmlns:a="http://schemas.openxmlformats.org/drawingml/2006/main" xmlns:r="http://schemas.openxmlformats.org/officeDocument/2006/relationships" xmlns:p="http://schemas.openxmlformats.org/presentationml/2006/main">
-  <p:cSld name="Slide 15">
-    <p:spTree>
-      <p:nvGrpSpPr>
-        <p:cNvPr id="1" name=""/>
-        <p:cNvGrpSpPr/>
-        <p:nvPr/>
-      </p:nvGrpSpPr>
-      <p:grpSpPr>
-        <a:xfrm>
-          <a:off x="0" y="0"/>
-          <a:ext cx="0" cy="0"/>
-          <a:chOff x="0" y="0"/>
-          <a:chExt cx="0" cy="0"/>
-        </a:xfrm>
-      </p:grpSpPr>
-      <p:sp>
-        <p:nvSpPr>
-          <p:cNvPr id="2" name="Text 0"/>
-          <p:cNvSpPr/>
-          <p:nvPr>
-            <p:ph idx="100" type="body" hasCustomPrompt="1"/>
-          </p:nvPr>
-        </p:nvSpPr>
-        <p:spPr>
-          <a:xfrm>
-            <a:off x="548640" y="2377440"/>
-            <a:ext cx="11064240" cy="457200"/>
-          </a:xfrm>
-          <a:prstGeom prst="rect">
-            <a:avLst/>
-          </a:prstGeom>
-          <a:noFill/>
-          <a:ln/>
-        </p:spPr>
-        <p:txBody>
-          <a:bodyPr wrap="square" rtlCol="0"/>
-          <a:lstStyle/>
-          <a:p>
-            <a:pPr algn="l" indent="0" marL="0">
-              <a:buNone/>
-            </a:pPr>
-            <a:r>
-              <a:rPr lang="en-US" sz="6000" b="1" dirty="0">
-                <a:solidFill>
-                  <a:srgbClr val="E8803A"/>
-                </a:solidFill>
-              </a:rPr>
-              <a:t>03</a:t>
-            </a:r>
-            <a:endParaRPr lang="en-US" sz="6000" dirty="0"/>
-          </a:p>
-        </p:txBody>
-      </p:sp>
-      <p:sp>
-        <p:nvSpPr>
-          <p:cNvPr id="3" name="Text 0"/>
-          <p:cNvSpPr/>
-          <p:nvPr>
-            <p:ph idx="101" type="title" hasCustomPrompt="1"/>
-          </p:nvPr>
-        </p:nvSpPr>
-        <p:spPr>
-          <a:xfrm>
-            <a:off x="548640" y="3200400"/>
-            <a:ext cx="11064240" cy="914400"/>
-          </a:xfrm>
-          <a:prstGeom prst="rect">
-            <a:avLst/>
-          </a:prstGeom>
-          <a:noFill/>
-          <a:ln/>
-        </p:spPr>
-        <p:txBody>
-          <a:bodyPr wrap="square" rtlCol="0"/>
-          <a:lstStyle/>
-          <a:p>
-            <a:pPr algn="l" indent="0" marL="0">
-              <a:buNone/>
-            </a:pPr>
-            <a:r>
-              <a:rPr lang="en-US" sz="4000" b="1" dirty="0">
-                <a:solidFill>
-                  <a:schemeClr val="bg1"/>
-                </a:solidFill>
-              </a:rPr>
-              <a:t>ปรับแต่งและแก้ปัญหา</a:t>
-            </a:r>
-            <a:endParaRPr lang="en-US" sz="4000" dirty="0"/>
-          </a:p>
-        </p:txBody>
-      </p:sp>
-      <p:sp>
-        <p:nvSpPr>
-          <p:cNvPr id="4" name="Text 0"/>
-          <p:cNvSpPr/>
-          <p:nvPr>
-            <p:ph idx="102" type="body" hasCustomPrompt="1"/>
-          </p:nvPr>
-        </p:nvSpPr>
-        <p:spPr>
-          <a:xfrm>
-            <a:off x="548640" y="4206240"/>
-            <a:ext cx="8686800" cy="914400"/>
-          </a:xfrm>
-          <a:prstGeom prst="rect">
-            <a:avLst/>
-          </a:prstGeom>
-          <a:noFill/>
-          <a:ln/>
-        </p:spPr>
-        <p:txBody>
-          <a:bodyPr wrap="square" rtlCol="0"/>
-          <a:lstStyle/>
-          <a:p>
-            <a:pPr algn="l" indent="0" marL="0">
-              <a:buNone/>
-            </a:pPr>
-            <a:r>
-              <a:rPr lang="en-US" sz="1600" dirty="0">
-                <a:solidFill>
-                  <a:srgbClr val="B9C6D4"/>
-                </a:solidFill>
-              </a:rPr>
-              <a:t>ค่าที่ปรับบ่อย วิธีที่หุ่นใช้หาเส้น และอาการเสียที่เจอซ้ำๆ</a:t>
-            </a:r>
-            <a:endParaRPr lang="en-US" sz="1600" dirty="0"/>
           </a:p>
         </p:txBody>
       </p:sp>
@@ -8144,6 +8843,145 @@
           <p:cNvPr id="2" name="Text 0"/>
           <p:cNvSpPr/>
           <p:nvPr>
+            <p:ph idx="100" type="body" hasCustomPrompt="1"/>
+          </p:nvPr>
+        </p:nvSpPr>
+        <p:spPr>
+          <a:xfrm>
+            <a:off x="548640" y="2377440"/>
+            <a:ext cx="11064240" cy="457200"/>
+          </a:xfrm>
+          <a:prstGeom prst="rect">
+            <a:avLst/>
+          </a:prstGeom>
+          <a:noFill/>
+          <a:ln/>
+        </p:spPr>
+        <p:txBody>
+          <a:bodyPr wrap="square" rtlCol="0"/>
+          <a:lstStyle/>
+          <a:p>
+            <a:pPr algn="l" indent="0" marL="0">
+              <a:buNone/>
+            </a:pPr>
+            <a:r>
+              <a:rPr lang="en-US" sz="6000" b="1" dirty="0">
+                <a:solidFill>
+                  <a:srgbClr val="E8803A"/>
+                </a:solidFill>
+              </a:rPr>
+              <a:t>03</a:t>
+            </a:r>
+            <a:endParaRPr lang="en-US" sz="6000" dirty="0"/>
+          </a:p>
+        </p:txBody>
+      </p:sp>
+      <p:sp>
+        <p:nvSpPr>
+          <p:cNvPr id="3" name="Text 0"/>
+          <p:cNvSpPr/>
+          <p:nvPr>
+            <p:ph idx="101" type="title" hasCustomPrompt="1"/>
+          </p:nvPr>
+        </p:nvSpPr>
+        <p:spPr>
+          <a:xfrm>
+            <a:off x="548640" y="3200400"/>
+            <a:ext cx="11064240" cy="914400"/>
+          </a:xfrm>
+          <a:prstGeom prst="rect">
+            <a:avLst/>
+          </a:prstGeom>
+          <a:noFill/>
+          <a:ln/>
+        </p:spPr>
+        <p:txBody>
+          <a:bodyPr wrap="square" rtlCol="0"/>
+          <a:lstStyle/>
+          <a:p>
+            <a:pPr algn="l" indent="0" marL="0">
+              <a:buNone/>
+            </a:pPr>
+            <a:r>
+              <a:rPr lang="en-US" sz="4000" b="1" dirty="0">
+                <a:solidFill>
+                  <a:schemeClr val="bg1"/>
+                </a:solidFill>
+              </a:rPr>
+              <a:t>ปรับแต่งและแก้ปัญหา</a:t>
+            </a:r>
+            <a:endParaRPr lang="en-US" sz="4000" dirty="0"/>
+          </a:p>
+        </p:txBody>
+      </p:sp>
+      <p:sp>
+        <p:nvSpPr>
+          <p:cNvPr id="4" name="Text 0"/>
+          <p:cNvSpPr/>
+          <p:nvPr>
+            <p:ph idx="102" type="body" hasCustomPrompt="1"/>
+          </p:nvPr>
+        </p:nvSpPr>
+        <p:spPr>
+          <a:xfrm>
+            <a:off x="548640" y="4206240"/>
+            <a:ext cx="8686800" cy="914400"/>
+          </a:xfrm>
+          <a:prstGeom prst="rect">
+            <a:avLst/>
+          </a:prstGeom>
+          <a:noFill/>
+          <a:ln/>
+        </p:spPr>
+        <p:txBody>
+          <a:bodyPr wrap="square" rtlCol="0"/>
+          <a:lstStyle/>
+          <a:p>
+            <a:pPr algn="l" indent="0" marL="0">
+              <a:buNone/>
+            </a:pPr>
+            <a:r>
+              <a:rPr lang="en-US" sz="1600" dirty="0">
+                <a:solidFill>
+                  <a:srgbClr val="B9C6D4"/>
+                </a:solidFill>
+              </a:rPr>
+              <a:t>ค่าที่ปรับบ่อย วิธีที่หุ่นใช้หาเส้น และอาการเสียที่เจอซ้ำๆ</a:t>
+            </a:r>
+            <a:endParaRPr lang="en-US" sz="1600" dirty="0"/>
+          </a:p>
+        </p:txBody>
+      </p:sp>
+    </p:spTree>
+  </p:cSld>
+  <p:clrMapOvr>
+    <a:masterClrMapping/>
+  </p:clrMapOvr>
+</p:sld>
+</file>
+
+<file path=ppt/slides/slide17.xml><?xml version="1.0" encoding="utf-8"?>
+<p:sld xmlns:a="http://schemas.openxmlformats.org/drawingml/2006/main" xmlns:r="http://schemas.openxmlformats.org/officeDocument/2006/relationships" xmlns:p="http://schemas.openxmlformats.org/presentationml/2006/main">
+  <p:cSld name="Slide 17">
+    <p:spTree>
+      <p:nvGrpSpPr>
+        <p:cNvPr id="1" name=""/>
+        <p:cNvGrpSpPr/>
+        <p:nvPr/>
+      </p:nvGrpSpPr>
+      <p:grpSpPr>
+        <a:xfrm>
+          <a:off x="0" y="0"/>
+          <a:ext cx="0" cy="0"/>
+          <a:chOff x="0" y="0"/>
+          <a:chExt cx="0" cy="0"/>
+        </a:xfrm>
+      </p:grpSpPr>
+      <p:sp>
+        <p:nvSpPr>
+          <p:cNvPr id="2" name="Text 0"/>
+          <p:cNvSpPr/>
+          <p:nvPr>
             <p:ph idx="100" type="title" hasCustomPrompt="1"/>
           </p:nvPr>
         </p:nvSpPr>
@@ -8179,7 +9017,7 @@
       </p:sp>
       <p:graphicFrame>
         <p:nvGraphicFramePr>
-          <p:cNvPr id="17" name="Table 0"/>
+          <p:cNvPr id="18" name="Table 0"/>
           <p:cNvGraphicFramePr>
             <a:graphicFrameLocks noGrp="1"/>
           </p:cNvGraphicFramePr>
@@ -9644,741 +10482,6 @@
             <a:pPr algn="r"/>
             <a:fld id="{F7021451-1387-4CA6-816F-3879F97B5CBC}" type="slidenum">
               <a:rPr b="0" lang="en-US"/>
-              <a:t>16</a:t>
-            </a:fld>
-            <a:endParaRPr lang="en-US"/>
-          </a:p>
-        </p:txBody>
-      </p:sp>
-    </p:spTree>
-  </p:cSld>
-  <p:clrMapOvr>
-    <a:masterClrMapping/>
-  </p:clrMapOvr>
-</p:sld>
-</file>
-
-<file path=ppt/slides/slide17.xml><?xml version="1.0" encoding="utf-8"?>
-<p:sld xmlns:a="http://schemas.openxmlformats.org/drawingml/2006/main" xmlns:r="http://schemas.openxmlformats.org/officeDocument/2006/relationships" xmlns:p="http://schemas.openxmlformats.org/presentationml/2006/main">
-  <p:cSld name="Slide 17">
-    <p:spTree>
-      <p:nvGrpSpPr>
-        <p:cNvPr id="1" name=""/>
-        <p:cNvGrpSpPr/>
-        <p:nvPr/>
-      </p:nvGrpSpPr>
-      <p:grpSpPr>
-        <a:xfrm>
-          <a:off x="0" y="0"/>
-          <a:ext cx="0" cy="0"/>
-          <a:chOff x="0" y="0"/>
-          <a:chExt cx="0" cy="0"/>
-        </a:xfrm>
-      </p:grpSpPr>
-      <p:sp>
-        <p:nvSpPr>
-          <p:cNvPr id="2" name="Text 0"/>
-          <p:cNvSpPr/>
-          <p:nvPr>
-            <p:ph idx="100" type="title" hasCustomPrompt="1"/>
-          </p:nvPr>
-        </p:nvSpPr>
-        <p:spPr>
-          <a:xfrm>
-            <a:off x="548640" y="384048"/>
-            <a:ext cx="11064240" cy="685800"/>
-          </a:xfrm>
-          <a:prstGeom prst="rect">
-            <a:avLst/>
-          </a:prstGeom>
-          <a:noFill/>
-          <a:ln/>
-        </p:spPr>
-        <p:txBody>
-          <a:bodyPr wrap="square" rtlCol="0"/>
-          <a:lstStyle/>
-          <a:p>
-            <a:pPr algn="l" indent="0" marL="0">
-              <a:buNone/>
-            </a:pPr>
-            <a:r>
-              <a:rPr lang="en-US" sz="3200" b="1" dirty="0">
-                <a:solidFill>
-                  <a:schemeClr val="tx1"/>
-                </a:solidFill>
-              </a:rPr>
-              <a:t>หุ่นหาเส้นที่หลุดไปยังไง</a:t>
-            </a:r>
-            <a:endParaRPr lang="en-US" sz="3200" dirty="0"/>
-          </a:p>
-        </p:txBody>
-      </p:sp>
-      <p:sp>
-        <p:nvSpPr>
-          <p:cNvPr id="3" name="Text 1"/>
-          <p:cNvSpPr txBox="1"/>
-          <p:nvPr/>
-        </p:nvSpPr>
-        <p:spPr>
-          <a:xfrm>
-            <a:off x="548640" y="1234440"/>
-            <a:ext cx="11064240" cy="411480"/>
-          </a:xfrm>
-          <a:prstGeom prst="rect">
-            <a:avLst/>
-          </a:prstGeom>
-          <a:noFill/>
-          <a:ln/>
-        </p:spPr>
-        <p:txBody>
-          <a:bodyPr wrap="square" lIns="0" tIns="0" rIns="0" bIns="0" rtlCol="0" anchor="ctr"/>
-          <a:lstStyle/>
-          <a:p>
-            <a:pPr algn="l" indent="0" marL="0">
-              <a:buNone/>
-            </a:pPr>
-            <a:r>
-              <a:rPr lang="en-US" sz="1400" dirty="0">
-                <a:solidFill>
-                  <a:srgbClr val="4A5568"/>
-                </a:solidFill>
-              </a:rPr>
-              <a:t>เซนเซอร์ไม่เจอเส้นเลย ไม่ได้แปลว่าหลงทาง  ทางโค้งแคบจะเหวี่ยงเส้นออกนอกแถวเซนเซอร์ชั่วครู่เป็นเรื่องปกติ</a:t>
-            </a:r>
-            <a:endParaRPr lang="en-US" sz="1400" dirty="0"/>
-          </a:p>
-        </p:txBody>
-      </p:sp>
-      <p:sp>
-        <p:nvSpPr>
-          <p:cNvPr id="4" name="stage-0"/>
-          <p:cNvSpPr/>
-          <p:nvPr/>
-        </p:nvSpPr>
-        <p:spPr>
-          <a:xfrm>
-            <a:off x="548640" y="1828800"/>
-            <a:ext cx="3444240" cy="2286000"/>
-          </a:xfrm>
-          <a:prstGeom prst="roundRect">
-            <a:avLst>
-              <a:gd name="adj" fmla="val 4000"/>
-            </a:avLst>
-          </a:prstGeom>
-          <a:solidFill>
-            <a:schemeClr val="bg2"/>
-          </a:solidFill>
-          <a:ln w="12700">
-            <a:solidFill>
-              <a:srgbClr val="D9E0E8"/>
-            </a:solidFill>
-            <a:prstDash val="solid"/>
-          </a:ln>
-        </p:spPr>
-      </p:sp>
-      <p:sp>
-        <p:nvSpPr>
-          <p:cNvPr id="5" name="dot-1"/>
-          <p:cNvSpPr/>
-          <p:nvPr/>
-        </p:nvSpPr>
-        <p:spPr>
-          <a:xfrm>
-            <a:off x="804672" y="2057400"/>
-            <a:ext cx="475488" cy="475488"/>
-          </a:xfrm>
-          <a:prstGeom prst="ellipse">
-            <a:avLst/>
-          </a:prstGeom>
-          <a:solidFill>
-            <a:srgbClr val="E8803A"/>
-          </a:solidFill>
-          <a:ln w="12700">
-            <a:solidFill>
-              <a:srgbClr val="E8803A"/>
-            </a:solidFill>
-            <a:prstDash val="solid"/>
-          </a:ln>
-        </p:spPr>
-      </p:sp>
-      <p:sp>
-        <p:nvSpPr>
-          <p:cNvPr id="6" name="Text 4"/>
-          <p:cNvSpPr txBox="1"/>
-          <p:nvPr/>
-        </p:nvSpPr>
-        <p:spPr>
-          <a:xfrm>
-            <a:off x="804672" y="2057400"/>
-            <a:ext cx="475488" cy="475488"/>
-          </a:xfrm>
-          <a:prstGeom prst="rect">
-            <a:avLst/>
-          </a:prstGeom>
-          <a:noFill/>
-          <a:ln/>
-        </p:spPr>
-        <p:txBody>
-          <a:bodyPr wrap="square" lIns="0" tIns="0" rIns="0" bIns="0" rtlCol="0" anchor="ctr"/>
-          <a:lstStyle/>
-          <a:p>
-            <a:pPr algn="ctr" indent="0" marL="0">
-              <a:buNone/>
-            </a:pPr>
-            <a:r>
-              <a:rPr lang="en-US" sz="1500" b="1" dirty="0">
-                <a:solidFill>
-                  <a:srgbClr val="FFFFFF"/>
-                </a:solidFill>
-              </a:rPr>
-              <a:t>1</a:t>
-            </a:r>
-            <a:endParaRPr lang="en-US" sz="1500" dirty="0"/>
-          </a:p>
-        </p:txBody>
-      </p:sp>
-      <p:sp>
-        <p:nvSpPr>
-          <p:cNvPr id="7" name="Text 5"/>
-          <p:cNvSpPr txBox="1"/>
-          <p:nvPr/>
-        </p:nvSpPr>
-        <p:spPr>
-          <a:xfrm>
-            <a:off x="804672" y="2670048"/>
-            <a:ext cx="2932176" cy="365760"/>
-          </a:xfrm>
-          <a:prstGeom prst="rect">
-            <a:avLst/>
-          </a:prstGeom>
-          <a:noFill/>
-          <a:ln/>
-        </p:spPr>
-        <p:txBody>
-          <a:bodyPr wrap="square" lIns="0" tIns="0" rIns="0" bIns="0" rtlCol="0" anchor="t"/>
-          <a:lstStyle/>
-          <a:p>
-            <a:pPr algn="l" indent="0" marL="0">
-              <a:buNone/>
-            </a:pPr>
-            <a:r>
-              <a:rPr lang="en-US" sz="1600" b="1" dirty="0">
-                <a:solidFill>
-                  <a:schemeClr val="tx1"/>
-                </a:solidFill>
-              </a:rPr>
-              <a:t>รอก่อน  150 ms</a:t>
-            </a:r>
-            <a:endParaRPr lang="en-US" sz="1600" dirty="0"/>
-          </a:p>
-        </p:txBody>
-      </p:sp>
-      <p:sp>
-        <p:nvSpPr>
-          <p:cNvPr id="8" name="Text 6"/>
-          <p:cNvSpPr txBox="1"/>
-          <p:nvPr/>
-        </p:nvSpPr>
-        <p:spPr>
-          <a:xfrm>
-            <a:off x="804672" y="3090672"/>
-            <a:ext cx="2932176" cy="914400"/>
-          </a:xfrm>
-          <a:prstGeom prst="rect">
-            <a:avLst/>
-          </a:prstGeom>
-          <a:noFill/>
-          <a:ln/>
-        </p:spPr>
-        <p:txBody>
-          <a:bodyPr wrap="square" lIns="0" tIns="0" rIns="0" bIns="0" rtlCol="0" anchor="t"/>
-          <a:lstStyle/>
-          <a:p>
-            <a:pPr algn="l" indent="0" marL="0">
-              <a:lnSpc>
-                <a:spcPct val="125000"/>
-              </a:lnSpc>
-              <a:buNone/>
-            </a:pPr>
-            <a:r>
-              <a:rPr lang="en-US" sz="1250" dirty="0">
-                <a:solidFill>
-                  <a:srgbClr val="4A5568"/>
-                </a:solidFill>
-              </a:rPr>
-              <a:t>ยังไม่ตัดสินใจอะไรทั้งนั้น เลี้ยวค้างไปทางเดิมต่อ ซึ่งเป็นทิศที่ไล่ตามเส้นอยู่แล้ว ทางโค้งส่วนใหญ่จบก่อนเวลานี้</a:t>
-            </a:r>
-            <a:endParaRPr lang="en-US" sz="1250" dirty="0"/>
-          </a:p>
-        </p:txBody>
-      </p:sp>
-      <p:sp>
-        <p:nvSpPr>
-          <p:cNvPr id="9" name="stage-1"/>
-          <p:cNvSpPr/>
-          <p:nvPr/>
-        </p:nvSpPr>
-        <p:spPr>
-          <a:xfrm>
-            <a:off x="4358640" y="1828800"/>
-            <a:ext cx="3444240" cy="2286000"/>
-          </a:xfrm>
-          <a:prstGeom prst="roundRect">
-            <a:avLst>
-              <a:gd name="adj" fmla="val 4000"/>
-            </a:avLst>
-          </a:prstGeom>
-          <a:solidFill>
-            <a:schemeClr val="bg2"/>
-          </a:solidFill>
-          <a:ln w="12700">
-            <a:solidFill>
-              <a:srgbClr val="D9E0E8"/>
-            </a:solidFill>
-            <a:prstDash val="solid"/>
-          </a:ln>
-        </p:spPr>
-      </p:sp>
-      <p:sp>
-        <p:nvSpPr>
-          <p:cNvPr id="10" name="dot-2"/>
-          <p:cNvSpPr/>
-          <p:nvPr/>
-        </p:nvSpPr>
-        <p:spPr>
-          <a:xfrm>
-            <a:off x="4614672" y="2057400"/>
-            <a:ext cx="475488" cy="475488"/>
-          </a:xfrm>
-          <a:prstGeom prst="ellipse">
-            <a:avLst/>
-          </a:prstGeom>
-          <a:solidFill>
-            <a:srgbClr val="E8803A"/>
-          </a:solidFill>
-          <a:ln w="12700">
-            <a:solidFill>
-              <a:srgbClr val="E8803A"/>
-            </a:solidFill>
-            <a:prstDash val="solid"/>
-          </a:ln>
-        </p:spPr>
-      </p:sp>
-      <p:sp>
-        <p:nvSpPr>
-          <p:cNvPr id="11" name="Text 9"/>
-          <p:cNvSpPr txBox="1"/>
-          <p:nvPr/>
-        </p:nvSpPr>
-        <p:spPr>
-          <a:xfrm>
-            <a:off x="4614672" y="2057400"/>
-            <a:ext cx="475488" cy="475488"/>
-          </a:xfrm>
-          <a:prstGeom prst="rect">
-            <a:avLst/>
-          </a:prstGeom>
-          <a:noFill/>
-          <a:ln/>
-        </p:spPr>
-        <p:txBody>
-          <a:bodyPr wrap="square" lIns="0" tIns="0" rIns="0" bIns="0" rtlCol="0" anchor="ctr"/>
-          <a:lstStyle/>
-          <a:p>
-            <a:pPr algn="ctr" indent="0" marL="0">
-              <a:buNone/>
-            </a:pPr>
-            <a:r>
-              <a:rPr lang="en-US" sz="1500" b="1" dirty="0">
-                <a:solidFill>
-                  <a:srgbClr val="FFFFFF"/>
-                </a:solidFill>
-              </a:rPr>
-              <a:t>2</a:t>
-            </a:r>
-            <a:endParaRPr lang="en-US" sz="1500" dirty="0"/>
-          </a:p>
-        </p:txBody>
-      </p:sp>
-      <p:sp>
-        <p:nvSpPr>
-          <p:cNvPr id="12" name="Text 10"/>
-          <p:cNvSpPr txBox="1"/>
-          <p:nvPr/>
-        </p:nvSpPr>
-        <p:spPr>
-          <a:xfrm>
-            <a:off x="4614672" y="2670048"/>
-            <a:ext cx="2932176" cy="365760"/>
-          </a:xfrm>
-          <a:prstGeom prst="rect">
-            <a:avLst/>
-          </a:prstGeom>
-          <a:noFill/>
-          <a:ln/>
-        </p:spPr>
-        <p:txBody>
-          <a:bodyPr wrap="square" lIns="0" tIns="0" rIns="0" bIns="0" rtlCol="0" anchor="t"/>
-          <a:lstStyle/>
-          <a:p>
-            <a:pPr algn="l" indent="0" marL="0">
-              <a:buNone/>
-            </a:pPr>
-            <a:r>
-              <a:rPr lang="en-US" sz="1600" b="1" dirty="0">
-                <a:solidFill>
-                  <a:schemeClr val="tx1"/>
-                </a:solidFill>
-              </a:rPr>
-              <a:t>ถอยหลัง  400 ms</a:t>
-            </a:r>
-            <a:endParaRPr lang="en-US" sz="1600" dirty="0"/>
-          </a:p>
-        </p:txBody>
-      </p:sp>
-      <p:sp>
-        <p:nvSpPr>
-          <p:cNvPr id="13" name="Text 11"/>
-          <p:cNvSpPr txBox="1"/>
-          <p:nvPr/>
-        </p:nvSpPr>
-        <p:spPr>
-          <a:xfrm>
-            <a:off x="4614672" y="3090672"/>
-            <a:ext cx="2932176" cy="914400"/>
-          </a:xfrm>
-          <a:prstGeom prst="rect">
-            <a:avLst/>
-          </a:prstGeom>
-          <a:noFill/>
-          <a:ln/>
-        </p:spPr>
-        <p:txBody>
-          <a:bodyPr wrap="square" lIns="0" tIns="0" rIns="0" bIns="0" rtlCol="0" anchor="t"/>
-          <a:lstStyle/>
-          <a:p>
-            <a:pPr algn="l" indent="0" marL="0">
-              <a:lnSpc>
-                <a:spcPct val="125000"/>
-              </a:lnSpc>
-              <a:buNone/>
-            </a:pPr>
-            <a:r>
-              <a:rPr lang="en-US" sz="1250" dirty="0">
-                <a:solidFill>
-                  <a:srgbClr val="4A5568"/>
-                </a:solidFill>
-              </a:rPr>
-              <a:t>ถอยเอียงไปทางที่เพิ่งเห็นเส้นครั้งสุดท้าย แก้กรณีเข้าโค้งเร็วเกินจนหลุด</a:t>
-            </a:r>
-            <a:endParaRPr lang="en-US" sz="1250" dirty="0"/>
-          </a:p>
-        </p:txBody>
-      </p:sp>
-      <p:sp>
-        <p:nvSpPr>
-          <p:cNvPr id="14" name="stage-2"/>
-          <p:cNvSpPr/>
-          <p:nvPr/>
-        </p:nvSpPr>
-        <p:spPr>
-          <a:xfrm>
-            <a:off x="8168640" y="1828800"/>
-            <a:ext cx="3444240" cy="2286000"/>
-          </a:xfrm>
-          <a:prstGeom prst="roundRect">
-            <a:avLst>
-              <a:gd name="adj" fmla="val 4000"/>
-            </a:avLst>
-          </a:prstGeom>
-          <a:solidFill>
-            <a:schemeClr val="bg2"/>
-          </a:solidFill>
-          <a:ln w="12700">
-            <a:solidFill>
-              <a:srgbClr val="D9E0E8"/>
-            </a:solidFill>
-            <a:prstDash val="solid"/>
-          </a:ln>
-        </p:spPr>
-      </p:sp>
-      <p:sp>
-        <p:nvSpPr>
-          <p:cNvPr id="15" name="dot-3"/>
-          <p:cNvSpPr/>
-          <p:nvPr/>
-        </p:nvSpPr>
-        <p:spPr>
-          <a:xfrm>
-            <a:off x="8424672" y="2057400"/>
-            <a:ext cx="475488" cy="475488"/>
-          </a:xfrm>
-          <a:prstGeom prst="ellipse">
-            <a:avLst/>
-          </a:prstGeom>
-          <a:solidFill>
-            <a:srgbClr val="E8803A"/>
-          </a:solidFill>
-          <a:ln w="12700">
-            <a:solidFill>
-              <a:srgbClr val="E8803A"/>
-            </a:solidFill>
-            <a:prstDash val="solid"/>
-          </a:ln>
-        </p:spPr>
-      </p:sp>
-      <p:sp>
-        <p:nvSpPr>
-          <p:cNvPr id="16" name="Text 14"/>
-          <p:cNvSpPr txBox="1"/>
-          <p:nvPr/>
-        </p:nvSpPr>
-        <p:spPr>
-          <a:xfrm>
-            <a:off x="8424672" y="2057400"/>
-            <a:ext cx="475488" cy="475488"/>
-          </a:xfrm>
-          <a:prstGeom prst="rect">
-            <a:avLst/>
-          </a:prstGeom>
-          <a:noFill/>
-          <a:ln/>
-        </p:spPr>
-        <p:txBody>
-          <a:bodyPr wrap="square" lIns="0" tIns="0" rIns="0" bIns="0" rtlCol="0" anchor="ctr"/>
-          <a:lstStyle/>
-          <a:p>
-            <a:pPr algn="ctr" indent="0" marL="0">
-              <a:buNone/>
-            </a:pPr>
-            <a:r>
-              <a:rPr lang="en-US" sz="1500" b="1" dirty="0">
-                <a:solidFill>
-                  <a:srgbClr val="FFFFFF"/>
-                </a:solidFill>
-              </a:rPr>
-              <a:t>3</a:t>
-            </a:r>
-            <a:endParaRPr lang="en-US" sz="1500" dirty="0"/>
-          </a:p>
-        </p:txBody>
-      </p:sp>
-      <p:sp>
-        <p:nvSpPr>
-          <p:cNvPr id="17" name="Text 15"/>
-          <p:cNvSpPr txBox="1"/>
-          <p:nvPr/>
-        </p:nvSpPr>
-        <p:spPr>
-          <a:xfrm>
-            <a:off x="8424672" y="2670048"/>
-            <a:ext cx="2932176" cy="365760"/>
-          </a:xfrm>
-          <a:prstGeom prst="rect">
-            <a:avLst/>
-          </a:prstGeom>
-          <a:noFill/>
-          <a:ln/>
-        </p:spPr>
-        <p:txBody>
-          <a:bodyPr wrap="square" lIns="0" tIns="0" rIns="0" bIns="0" rtlCol="0" anchor="t"/>
-          <a:lstStyle/>
-          <a:p>
-            <a:pPr algn="l" indent="0" marL="0">
-              <a:buNone/>
-            </a:pPr>
-            <a:r>
-              <a:rPr lang="en-US" sz="1600" b="1" dirty="0">
-                <a:solidFill>
-                  <a:schemeClr val="tx1"/>
-                </a:solidFill>
-              </a:rPr>
-              <a:t>กวาดหา  ถึง 6 วินาที</a:t>
-            </a:r>
-            <a:endParaRPr lang="en-US" sz="1600" dirty="0"/>
-          </a:p>
-        </p:txBody>
-      </p:sp>
-      <p:sp>
-        <p:nvSpPr>
-          <p:cNvPr id="18" name="Text 16"/>
-          <p:cNvSpPr txBox="1"/>
-          <p:nvPr/>
-        </p:nvSpPr>
-        <p:spPr>
-          <a:xfrm>
-            <a:off x="8424672" y="3090672"/>
-            <a:ext cx="2932176" cy="914400"/>
-          </a:xfrm>
-          <a:prstGeom prst="rect">
-            <a:avLst/>
-          </a:prstGeom>
-          <a:noFill/>
-          <a:ln/>
-        </p:spPr>
-        <p:txBody>
-          <a:bodyPr wrap="square" lIns="0" tIns="0" rIns="0" bIns="0" rtlCol="0" anchor="t"/>
-          <a:lstStyle/>
-          <a:p>
-            <a:pPr algn="l" indent="0" marL="0">
-              <a:lnSpc>
-                <a:spcPct val="125000"/>
-              </a:lnSpc>
-              <a:buNone/>
-            </a:pPr>
-            <a:r>
-              <a:rPr lang="en-US" sz="1250" dirty="0">
-                <a:solidFill>
-                  <a:srgbClr val="4A5568"/>
-                </a:solidFill>
-              </a:rPr>
-              <a:t>หมุนอยู่กับที่ด้วยความเร็ว 55% สลับซ้ายขวา แต่ละรอบกว้างขึ้นเรื่อยๆ ครบ 6 วินาทีแล้วไม่เจอถึงจะยอมแพ้</a:t>
-            </a:r>
-            <a:endParaRPr lang="en-US" sz="1250" dirty="0"/>
-          </a:p>
-        </p:txBody>
-      </p:sp>
-      <p:sp>
-        <p:nvSpPr>
-          <p:cNvPr id="19" name="callout"/>
-          <p:cNvSpPr/>
-          <p:nvPr/>
-        </p:nvSpPr>
-        <p:spPr>
-          <a:xfrm>
-            <a:off x="548640" y="4343400"/>
-            <a:ext cx="11064240" cy="1234440"/>
-          </a:xfrm>
-          <a:prstGeom prst="roundRect">
-            <a:avLst>
-              <a:gd name="adj" fmla="val 5926"/>
-            </a:avLst>
-          </a:prstGeom>
-          <a:solidFill>
-            <a:srgbClr val="E8F1F5"/>
-          </a:solidFill>
-          <a:ln w="12700">
-            <a:solidFill>
-              <a:srgbClr val="CBE0E9"/>
-            </a:solidFill>
-            <a:prstDash val="solid"/>
-          </a:ln>
-        </p:spPr>
-      </p:sp>
-      <p:sp>
-        <p:nvSpPr>
-          <p:cNvPr id="20" name="Text 18"/>
-          <p:cNvSpPr txBox="1"/>
-          <p:nvPr/>
-        </p:nvSpPr>
-        <p:spPr>
-          <a:xfrm>
-            <a:off x="777240" y="4471416"/>
-            <a:ext cx="10607040" cy="274320"/>
-          </a:xfrm>
-          <a:prstGeom prst="rect">
-            <a:avLst/>
-          </a:prstGeom>
-          <a:noFill/>
-          <a:ln/>
-        </p:spPr>
-        <p:txBody>
-          <a:bodyPr wrap="square" lIns="0" tIns="0" rIns="0" bIns="0" rtlCol="0" anchor="t"/>
-          <a:lstStyle/>
-          <a:p>
-            <a:pPr algn="l" indent="0" marL="0">
-              <a:buNone/>
-            </a:pPr>
-            <a:r>
-              <a:rPr lang="en-US" sz="1400" b="1" dirty="0">
-                <a:solidFill>
-                  <a:srgbClr val="1C7293"/>
-                </a:solidFill>
-              </a:rPr>
-              <a:t>ขาวหมดกับดำหมด คนละความหมายกันคนละขั้ว</a:t>
-            </a:r>
-            <a:endParaRPr lang="en-US" sz="1400" dirty="0"/>
-          </a:p>
-        </p:txBody>
-      </p:sp>
-      <p:sp>
-        <p:nvSpPr>
-          <p:cNvPr id="21" name="Text 19"/>
-          <p:cNvSpPr txBox="1"/>
-          <p:nvPr/>
-        </p:nvSpPr>
-        <p:spPr>
-          <a:xfrm>
-            <a:off x="777240" y="4782312"/>
-            <a:ext cx="10607040" cy="667512"/>
-          </a:xfrm>
-          <a:prstGeom prst="rect">
-            <a:avLst/>
-          </a:prstGeom>
-          <a:noFill/>
-          <a:ln/>
-        </p:spPr>
-        <p:txBody>
-          <a:bodyPr wrap="square" lIns="0" tIns="0" rIns="0" bIns="0" rtlCol="0" anchor="t"/>
-          <a:lstStyle/>
-          <a:p>
-            <a:pPr algn="l" indent="0" marL="0">
-              <a:lnSpc>
-                <a:spcPct val="120000"/>
-              </a:lnSpc>
-              <a:buNone/>
-            </a:pPr>
-            <a:r>
-              <a:rPr lang="en-US" sz="1250" dirty="0">
-                <a:solidFill>
-                  <a:srgbClr val="4A5568"/>
-                </a:solidFill>
-              </a:rPr>
-              <a:t>ไม่เจอเส้นเลยแปลว่าเส้นอยู่นอกแถวเซนเซอร์ หุ่นต้องดันตัวเองไปหาจนกว่าจะมีดวงใดดวงหนึ่งเจอ  ส่วนที่สั่งให้หยุดคือตรงข้ามกันพอดี คือดำครบทั้ง 5 ดวง ซึ่งแปลว่าถึงเส้นชัยแล้ว</a:t>
-            </a:r>
-            <a:endParaRPr lang="en-US" sz="1250" dirty="0"/>
-          </a:p>
-        </p:txBody>
-      </p:sp>
-      <p:sp>
-        <p:nvSpPr>
-          <p:cNvPr id="25" name="Slide Number Placeholder 0"/>
-          <p:cNvSpPr>
-            <a:spLocks noGrp="1"/>
-          </p:cNvSpPr>
-          <p:nvPr>
-            <p:ph type="sldNum" sz="quarter" idx="4294967295"/>
-          </p:nvPr>
-        </p:nvSpPr>
-        <p:spPr>
-          <a:xfrm>
-            <a:off x="11338560" y="6263640"/>
-            <a:ext cx="457200" cy="274320"/>
-          </a:xfrm>
-          <a:prstGeom prst="rect">
-            <a:avLst/>
-          </a:prstGeom>
-          <a:extLst>
-            <a:ext uri="{C572A759-6A51-4108-AA02-DFA0A04FC94B}">
-              <ma14:wrappingTextBoxFlag xmlns:ma14="http://schemas.microsoft.com/office/mac/drawingml/2011/main" val="0"/>
-            </a:ext>
-          </a:extLst>
-        </p:spPr>
-        <p:txBody>
-          <a:bodyPr/>
-          <a:lstStyle>
-            <a:lvl1pPr>
-              <a:defRPr sz="1000">
-                <a:solidFill>
-                  <a:srgbClr val="6B7E93"/>
-                </a:solidFill>
-              </a:defRPr>
-            </a:lvl1pPr>
-          </a:lstStyle>
-          <a:p>
-            <a:pPr algn="r"/>
-            <a:fld id="{F7021451-1387-4CA6-816F-3879F97B5CBC}" type="slidenum">
-              <a:rPr b="0" lang="en-US"/>
               <a:t>17</a:t>
             </a:fld>
             <a:endParaRPr lang="en-US"/>
@@ -10442,6 +10545,741 @@
                   <a:schemeClr val="tx1"/>
                 </a:solidFill>
               </a:rPr>
+              <a:t>หุ่นหาเส้นที่หลุดไปยังไง</a:t>
+            </a:r>
+            <a:endParaRPr lang="en-US" sz="3200" dirty="0"/>
+          </a:p>
+        </p:txBody>
+      </p:sp>
+      <p:sp>
+        <p:nvSpPr>
+          <p:cNvPr id="3" name="Text 1"/>
+          <p:cNvSpPr txBox="1"/>
+          <p:nvPr/>
+        </p:nvSpPr>
+        <p:spPr>
+          <a:xfrm>
+            <a:off x="548640" y="1234440"/>
+            <a:ext cx="11064240" cy="411480"/>
+          </a:xfrm>
+          <a:prstGeom prst="rect">
+            <a:avLst/>
+          </a:prstGeom>
+          <a:noFill/>
+          <a:ln/>
+        </p:spPr>
+        <p:txBody>
+          <a:bodyPr wrap="square" lIns="0" tIns="0" rIns="0" bIns="0" rtlCol="0" anchor="ctr"/>
+          <a:lstStyle/>
+          <a:p>
+            <a:pPr algn="l" indent="0" marL="0">
+              <a:buNone/>
+            </a:pPr>
+            <a:r>
+              <a:rPr lang="en-US" sz="1400" dirty="0">
+                <a:solidFill>
+                  <a:srgbClr val="4A5568"/>
+                </a:solidFill>
+              </a:rPr>
+              <a:t>เซนเซอร์ไม่เจอเส้นเลย ไม่ได้แปลว่าหลงทาง  ทางโค้งแคบจะเหวี่ยงเส้นออกนอกแถวเซนเซอร์ชั่วครู่เป็นเรื่องปกติ</a:t>
+            </a:r>
+            <a:endParaRPr lang="en-US" sz="1400" dirty="0"/>
+          </a:p>
+        </p:txBody>
+      </p:sp>
+      <p:sp>
+        <p:nvSpPr>
+          <p:cNvPr id="4" name="stage-0"/>
+          <p:cNvSpPr/>
+          <p:nvPr/>
+        </p:nvSpPr>
+        <p:spPr>
+          <a:xfrm>
+            <a:off x="548640" y="1828800"/>
+            <a:ext cx="3444240" cy="2286000"/>
+          </a:xfrm>
+          <a:prstGeom prst="roundRect">
+            <a:avLst>
+              <a:gd name="adj" fmla="val 4000"/>
+            </a:avLst>
+          </a:prstGeom>
+          <a:solidFill>
+            <a:schemeClr val="bg2"/>
+          </a:solidFill>
+          <a:ln w="12700">
+            <a:solidFill>
+              <a:srgbClr val="D9E0E8"/>
+            </a:solidFill>
+            <a:prstDash val="solid"/>
+          </a:ln>
+        </p:spPr>
+      </p:sp>
+      <p:sp>
+        <p:nvSpPr>
+          <p:cNvPr id="5" name="dot-1"/>
+          <p:cNvSpPr/>
+          <p:nvPr/>
+        </p:nvSpPr>
+        <p:spPr>
+          <a:xfrm>
+            <a:off x="804672" y="2057400"/>
+            <a:ext cx="475488" cy="475488"/>
+          </a:xfrm>
+          <a:prstGeom prst="ellipse">
+            <a:avLst/>
+          </a:prstGeom>
+          <a:solidFill>
+            <a:srgbClr val="E8803A"/>
+          </a:solidFill>
+          <a:ln w="12700">
+            <a:solidFill>
+              <a:srgbClr val="E8803A"/>
+            </a:solidFill>
+            <a:prstDash val="solid"/>
+          </a:ln>
+        </p:spPr>
+      </p:sp>
+      <p:sp>
+        <p:nvSpPr>
+          <p:cNvPr id="6" name="Text 4"/>
+          <p:cNvSpPr txBox="1"/>
+          <p:nvPr/>
+        </p:nvSpPr>
+        <p:spPr>
+          <a:xfrm>
+            <a:off x="804672" y="2057400"/>
+            <a:ext cx="475488" cy="475488"/>
+          </a:xfrm>
+          <a:prstGeom prst="rect">
+            <a:avLst/>
+          </a:prstGeom>
+          <a:noFill/>
+          <a:ln/>
+        </p:spPr>
+        <p:txBody>
+          <a:bodyPr wrap="square" lIns="0" tIns="0" rIns="0" bIns="0" rtlCol="0" anchor="ctr"/>
+          <a:lstStyle/>
+          <a:p>
+            <a:pPr algn="ctr" indent="0" marL="0">
+              <a:buNone/>
+            </a:pPr>
+            <a:r>
+              <a:rPr lang="en-US" sz="1500" b="1" dirty="0">
+                <a:solidFill>
+                  <a:srgbClr val="FFFFFF"/>
+                </a:solidFill>
+              </a:rPr>
+              <a:t>1</a:t>
+            </a:r>
+            <a:endParaRPr lang="en-US" sz="1500" dirty="0"/>
+          </a:p>
+        </p:txBody>
+      </p:sp>
+      <p:sp>
+        <p:nvSpPr>
+          <p:cNvPr id="7" name="Text 5"/>
+          <p:cNvSpPr txBox="1"/>
+          <p:nvPr/>
+        </p:nvSpPr>
+        <p:spPr>
+          <a:xfrm>
+            <a:off x="804672" y="2670048"/>
+            <a:ext cx="2932176" cy="365760"/>
+          </a:xfrm>
+          <a:prstGeom prst="rect">
+            <a:avLst/>
+          </a:prstGeom>
+          <a:noFill/>
+          <a:ln/>
+        </p:spPr>
+        <p:txBody>
+          <a:bodyPr wrap="square" lIns="0" tIns="0" rIns="0" bIns="0" rtlCol="0" anchor="t"/>
+          <a:lstStyle/>
+          <a:p>
+            <a:pPr algn="l" indent="0" marL="0">
+              <a:buNone/>
+            </a:pPr>
+            <a:r>
+              <a:rPr lang="en-US" sz="1600" b="1" dirty="0">
+                <a:solidFill>
+                  <a:schemeClr val="tx1"/>
+                </a:solidFill>
+              </a:rPr>
+              <a:t>รอก่อน  150 ms</a:t>
+            </a:r>
+            <a:endParaRPr lang="en-US" sz="1600" dirty="0"/>
+          </a:p>
+        </p:txBody>
+      </p:sp>
+      <p:sp>
+        <p:nvSpPr>
+          <p:cNvPr id="8" name="Text 6"/>
+          <p:cNvSpPr txBox="1"/>
+          <p:nvPr/>
+        </p:nvSpPr>
+        <p:spPr>
+          <a:xfrm>
+            <a:off x="804672" y="3090672"/>
+            <a:ext cx="2932176" cy="914400"/>
+          </a:xfrm>
+          <a:prstGeom prst="rect">
+            <a:avLst/>
+          </a:prstGeom>
+          <a:noFill/>
+          <a:ln/>
+        </p:spPr>
+        <p:txBody>
+          <a:bodyPr wrap="square" lIns="0" tIns="0" rIns="0" bIns="0" rtlCol="0" anchor="t"/>
+          <a:lstStyle/>
+          <a:p>
+            <a:pPr algn="l" indent="0" marL="0">
+              <a:lnSpc>
+                <a:spcPct val="125000"/>
+              </a:lnSpc>
+              <a:buNone/>
+            </a:pPr>
+            <a:r>
+              <a:rPr lang="en-US" sz="1250" dirty="0">
+                <a:solidFill>
+                  <a:srgbClr val="4A5568"/>
+                </a:solidFill>
+              </a:rPr>
+              <a:t>ยังไม่ตัดสินใจอะไรทั้งนั้น เลี้ยวค้างไปทางเดิมต่อ ซึ่งเป็นทิศที่ไล่ตามเส้นอยู่แล้ว ทางโค้งส่วนใหญ่จบก่อนเวลานี้</a:t>
+            </a:r>
+            <a:endParaRPr lang="en-US" sz="1250" dirty="0"/>
+          </a:p>
+        </p:txBody>
+      </p:sp>
+      <p:sp>
+        <p:nvSpPr>
+          <p:cNvPr id="9" name="stage-1"/>
+          <p:cNvSpPr/>
+          <p:nvPr/>
+        </p:nvSpPr>
+        <p:spPr>
+          <a:xfrm>
+            <a:off x="4358640" y="1828800"/>
+            <a:ext cx="3444240" cy="2286000"/>
+          </a:xfrm>
+          <a:prstGeom prst="roundRect">
+            <a:avLst>
+              <a:gd name="adj" fmla="val 4000"/>
+            </a:avLst>
+          </a:prstGeom>
+          <a:solidFill>
+            <a:schemeClr val="bg2"/>
+          </a:solidFill>
+          <a:ln w="12700">
+            <a:solidFill>
+              <a:srgbClr val="D9E0E8"/>
+            </a:solidFill>
+            <a:prstDash val="solid"/>
+          </a:ln>
+        </p:spPr>
+      </p:sp>
+      <p:sp>
+        <p:nvSpPr>
+          <p:cNvPr id="10" name="dot-2"/>
+          <p:cNvSpPr/>
+          <p:nvPr/>
+        </p:nvSpPr>
+        <p:spPr>
+          <a:xfrm>
+            <a:off x="4614672" y="2057400"/>
+            <a:ext cx="475488" cy="475488"/>
+          </a:xfrm>
+          <a:prstGeom prst="ellipse">
+            <a:avLst/>
+          </a:prstGeom>
+          <a:solidFill>
+            <a:srgbClr val="E8803A"/>
+          </a:solidFill>
+          <a:ln w="12700">
+            <a:solidFill>
+              <a:srgbClr val="E8803A"/>
+            </a:solidFill>
+            <a:prstDash val="solid"/>
+          </a:ln>
+        </p:spPr>
+      </p:sp>
+      <p:sp>
+        <p:nvSpPr>
+          <p:cNvPr id="11" name="Text 9"/>
+          <p:cNvSpPr txBox="1"/>
+          <p:nvPr/>
+        </p:nvSpPr>
+        <p:spPr>
+          <a:xfrm>
+            <a:off x="4614672" y="2057400"/>
+            <a:ext cx="475488" cy="475488"/>
+          </a:xfrm>
+          <a:prstGeom prst="rect">
+            <a:avLst/>
+          </a:prstGeom>
+          <a:noFill/>
+          <a:ln/>
+        </p:spPr>
+        <p:txBody>
+          <a:bodyPr wrap="square" lIns="0" tIns="0" rIns="0" bIns="0" rtlCol="0" anchor="ctr"/>
+          <a:lstStyle/>
+          <a:p>
+            <a:pPr algn="ctr" indent="0" marL="0">
+              <a:buNone/>
+            </a:pPr>
+            <a:r>
+              <a:rPr lang="en-US" sz="1500" b="1" dirty="0">
+                <a:solidFill>
+                  <a:srgbClr val="FFFFFF"/>
+                </a:solidFill>
+              </a:rPr>
+              <a:t>2</a:t>
+            </a:r>
+            <a:endParaRPr lang="en-US" sz="1500" dirty="0"/>
+          </a:p>
+        </p:txBody>
+      </p:sp>
+      <p:sp>
+        <p:nvSpPr>
+          <p:cNvPr id="12" name="Text 10"/>
+          <p:cNvSpPr txBox="1"/>
+          <p:nvPr/>
+        </p:nvSpPr>
+        <p:spPr>
+          <a:xfrm>
+            <a:off x="4614672" y="2670048"/>
+            <a:ext cx="2932176" cy="365760"/>
+          </a:xfrm>
+          <a:prstGeom prst="rect">
+            <a:avLst/>
+          </a:prstGeom>
+          <a:noFill/>
+          <a:ln/>
+        </p:spPr>
+        <p:txBody>
+          <a:bodyPr wrap="square" lIns="0" tIns="0" rIns="0" bIns="0" rtlCol="0" anchor="t"/>
+          <a:lstStyle/>
+          <a:p>
+            <a:pPr algn="l" indent="0" marL="0">
+              <a:buNone/>
+            </a:pPr>
+            <a:r>
+              <a:rPr lang="en-US" sz="1600" b="1" dirty="0">
+                <a:solidFill>
+                  <a:schemeClr val="tx1"/>
+                </a:solidFill>
+              </a:rPr>
+              <a:t>ถอยหลัง  400 ms</a:t>
+            </a:r>
+            <a:endParaRPr lang="en-US" sz="1600" dirty="0"/>
+          </a:p>
+        </p:txBody>
+      </p:sp>
+      <p:sp>
+        <p:nvSpPr>
+          <p:cNvPr id="13" name="Text 11"/>
+          <p:cNvSpPr txBox="1"/>
+          <p:nvPr/>
+        </p:nvSpPr>
+        <p:spPr>
+          <a:xfrm>
+            <a:off x="4614672" y="3090672"/>
+            <a:ext cx="2932176" cy="914400"/>
+          </a:xfrm>
+          <a:prstGeom prst="rect">
+            <a:avLst/>
+          </a:prstGeom>
+          <a:noFill/>
+          <a:ln/>
+        </p:spPr>
+        <p:txBody>
+          <a:bodyPr wrap="square" lIns="0" tIns="0" rIns="0" bIns="0" rtlCol="0" anchor="t"/>
+          <a:lstStyle/>
+          <a:p>
+            <a:pPr algn="l" indent="0" marL="0">
+              <a:lnSpc>
+                <a:spcPct val="125000"/>
+              </a:lnSpc>
+              <a:buNone/>
+            </a:pPr>
+            <a:r>
+              <a:rPr lang="en-US" sz="1250" dirty="0">
+                <a:solidFill>
+                  <a:srgbClr val="4A5568"/>
+                </a:solidFill>
+              </a:rPr>
+              <a:t>ถอยเอียงไปทางที่เพิ่งเห็นเส้นครั้งสุดท้าย แก้กรณีเข้าโค้งเร็วเกินจนหลุด</a:t>
+            </a:r>
+            <a:endParaRPr lang="en-US" sz="1250" dirty="0"/>
+          </a:p>
+        </p:txBody>
+      </p:sp>
+      <p:sp>
+        <p:nvSpPr>
+          <p:cNvPr id="14" name="stage-2"/>
+          <p:cNvSpPr/>
+          <p:nvPr/>
+        </p:nvSpPr>
+        <p:spPr>
+          <a:xfrm>
+            <a:off x="8168640" y="1828800"/>
+            <a:ext cx="3444240" cy="2286000"/>
+          </a:xfrm>
+          <a:prstGeom prst="roundRect">
+            <a:avLst>
+              <a:gd name="adj" fmla="val 4000"/>
+            </a:avLst>
+          </a:prstGeom>
+          <a:solidFill>
+            <a:schemeClr val="bg2"/>
+          </a:solidFill>
+          <a:ln w="12700">
+            <a:solidFill>
+              <a:srgbClr val="D9E0E8"/>
+            </a:solidFill>
+            <a:prstDash val="solid"/>
+          </a:ln>
+        </p:spPr>
+      </p:sp>
+      <p:sp>
+        <p:nvSpPr>
+          <p:cNvPr id="15" name="dot-3"/>
+          <p:cNvSpPr/>
+          <p:nvPr/>
+        </p:nvSpPr>
+        <p:spPr>
+          <a:xfrm>
+            <a:off x="8424672" y="2057400"/>
+            <a:ext cx="475488" cy="475488"/>
+          </a:xfrm>
+          <a:prstGeom prst="ellipse">
+            <a:avLst/>
+          </a:prstGeom>
+          <a:solidFill>
+            <a:srgbClr val="E8803A"/>
+          </a:solidFill>
+          <a:ln w="12700">
+            <a:solidFill>
+              <a:srgbClr val="E8803A"/>
+            </a:solidFill>
+            <a:prstDash val="solid"/>
+          </a:ln>
+        </p:spPr>
+      </p:sp>
+      <p:sp>
+        <p:nvSpPr>
+          <p:cNvPr id="16" name="Text 14"/>
+          <p:cNvSpPr txBox="1"/>
+          <p:nvPr/>
+        </p:nvSpPr>
+        <p:spPr>
+          <a:xfrm>
+            <a:off x="8424672" y="2057400"/>
+            <a:ext cx="475488" cy="475488"/>
+          </a:xfrm>
+          <a:prstGeom prst="rect">
+            <a:avLst/>
+          </a:prstGeom>
+          <a:noFill/>
+          <a:ln/>
+        </p:spPr>
+        <p:txBody>
+          <a:bodyPr wrap="square" lIns="0" tIns="0" rIns="0" bIns="0" rtlCol="0" anchor="ctr"/>
+          <a:lstStyle/>
+          <a:p>
+            <a:pPr algn="ctr" indent="0" marL="0">
+              <a:buNone/>
+            </a:pPr>
+            <a:r>
+              <a:rPr lang="en-US" sz="1500" b="1" dirty="0">
+                <a:solidFill>
+                  <a:srgbClr val="FFFFFF"/>
+                </a:solidFill>
+              </a:rPr>
+              <a:t>3</a:t>
+            </a:r>
+            <a:endParaRPr lang="en-US" sz="1500" dirty="0"/>
+          </a:p>
+        </p:txBody>
+      </p:sp>
+      <p:sp>
+        <p:nvSpPr>
+          <p:cNvPr id="17" name="Text 15"/>
+          <p:cNvSpPr txBox="1"/>
+          <p:nvPr/>
+        </p:nvSpPr>
+        <p:spPr>
+          <a:xfrm>
+            <a:off x="8424672" y="2670048"/>
+            <a:ext cx="2932176" cy="365760"/>
+          </a:xfrm>
+          <a:prstGeom prst="rect">
+            <a:avLst/>
+          </a:prstGeom>
+          <a:noFill/>
+          <a:ln/>
+        </p:spPr>
+        <p:txBody>
+          <a:bodyPr wrap="square" lIns="0" tIns="0" rIns="0" bIns="0" rtlCol="0" anchor="t"/>
+          <a:lstStyle/>
+          <a:p>
+            <a:pPr algn="l" indent="0" marL="0">
+              <a:buNone/>
+            </a:pPr>
+            <a:r>
+              <a:rPr lang="en-US" sz="1600" b="1" dirty="0">
+                <a:solidFill>
+                  <a:schemeClr val="tx1"/>
+                </a:solidFill>
+              </a:rPr>
+              <a:t>กวาดหา  ถึง 6 วินาที</a:t>
+            </a:r>
+            <a:endParaRPr lang="en-US" sz="1600" dirty="0"/>
+          </a:p>
+        </p:txBody>
+      </p:sp>
+      <p:sp>
+        <p:nvSpPr>
+          <p:cNvPr id="18" name="Text 16"/>
+          <p:cNvSpPr txBox="1"/>
+          <p:nvPr/>
+        </p:nvSpPr>
+        <p:spPr>
+          <a:xfrm>
+            <a:off x="8424672" y="3090672"/>
+            <a:ext cx="2932176" cy="914400"/>
+          </a:xfrm>
+          <a:prstGeom prst="rect">
+            <a:avLst/>
+          </a:prstGeom>
+          <a:noFill/>
+          <a:ln/>
+        </p:spPr>
+        <p:txBody>
+          <a:bodyPr wrap="square" lIns="0" tIns="0" rIns="0" bIns="0" rtlCol="0" anchor="t"/>
+          <a:lstStyle/>
+          <a:p>
+            <a:pPr algn="l" indent="0" marL="0">
+              <a:lnSpc>
+                <a:spcPct val="125000"/>
+              </a:lnSpc>
+              <a:buNone/>
+            </a:pPr>
+            <a:r>
+              <a:rPr lang="en-US" sz="1250" dirty="0">
+                <a:solidFill>
+                  <a:srgbClr val="4A5568"/>
+                </a:solidFill>
+              </a:rPr>
+              <a:t>หมุนอยู่กับที่ด้วยความเร็ว 55% สลับซ้ายขวา แต่ละรอบกว้างขึ้นเรื่อยๆ ครบ 6 วินาทีแล้วไม่เจอถึงจะยอมแพ้</a:t>
+            </a:r>
+            <a:endParaRPr lang="en-US" sz="1250" dirty="0"/>
+          </a:p>
+        </p:txBody>
+      </p:sp>
+      <p:sp>
+        <p:nvSpPr>
+          <p:cNvPr id="19" name="callout"/>
+          <p:cNvSpPr/>
+          <p:nvPr/>
+        </p:nvSpPr>
+        <p:spPr>
+          <a:xfrm>
+            <a:off x="548640" y="4343400"/>
+            <a:ext cx="11064240" cy="1234440"/>
+          </a:xfrm>
+          <a:prstGeom prst="roundRect">
+            <a:avLst>
+              <a:gd name="adj" fmla="val 5926"/>
+            </a:avLst>
+          </a:prstGeom>
+          <a:solidFill>
+            <a:srgbClr val="E8F1F5"/>
+          </a:solidFill>
+          <a:ln w="12700">
+            <a:solidFill>
+              <a:srgbClr val="CBE0E9"/>
+            </a:solidFill>
+            <a:prstDash val="solid"/>
+          </a:ln>
+        </p:spPr>
+      </p:sp>
+      <p:sp>
+        <p:nvSpPr>
+          <p:cNvPr id="20" name="Text 18"/>
+          <p:cNvSpPr txBox="1"/>
+          <p:nvPr/>
+        </p:nvSpPr>
+        <p:spPr>
+          <a:xfrm>
+            <a:off x="777240" y="4471416"/>
+            <a:ext cx="10607040" cy="274320"/>
+          </a:xfrm>
+          <a:prstGeom prst="rect">
+            <a:avLst/>
+          </a:prstGeom>
+          <a:noFill/>
+          <a:ln/>
+        </p:spPr>
+        <p:txBody>
+          <a:bodyPr wrap="square" lIns="0" tIns="0" rIns="0" bIns="0" rtlCol="0" anchor="t"/>
+          <a:lstStyle/>
+          <a:p>
+            <a:pPr algn="l" indent="0" marL="0">
+              <a:buNone/>
+            </a:pPr>
+            <a:r>
+              <a:rPr lang="en-US" sz="1400" b="1" dirty="0">
+                <a:solidFill>
+                  <a:srgbClr val="1C7293"/>
+                </a:solidFill>
+              </a:rPr>
+              <a:t>ขาวหมดกับดำหมด คนละความหมายกันคนละขั้ว</a:t>
+            </a:r>
+            <a:endParaRPr lang="en-US" sz="1400" dirty="0"/>
+          </a:p>
+        </p:txBody>
+      </p:sp>
+      <p:sp>
+        <p:nvSpPr>
+          <p:cNvPr id="21" name="Text 19"/>
+          <p:cNvSpPr txBox="1"/>
+          <p:nvPr/>
+        </p:nvSpPr>
+        <p:spPr>
+          <a:xfrm>
+            <a:off x="777240" y="4782312"/>
+            <a:ext cx="10607040" cy="667512"/>
+          </a:xfrm>
+          <a:prstGeom prst="rect">
+            <a:avLst/>
+          </a:prstGeom>
+          <a:noFill/>
+          <a:ln/>
+        </p:spPr>
+        <p:txBody>
+          <a:bodyPr wrap="square" lIns="0" tIns="0" rIns="0" bIns="0" rtlCol="0" anchor="t"/>
+          <a:lstStyle/>
+          <a:p>
+            <a:pPr algn="l" indent="0" marL="0">
+              <a:lnSpc>
+                <a:spcPct val="120000"/>
+              </a:lnSpc>
+              <a:buNone/>
+            </a:pPr>
+            <a:r>
+              <a:rPr lang="en-US" sz="1250" dirty="0">
+                <a:solidFill>
+                  <a:srgbClr val="4A5568"/>
+                </a:solidFill>
+              </a:rPr>
+              <a:t>ไม่เจอเส้นเลยแปลว่าเส้นอยู่นอกแถวเซนเซอร์ หุ่นต้องดันตัวเองไปหาจนกว่าจะมีดวงใดดวงหนึ่งเจอ  ส่วนที่สั่งให้หยุดคือตรงข้ามกันพอดี คือดำครบทั้ง 5 ดวง ซึ่งแปลว่าถึงเส้นชัยแล้ว</a:t>
+            </a:r>
+            <a:endParaRPr lang="en-US" sz="1250" dirty="0"/>
+          </a:p>
+        </p:txBody>
+      </p:sp>
+      <p:sp>
+        <p:nvSpPr>
+          <p:cNvPr id="25" name="Slide Number Placeholder 0"/>
+          <p:cNvSpPr>
+            <a:spLocks noGrp="1"/>
+          </p:cNvSpPr>
+          <p:nvPr>
+            <p:ph type="sldNum" sz="quarter" idx="4294967295"/>
+          </p:nvPr>
+        </p:nvSpPr>
+        <p:spPr>
+          <a:xfrm>
+            <a:off x="11338560" y="6263640"/>
+            <a:ext cx="457200" cy="274320"/>
+          </a:xfrm>
+          <a:prstGeom prst="rect">
+            <a:avLst/>
+          </a:prstGeom>
+          <a:extLst>
+            <a:ext uri="{C572A759-6A51-4108-AA02-DFA0A04FC94B}">
+              <ma14:wrappingTextBoxFlag xmlns:ma14="http://schemas.microsoft.com/office/mac/drawingml/2011/main" val="0"/>
+            </a:ext>
+          </a:extLst>
+        </p:spPr>
+        <p:txBody>
+          <a:bodyPr/>
+          <a:lstStyle>
+            <a:lvl1pPr>
+              <a:defRPr sz="1000">
+                <a:solidFill>
+                  <a:srgbClr val="6B7E93"/>
+                </a:solidFill>
+              </a:defRPr>
+            </a:lvl1pPr>
+          </a:lstStyle>
+          <a:p>
+            <a:pPr algn="r"/>
+            <a:fld id="{F7021451-1387-4CA6-816F-3879F97B5CBC}" type="slidenum">
+              <a:rPr b="0" lang="en-US"/>
+              <a:t>18</a:t>
+            </a:fld>
+            <a:endParaRPr lang="en-US"/>
+          </a:p>
+        </p:txBody>
+      </p:sp>
+    </p:spTree>
+  </p:cSld>
+  <p:clrMapOvr>
+    <a:masterClrMapping/>
+  </p:clrMapOvr>
+</p:sld>
+</file>
+
+<file path=ppt/slides/slide19.xml><?xml version="1.0" encoding="utf-8"?>
+<p:sld xmlns:a="http://schemas.openxmlformats.org/drawingml/2006/main" xmlns:r="http://schemas.openxmlformats.org/officeDocument/2006/relationships" xmlns:p="http://schemas.openxmlformats.org/presentationml/2006/main">
+  <p:cSld name="Slide 19">
+    <p:spTree>
+      <p:nvGrpSpPr>
+        <p:cNvPr id="1" name=""/>
+        <p:cNvGrpSpPr/>
+        <p:nvPr/>
+      </p:nvGrpSpPr>
+      <p:grpSpPr>
+        <a:xfrm>
+          <a:off x="0" y="0"/>
+          <a:ext cx="0" cy="0"/>
+          <a:chOff x="0" y="0"/>
+          <a:chExt cx="0" cy="0"/>
+        </a:xfrm>
+      </p:grpSpPr>
+      <p:sp>
+        <p:nvSpPr>
+          <p:cNvPr id="2" name="Text 0"/>
+          <p:cNvSpPr/>
+          <p:nvPr>
+            <p:ph idx="100" type="title" hasCustomPrompt="1"/>
+          </p:nvPr>
+        </p:nvSpPr>
+        <p:spPr>
+          <a:xfrm>
+            <a:off x="548640" y="384048"/>
+            <a:ext cx="11064240" cy="685800"/>
+          </a:xfrm>
+          <a:prstGeom prst="rect">
+            <a:avLst/>
+          </a:prstGeom>
+          <a:noFill/>
+          <a:ln/>
+        </p:spPr>
+        <p:txBody>
+          <a:bodyPr wrap="square" rtlCol="0"/>
+          <a:lstStyle/>
+          <a:p>
+            <a:pPr algn="l" indent="0" marL="0">
+              <a:buNone/>
+            </a:pPr>
+            <a:r>
+              <a:rPr lang="en-US" sz="3200" b="1" dirty="0">
+                <a:solidFill>
+                  <a:schemeClr val="tx1"/>
+                </a:solidFill>
+              </a:rPr>
               <a:t>อาการที่เจอบ่อยและวิธีแก้</a:t>
             </a:r>
             <a:endParaRPr lang="en-US" sz="3200" dirty="0"/>
@@ -10450,7 +11288,7 @@
       </p:sp>
       <p:graphicFrame>
         <p:nvGraphicFramePr>
-          <p:cNvPr id="19" name="Table 0"/>
+          <p:cNvPr id="20" name="Table 0"/>
           <p:cNvGraphicFramePr>
             <a:graphicFrameLocks noGrp="1"/>
           </p:cNvGraphicFramePr>
@@ -10921,7 +11759,7 @@
                             <a:srgbClr val="4A5568"/>
                           </a:solidFill>
                         </a:rPr>
-                        <a:t>เลือกพอร์ตผิด หรือ Serial Monitor จองพอร์ตไว้</a:t>
+                        <a:t>เลือกบอร์ดผิดชุด หรือยังไม่ได้ลง STM32CubeProgrammer</a:t>
                       </a:r>
                       <a:endParaRPr lang="en-US" sz="1250" dirty="0"/>
                     </a:p>
@@ -10982,7 +11820,192 @@
                             <a:srgbClr val="4A5568"/>
                           </a:solidFill>
                         </a:rPr>
-                        <a:t>เลือกพอร์ตของ CH340 และปิด Serial Monitor ให้หมดก่อน</a:t>
+                        <a:t>เลือก Generic STM32F1 series และ Upload method เป็น SWD</a:t>
+                      </a:r>
+                      <a:endParaRPr lang="en-US" sz="1250" dirty="0"/>
+                    </a:p>
+                  </a:txBody>
+                  <a:tcPr marL="82296" marR="82296" marT="82296" marB="82296" anchor="ctr">
+                    <a:lnL w="12700" cap="flat" cmpd="sng" algn="ctr">
+                      <a:solidFill>
+                        <a:srgbClr val="D9E0E8"/>
+                      </a:solidFill>
+                      <a:prstDash val="solid"/>
+                      <a:round/>
+                      <a:headEnd type="none" w="med" len="med"/>
+                      <a:tailEnd type="none" w="med" len="med"/>
+                    </a:lnL>
+                    <a:lnR w="12700" cap="flat" cmpd="sng" algn="ctr">
+                      <a:solidFill>
+                        <a:srgbClr val="D9E0E8"/>
+                      </a:solidFill>
+                      <a:prstDash val="solid"/>
+                      <a:round/>
+                      <a:headEnd type="none" w="med" len="med"/>
+                      <a:tailEnd type="none" w="med" len="med"/>
+                    </a:lnR>
+                    <a:lnT w="12700" cap="flat" cmpd="sng" algn="ctr">
+                      <a:solidFill>
+                        <a:srgbClr val="D9E0E8"/>
+                      </a:solidFill>
+                      <a:prstDash val="solid"/>
+                      <a:round/>
+                      <a:headEnd type="none" w="med" len="med"/>
+                      <a:tailEnd type="none" w="med" len="med"/>
+                    </a:lnT>
+                    <a:lnB w="12700" cap="flat" cmpd="sng" algn="ctr">
+                      <a:solidFill>
+                        <a:srgbClr val="D9E0E8"/>
+                      </a:solidFill>
+                      <a:prstDash val="solid"/>
+                      <a:round/>
+                      <a:headEnd type="none" w="med" len="med"/>
+                      <a:tailEnd type="none" w="med" len="med"/>
+                    </a:lnB>
+                    <a:solidFill>
+                      <a:srgbClr val="FFFFFF"/>
+                    </a:solidFill>
+                  </a:tcPr>
+                </a:tc>
+              </a:tr>
+              <a:tr h="0">
+                <a:tc>
+                  <a:txBody>
+                    <a:bodyPr/>
+                    <a:lstStyle/>
+                    <a:p>
+                      <a:pPr indent="0" marL="0">
+                        <a:buNone/>
+                      </a:pPr>
+                      <a:r>
+                        <a:rPr lang="en-US" sz="1250" b="1" dirty="0">
+                          <a:solidFill>
+                            <a:srgbClr val="16202E"/>
+                          </a:solidFill>
+                        </a:rPr>
+                        <a:t>undefined reference to 'Serial2'</a:t>
+                      </a:r>
+                      <a:endParaRPr lang="en-US" sz="1250" dirty="0"/>
+                    </a:p>
+                  </a:txBody>
+                  <a:tcPr marL="82296" marR="82296" marT="82296" marB="82296" anchor="ctr">
+                    <a:lnL w="12700" cap="flat" cmpd="sng" algn="ctr">
+                      <a:solidFill>
+                        <a:srgbClr val="D9E0E8"/>
+                      </a:solidFill>
+                      <a:prstDash val="solid"/>
+                      <a:round/>
+                      <a:headEnd type="none" w="med" len="med"/>
+                      <a:tailEnd type="none" w="med" len="med"/>
+                    </a:lnL>
+                    <a:lnR w="12700" cap="flat" cmpd="sng" algn="ctr">
+                      <a:solidFill>
+                        <a:srgbClr val="D9E0E8"/>
+                      </a:solidFill>
+                      <a:prstDash val="solid"/>
+                      <a:round/>
+                      <a:headEnd type="none" w="med" len="med"/>
+                      <a:tailEnd type="none" w="med" len="med"/>
+                    </a:lnR>
+                    <a:lnT w="12700" cap="flat" cmpd="sng" algn="ctr">
+                      <a:solidFill>
+                        <a:srgbClr val="D9E0E8"/>
+                      </a:solidFill>
+                      <a:prstDash val="solid"/>
+                      <a:round/>
+                      <a:headEnd type="none" w="med" len="med"/>
+                      <a:tailEnd type="none" w="med" len="med"/>
+                    </a:lnT>
+                    <a:lnB w="12700" cap="flat" cmpd="sng" algn="ctr">
+                      <a:solidFill>
+                        <a:srgbClr val="D9E0E8"/>
+                      </a:solidFill>
+                      <a:prstDash val="solid"/>
+                      <a:round/>
+                      <a:headEnd type="none" w="med" len="med"/>
+                      <a:tailEnd type="none" w="med" len="med"/>
+                    </a:lnB>
+                    <a:solidFill>
+                      <a:srgbClr val="FFFFFF"/>
+                    </a:solidFill>
+                  </a:tcPr>
+                </a:tc>
+                <a:tc>
+                  <a:txBody>
+                    <a:bodyPr/>
+                    <a:lstStyle/>
+                    <a:p>
+                      <a:pPr indent="0" marL="0">
+                        <a:buNone/>
+                      </a:pPr>
+                      <a:r>
+                        <a:rPr lang="en-US" sz="1250" dirty="0">
+                          <a:solidFill>
+                            <a:srgbClr val="4A5568"/>
+                          </a:solidFill>
+                        </a:rPr>
+                        <a:t>คอร์ทางการไม่ได้สร้าง Serial2 Serial3 ให้เอง</a:t>
+                      </a:r>
+                      <a:endParaRPr lang="en-US" sz="1250" dirty="0"/>
+                    </a:p>
+                  </a:txBody>
+                  <a:tcPr marL="82296" marR="82296" marT="82296" marB="82296" anchor="ctr">
+                    <a:lnL w="12700" cap="flat" cmpd="sng" algn="ctr">
+                      <a:solidFill>
+                        <a:srgbClr val="D9E0E8"/>
+                      </a:solidFill>
+                      <a:prstDash val="solid"/>
+                      <a:round/>
+                      <a:headEnd type="none" w="med" len="med"/>
+                      <a:tailEnd type="none" w="med" len="med"/>
+                    </a:lnL>
+                    <a:lnR w="12700" cap="flat" cmpd="sng" algn="ctr">
+                      <a:solidFill>
+                        <a:srgbClr val="D9E0E8"/>
+                      </a:solidFill>
+                      <a:prstDash val="solid"/>
+                      <a:round/>
+                      <a:headEnd type="none" w="med" len="med"/>
+                      <a:tailEnd type="none" w="med" len="med"/>
+                    </a:lnR>
+                    <a:lnT w="12700" cap="flat" cmpd="sng" algn="ctr">
+                      <a:solidFill>
+                        <a:srgbClr val="D9E0E8"/>
+                      </a:solidFill>
+                      <a:prstDash val="solid"/>
+                      <a:round/>
+                      <a:headEnd type="none" w="med" len="med"/>
+                      <a:tailEnd type="none" w="med" len="med"/>
+                    </a:lnT>
+                    <a:lnB w="12700" cap="flat" cmpd="sng" algn="ctr">
+                      <a:solidFill>
+                        <a:srgbClr val="D9E0E8"/>
+                      </a:solidFill>
+                      <a:prstDash val="solid"/>
+                      <a:round/>
+                      <a:headEnd type="none" w="med" len="med"/>
+                      <a:tailEnd type="none" w="med" len="med"/>
+                    </a:lnB>
+                    <a:solidFill>
+                      <a:srgbClr val="FFFFFF"/>
+                    </a:solidFill>
+                  </a:tcPr>
+                </a:tc>
+                <a:tc>
+                  <a:txBody>
+                    <a:bodyPr/>
+                    <a:lstStyle/>
+                    <a:p>
+                      <a:pPr indent="0" marL="0">
+                        <a:buNone/>
+                      </a:pPr>
+                      <a:r>
+                        <a:rPr lang="en-US" sz="1250" dirty="0">
+                          <a:solidFill>
+                            <a:srgbClr val="4A5568"/>
+                          </a:solidFill>
+                        </a:rPr>
+                        <a:t>สเก็ตช์สร้างไว้ให้แล้วตรงหัวไฟล์ อย่าลบสองบรรทัดนั้นทิ้ง</a:t>
                       </a:r>
                       <a:endParaRPr lang="en-US" sz="1250" dirty="0"/>
                     </a:p>
@@ -12368,744 +13391,6 @@
             <a:pPr algn="r"/>
             <a:fld id="{F7021451-1387-4CA6-816F-3879F97B5CBC}" type="slidenum">
               <a:rPr b="0" lang="en-US"/>
-              <a:t>18</a:t>
-            </a:fld>
-            <a:endParaRPr lang="en-US"/>
-          </a:p>
-        </p:txBody>
-      </p:sp>
-    </p:spTree>
-  </p:cSld>
-  <p:clrMapOvr>
-    <a:masterClrMapping/>
-  </p:clrMapOvr>
-</p:sld>
-</file>
-
-<file path=ppt/slides/slide19.xml><?xml version="1.0" encoding="utf-8"?>
-<p:sld xmlns:a="http://schemas.openxmlformats.org/drawingml/2006/main" xmlns:r="http://schemas.openxmlformats.org/officeDocument/2006/relationships" xmlns:p="http://schemas.openxmlformats.org/presentationml/2006/main">
-  <p:cSld name="Slide 19">
-    <p:spTree>
-      <p:nvGrpSpPr>
-        <p:cNvPr id="1" name=""/>
-        <p:cNvGrpSpPr/>
-        <p:nvPr/>
-      </p:nvGrpSpPr>
-      <p:grpSpPr>
-        <a:xfrm>
-          <a:off x="0" y="0"/>
-          <a:ext cx="0" cy="0"/>
-          <a:chOff x="0" y="0"/>
-          <a:chExt cx="0" cy="0"/>
-        </a:xfrm>
-      </p:grpSpPr>
-      <p:sp>
-        <p:nvSpPr>
-          <p:cNvPr id="2" name="Text 0"/>
-          <p:cNvSpPr/>
-          <p:nvPr>
-            <p:ph idx="100" type="title" hasCustomPrompt="1"/>
-          </p:nvPr>
-        </p:nvSpPr>
-        <p:spPr>
-          <a:xfrm>
-            <a:off x="548640" y="384048"/>
-            <a:ext cx="11064240" cy="685800"/>
-          </a:xfrm>
-          <a:prstGeom prst="rect">
-            <a:avLst/>
-          </a:prstGeom>
-          <a:noFill/>
-          <a:ln/>
-        </p:spPr>
-        <p:txBody>
-          <a:bodyPr wrap="square" rtlCol="0"/>
-          <a:lstStyle/>
-          <a:p>
-            <a:pPr algn="l" indent="0" marL="0">
-              <a:buNone/>
-            </a:pPr>
-            <a:r>
-              <a:rPr lang="en-US" sz="3200" b="1" dirty="0">
-                <a:solidFill>
-                  <a:schemeClr val="tx1"/>
-                </a:solidFill>
-              </a:rPr>
-              <a:t>เช็กลิสต์ก่อนวิ่งจริง</a:t>
-            </a:r>
-            <a:endParaRPr lang="en-US" sz="3200" dirty="0"/>
-          </a:p>
-        </p:txBody>
-      </p:sp>
-      <p:sp>
-        <p:nvSpPr>
-          <p:cNvPr id="3" name="check-0"/>
-          <p:cNvSpPr/>
-          <p:nvPr/>
-        </p:nvSpPr>
-        <p:spPr>
-          <a:xfrm>
-            <a:off x="548640" y="1600200"/>
-            <a:ext cx="310896" cy="310896"/>
-          </a:xfrm>
-          <a:prstGeom prst="roundRect">
-            <a:avLst>
-              <a:gd name="adj" fmla="val 17647"/>
-            </a:avLst>
-          </a:prstGeom>
-          <a:solidFill>
-            <a:srgbClr val="FFFFFF"/>
-          </a:solidFill>
-          <a:ln w="19050">
-            <a:solidFill>
-              <a:srgbClr val="2F7A4F"/>
-            </a:solidFill>
-            <a:prstDash val="solid"/>
-          </a:ln>
-        </p:spPr>
-      </p:sp>
-      <p:sp>
-        <p:nvSpPr>
-          <p:cNvPr id="4" name="Text 2"/>
-          <p:cNvSpPr txBox="1"/>
-          <p:nvPr/>
-        </p:nvSpPr>
-        <p:spPr>
-          <a:xfrm>
-            <a:off x="1051560" y="1563624"/>
-            <a:ext cx="4709160" cy="685800"/>
-          </a:xfrm>
-          <a:prstGeom prst="rect">
-            <a:avLst/>
-          </a:prstGeom>
-          <a:noFill/>
-          <a:ln/>
-        </p:spPr>
-        <p:txBody>
-          <a:bodyPr wrap="square" lIns="0" tIns="0" rIns="0" bIns="0" rtlCol="0" anchor="t"/>
-          <a:lstStyle/>
-          <a:p>
-            <a:pPr algn="l" indent="0" marL="0">
-              <a:lnSpc>
-                <a:spcPct val="120000"/>
-              </a:lnSpc>
-              <a:buNone/>
-            </a:pPr>
-            <a:r>
-              <a:rPr lang="en-US" sz="1350" dirty="0">
-                <a:solidFill>
-                  <a:schemeClr val="tx1"/>
-                </a:solidFill>
-              </a:rPr>
-              <a:t>แบตเตอรี่เต็ม และจ่ายไฟมอเตอร์แยกจากบอร์ด</a:t>
-            </a:r>
-            <a:endParaRPr lang="en-US" sz="1350" dirty="0"/>
-          </a:p>
-        </p:txBody>
-      </p:sp>
-      <p:sp>
-        <p:nvSpPr>
-          <p:cNvPr id="5" name="check-1"/>
-          <p:cNvSpPr/>
-          <p:nvPr/>
-        </p:nvSpPr>
-        <p:spPr>
-          <a:xfrm>
-            <a:off x="6400800" y="1600200"/>
-            <a:ext cx="310896" cy="310896"/>
-          </a:xfrm>
-          <a:prstGeom prst="roundRect">
-            <a:avLst>
-              <a:gd name="adj" fmla="val 17647"/>
-            </a:avLst>
-          </a:prstGeom>
-          <a:solidFill>
-            <a:srgbClr val="FFFFFF"/>
-          </a:solidFill>
-          <a:ln w="19050">
-            <a:solidFill>
-              <a:srgbClr val="2F7A4F"/>
-            </a:solidFill>
-            <a:prstDash val="solid"/>
-          </a:ln>
-        </p:spPr>
-      </p:sp>
-      <p:sp>
-        <p:nvSpPr>
-          <p:cNvPr id="6" name="Text 4"/>
-          <p:cNvSpPr txBox="1"/>
-          <p:nvPr/>
-        </p:nvSpPr>
-        <p:spPr>
-          <a:xfrm>
-            <a:off x="6903720" y="1563624"/>
-            <a:ext cx="4709160" cy="685800"/>
-          </a:xfrm>
-          <a:prstGeom prst="rect">
-            <a:avLst/>
-          </a:prstGeom>
-          <a:noFill/>
-          <a:ln/>
-        </p:spPr>
-        <p:txBody>
-          <a:bodyPr wrap="square" lIns="0" tIns="0" rIns="0" bIns="0" rtlCol="0" anchor="t"/>
-          <a:lstStyle/>
-          <a:p>
-            <a:pPr algn="l" indent="0" marL="0">
-              <a:lnSpc>
-                <a:spcPct val="120000"/>
-              </a:lnSpc>
-              <a:buNone/>
-            </a:pPr>
-            <a:r>
-              <a:rPr lang="en-US" sz="1350" dirty="0">
-                <a:solidFill>
-                  <a:schemeClr val="tx1"/>
-                </a:solidFill>
-              </a:rPr>
-              <a:t>สายจอ OLED ทั้งสี่เส้นบัดกรีแน่น ไม่ใช่แค่เสียบ</a:t>
-            </a:r>
-            <a:endParaRPr lang="en-US" sz="1350" dirty="0"/>
-          </a:p>
-        </p:txBody>
-      </p:sp>
-      <p:sp>
-        <p:nvSpPr>
-          <p:cNvPr id="7" name="check-2"/>
-          <p:cNvSpPr/>
-          <p:nvPr/>
-        </p:nvSpPr>
-        <p:spPr>
-          <a:xfrm>
-            <a:off x="548640" y="2560320"/>
-            <a:ext cx="310896" cy="310896"/>
-          </a:xfrm>
-          <a:prstGeom prst="roundRect">
-            <a:avLst>
-              <a:gd name="adj" fmla="val 17647"/>
-            </a:avLst>
-          </a:prstGeom>
-          <a:solidFill>
-            <a:srgbClr val="FFFFFF"/>
-          </a:solidFill>
-          <a:ln w="19050">
-            <a:solidFill>
-              <a:srgbClr val="2F7A4F"/>
-            </a:solidFill>
-            <a:prstDash val="solid"/>
-          </a:ln>
-        </p:spPr>
-      </p:sp>
-      <p:sp>
-        <p:nvSpPr>
-          <p:cNvPr id="8" name="Text 6"/>
-          <p:cNvSpPr txBox="1"/>
-          <p:nvPr/>
-        </p:nvSpPr>
-        <p:spPr>
-          <a:xfrm>
-            <a:off x="1051560" y="2523744"/>
-            <a:ext cx="4709160" cy="685800"/>
-          </a:xfrm>
-          <a:prstGeom prst="rect">
-            <a:avLst/>
-          </a:prstGeom>
-          <a:noFill/>
-          <a:ln/>
-        </p:spPr>
-        <p:txBody>
-          <a:bodyPr wrap="square" lIns="0" tIns="0" rIns="0" bIns="0" rtlCol="0" anchor="t"/>
-          <a:lstStyle/>
-          <a:p>
-            <a:pPr algn="l" indent="0" marL="0">
-              <a:lnSpc>
-                <a:spcPct val="120000"/>
-              </a:lnSpc>
-              <a:buNone/>
-            </a:pPr>
-            <a:r>
-              <a:rPr lang="en-US" sz="1350" dirty="0">
-                <a:solidFill>
-                  <a:schemeClr val="tx1"/>
-                </a:solidFill>
-              </a:rPr>
-              <a:t>สายสื่อสารไขว้ถูกคู่ และต่อ GND ร่วมกันครบ</a:t>
-            </a:r>
-            <a:endParaRPr lang="en-US" sz="1350" dirty="0"/>
-          </a:p>
-        </p:txBody>
-      </p:sp>
-      <p:sp>
-        <p:nvSpPr>
-          <p:cNvPr id="9" name="check-3"/>
-          <p:cNvSpPr/>
-          <p:nvPr/>
-        </p:nvSpPr>
-        <p:spPr>
-          <a:xfrm>
-            <a:off x="6400800" y="2560320"/>
-            <a:ext cx="310896" cy="310896"/>
-          </a:xfrm>
-          <a:prstGeom prst="roundRect">
-            <a:avLst>
-              <a:gd name="adj" fmla="val 17647"/>
-            </a:avLst>
-          </a:prstGeom>
-          <a:solidFill>
-            <a:srgbClr val="FFFFFF"/>
-          </a:solidFill>
-          <a:ln w="19050">
-            <a:solidFill>
-              <a:srgbClr val="2F7A4F"/>
-            </a:solidFill>
-            <a:prstDash val="solid"/>
-          </a:ln>
-        </p:spPr>
-      </p:sp>
-      <p:sp>
-        <p:nvSpPr>
-          <p:cNvPr id="10" name="Text 8"/>
-          <p:cNvSpPr txBox="1"/>
-          <p:nvPr/>
-        </p:nvSpPr>
-        <p:spPr>
-          <a:xfrm>
-            <a:off x="6903720" y="2523744"/>
-            <a:ext cx="4709160" cy="685800"/>
-          </a:xfrm>
-          <a:prstGeom prst="rect">
-            <a:avLst/>
-          </a:prstGeom>
-          <a:noFill/>
-          <a:ln/>
-        </p:spPr>
-        <p:txBody>
-          <a:bodyPr wrap="square" lIns="0" tIns="0" rIns="0" bIns="0" rtlCol="0" anchor="t"/>
-          <a:lstStyle/>
-          <a:p>
-            <a:pPr algn="l" indent="0" marL="0">
-              <a:lnSpc>
-                <a:spcPct val="120000"/>
-              </a:lnSpc>
-              <a:buNone/>
-            </a:pPr>
-            <a:r>
-              <a:rPr lang="en-US" sz="1350" dirty="0">
-                <a:solidFill>
-                  <a:schemeClr val="tx1"/>
-                </a:solidFill>
-              </a:rPr>
-              <a:t>เปิด Serial Monitor เช็กว่าวันเวลาคอมไพล์ตรงกับที่เพิ่งอัป</a:t>
-            </a:r>
-            <a:endParaRPr lang="en-US" sz="1350" dirty="0"/>
-          </a:p>
-        </p:txBody>
-      </p:sp>
-      <p:sp>
-        <p:nvSpPr>
-          <p:cNvPr id="11" name="check-4"/>
-          <p:cNvSpPr/>
-          <p:nvPr/>
-        </p:nvSpPr>
-        <p:spPr>
-          <a:xfrm>
-            <a:off x="548640" y="3520440"/>
-            <a:ext cx="310896" cy="310896"/>
-          </a:xfrm>
-          <a:prstGeom prst="roundRect">
-            <a:avLst>
-              <a:gd name="adj" fmla="val 17647"/>
-            </a:avLst>
-          </a:prstGeom>
-          <a:solidFill>
-            <a:srgbClr val="FFFFFF"/>
-          </a:solidFill>
-          <a:ln w="19050">
-            <a:solidFill>
-              <a:srgbClr val="2F7A4F"/>
-            </a:solidFill>
-            <a:prstDash val="solid"/>
-          </a:ln>
-        </p:spPr>
-      </p:sp>
-      <p:sp>
-        <p:nvSpPr>
-          <p:cNvPr id="12" name="Text 10"/>
-          <p:cNvSpPr txBox="1"/>
-          <p:nvPr/>
-        </p:nvSpPr>
-        <p:spPr>
-          <a:xfrm>
-            <a:off x="1051560" y="3483864"/>
-            <a:ext cx="4709160" cy="685800"/>
-          </a:xfrm>
-          <a:prstGeom prst="rect">
-            <a:avLst/>
-          </a:prstGeom>
-          <a:noFill/>
-          <a:ln/>
-        </p:spPr>
-        <p:txBody>
-          <a:bodyPr wrap="square" lIns="0" tIns="0" rIns="0" bIns="0" rtlCol="0" anchor="t"/>
-          <a:lstStyle/>
-          <a:p>
-            <a:pPr algn="l" indent="0" marL="0">
-              <a:lnSpc>
-                <a:spcPct val="120000"/>
-              </a:lnSpc>
-              <a:buNone/>
-            </a:pPr>
-            <a:r>
-              <a:rPr lang="en-US" sz="1350" dirty="0">
-                <a:solidFill>
-                  <a:schemeClr val="tx1"/>
-                </a:solidFill>
-              </a:rPr>
-              <a:t>วางหุ่นบนเส้นแล้วอ่านค่าได้ 0 0 1 0 0</a:t>
-            </a:r>
-            <a:endParaRPr lang="en-US" sz="1350" dirty="0"/>
-          </a:p>
-        </p:txBody>
-      </p:sp>
-      <p:sp>
-        <p:nvSpPr>
-          <p:cNvPr id="13" name="check-5"/>
-          <p:cNvSpPr/>
-          <p:nvPr/>
-        </p:nvSpPr>
-        <p:spPr>
-          <a:xfrm>
-            <a:off x="6400800" y="3520440"/>
-            <a:ext cx="310896" cy="310896"/>
-          </a:xfrm>
-          <a:prstGeom prst="roundRect">
-            <a:avLst>
-              <a:gd name="adj" fmla="val 17647"/>
-            </a:avLst>
-          </a:prstGeom>
-          <a:solidFill>
-            <a:srgbClr val="FFFFFF"/>
-          </a:solidFill>
-          <a:ln w="19050">
-            <a:solidFill>
-              <a:srgbClr val="2F7A4F"/>
-            </a:solidFill>
-            <a:prstDash val="solid"/>
-          </a:ln>
-        </p:spPr>
-      </p:sp>
-      <p:sp>
-        <p:nvSpPr>
-          <p:cNvPr id="14" name="Text 12"/>
-          <p:cNvSpPr txBox="1"/>
-          <p:nvPr/>
-        </p:nvSpPr>
-        <p:spPr>
-          <a:xfrm>
-            <a:off x="6903720" y="3483864"/>
-            <a:ext cx="4709160" cy="685800"/>
-          </a:xfrm>
-          <a:prstGeom prst="rect">
-            <a:avLst/>
-          </a:prstGeom>
-          <a:noFill/>
-          <a:ln/>
-        </p:spPr>
-        <p:txBody>
-          <a:bodyPr wrap="square" lIns="0" tIns="0" rIns="0" bIns="0" rtlCol="0" anchor="t"/>
-          <a:lstStyle/>
-          <a:p>
-            <a:pPr algn="l" indent="0" marL="0">
-              <a:lnSpc>
-                <a:spcPct val="120000"/>
-              </a:lnSpc>
-              <a:buNone/>
-            </a:pPr>
-            <a:r>
-              <a:rPr lang="en-US" sz="1350" dirty="0">
-                <a:solidFill>
-                  <a:schemeClr val="tx1"/>
-                </a:solidFill>
-              </a:rPr>
-              <a:t>มือถือและ PC ต่อ Wi-Fi ชื่อ My_Robot2 แล้วทั้งคู่</a:t>
-            </a:r>
-            <a:endParaRPr lang="en-US" sz="1350" dirty="0"/>
-          </a:p>
-        </p:txBody>
-      </p:sp>
-      <p:sp>
-        <p:nvSpPr>
-          <p:cNvPr id="15" name="check-6"/>
-          <p:cNvSpPr/>
-          <p:nvPr/>
-        </p:nvSpPr>
-        <p:spPr>
-          <a:xfrm>
-            <a:off x="548640" y="4480560"/>
-            <a:ext cx="310896" cy="310896"/>
-          </a:xfrm>
-          <a:prstGeom prst="roundRect">
-            <a:avLst>
-              <a:gd name="adj" fmla="val 17647"/>
-            </a:avLst>
-          </a:prstGeom>
-          <a:solidFill>
-            <a:srgbClr val="FFFFFF"/>
-          </a:solidFill>
-          <a:ln w="19050">
-            <a:solidFill>
-              <a:srgbClr val="2F7A4F"/>
-            </a:solidFill>
-            <a:prstDash val="solid"/>
-          </a:ln>
-        </p:spPr>
-      </p:sp>
-      <p:sp>
-        <p:nvSpPr>
-          <p:cNvPr id="16" name="Text 14"/>
-          <p:cNvSpPr txBox="1"/>
-          <p:nvPr/>
-        </p:nvSpPr>
-        <p:spPr>
-          <a:xfrm>
-            <a:off x="1051560" y="4443984"/>
-            <a:ext cx="4709160" cy="685800"/>
-          </a:xfrm>
-          <a:prstGeom prst="rect">
-            <a:avLst/>
-          </a:prstGeom>
-          <a:noFill/>
-          <a:ln/>
-        </p:spPr>
-        <p:txBody>
-          <a:bodyPr wrap="square" lIns="0" tIns="0" rIns="0" bIns="0" rtlCol="0" anchor="t"/>
-          <a:lstStyle/>
-          <a:p>
-            <a:pPr algn="l" indent="0" marL="0">
-              <a:lnSpc>
-                <a:spcPct val="120000"/>
-              </a:lnSpc>
-              <a:buNone/>
-            </a:pPr>
-            <a:r>
-              <a:rPr lang="en-US" sz="1350" dirty="0">
-                <a:solidFill>
-                  <a:schemeClr val="tx1"/>
-                </a:solidFill>
-              </a:rPr>
-              <a:t>ปิดไฟล์ CSV ใน Excel ให้หมดก่อนรันสคริปต์</a:t>
-            </a:r>
-            <a:endParaRPr lang="en-US" sz="1350" dirty="0"/>
-          </a:p>
-        </p:txBody>
-      </p:sp>
-      <p:sp>
-        <p:nvSpPr>
-          <p:cNvPr id="17" name="check-7"/>
-          <p:cNvSpPr/>
-          <p:nvPr/>
-        </p:nvSpPr>
-        <p:spPr>
-          <a:xfrm>
-            <a:off x="6400800" y="4480560"/>
-            <a:ext cx="310896" cy="310896"/>
-          </a:xfrm>
-          <a:prstGeom prst="roundRect">
-            <a:avLst>
-              <a:gd name="adj" fmla="val 17647"/>
-            </a:avLst>
-          </a:prstGeom>
-          <a:solidFill>
-            <a:srgbClr val="FFFFFF"/>
-          </a:solidFill>
-          <a:ln w="19050">
-            <a:solidFill>
-              <a:srgbClr val="2F7A4F"/>
-            </a:solidFill>
-            <a:prstDash val="solid"/>
-          </a:ln>
-        </p:spPr>
-      </p:sp>
-      <p:sp>
-        <p:nvSpPr>
-          <p:cNvPr id="18" name="Text 16"/>
-          <p:cNvSpPr txBox="1"/>
-          <p:nvPr/>
-        </p:nvSpPr>
-        <p:spPr>
-          <a:xfrm>
-            <a:off x="6903720" y="4443984"/>
-            <a:ext cx="4709160" cy="685800"/>
-          </a:xfrm>
-          <a:prstGeom prst="rect">
-            <a:avLst/>
-          </a:prstGeom>
-          <a:noFill/>
-          <a:ln/>
-        </p:spPr>
-        <p:txBody>
-          <a:bodyPr wrap="square" lIns="0" tIns="0" rIns="0" bIns="0" rtlCol="0" anchor="t"/>
-          <a:lstStyle/>
-          <a:p>
-            <a:pPr algn="l" indent="0" marL="0">
-              <a:lnSpc>
-                <a:spcPct val="120000"/>
-              </a:lnSpc>
-              <a:buNone/>
-            </a:pPr>
-            <a:r>
-              <a:rPr lang="en-US" sz="1350" dirty="0">
-                <a:solidFill>
-                  <a:schemeClr val="tx1"/>
-                </a:solidFill>
-              </a:rPr>
-              <a:t>ลองโหมด Manual ให้เดินหน้าถอยหลังได้ก่อน ค่อยสลับไป Auto</a:t>
-            </a:r>
-            <a:endParaRPr lang="en-US" sz="1350" dirty="0"/>
-          </a:p>
-        </p:txBody>
-      </p:sp>
-      <p:sp>
-        <p:nvSpPr>
-          <p:cNvPr id="19" name="callout"/>
-          <p:cNvSpPr/>
-          <p:nvPr/>
-        </p:nvSpPr>
-        <p:spPr>
-          <a:xfrm>
-            <a:off x="548640" y="5349240"/>
-            <a:ext cx="11064240" cy="777240"/>
-          </a:xfrm>
-          <a:prstGeom prst="roundRect">
-            <a:avLst>
-              <a:gd name="adj" fmla="val 9412"/>
-            </a:avLst>
-          </a:prstGeom>
-          <a:solidFill>
-            <a:srgbClr val="E8F1F5"/>
-          </a:solidFill>
-          <a:ln w="12700">
-            <a:solidFill>
-              <a:srgbClr val="CBE0E9"/>
-            </a:solidFill>
-            <a:prstDash val="solid"/>
-          </a:ln>
-        </p:spPr>
-      </p:sp>
-      <p:sp>
-        <p:nvSpPr>
-          <p:cNvPr id="20" name="Text 18"/>
-          <p:cNvSpPr txBox="1"/>
-          <p:nvPr/>
-        </p:nvSpPr>
-        <p:spPr>
-          <a:xfrm>
-            <a:off x="777240" y="5477256"/>
-            <a:ext cx="10607040" cy="274320"/>
-          </a:xfrm>
-          <a:prstGeom prst="rect">
-            <a:avLst/>
-          </a:prstGeom>
-          <a:noFill/>
-          <a:ln/>
-        </p:spPr>
-        <p:txBody>
-          <a:bodyPr wrap="square" lIns="0" tIns="0" rIns="0" bIns="0" rtlCol="0" anchor="t"/>
-          <a:lstStyle/>
-          <a:p>
-            <a:pPr algn="l" indent="0" marL="0">
-              <a:buNone/>
-            </a:pPr>
-            <a:r>
-              <a:rPr lang="en-US" sz="1400" b="1" dirty="0">
-                <a:solidFill>
-                  <a:srgbClr val="1C7293"/>
-                </a:solidFill>
-              </a:rPr>
-              <a:t>ไล่จากบนลงล่างทุกครั้ง</a:t>
-            </a:r>
-            <a:endParaRPr lang="en-US" sz="1400" dirty="0"/>
-          </a:p>
-        </p:txBody>
-      </p:sp>
-      <p:sp>
-        <p:nvSpPr>
-          <p:cNvPr id="21" name="Text 19"/>
-          <p:cNvSpPr txBox="1"/>
-          <p:nvPr/>
-        </p:nvSpPr>
-        <p:spPr>
-          <a:xfrm>
-            <a:off x="777240" y="5788152"/>
-            <a:ext cx="10607040" cy="210312"/>
-          </a:xfrm>
-          <a:prstGeom prst="rect">
-            <a:avLst/>
-          </a:prstGeom>
-          <a:noFill/>
-          <a:ln/>
-        </p:spPr>
-        <p:txBody>
-          <a:bodyPr wrap="square" lIns="0" tIns="0" rIns="0" bIns="0" rtlCol="0" anchor="t"/>
-          <a:lstStyle/>
-          <a:p>
-            <a:pPr algn="l" indent="0" marL="0">
-              <a:lnSpc>
-                <a:spcPct val="120000"/>
-              </a:lnSpc>
-              <a:buNone/>
-            </a:pPr>
-            <a:r>
-              <a:rPr lang="en-US" sz="1250" dirty="0">
-                <a:solidFill>
-                  <a:srgbClr val="4A5568"/>
-                </a:solidFill>
-              </a:rPr>
-              <a:t>แปดข้อนี้ใช้เวลาไม่ถึงสองนาที แต่ตัดสาเหตุที่ทำให้เสียเวลาทั้งวันออกไปได้เกือบหมด</a:t>
-            </a:r>
-            <a:endParaRPr lang="en-US" sz="1250" dirty="0"/>
-          </a:p>
-        </p:txBody>
-      </p:sp>
-      <p:sp>
-        <p:nvSpPr>
-          <p:cNvPr id="25" name="Slide Number Placeholder 0"/>
-          <p:cNvSpPr>
-            <a:spLocks noGrp="1"/>
-          </p:cNvSpPr>
-          <p:nvPr>
-            <p:ph type="sldNum" sz="quarter" idx="4294967295"/>
-          </p:nvPr>
-        </p:nvSpPr>
-        <p:spPr>
-          <a:xfrm>
-            <a:off x="11338560" y="6263640"/>
-            <a:ext cx="457200" cy="274320"/>
-          </a:xfrm>
-          <a:prstGeom prst="rect">
-            <a:avLst/>
-          </a:prstGeom>
-          <a:extLst>
-            <a:ext uri="{C572A759-6A51-4108-AA02-DFA0A04FC94B}">
-              <ma14:wrappingTextBoxFlag xmlns:ma14="http://schemas.microsoft.com/office/mac/drawingml/2011/main" val="0"/>
-            </a:ext>
-          </a:extLst>
-        </p:spPr>
-        <p:txBody>
-          <a:bodyPr/>
-          <a:lstStyle>
-            <a:lvl1pPr>
-              <a:defRPr sz="1000">
-                <a:solidFill>
-                  <a:srgbClr val="6B7E93"/>
-                </a:solidFill>
-              </a:defRPr>
-            </a:lvl1pPr>
-          </a:lstStyle>
-          <a:p>
-            <a:pPr algn="r"/>
-            <a:fld id="{F7021451-1387-4CA6-816F-3879F97B5CBC}" type="slidenum">
-              <a:rPr b="0" lang="en-US"/>
               <a:t>19</a:t>
             </a:fld>
             <a:endParaRPr lang="en-US"/>
@@ -13962,6 +14247,744 @@
 <file path=ppt/slides/slide20.xml><?xml version="1.0" encoding="utf-8"?>
 <p:sld xmlns:a="http://schemas.openxmlformats.org/drawingml/2006/main" xmlns:r="http://schemas.openxmlformats.org/officeDocument/2006/relationships" xmlns:p="http://schemas.openxmlformats.org/presentationml/2006/main">
   <p:cSld name="Slide 20">
+    <p:spTree>
+      <p:nvGrpSpPr>
+        <p:cNvPr id="1" name=""/>
+        <p:cNvGrpSpPr/>
+        <p:nvPr/>
+      </p:nvGrpSpPr>
+      <p:grpSpPr>
+        <a:xfrm>
+          <a:off x="0" y="0"/>
+          <a:ext cx="0" cy="0"/>
+          <a:chOff x="0" y="0"/>
+          <a:chExt cx="0" cy="0"/>
+        </a:xfrm>
+      </p:grpSpPr>
+      <p:sp>
+        <p:nvSpPr>
+          <p:cNvPr id="2" name="Text 0"/>
+          <p:cNvSpPr/>
+          <p:nvPr>
+            <p:ph idx="100" type="title" hasCustomPrompt="1"/>
+          </p:nvPr>
+        </p:nvSpPr>
+        <p:spPr>
+          <a:xfrm>
+            <a:off x="548640" y="384048"/>
+            <a:ext cx="11064240" cy="685800"/>
+          </a:xfrm>
+          <a:prstGeom prst="rect">
+            <a:avLst/>
+          </a:prstGeom>
+          <a:noFill/>
+          <a:ln/>
+        </p:spPr>
+        <p:txBody>
+          <a:bodyPr wrap="square" rtlCol="0"/>
+          <a:lstStyle/>
+          <a:p>
+            <a:pPr algn="l" indent="0" marL="0">
+              <a:buNone/>
+            </a:pPr>
+            <a:r>
+              <a:rPr lang="en-US" sz="3200" b="1" dirty="0">
+                <a:solidFill>
+                  <a:schemeClr val="tx1"/>
+                </a:solidFill>
+              </a:rPr>
+              <a:t>เช็กลิสต์ก่อนวิ่งจริง</a:t>
+            </a:r>
+            <a:endParaRPr lang="en-US" sz="3200" dirty="0"/>
+          </a:p>
+        </p:txBody>
+      </p:sp>
+      <p:sp>
+        <p:nvSpPr>
+          <p:cNvPr id="3" name="check-0"/>
+          <p:cNvSpPr/>
+          <p:nvPr/>
+        </p:nvSpPr>
+        <p:spPr>
+          <a:xfrm>
+            <a:off x="548640" y="1600200"/>
+            <a:ext cx="310896" cy="310896"/>
+          </a:xfrm>
+          <a:prstGeom prst="roundRect">
+            <a:avLst>
+              <a:gd name="adj" fmla="val 17647"/>
+            </a:avLst>
+          </a:prstGeom>
+          <a:solidFill>
+            <a:srgbClr val="FFFFFF"/>
+          </a:solidFill>
+          <a:ln w="19050">
+            <a:solidFill>
+              <a:srgbClr val="2F7A4F"/>
+            </a:solidFill>
+            <a:prstDash val="solid"/>
+          </a:ln>
+        </p:spPr>
+      </p:sp>
+      <p:sp>
+        <p:nvSpPr>
+          <p:cNvPr id="4" name="Text 2"/>
+          <p:cNvSpPr txBox="1"/>
+          <p:nvPr/>
+        </p:nvSpPr>
+        <p:spPr>
+          <a:xfrm>
+            <a:off x="1051560" y="1563624"/>
+            <a:ext cx="4709160" cy="685800"/>
+          </a:xfrm>
+          <a:prstGeom prst="rect">
+            <a:avLst/>
+          </a:prstGeom>
+          <a:noFill/>
+          <a:ln/>
+        </p:spPr>
+        <p:txBody>
+          <a:bodyPr wrap="square" lIns="0" tIns="0" rIns="0" bIns="0" rtlCol="0" anchor="t"/>
+          <a:lstStyle/>
+          <a:p>
+            <a:pPr algn="l" indent="0" marL="0">
+              <a:lnSpc>
+                <a:spcPct val="120000"/>
+              </a:lnSpc>
+              <a:buNone/>
+            </a:pPr>
+            <a:r>
+              <a:rPr lang="en-US" sz="1350" dirty="0">
+                <a:solidFill>
+                  <a:schemeClr val="tx1"/>
+                </a:solidFill>
+              </a:rPr>
+              <a:t>แบตเตอรี่เต็ม และจ่ายไฟมอเตอร์แยกจากบอร์ด</a:t>
+            </a:r>
+            <a:endParaRPr lang="en-US" sz="1350" dirty="0"/>
+          </a:p>
+        </p:txBody>
+      </p:sp>
+      <p:sp>
+        <p:nvSpPr>
+          <p:cNvPr id="5" name="check-1"/>
+          <p:cNvSpPr/>
+          <p:nvPr/>
+        </p:nvSpPr>
+        <p:spPr>
+          <a:xfrm>
+            <a:off x="6400800" y="1600200"/>
+            <a:ext cx="310896" cy="310896"/>
+          </a:xfrm>
+          <a:prstGeom prst="roundRect">
+            <a:avLst>
+              <a:gd name="adj" fmla="val 17647"/>
+            </a:avLst>
+          </a:prstGeom>
+          <a:solidFill>
+            <a:srgbClr val="FFFFFF"/>
+          </a:solidFill>
+          <a:ln w="19050">
+            <a:solidFill>
+              <a:srgbClr val="2F7A4F"/>
+            </a:solidFill>
+            <a:prstDash val="solid"/>
+          </a:ln>
+        </p:spPr>
+      </p:sp>
+      <p:sp>
+        <p:nvSpPr>
+          <p:cNvPr id="6" name="Text 4"/>
+          <p:cNvSpPr txBox="1"/>
+          <p:nvPr/>
+        </p:nvSpPr>
+        <p:spPr>
+          <a:xfrm>
+            <a:off x="6903720" y="1563624"/>
+            <a:ext cx="4709160" cy="685800"/>
+          </a:xfrm>
+          <a:prstGeom prst="rect">
+            <a:avLst/>
+          </a:prstGeom>
+          <a:noFill/>
+          <a:ln/>
+        </p:spPr>
+        <p:txBody>
+          <a:bodyPr wrap="square" lIns="0" tIns="0" rIns="0" bIns="0" rtlCol="0" anchor="t"/>
+          <a:lstStyle/>
+          <a:p>
+            <a:pPr algn="l" indent="0" marL="0">
+              <a:lnSpc>
+                <a:spcPct val="120000"/>
+              </a:lnSpc>
+              <a:buNone/>
+            </a:pPr>
+            <a:r>
+              <a:rPr lang="en-US" sz="1350" dirty="0">
+                <a:solidFill>
+                  <a:schemeClr val="tx1"/>
+                </a:solidFill>
+              </a:rPr>
+              <a:t>สายจอ OLED ทั้งสี่เส้นบัดกรีแน่น ไม่ใช่แค่เสียบ</a:t>
+            </a:r>
+            <a:endParaRPr lang="en-US" sz="1350" dirty="0"/>
+          </a:p>
+        </p:txBody>
+      </p:sp>
+      <p:sp>
+        <p:nvSpPr>
+          <p:cNvPr id="7" name="check-2"/>
+          <p:cNvSpPr/>
+          <p:nvPr/>
+        </p:nvSpPr>
+        <p:spPr>
+          <a:xfrm>
+            <a:off x="548640" y="2560320"/>
+            <a:ext cx="310896" cy="310896"/>
+          </a:xfrm>
+          <a:prstGeom prst="roundRect">
+            <a:avLst>
+              <a:gd name="adj" fmla="val 17647"/>
+            </a:avLst>
+          </a:prstGeom>
+          <a:solidFill>
+            <a:srgbClr val="FFFFFF"/>
+          </a:solidFill>
+          <a:ln w="19050">
+            <a:solidFill>
+              <a:srgbClr val="2F7A4F"/>
+            </a:solidFill>
+            <a:prstDash val="solid"/>
+          </a:ln>
+        </p:spPr>
+      </p:sp>
+      <p:sp>
+        <p:nvSpPr>
+          <p:cNvPr id="8" name="Text 6"/>
+          <p:cNvSpPr txBox="1"/>
+          <p:nvPr/>
+        </p:nvSpPr>
+        <p:spPr>
+          <a:xfrm>
+            <a:off x="1051560" y="2523744"/>
+            <a:ext cx="4709160" cy="685800"/>
+          </a:xfrm>
+          <a:prstGeom prst="rect">
+            <a:avLst/>
+          </a:prstGeom>
+          <a:noFill/>
+          <a:ln/>
+        </p:spPr>
+        <p:txBody>
+          <a:bodyPr wrap="square" lIns="0" tIns="0" rIns="0" bIns="0" rtlCol="0" anchor="t"/>
+          <a:lstStyle/>
+          <a:p>
+            <a:pPr algn="l" indent="0" marL="0">
+              <a:lnSpc>
+                <a:spcPct val="120000"/>
+              </a:lnSpc>
+              <a:buNone/>
+            </a:pPr>
+            <a:r>
+              <a:rPr lang="en-US" sz="1350" dirty="0">
+                <a:solidFill>
+                  <a:schemeClr val="tx1"/>
+                </a:solidFill>
+              </a:rPr>
+              <a:t>สายสื่อสารไขว้ถูกคู่ และต่อ GND ร่วมกันครบ</a:t>
+            </a:r>
+            <a:endParaRPr lang="en-US" sz="1350" dirty="0"/>
+          </a:p>
+        </p:txBody>
+      </p:sp>
+      <p:sp>
+        <p:nvSpPr>
+          <p:cNvPr id="9" name="check-3"/>
+          <p:cNvSpPr/>
+          <p:nvPr/>
+        </p:nvSpPr>
+        <p:spPr>
+          <a:xfrm>
+            <a:off x="6400800" y="2560320"/>
+            <a:ext cx="310896" cy="310896"/>
+          </a:xfrm>
+          <a:prstGeom prst="roundRect">
+            <a:avLst>
+              <a:gd name="adj" fmla="val 17647"/>
+            </a:avLst>
+          </a:prstGeom>
+          <a:solidFill>
+            <a:srgbClr val="FFFFFF"/>
+          </a:solidFill>
+          <a:ln w="19050">
+            <a:solidFill>
+              <a:srgbClr val="2F7A4F"/>
+            </a:solidFill>
+            <a:prstDash val="solid"/>
+          </a:ln>
+        </p:spPr>
+      </p:sp>
+      <p:sp>
+        <p:nvSpPr>
+          <p:cNvPr id="10" name="Text 8"/>
+          <p:cNvSpPr txBox="1"/>
+          <p:nvPr/>
+        </p:nvSpPr>
+        <p:spPr>
+          <a:xfrm>
+            <a:off x="6903720" y="2523744"/>
+            <a:ext cx="4709160" cy="685800"/>
+          </a:xfrm>
+          <a:prstGeom prst="rect">
+            <a:avLst/>
+          </a:prstGeom>
+          <a:noFill/>
+          <a:ln/>
+        </p:spPr>
+        <p:txBody>
+          <a:bodyPr wrap="square" lIns="0" tIns="0" rIns="0" bIns="0" rtlCol="0" anchor="t"/>
+          <a:lstStyle/>
+          <a:p>
+            <a:pPr algn="l" indent="0" marL="0">
+              <a:lnSpc>
+                <a:spcPct val="120000"/>
+              </a:lnSpc>
+              <a:buNone/>
+            </a:pPr>
+            <a:r>
+              <a:rPr lang="en-US" sz="1350" dirty="0">
+                <a:solidFill>
+                  <a:schemeClr val="tx1"/>
+                </a:solidFill>
+              </a:rPr>
+              <a:t>เปิด Serial Monitor เช็กว่าวันเวลาคอมไพล์ตรงกับที่เพิ่งอัป</a:t>
+            </a:r>
+            <a:endParaRPr lang="en-US" sz="1350" dirty="0"/>
+          </a:p>
+        </p:txBody>
+      </p:sp>
+      <p:sp>
+        <p:nvSpPr>
+          <p:cNvPr id="11" name="check-4"/>
+          <p:cNvSpPr/>
+          <p:nvPr/>
+        </p:nvSpPr>
+        <p:spPr>
+          <a:xfrm>
+            <a:off x="548640" y="3520440"/>
+            <a:ext cx="310896" cy="310896"/>
+          </a:xfrm>
+          <a:prstGeom prst="roundRect">
+            <a:avLst>
+              <a:gd name="adj" fmla="val 17647"/>
+            </a:avLst>
+          </a:prstGeom>
+          <a:solidFill>
+            <a:srgbClr val="FFFFFF"/>
+          </a:solidFill>
+          <a:ln w="19050">
+            <a:solidFill>
+              <a:srgbClr val="2F7A4F"/>
+            </a:solidFill>
+            <a:prstDash val="solid"/>
+          </a:ln>
+        </p:spPr>
+      </p:sp>
+      <p:sp>
+        <p:nvSpPr>
+          <p:cNvPr id="12" name="Text 10"/>
+          <p:cNvSpPr txBox="1"/>
+          <p:nvPr/>
+        </p:nvSpPr>
+        <p:spPr>
+          <a:xfrm>
+            <a:off x="1051560" y="3483864"/>
+            <a:ext cx="4709160" cy="685800"/>
+          </a:xfrm>
+          <a:prstGeom prst="rect">
+            <a:avLst/>
+          </a:prstGeom>
+          <a:noFill/>
+          <a:ln/>
+        </p:spPr>
+        <p:txBody>
+          <a:bodyPr wrap="square" lIns="0" tIns="0" rIns="0" bIns="0" rtlCol="0" anchor="t"/>
+          <a:lstStyle/>
+          <a:p>
+            <a:pPr algn="l" indent="0" marL="0">
+              <a:lnSpc>
+                <a:spcPct val="120000"/>
+              </a:lnSpc>
+              <a:buNone/>
+            </a:pPr>
+            <a:r>
+              <a:rPr lang="en-US" sz="1350" dirty="0">
+                <a:solidFill>
+                  <a:schemeClr val="tx1"/>
+                </a:solidFill>
+              </a:rPr>
+              <a:t>วางหุ่นบนเส้นแล้วอ่านค่าได้ 0 0 1 0 0</a:t>
+            </a:r>
+            <a:endParaRPr lang="en-US" sz="1350" dirty="0"/>
+          </a:p>
+        </p:txBody>
+      </p:sp>
+      <p:sp>
+        <p:nvSpPr>
+          <p:cNvPr id="13" name="check-5"/>
+          <p:cNvSpPr/>
+          <p:nvPr/>
+        </p:nvSpPr>
+        <p:spPr>
+          <a:xfrm>
+            <a:off x="6400800" y="3520440"/>
+            <a:ext cx="310896" cy="310896"/>
+          </a:xfrm>
+          <a:prstGeom prst="roundRect">
+            <a:avLst>
+              <a:gd name="adj" fmla="val 17647"/>
+            </a:avLst>
+          </a:prstGeom>
+          <a:solidFill>
+            <a:srgbClr val="FFFFFF"/>
+          </a:solidFill>
+          <a:ln w="19050">
+            <a:solidFill>
+              <a:srgbClr val="2F7A4F"/>
+            </a:solidFill>
+            <a:prstDash val="solid"/>
+          </a:ln>
+        </p:spPr>
+      </p:sp>
+      <p:sp>
+        <p:nvSpPr>
+          <p:cNvPr id="14" name="Text 12"/>
+          <p:cNvSpPr txBox="1"/>
+          <p:nvPr/>
+        </p:nvSpPr>
+        <p:spPr>
+          <a:xfrm>
+            <a:off x="6903720" y="3483864"/>
+            <a:ext cx="4709160" cy="685800"/>
+          </a:xfrm>
+          <a:prstGeom prst="rect">
+            <a:avLst/>
+          </a:prstGeom>
+          <a:noFill/>
+          <a:ln/>
+        </p:spPr>
+        <p:txBody>
+          <a:bodyPr wrap="square" lIns="0" tIns="0" rIns="0" bIns="0" rtlCol="0" anchor="t"/>
+          <a:lstStyle/>
+          <a:p>
+            <a:pPr algn="l" indent="0" marL="0">
+              <a:lnSpc>
+                <a:spcPct val="120000"/>
+              </a:lnSpc>
+              <a:buNone/>
+            </a:pPr>
+            <a:r>
+              <a:rPr lang="en-US" sz="1350" dirty="0">
+                <a:solidFill>
+                  <a:schemeClr val="tx1"/>
+                </a:solidFill>
+              </a:rPr>
+              <a:t>มือถือและ PC ต่อ Wi-Fi ชื่อ My_Robot2 แล้วทั้งคู่</a:t>
+            </a:r>
+            <a:endParaRPr lang="en-US" sz="1350" dirty="0"/>
+          </a:p>
+        </p:txBody>
+      </p:sp>
+      <p:sp>
+        <p:nvSpPr>
+          <p:cNvPr id="15" name="check-6"/>
+          <p:cNvSpPr/>
+          <p:nvPr/>
+        </p:nvSpPr>
+        <p:spPr>
+          <a:xfrm>
+            <a:off x="548640" y="4480560"/>
+            <a:ext cx="310896" cy="310896"/>
+          </a:xfrm>
+          <a:prstGeom prst="roundRect">
+            <a:avLst>
+              <a:gd name="adj" fmla="val 17647"/>
+            </a:avLst>
+          </a:prstGeom>
+          <a:solidFill>
+            <a:srgbClr val="FFFFFF"/>
+          </a:solidFill>
+          <a:ln w="19050">
+            <a:solidFill>
+              <a:srgbClr val="2F7A4F"/>
+            </a:solidFill>
+            <a:prstDash val="solid"/>
+          </a:ln>
+        </p:spPr>
+      </p:sp>
+      <p:sp>
+        <p:nvSpPr>
+          <p:cNvPr id="16" name="Text 14"/>
+          <p:cNvSpPr txBox="1"/>
+          <p:nvPr/>
+        </p:nvSpPr>
+        <p:spPr>
+          <a:xfrm>
+            <a:off x="1051560" y="4443984"/>
+            <a:ext cx="4709160" cy="685800"/>
+          </a:xfrm>
+          <a:prstGeom prst="rect">
+            <a:avLst/>
+          </a:prstGeom>
+          <a:noFill/>
+          <a:ln/>
+        </p:spPr>
+        <p:txBody>
+          <a:bodyPr wrap="square" lIns="0" tIns="0" rIns="0" bIns="0" rtlCol="0" anchor="t"/>
+          <a:lstStyle/>
+          <a:p>
+            <a:pPr algn="l" indent="0" marL="0">
+              <a:lnSpc>
+                <a:spcPct val="120000"/>
+              </a:lnSpc>
+              <a:buNone/>
+            </a:pPr>
+            <a:r>
+              <a:rPr lang="en-US" sz="1350" dirty="0">
+                <a:solidFill>
+                  <a:schemeClr val="tx1"/>
+                </a:solidFill>
+              </a:rPr>
+              <a:t>ปิดไฟล์ CSV ใน Excel ให้หมดก่อนรันสคริปต์</a:t>
+            </a:r>
+            <a:endParaRPr lang="en-US" sz="1350" dirty="0"/>
+          </a:p>
+        </p:txBody>
+      </p:sp>
+      <p:sp>
+        <p:nvSpPr>
+          <p:cNvPr id="17" name="check-7"/>
+          <p:cNvSpPr/>
+          <p:nvPr/>
+        </p:nvSpPr>
+        <p:spPr>
+          <a:xfrm>
+            <a:off x="6400800" y="4480560"/>
+            <a:ext cx="310896" cy="310896"/>
+          </a:xfrm>
+          <a:prstGeom prst="roundRect">
+            <a:avLst>
+              <a:gd name="adj" fmla="val 17647"/>
+            </a:avLst>
+          </a:prstGeom>
+          <a:solidFill>
+            <a:srgbClr val="FFFFFF"/>
+          </a:solidFill>
+          <a:ln w="19050">
+            <a:solidFill>
+              <a:srgbClr val="2F7A4F"/>
+            </a:solidFill>
+            <a:prstDash val="solid"/>
+          </a:ln>
+        </p:spPr>
+      </p:sp>
+      <p:sp>
+        <p:nvSpPr>
+          <p:cNvPr id="18" name="Text 16"/>
+          <p:cNvSpPr txBox="1"/>
+          <p:nvPr/>
+        </p:nvSpPr>
+        <p:spPr>
+          <a:xfrm>
+            <a:off x="6903720" y="4443984"/>
+            <a:ext cx="4709160" cy="685800"/>
+          </a:xfrm>
+          <a:prstGeom prst="rect">
+            <a:avLst/>
+          </a:prstGeom>
+          <a:noFill/>
+          <a:ln/>
+        </p:spPr>
+        <p:txBody>
+          <a:bodyPr wrap="square" lIns="0" tIns="0" rIns="0" bIns="0" rtlCol="0" anchor="t"/>
+          <a:lstStyle/>
+          <a:p>
+            <a:pPr algn="l" indent="0" marL="0">
+              <a:lnSpc>
+                <a:spcPct val="120000"/>
+              </a:lnSpc>
+              <a:buNone/>
+            </a:pPr>
+            <a:r>
+              <a:rPr lang="en-US" sz="1350" dirty="0">
+                <a:solidFill>
+                  <a:schemeClr val="tx1"/>
+                </a:solidFill>
+              </a:rPr>
+              <a:t>ลองโหมด Manual ให้เดินหน้าถอยหลังได้ก่อน ค่อยสลับไป Auto</a:t>
+            </a:r>
+            <a:endParaRPr lang="en-US" sz="1350" dirty="0"/>
+          </a:p>
+        </p:txBody>
+      </p:sp>
+      <p:sp>
+        <p:nvSpPr>
+          <p:cNvPr id="19" name="callout"/>
+          <p:cNvSpPr/>
+          <p:nvPr/>
+        </p:nvSpPr>
+        <p:spPr>
+          <a:xfrm>
+            <a:off x="548640" y="5349240"/>
+            <a:ext cx="11064240" cy="777240"/>
+          </a:xfrm>
+          <a:prstGeom prst="roundRect">
+            <a:avLst>
+              <a:gd name="adj" fmla="val 9412"/>
+            </a:avLst>
+          </a:prstGeom>
+          <a:solidFill>
+            <a:srgbClr val="E8F1F5"/>
+          </a:solidFill>
+          <a:ln w="12700">
+            <a:solidFill>
+              <a:srgbClr val="CBE0E9"/>
+            </a:solidFill>
+            <a:prstDash val="solid"/>
+          </a:ln>
+        </p:spPr>
+      </p:sp>
+      <p:sp>
+        <p:nvSpPr>
+          <p:cNvPr id="20" name="Text 18"/>
+          <p:cNvSpPr txBox="1"/>
+          <p:nvPr/>
+        </p:nvSpPr>
+        <p:spPr>
+          <a:xfrm>
+            <a:off x="777240" y="5477256"/>
+            <a:ext cx="10607040" cy="274320"/>
+          </a:xfrm>
+          <a:prstGeom prst="rect">
+            <a:avLst/>
+          </a:prstGeom>
+          <a:noFill/>
+          <a:ln/>
+        </p:spPr>
+        <p:txBody>
+          <a:bodyPr wrap="square" lIns="0" tIns="0" rIns="0" bIns="0" rtlCol="0" anchor="t"/>
+          <a:lstStyle/>
+          <a:p>
+            <a:pPr algn="l" indent="0" marL="0">
+              <a:buNone/>
+            </a:pPr>
+            <a:r>
+              <a:rPr lang="en-US" sz="1400" b="1" dirty="0">
+                <a:solidFill>
+                  <a:srgbClr val="1C7293"/>
+                </a:solidFill>
+              </a:rPr>
+              <a:t>ไล่จากบนลงล่างทุกครั้ง</a:t>
+            </a:r>
+            <a:endParaRPr lang="en-US" sz="1400" dirty="0"/>
+          </a:p>
+        </p:txBody>
+      </p:sp>
+      <p:sp>
+        <p:nvSpPr>
+          <p:cNvPr id="21" name="Text 19"/>
+          <p:cNvSpPr txBox="1"/>
+          <p:nvPr/>
+        </p:nvSpPr>
+        <p:spPr>
+          <a:xfrm>
+            <a:off x="777240" y="5788152"/>
+            <a:ext cx="10607040" cy="210312"/>
+          </a:xfrm>
+          <a:prstGeom prst="rect">
+            <a:avLst/>
+          </a:prstGeom>
+          <a:noFill/>
+          <a:ln/>
+        </p:spPr>
+        <p:txBody>
+          <a:bodyPr wrap="square" lIns="0" tIns="0" rIns="0" bIns="0" rtlCol="0" anchor="t"/>
+          <a:lstStyle/>
+          <a:p>
+            <a:pPr algn="l" indent="0" marL="0">
+              <a:lnSpc>
+                <a:spcPct val="120000"/>
+              </a:lnSpc>
+              <a:buNone/>
+            </a:pPr>
+            <a:r>
+              <a:rPr lang="en-US" sz="1250" dirty="0">
+                <a:solidFill>
+                  <a:srgbClr val="4A5568"/>
+                </a:solidFill>
+              </a:rPr>
+              <a:t>แปดข้อนี้ใช้เวลาไม่ถึงสองนาที แต่ตัดสาเหตุที่ทำให้เสียเวลาทั้งวันออกไปได้เกือบหมด</a:t>
+            </a:r>
+            <a:endParaRPr lang="en-US" sz="1250" dirty="0"/>
+          </a:p>
+        </p:txBody>
+      </p:sp>
+      <p:sp>
+        <p:nvSpPr>
+          <p:cNvPr id="25" name="Slide Number Placeholder 0"/>
+          <p:cNvSpPr>
+            <a:spLocks noGrp="1"/>
+          </p:cNvSpPr>
+          <p:nvPr>
+            <p:ph type="sldNum" sz="quarter" idx="4294967295"/>
+          </p:nvPr>
+        </p:nvSpPr>
+        <p:spPr>
+          <a:xfrm>
+            <a:off x="11338560" y="6263640"/>
+            <a:ext cx="457200" cy="274320"/>
+          </a:xfrm>
+          <a:prstGeom prst="rect">
+            <a:avLst/>
+          </a:prstGeom>
+          <a:extLst>
+            <a:ext uri="{C572A759-6A51-4108-AA02-DFA0A04FC94B}">
+              <ma14:wrappingTextBoxFlag xmlns:ma14="http://schemas.microsoft.com/office/mac/drawingml/2011/main" val="0"/>
+            </a:ext>
+          </a:extLst>
+        </p:spPr>
+        <p:txBody>
+          <a:bodyPr/>
+          <a:lstStyle>
+            <a:lvl1pPr>
+              <a:defRPr sz="1000">
+                <a:solidFill>
+                  <a:srgbClr val="6B7E93"/>
+                </a:solidFill>
+              </a:defRPr>
+            </a:lvl1pPr>
+          </a:lstStyle>
+          <a:p>
+            <a:pPr algn="r"/>
+            <a:fld id="{F7021451-1387-4CA6-816F-3879F97B5CBC}" type="slidenum">
+              <a:rPr b="0" lang="en-US"/>
+              <a:t>20</a:t>
+            </a:fld>
+            <a:endParaRPr lang="en-US"/>
+          </a:p>
+        </p:txBody>
+      </p:sp>
+    </p:spTree>
+  </p:cSld>
+  <p:clrMapOvr>
+    <a:masterClrMapping/>
+  </p:clrMapOvr>
+</p:sld>
+</file>
+
+<file path=ppt/slides/slide21.xml><?xml version="1.0" encoding="utf-8"?>
+<p:sld xmlns:a="http://schemas.openxmlformats.org/drawingml/2006/main" xmlns:r="http://schemas.openxmlformats.org/officeDocument/2006/relationships" xmlns:p="http://schemas.openxmlformats.org/presentationml/2006/main">
+  <p:cSld name="Slide 21">
     <p:spTree>
       <p:nvGrpSpPr>
         <p:cNvPr id="1" name=""/>
@@ -20004,7 +21027,7 @@
                   <a:schemeClr val="tx1"/>
                 </a:solidFill>
               </a:rPr>
-              <a:t>อัปเฟิร์มแวร์ทีละบอร์ด</a:t>
+              <a:t>เตรียม ST-Link สำหรับอัป STM32</a:t>
             </a:r>
             <a:endParaRPr lang="en-US" sz="3200" dirty="0"/>
           </a:p>
@@ -20101,7 +21124,7 @@
                   <a:schemeClr val="tx1"/>
                 </a:solidFill>
               </a:rPr>
-              <a:t>STM32</a:t>
+              <a:t>ลง STM32CubeProgrammer</a:t>
             </a:r>
             <a:endParaRPr lang="en-US" sz="1600" dirty="0"/>
           </a:p>
@@ -20140,7 +21163,7 @@
                   <a:srgbClr val="4A5568"/>
                 </a:solidFill>
               </a:rPr>
-              <a:t>เปิดโฟลเดอร์ stm32_robot_controller  ตั้ง BOOT0 เป็น 1 แล้วกดรีเซ็ตก่อนอัป เสร็จแล้วตั้งกลับเป็น 0 แล้วรีเซ็ตอีกครั้ง</a:t>
+              <a:t>โหลดจากเว็บ ST ต้องสมัครบัญชีฟรีก่อน  ลงแบบ default ไม่ต้องเปลี่ยน path  ไดรเวอร์ของ ST-Link มากับตัวนี้ด้วย</a:t>
             </a:r>
             <a:endParaRPr lang="en-US" sz="1300" dirty="0"/>
           </a:p>
@@ -20154,7 +21177,7 @@
         </p:nvSpPr>
         <p:spPr>
           <a:xfrm>
-            <a:off x="548640" y="2834640"/>
+            <a:off x="548640" y="2697480"/>
             <a:ext cx="475488" cy="475488"/>
           </a:xfrm>
           <a:prstGeom prst="ellipse">
@@ -20179,7 +21202,7 @@
         </p:nvSpPr>
         <p:spPr>
           <a:xfrm>
-            <a:off x="548640" y="2834640"/>
+            <a:off x="548640" y="2697480"/>
             <a:ext cx="475488" cy="475488"/>
           </a:xfrm>
           <a:prstGeom prst="rect">
@@ -20215,7 +21238,7 @@
         </p:nvSpPr>
         <p:spPr>
           <a:xfrm>
-            <a:off x="1207008" y="2816352"/>
+            <a:off x="1207008" y="2679192"/>
             <a:ext cx="4553712" cy="301752"/>
           </a:xfrm>
           <a:prstGeom prst="rect">
@@ -20237,7 +21260,7 @@
                   <a:schemeClr val="tx1"/>
                 </a:solidFill>
               </a:rPr>
-              <a:t>ESP32 รีโมท</a:t>
+              <a:t>ต่อสาย 4 เส้น</a:t>
             </a:r>
             <a:endParaRPr lang="en-US" sz="1600" dirty="0"/>
           </a:p>
@@ -20251,7 +21274,7 @@
         </p:nvSpPr>
         <p:spPr>
           <a:xfrm>
-            <a:off x="1207008" y="3145536"/>
+            <a:off x="1207008" y="3008376"/>
             <a:ext cx="4553712" cy="822960"/>
           </a:xfrm>
           <a:prstGeom prst="rect">
@@ -20276,7 +21299,7 @@
                   <a:srgbClr val="4A5568"/>
                 </a:solidFill>
               </a:rPr>
-              <a:t>เปิดโฟลเดอร์ esp32_remote_controller  เลือกบอร์ด ESP32 Dev Module แล้วอัปตามปกติ</a:t>
+              <a:t>ตามตารางด้านขวา  จับคู่ตามชื่อที่พิมพ์บนตัว ST-Link อย่าดูตามเลขพิน เพราะของแต่ละล็อตสลับตำแหน่งกัน</a:t>
             </a:r>
             <a:endParaRPr lang="en-US" sz="1300" dirty="0"/>
           </a:p>
@@ -20290,7 +21313,7 @@
         </p:nvSpPr>
         <p:spPr>
           <a:xfrm>
-            <a:off x="548640" y="4069080"/>
+            <a:off x="548640" y="3931920"/>
             <a:ext cx="475488" cy="475488"/>
           </a:xfrm>
           <a:prstGeom prst="ellipse">
@@ -20315,7 +21338,7 @@
         </p:nvSpPr>
         <p:spPr>
           <a:xfrm>
-            <a:off x="548640" y="4069080"/>
+            <a:off x="548640" y="3931920"/>
             <a:ext cx="475488" cy="475488"/>
           </a:xfrm>
           <a:prstGeom prst="rect">
@@ -20351,7 +21374,7 @@
         </p:nvSpPr>
         <p:spPr>
           <a:xfrm>
-            <a:off x="1207008" y="4050792"/>
+            <a:off x="1207008" y="3913632"/>
             <a:ext cx="4553712" cy="301752"/>
           </a:xfrm>
           <a:prstGeom prst="rect">
@@ -20373,7 +21396,7 @@
                   <a:schemeClr val="tx1"/>
                 </a:solidFill>
               </a:rPr>
-              <a:t>ESP32-CAM</a:t>
+              <a:t>ตั้งค่าใน Arduino IDE</a:t>
             </a:r>
             <a:endParaRPr lang="en-US" sz="1600" dirty="0"/>
           </a:p>
@@ -20387,7 +21410,7 @@
         </p:nvSpPr>
         <p:spPr>
           <a:xfrm>
-            <a:off x="1207008" y="4379976"/>
+            <a:off x="1207008" y="4242816"/>
             <a:ext cx="4553712" cy="822960"/>
           </a:xfrm>
           <a:prstGeom prst="rect">
@@ -20412,26 +21435,676 @@
                   <a:srgbClr val="4A5568"/>
                 </a:solidFill>
               </a:rPr>
-              <a:t>เปิดโฟลเดอร์ esp32_camera_server ทั้งโฟลเดอร์  เลือกบอร์ด AI Thinker ESP32-CAM  บอร์ดนี้จะเกาะ Wi-Fi ของหุ่นเองอัตโนมัติ</a:t>
+              <a:t>Upload method เลือก STM32CubeProgrammer (SWD)  ส่วนเมนู Port ปล่อยว่างไว้ ไม่ต้องเลือกอะไรเลย</a:t>
             </a:r>
             <a:endParaRPr lang="en-US" sz="1300" dirty="0"/>
           </a:p>
         </p:txBody>
       </p:sp>
-      <p:sp>
-        <p:nvSpPr>
-          <p:cNvPr id="15" name="callout"/>
+      <p:graphicFrame>
+        <p:nvGraphicFramePr>
+          <p:cNvPr id="10" name="Table 0"/>
+          <p:cNvGraphicFramePr>
+            <a:graphicFrameLocks noGrp="1"/>
+          </p:cNvGraphicFramePr>
+          <p:nvPr>
+            <p:extLst>
+              <p:ext uri="{D42A27DB-BD31-4B8C-83A1-F6EECF244321}">
+                <p14:modId xmlns:p14="http://schemas.microsoft.com/office/powerpoint/2010/main" val="1579011935"/>
+              </p:ext>
+            </p:extLst>
+          </p:nvPr>
+        </p:nvGraphicFramePr>
+        <p:xfrm>
+          <a:off x="6309360" y="1417320"/>
+          <a:ext cx="5303520" cy="914400"/>
+        </p:xfrm>
+        <a:graphic>
+          <a:graphicData uri="http://schemas.openxmlformats.org/drawingml/2006/table">
+            <a:tbl>
+              <a:tblPr/>
+              <a:tblGrid>
+                <a:gridCol w="1920240"/>
+                <a:gridCol w="3383280"/>
+              </a:tblGrid>
+              <a:tr h="0">
+                <a:tc>
+                  <a:txBody>
+                    <a:bodyPr/>
+                    <a:lstStyle/>
+                    <a:p>
+                      <a:pPr indent="0" marL="0">
+                        <a:buNone/>
+                      </a:pPr>
+                      <a:r>
+                        <a:rPr lang="en-US" sz="1300" b="1" dirty="0">
+                          <a:solidFill>
+                            <a:srgbClr val="FFFFFF"/>
+                          </a:solidFill>
+                        </a:rPr>
+                        <a:t>ST-Link</a:t>
+                      </a:r>
+                      <a:endParaRPr lang="en-US" sz="1300" dirty="0"/>
+                    </a:p>
+                  </a:txBody>
+                  <a:tcPr marL="82296" marR="82296" marT="82296" marB="82296" anchor="ctr">
+                    <a:lnL w="12700" cap="flat" cmpd="sng" algn="ctr">
+                      <a:solidFill>
+                        <a:srgbClr val="D9E0E8"/>
+                      </a:solidFill>
+                      <a:prstDash val="solid"/>
+                      <a:round/>
+                      <a:headEnd type="none" w="med" len="med"/>
+                      <a:tailEnd type="none" w="med" len="med"/>
+                    </a:lnL>
+                    <a:lnR w="12700" cap="flat" cmpd="sng" algn="ctr">
+                      <a:solidFill>
+                        <a:srgbClr val="D9E0E8"/>
+                      </a:solidFill>
+                      <a:prstDash val="solid"/>
+                      <a:round/>
+                      <a:headEnd type="none" w="med" len="med"/>
+                      <a:tailEnd type="none" w="med" len="med"/>
+                    </a:lnR>
+                    <a:lnT w="12700" cap="flat" cmpd="sng" algn="ctr">
+                      <a:solidFill>
+                        <a:srgbClr val="D9E0E8"/>
+                      </a:solidFill>
+                      <a:prstDash val="solid"/>
+                      <a:round/>
+                      <a:headEnd type="none" w="med" len="med"/>
+                      <a:tailEnd type="none" w="med" len="med"/>
+                    </a:lnT>
+                    <a:lnB w="12700" cap="flat" cmpd="sng" algn="ctr">
+                      <a:solidFill>
+                        <a:srgbClr val="D9E0E8"/>
+                      </a:solidFill>
+                      <a:prstDash val="solid"/>
+                      <a:round/>
+                      <a:headEnd type="none" w="med" len="med"/>
+                      <a:tailEnd type="none" w="med" len="med"/>
+                    </a:lnB>
+                    <a:solidFill>
+                      <a:srgbClr val="16202E"/>
+                    </a:solidFill>
+                  </a:tcPr>
+                </a:tc>
+                <a:tc>
+                  <a:txBody>
+                    <a:bodyPr/>
+                    <a:lstStyle/>
+                    <a:p>
+                      <a:pPr indent="0" marL="0">
+                        <a:buNone/>
+                      </a:pPr>
+                      <a:r>
+                        <a:rPr lang="en-US" sz="1300" b="1" dirty="0">
+                          <a:solidFill>
+                            <a:srgbClr val="FFFFFF"/>
+                          </a:solidFill>
+                        </a:rPr>
+                        <a:t>Blue Pill</a:t>
+                      </a:r>
+                      <a:endParaRPr lang="en-US" sz="1300" dirty="0"/>
+                    </a:p>
+                  </a:txBody>
+                  <a:tcPr marL="82296" marR="82296" marT="82296" marB="82296" anchor="ctr">
+                    <a:lnL w="12700" cap="flat" cmpd="sng" algn="ctr">
+                      <a:solidFill>
+                        <a:srgbClr val="D9E0E8"/>
+                      </a:solidFill>
+                      <a:prstDash val="solid"/>
+                      <a:round/>
+                      <a:headEnd type="none" w="med" len="med"/>
+                      <a:tailEnd type="none" w="med" len="med"/>
+                    </a:lnL>
+                    <a:lnR w="12700" cap="flat" cmpd="sng" algn="ctr">
+                      <a:solidFill>
+                        <a:srgbClr val="D9E0E8"/>
+                      </a:solidFill>
+                      <a:prstDash val="solid"/>
+                      <a:round/>
+                      <a:headEnd type="none" w="med" len="med"/>
+                      <a:tailEnd type="none" w="med" len="med"/>
+                    </a:lnR>
+                    <a:lnT w="12700" cap="flat" cmpd="sng" algn="ctr">
+                      <a:solidFill>
+                        <a:srgbClr val="D9E0E8"/>
+                      </a:solidFill>
+                      <a:prstDash val="solid"/>
+                      <a:round/>
+                      <a:headEnd type="none" w="med" len="med"/>
+                      <a:tailEnd type="none" w="med" len="med"/>
+                    </a:lnT>
+                    <a:lnB w="12700" cap="flat" cmpd="sng" algn="ctr">
+                      <a:solidFill>
+                        <a:srgbClr val="D9E0E8"/>
+                      </a:solidFill>
+                      <a:prstDash val="solid"/>
+                      <a:round/>
+                      <a:headEnd type="none" w="med" len="med"/>
+                      <a:tailEnd type="none" w="med" len="med"/>
+                    </a:lnB>
+                    <a:solidFill>
+                      <a:srgbClr val="16202E"/>
+                    </a:solidFill>
+                  </a:tcPr>
+                </a:tc>
+              </a:tr>
+              <a:tr h="0">
+                <a:tc>
+                  <a:txBody>
+                    <a:bodyPr/>
+                    <a:lstStyle/>
+                    <a:p>
+                      <a:pPr indent="0" marL="0">
+                        <a:buNone/>
+                      </a:pPr>
+                      <a:r>
+                        <a:rPr lang="en-US" sz="1250" b="1" dirty="0">
+                          <a:solidFill>
+                            <a:srgbClr val="16202E"/>
+                          </a:solidFill>
+                        </a:rPr>
+                        <a:t>SWDIO</a:t>
+                      </a:r>
+                      <a:endParaRPr lang="en-US" sz="1250" dirty="0"/>
+                    </a:p>
+                  </a:txBody>
+                  <a:tcPr marL="82296" marR="82296" marT="82296" marB="82296" anchor="ctr">
+                    <a:lnL w="12700" cap="flat" cmpd="sng" algn="ctr">
+                      <a:solidFill>
+                        <a:srgbClr val="D9E0E8"/>
+                      </a:solidFill>
+                      <a:prstDash val="solid"/>
+                      <a:round/>
+                      <a:headEnd type="none" w="med" len="med"/>
+                      <a:tailEnd type="none" w="med" len="med"/>
+                    </a:lnL>
+                    <a:lnR w="12700" cap="flat" cmpd="sng" algn="ctr">
+                      <a:solidFill>
+                        <a:srgbClr val="D9E0E8"/>
+                      </a:solidFill>
+                      <a:prstDash val="solid"/>
+                      <a:round/>
+                      <a:headEnd type="none" w="med" len="med"/>
+                      <a:tailEnd type="none" w="med" len="med"/>
+                    </a:lnR>
+                    <a:lnT w="12700" cap="flat" cmpd="sng" algn="ctr">
+                      <a:solidFill>
+                        <a:srgbClr val="D9E0E8"/>
+                      </a:solidFill>
+                      <a:prstDash val="solid"/>
+                      <a:round/>
+                      <a:headEnd type="none" w="med" len="med"/>
+                      <a:tailEnd type="none" w="med" len="med"/>
+                    </a:lnT>
+                    <a:lnB w="12700" cap="flat" cmpd="sng" algn="ctr">
+                      <a:solidFill>
+                        <a:srgbClr val="D9E0E8"/>
+                      </a:solidFill>
+                      <a:prstDash val="solid"/>
+                      <a:round/>
+                      <a:headEnd type="none" w="med" len="med"/>
+                      <a:tailEnd type="none" w="med" len="med"/>
+                    </a:lnB>
+                    <a:solidFill>
+                      <a:srgbClr val="FFFFFF"/>
+                    </a:solidFill>
+                  </a:tcPr>
+                </a:tc>
+                <a:tc>
+                  <a:txBody>
+                    <a:bodyPr/>
+                    <a:lstStyle/>
+                    <a:p>
+                      <a:pPr indent="0" marL="0">
+                        <a:buNone/>
+                      </a:pPr>
+                      <a:r>
+                        <a:rPr lang="en-US" sz="1250" dirty="0">
+                          <a:solidFill>
+                            <a:srgbClr val="4A5568"/>
+                          </a:solidFill>
+                        </a:rPr>
+                        <a:t>DIO   (PA13)</a:t>
+                      </a:r>
+                      <a:endParaRPr lang="en-US" sz="1250" dirty="0"/>
+                    </a:p>
+                  </a:txBody>
+                  <a:tcPr marL="82296" marR="82296" marT="82296" marB="82296" anchor="ctr">
+                    <a:lnL w="12700" cap="flat" cmpd="sng" algn="ctr">
+                      <a:solidFill>
+                        <a:srgbClr val="D9E0E8"/>
+                      </a:solidFill>
+                      <a:prstDash val="solid"/>
+                      <a:round/>
+                      <a:headEnd type="none" w="med" len="med"/>
+                      <a:tailEnd type="none" w="med" len="med"/>
+                    </a:lnL>
+                    <a:lnR w="12700" cap="flat" cmpd="sng" algn="ctr">
+                      <a:solidFill>
+                        <a:srgbClr val="D9E0E8"/>
+                      </a:solidFill>
+                      <a:prstDash val="solid"/>
+                      <a:round/>
+                      <a:headEnd type="none" w="med" len="med"/>
+                      <a:tailEnd type="none" w="med" len="med"/>
+                    </a:lnR>
+                    <a:lnT w="12700" cap="flat" cmpd="sng" algn="ctr">
+                      <a:solidFill>
+                        <a:srgbClr val="D9E0E8"/>
+                      </a:solidFill>
+                      <a:prstDash val="solid"/>
+                      <a:round/>
+                      <a:headEnd type="none" w="med" len="med"/>
+                      <a:tailEnd type="none" w="med" len="med"/>
+                    </a:lnT>
+                    <a:lnB w="12700" cap="flat" cmpd="sng" algn="ctr">
+                      <a:solidFill>
+                        <a:srgbClr val="D9E0E8"/>
+                      </a:solidFill>
+                      <a:prstDash val="solid"/>
+                      <a:round/>
+                      <a:headEnd type="none" w="med" len="med"/>
+                      <a:tailEnd type="none" w="med" len="med"/>
+                    </a:lnB>
+                    <a:solidFill>
+                      <a:srgbClr val="FFFFFF"/>
+                    </a:solidFill>
+                  </a:tcPr>
+                </a:tc>
+              </a:tr>
+              <a:tr h="0">
+                <a:tc>
+                  <a:txBody>
+                    <a:bodyPr/>
+                    <a:lstStyle/>
+                    <a:p>
+                      <a:pPr indent="0" marL="0">
+                        <a:buNone/>
+                      </a:pPr>
+                      <a:r>
+                        <a:rPr lang="en-US" sz="1250" b="1" dirty="0">
+                          <a:solidFill>
+                            <a:srgbClr val="16202E"/>
+                          </a:solidFill>
+                        </a:rPr>
+                        <a:t>SWCLK</a:t>
+                      </a:r>
+                      <a:endParaRPr lang="en-US" sz="1250" dirty="0"/>
+                    </a:p>
+                  </a:txBody>
+                  <a:tcPr marL="82296" marR="82296" marT="82296" marB="82296" anchor="ctr">
+                    <a:lnL w="12700" cap="flat" cmpd="sng" algn="ctr">
+                      <a:solidFill>
+                        <a:srgbClr val="D9E0E8"/>
+                      </a:solidFill>
+                      <a:prstDash val="solid"/>
+                      <a:round/>
+                      <a:headEnd type="none" w="med" len="med"/>
+                      <a:tailEnd type="none" w="med" len="med"/>
+                    </a:lnL>
+                    <a:lnR w="12700" cap="flat" cmpd="sng" algn="ctr">
+                      <a:solidFill>
+                        <a:srgbClr val="D9E0E8"/>
+                      </a:solidFill>
+                      <a:prstDash val="solid"/>
+                      <a:round/>
+                      <a:headEnd type="none" w="med" len="med"/>
+                      <a:tailEnd type="none" w="med" len="med"/>
+                    </a:lnR>
+                    <a:lnT w="12700" cap="flat" cmpd="sng" algn="ctr">
+                      <a:solidFill>
+                        <a:srgbClr val="D9E0E8"/>
+                      </a:solidFill>
+                      <a:prstDash val="solid"/>
+                      <a:round/>
+                      <a:headEnd type="none" w="med" len="med"/>
+                      <a:tailEnd type="none" w="med" len="med"/>
+                    </a:lnT>
+                    <a:lnB w="12700" cap="flat" cmpd="sng" algn="ctr">
+                      <a:solidFill>
+                        <a:srgbClr val="D9E0E8"/>
+                      </a:solidFill>
+                      <a:prstDash val="solid"/>
+                      <a:round/>
+                      <a:headEnd type="none" w="med" len="med"/>
+                      <a:tailEnd type="none" w="med" len="med"/>
+                    </a:lnB>
+                    <a:solidFill>
+                      <a:srgbClr val="FFFFFF"/>
+                    </a:solidFill>
+                  </a:tcPr>
+                </a:tc>
+                <a:tc>
+                  <a:txBody>
+                    <a:bodyPr/>
+                    <a:lstStyle/>
+                    <a:p>
+                      <a:pPr indent="0" marL="0">
+                        <a:buNone/>
+                      </a:pPr>
+                      <a:r>
+                        <a:rPr lang="en-US" sz="1250" dirty="0">
+                          <a:solidFill>
+                            <a:srgbClr val="4A5568"/>
+                          </a:solidFill>
+                        </a:rPr>
+                        <a:t>DCLK  (PA14)</a:t>
+                      </a:r>
+                      <a:endParaRPr lang="en-US" sz="1250" dirty="0"/>
+                    </a:p>
+                  </a:txBody>
+                  <a:tcPr marL="82296" marR="82296" marT="82296" marB="82296" anchor="ctr">
+                    <a:lnL w="12700" cap="flat" cmpd="sng" algn="ctr">
+                      <a:solidFill>
+                        <a:srgbClr val="D9E0E8"/>
+                      </a:solidFill>
+                      <a:prstDash val="solid"/>
+                      <a:round/>
+                      <a:headEnd type="none" w="med" len="med"/>
+                      <a:tailEnd type="none" w="med" len="med"/>
+                    </a:lnL>
+                    <a:lnR w="12700" cap="flat" cmpd="sng" algn="ctr">
+                      <a:solidFill>
+                        <a:srgbClr val="D9E0E8"/>
+                      </a:solidFill>
+                      <a:prstDash val="solid"/>
+                      <a:round/>
+                      <a:headEnd type="none" w="med" len="med"/>
+                      <a:tailEnd type="none" w="med" len="med"/>
+                    </a:lnR>
+                    <a:lnT w="12700" cap="flat" cmpd="sng" algn="ctr">
+                      <a:solidFill>
+                        <a:srgbClr val="D9E0E8"/>
+                      </a:solidFill>
+                      <a:prstDash val="solid"/>
+                      <a:round/>
+                      <a:headEnd type="none" w="med" len="med"/>
+                      <a:tailEnd type="none" w="med" len="med"/>
+                    </a:lnT>
+                    <a:lnB w="12700" cap="flat" cmpd="sng" algn="ctr">
+                      <a:solidFill>
+                        <a:srgbClr val="D9E0E8"/>
+                      </a:solidFill>
+                      <a:prstDash val="solid"/>
+                      <a:round/>
+                      <a:headEnd type="none" w="med" len="med"/>
+                      <a:tailEnd type="none" w="med" len="med"/>
+                    </a:lnB>
+                    <a:solidFill>
+                      <a:srgbClr val="FFFFFF"/>
+                    </a:solidFill>
+                  </a:tcPr>
+                </a:tc>
+              </a:tr>
+              <a:tr h="0">
+                <a:tc>
+                  <a:txBody>
+                    <a:bodyPr/>
+                    <a:lstStyle/>
+                    <a:p>
+                      <a:pPr indent="0" marL="0">
+                        <a:buNone/>
+                      </a:pPr>
+                      <a:r>
+                        <a:rPr lang="en-US" sz="1250" b="1" dirty="0">
+                          <a:solidFill>
+                            <a:srgbClr val="16202E"/>
+                          </a:solidFill>
+                        </a:rPr>
+                        <a:t>GND</a:t>
+                      </a:r>
+                      <a:endParaRPr lang="en-US" sz="1250" dirty="0"/>
+                    </a:p>
+                  </a:txBody>
+                  <a:tcPr marL="82296" marR="82296" marT="82296" marB="82296" anchor="ctr">
+                    <a:lnL w="12700" cap="flat" cmpd="sng" algn="ctr">
+                      <a:solidFill>
+                        <a:srgbClr val="D9E0E8"/>
+                      </a:solidFill>
+                      <a:prstDash val="solid"/>
+                      <a:round/>
+                      <a:headEnd type="none" w="med" len="med"/>
+                      <a:tailEnd type="none" w="med" len="med"/>
+                    </a:lnL>
+                    <a:lnR w="12700" cap="flat" cmpd="sng" algn="ctr">
+                      <a:solidFill>
+                        <a:srgbClr val="D9E0E8"/>
+                      </a:solidFill>
+                      <a:prstDash val="solid"/>
+                      <a:round/>
+                      <a:headEnd type="none" w="med" len="med"/>
+                      <a:tailEnd type="none" w="med" len="med"/>
+                    </a:lnR>
+                    <a:lnT w="12700" cap="flat" cmpd="sng" algn="ctr">
+                      <a:solidFill>
+                        <a:srgbClr val="D9E0E8"/>
+                      </a:solidFill>
+                      <a:prstDash val="solid"/>
+                      <a:round/>
+                      <a:headEnd type="none" w="med" len="med"/>
+                      <a:tailEnd type="none" w="med" len="med"/>
+                    </a:lnT>
+                    <a:lnB w="12700" cap="flat" cmpd="sng" algn="ctr">
+                      <a:solidFill>
+                        <a:srgbClr val="D9E0E8"/>
+                      </a:solidFill>
+                      <a:prstDash val="solid"/>
+                      <a:round/>
+                      <a:headEnd type="none" w="med" len="med"/>
+                      <a:tailEnd type="none" w="med" len="med"/>
+                    </a:lnB>
+                    <a:solidFill>
+                      <a:srgbClr val="FFFFFF"/>
+                    </a:solidFill>
+                  </a:tcPr>
+                </a:tc>
+                <a:tc>
+                  <a:txBody>
+                    <a:bodyPr/>
+                    <a:lstStyle/>
+                    <a:p>
+                      <a:pPr indent="0" marL="0">
+                        <a:buNone/>
+                      </a:pPr>
+                      <a:r>
+                        <a:rPr lang="en-US" sz="1250" dirty="0">
+                          <a:solidFill>
+                            <a:srgbClr val="4A5568"/>
+                          </a:solidFill>
+                        </a:rPr>
+                        <a:t>GND</a:t>
+                      </a:r>
+                      <a:endParaRPr lang="en-US" sz="1250" dirty="0"/>
+                    </a:p>
+                  </a:txBody>
+                  <a:tcPr marL="82296" marR="82296" marT="82296" marB="82296" anchor="ctr">
+                    <a:lnL w="12700" cap="flat" cmpd="sng" algn="ctr">
+                      <a:solidFill>
+                        <a:srgbClr val="D9E0E8"/>
+                      </a:solidFill>
+                      <a:prstDash val="solid"/>
+                      <a:round/>
+                      <a:headEnd type="none" w="med" len="med"/>
+                      <a:tailEnd type="none" w="med" len="med"/>
+                    </a:lnL>
+                    <a:lnR w="12700" cap="flat" cmpd="sng" algn="ctr">
+                      <a:solidFill>
+                        <a:srgbClr val="D9E0E8"/>
+                      </a:solidFill>
+                      <a:prstDash val="solid"/>
+                      <a:round/>
+                      <a:headEnd type="none" w="med" len="med"/>
+                      <a:tailEnd type="none" w="med" len="med"/>
+                    </a:lnR>
+                    <a:lnT w="12700" cap="flat" cmpd="sng" algn="ctr">
+                      <a:solidFill>
+                        <a:srgbClr val="D9E0E8"/>
+                      </a:solidFill>
+                      <a:prstDash val="solid"/>
+                      <a:round/>
+                      <a:headEnd type="none" w="med" len="med"/>
+                      <a:tailEnd type="none" w="med" len="med"/>
+                    </a:lnT>
+                    <a:lnB w="12700" cap="flat" cmpd="sng" algn="ctr">
+                      <a:solidFill>
+                        <a:srgbClr val="D9E0E8"/>
+                      </a:solidFill>
+                      <a:prstDash val="solid"/>
+                      <a:round/>
+                      <a:headEnd type="none" w="med" len="med"/>
+                      <a:tailEnd type="none" w="med" len="med"/>
+                    </a:lnB>
+                    <a:solidFill>
+                      <a:srgbClr val="FFFFFF"/>
+                    </a:solidFill>
+                  </a:tcPr>
+                </a:tc>
+              </a:tr>
+              <a:tr h="0">
+                <a:tc>
+                  <a:txBody>
+                    <a:bodyPr/>
+                    <a:lstStyle/>
+                    <a:p>
+                      <a:pPr indent="0" marL="0">
+                        <a:buNone/>
+                      </a:pPr>
+                      <a:r>
+                        <a:rPr lang="en-US" sz="1250" b="1" dirty="0">
+                          <a:solidFill>
+                            <a:srgbClr val="16202E"/>
+                          </a:solidFill>
+                        </a:rPr>
+                        <a:t>3.3V</a:t>
+                      </a:r>
+                      <a:endParaRPr lang="en-US" sz="1250" dirty="0"/>
+                    </a:p>
+                  </a:txBody>
+                  <a:tcPr marL="82296" marR="82296" marT="82296" marB="82296" anchor="ctr">
+                    <a:lnL w="12700" cap="flat" cmpd="sng" algn="ctr">
+                      <a:solidFill>
+                        <a:srgbClr val="D9E0E8"/>
+                      </a:solidFill>
+                      <a:prstDash val="solid"/>
+                      <a:round/>
+                      <a:headEnd type="none" w="med" len="med"/>
+                      <a:tailEnd type="none" w="med" len="med"/>
+                    </a:lnL>
+                    <a:lnR w="12700" cap="flat" cmpd="sng" algn="ctr">
+                      <a:solidFill>
+                        <a:srgbClr val="D9E0E8"/>
+                      </a:solidFill>
+                      <a:prstDash val="solid"/>
+                      <a:round/>
+                      <a:headEnd type="none" w="med" len="med"/>
+                      <a:tailEnd type="none" w="med" len="med"/>
+                    </a:lnR>
+                    <a:lnT w="12700" cap="flat" cmpd="sng" algn="ctr">
+                      <a:solidFill>
+                        <a:srgbClr val="D9E0E8"/>
+                      </a:solidFill>
+                      <a:prstDash val="solid"/>
+                      <a:round/>
+                      <a:headEnd type="none" w="med" len="med"/>
+                      <a:tailEnd type="none" w="med" len="med"/>
+                    </a:lnT>
+                    <a:lnB w="12700" cap="flat" cmpd="sng" algn="ctr">
+                      <a:solidFill>
+                        <a:srgbClr val="D9E0E8"/>
+                      </a:solidFill>
+                      <a:prstDash val="solid"/>
+                      <a:round/>
+                      <a:headEnd type="none" w="med" len="med"/>
+                      <a:tailEnd type="none" w="med" len="med"/>
+                    </a:lnB>
+                    <a:solidFill>
+                      <a:srgbClr val="FFFFFF"/>
+                    </a:solidFill>
+                  </a:tcPr>
+                </a:tc>
+                <a:tc>
+                  <a:txBody>
+                    <a:bodyPr/>
+                    <a:lstStyle/>
+                    <a:p>
+                      <a:pPr indent="0" marL="0">
+                        <a:buNone/>
+                      </a:pPr>
+                      <a:r>
+                        <a:rPr lang="en-US" sz="1250" dirty="0">
+                          <a:solidFill>
+                            <a:srgbClr val="4A5568"/>
+                          </a:solidFill>
+                        </a:rPr>
+                        <a:t>3V3  ต่อเมื่อไม่มีไฟอื่น</a:t>
+                      </a:r>
+                      <a:endParaRPr lang="en-US" sz="1250" dirty="0"/>
+                    </a:p>
+                  </a:txBody>
+                  <a:tcPr marL="82296" marR="82296" marT="82296" marB="82296" anchor="ctr">
+                    <a:lnL w="12700" cap="flat" cmpd="sng" algn="ctr">
+                      <a:solidFill>
+                        <a:srgbClr val="D9E0E8"/>
+                      </a:solidFill>
+                      <a:prstDash val="solid"/>
+                      <a:round/>
+                      <a:headEnd type="none" w="med" len="med"/>
+                      <a:tailEnd type="none" w="med" len="med"/>
+                    </a:lnL>
+                    <a:lnR w="12700" cap="flat" cmpd="sng" algn="ctr">
+                      <a:solidFill>
+                        <a:srgbClr val="D9E0E8"/>
+                      </a:solidFill>
+                      <a:prstDash val="solid"/>
+                      <a:round/>
+                      <a:headEnd type="none" w="med" len="med"/>
+                      <a:tailEnd type="none" w="med" len="med"/>
+                    </a:lnR>
+                    <a:lnT w="12700" cap="flat" cmpd="sng" algn="ctr">
+                      <a:solidFill>
+                        <a:srgbClr val="D9E0E8"/>
+                      </a:solidFill>
+                      <a:prstDash val="solid"/>
+                      <a:round/>
+                      <a:headEnd type="none" w="med" len="med"/>
+                      <a:tailEnd type="none" w="med" len="med"/>
+                    </a:lnT>
+                    <a:lnB w="12700" cap="flat" cmpd="sng" algn="ctr">
+                      <a:solidFill>
+                        <a:srgbClr val="D9E0E8"/>
+                      </a:solidFill>
+                      <a:prstDash val="solid"/>
+                      <a:round/>
+                      <a:headEnd type="none" w="med" len="med"/>
+                      <a:tailEnd type="none" w="med" len="med"/>
+                    </a:lnB>
+                    <a:solidFill>
+                      <a:srgbClr val="FFFFFF"/>
+                    </a:solidFill>
+                  </a:tcPr>
+                </a:tc>
+              </a:tr>
+            </a:tbl>
+          </a:graphicData>
+        </a:graphic>
+      </p:graphicFrame>
+      <p:sp>
+        <p:nvSpPr>
+          <p:cNvPr id="16" name="callout"/>
           <p:cNvSpPr/>
           <p:nvPr/>
         </p:nvSpPr>
         <p:spPr>
           <a:xfrm>
-            <a:off x="6309360" y="1463040"/>
-            <a:ext cx="5303520" cy="1508760"/>
+            <a:off x="6309360" y="3383280"/>
+            <a:ext cx="5303520" cy="1280160"/>
           </a:xfrm>
           <a:prstGeom prst="roundRect">
             <a:avLst>
-              <a:gd name="adj" fmla="val 4848"/>
+              <a:gd name="adj" fmla="val 5714"/>
             </a:avLst>
           </a:prstGeom>
           <a:solidFill>
@@ -20447,13 +22120,13 @@
       </p:sp>
       <p:sp>
         <p:nvSpPr>
-          <p:cNvPr id="16" name="Text 14"/>
+          <p:cNvPr id="17" name="Text 14"/>
           <p:cNvSpPr txBox="1"/>
           <p:nvPr/>
         </p:nvSpPr>
         <p:spPr>
           <a:xfrm>
-            <a:off x="6537960" y="1591056"/>
+            <a:off x="6537960" y="3511296"/>
             <a:ext cx="4846320" cy="274320"/>
           </a:xfrm>
           <a:prstGeom prst="rect">
@@ -20475,7 +22148,7 @@
                   <a:srgbClr val="B3261E"/>
                 </a:solidFill>
               </a:rPr>
-              <a:t>อัป STM32 ไม่ได้ ขึ้นว่า Failed to open port</a:t>
+              <a:t>หา PA13 PA14 บนแถวพินข้างบอร์ดไม่เจอแน่นอน</a:t>
             </a:r>
             <a:endParaRPr lang="en-US" sz="1400" dirty="0"/>
           </a:p>
@@ -20483,14 +22156,14 @@
       </p:sp>
       <p:sp>
         <p:nvSpPr>
-          <p:cNvPr id="17" name="Text 15"/>
+          <p:cNvPr id="18" name="Text 15"/>
           <p:cNvSpPr txBox="1"/>
           <p:nvPr/>
         </p:nvSpPr>
         <p:spPr>
           <a:xfrm>
-            <a:off x="6537960" y="1901952"/>
-            <a:ext cx="4846320" cy="941832"/>
+            <a:off x="6537960" y="3822192"/>
+            <a:ext cx="4846320" cy="713232"/>
           </a:xfrm>
           <a:prstGeom prst="rect">
             <a:avLst/>
@@ -20514,7 +22187,7 @@
                   <a:srgbClr val="4A5568"/>
                 </a:solidFill>
               </a:rPr>
-              <a:t>พอร์ตของ STM32 คือตัวแปลง CH340 ไม่ใช่ CP210x ที่เป็นของ ESP32   และต้องปิดหน้าต่าง Serial Monitor ให้หมดก่อน เพราะมันจองพอร์ตไว้</a:t>
+              <a:t>ไล่ดูจะเห็นเลขกระโดดจาก A12 ไป A15 เลย  สองขานี้ถูกแยกไปไว้ที่หัวต่อ 4 พินตรงปลายบอร์ด ฝั่งตรงข้าม USB และพิมพ์ชื่อว่า DIO กับ DCLK</a:t>
             </a:r>
             <a:endParaRPr lang="en-US" sz="1250" dirty="0"/>
           </a:p>
@@ -20522,18 +22195,18 @@
       </p:sp>
       <p:sp>
         <p:nvSpPr>
-          <p:cNvPr id="18" name="callout"/>
+          <p:cNvPr id="19" name="callout"/>
           <p:cNvSpPr/>
           <p:nvPr/>
         </p:nvSpPr>
         <p:spPr>
           <a:xfrm>
-            <a:off x="6309360" y="3154680"/>
-            <a:ext cx="5303520" cy="2057400"/>
+            <a:off x="548640" y="5303520"/>
+            <a:ext cx="11064240" cy="777240"/>
           </a:xfrm>
           <a:prstGeom prst="roundRect">
             <a:avLst>
-              <a:gd name="adj" fmla="val 3556"/>
+              <a:gd name="adj" fmla="val 9412"/>
             </a:avLst>
           </a:prstGeom>
           <a:solidFill>
@@ -20549,14 +22222,14 @@
       </p:sp>
       <p:sp>
         <p:nvSpPr>
-          <p:cNvPr id="19" name="Text 17"/>
+          <p:cNvPr id="20" name="Text 17"/>
           <p:cNvSpPr txBox="1"/>
           <p:nvPr/>
         </p:nvSpPr>
         <p:spPr>
           <a:xfrm>
-            <a:off x="6537960" y="3282696"/>
-            <a:ext cx="4846320" cy="274320"/>
+            <a:off x="777240" y="5431536"/>
+            <a:ext cx="10607040" cy="274320"/>
           </a:xfrm>
           <a:prstGeom prst="rect">
             <a:avLst/>
@@ -20577,7 +22250,7 @@
                   <a:srgbClr val="1C7293"/>
                 </a:solidFill>
               </a:rPr>
-              <a:t>เช็กว่าอัปติดจริงไหม</a:t>
+              <a:t>สิ่งที่ได้มาจากการเปลี่ยนมาใช้ ST-Link</a:t>
             </a:r>
             <a:endParaRPr lang="en-US" sz="1400" dirty="0"/>
           </a:p>
@@ -20585,14 +22258,14 @@
       </p:sp>
       <p:sp>
         <p:nvSpPr>
-          <p:cNvPr id="20" name="Text 18"/>
+          <p:cNvPr id="21" name="Text 18"/>
           <p:cNvSpPr txBox="1"/>
           <p:nvPr/>
         </p:nvSpPr>
         <p:spPr>
           <a:xfrm>
-            <a:off x="6537960" y="3593592"/>
-            <a:ext cx="4846320" cy="1490472"/>
+            <a:off x="777240" y="5742432"/>
+            <a:ext cx="10607040" cy="210312"/>
           </a:xfrm>
           <a:prstGeom prst="rect">
             <a:avLst/>
@@ -20616,33 +22289,7 @@
                   <a:srgbClr val="4A5568"/>
                 </a:solidFill>
               </a:rPr>
-              <a:t>เปิด Serial Monitor ที่ 115200 แล้วกดรีเซ็ต โปรแกรมจะพิมพ์วันเวลาที่คอมไพล์ออกมา</a:t>
-            </a:r>
-            <a:endParaRPr lang="en-US" sz="1250" dirty="0"/>
-          </a:p>
-          <a:p>
-            <a:pPr algn="l" indent="0" marL="0">
-              <a:lnSpc>
-                <a:spcPct val="120000"/>
-              </a:lnSpc>
-              <a:buNone/>
-            </a:pPr>
-            <a:endParaRPr lang="en-US" sz="1250" dirty="0"/>
-          </a:p>
-          <a:p>
-            <a:pPr algn="l" indent="0" marL="0">
-              <a:lnSpc>
-                <a:spcPct val="120000"/>
-              </a:lnSpc>
-              <a:buNone/>
-            </a:pPr>
-            <a:r>
-              <a:rPr lang="en-US" sz="1250" dirty="0">
-                <a:solidFill>
-                  <a:srgbClr val="4A5568"/>
-                </a:solidFill>
-              </a:rPr>
-              <a:t>ถ้าเวลาไม่ตรงกับที่เพิ่งอัป แปลว่าไม่ติด บน Blue Pill สาเหตุที่เจอบ่อยที่สุดคือลืมตั้ง BOOT0 กลับเป็น 0</a:t>
+              <a:t>ไม่ต้องสลับ BOOT0 ไปมาอีกเลย  และไม่แย่ง COM port กับ Serial Monitor เพราะการอัปไม่ได้วิ่งผ่านพอร์ต COM</a:t>
             </a:r>
             <a:endParaRPr lang="en-US" sz="1250" dirty="0"/>
           </a:p>

--- a/docs/Tiny-Robot-Setup-Guide-TH.pptx
+++ b/docs/Tiny-Robot-Setup-Guide-TH.pptx
@@ -27,9 +27,10 @@
     <p:sldId id="275" r:id="rId21"/>
     <p:sldId id="276" r:id="rId22"/>
     <p:sldId id="277" r:id="rId23"/>
+    <p:sldId id="278" r:id="rId24"/>
   </p:sldIdLst>
   <p:notesMasterIdLst>
-    <p:notesMasterId r:id="rId24"/>
+    <p:notesMasterId r:id="rId25"/>
   </p:notesMasterIdLst>
   <p:sldSz cx="12192000" cy="6858000"/>
   <p:notesSz cx="6858000" cy="12192000"/>
@@ -128,7 +129,7 @@
   <p:extLst>
     <p:ext uri="{521415D9-36F7-43E2-AB2F-B90AF26B5E84}">
       <p14:sectionLst xmlns:p14="http://schemas.microsoft.com/office/powerpoint/2010/main">
-        <p14:section name="ภาพรวม" id="{9b352ba2-4955-bed3-97e5-3d78448a9f6b}">
+        <p14:section name="ภาพรวม" id="{dcc12fe2-db61-3415-c8d5-3e1a5905f846}">
           <p14:sldIdLst>
             <p14:sldId id="256"/>
             <p14:sldId id="257"/>
@@ -136,7 +137,7 @@
             <p14:sldId id="259"/>
           </p14:sldIdLst>
         </p14:section>
-        <p14:section name="ติดตั้ง" id="{68c69056-8203-bef1-a4c2-ad53cbc9044f}">
+        <p14:section name="ติดตั้ง" id="{220aae83-f0d2-28bc-b3dd-c3c13539b529}">
           <p14:sldIdLst>
             <p14:sldId id="260"/>
             <p14:sldId id="261"/>
@@ -145,25 +146,26 @@
             <p14:sldId id="264"/>
             <p14:sldId id="265"/>
             <p14:sldId id="266"/>
+            <p14:sldId id="267"/>
           </p14:sldIdLst>
         </p14:section>
-        <p14:section name="ใช้งานจริง" id="{77025737-0e79-ac58-bbff-ddf0151cf681}">
+        <p14:section name="ใช้งานจริง" id="{a7b8c6e9-7926-c1cf-0f45-2c5ab4cdaef0}">
           <p14:sldIdLst>
-            <p14:sldId id="267"/>
             <p14:sldId id="268"/>
             <p14:sldId id="269"/>
             <p14:sldId id="270"/>
             <p14:sldId id="271"/>
+            <p14:sldId id="272"/>
           </p14:sldIdLst>
         </p14:section>
-        <p14:section name="ปรับแต่งและแก้ปัญหา" id="{5f28078a-bff0-c941-d0da-75f6310f72c0}">
+        <p14:section name="ปรับแต่งและแก้ปัญหา" id="{f7ccbec8-38f1-b99a-1d37-3c94eaff4960}">
           <p14:sldIdLst>
-            <p14:sldId id="272"/>
             <p14:sldId id="273"/>
             <p14:sldId id="274"/>
             <p14:sldId id="275"/>
             <p14:sldId id="276"/>
             <p14:sldId id="277"/>
+            <p14:sldId id="278"/>
           </p14:sldIdLst>
         </p14:section>
       </p14:sectionLst>
@@ -839,7 +841,8 @@
           <a:p>
             <a:r>
               <a:rPr lang="en-US" dirty="0"/>
-              <a:t/>
+              <a:t>วิธีนี้คือวิธีเดียวกับที่ปุ่ม Upload ใน IDE ทำอยู่เบื้องหลัง แค่เราเรียกเองทีละขั้นแทน
+ถ้าอยากกดปุ่มแทนพิมพ์ ก็เปิดโปรแกรม STM32CubeProgrammer ได้ เลือก ST-LINK มุมขวาบน กด Connect แล้วไปแท็บ Erasing &amp; Programming ติ๊ก Verify กับ Run after programming</a:t>
             </a:r>
             <a:endParaRPr lang="en-US" dirty="0"/>
           </a:p>
@@ -927,8 +930,7 @@
           <a:p>
             <a:r>
               <a:rPr lang="en-US" dirty="0"/>
-              <a:t>ข้อ 4 เป็นข้อที่คนใหม่พลาดบ่อยที่สุด เห็นหุ่นไม่ขยับแล้วคิดว่าเสีย ทั้งที่แค่ยังไม่ได้เลื่อนความเร็วขึ้นจากศูนย์
-ที่ตั้งให้เริ่มที่ 0 เพราะไม่อยากให้หุ่นพุ่งทันทีที่เปิดหน้าเว็บ</a:t>
+              <a:t/>
             </a:r>
             <a:endParaRPr lang="en-US" dirty="0"/>
           </a:p>
@@ -1016,8 +1018,8 @@
           <a:p>
             <a:r>
               <a:rPr lang="en-US" dirty="0"/>
-              <a:t>ทุกหน้ายกเว้นหน้าสถานะเป็นรูปบิตแมปเต็มจอ 128x64 ที่วาดตัวหนังสือไว้ในรูปแล้ว
-ถ้าอยากเปลี่ยนรูป ให้แก้ไฟล์ PNG ใน assets/oled แล้วสั่ง py tools/png_to_bitmaps.py</a:t>
+              <a:t>ข้อ 4 เป็นข้อที่คนใหม่พลาดบ่อยที่สุด เห็นหุ่นไม่ขยับแล้วคิดว่าเสีย ทั้งที่แค่ยังไม่ได้เลื่อนความเร็วขึ้นจากศูนย์
+ที่ตั้งให้เริ่มที่ 0 เพราะไม่อยากให้หุ่นพุ่งทันทีที่เปิดหน้าเว็บ</a:t>
             </a:r>
             <a:endParaRPr lang="en-US" dirty="0"/>
           </a:p>
@@ -1105,8 +1107,8 @@
           <a:p>
             <a:r>
               <a:rPr lang="en-US" dirty="0"/>
-              <a:t>ถ้าเปิดหน้าเว็บไม่ขึ้น ให้เช็กว่ามือถือต่อ Wi-Fi ชื่อ My_Robot2 อยู่จริงไหม
-มือถือบางรุ่นเห็นว่า Wi-Fi วงนี้ไม่มีอินเทอร์เน็ตแล้วแอบสลับกลับไปใช้เน็ตมือถือเอง ต้องเข้าไปปิดการสลับอัตโนมัติก่อน</a:t>
+              <a:t>ทุกหน้ายกเว้นหน้าสถานะเป็นรูปบิตแมปเต็มจอ 128x64 ที่วาดตัวหนังสือไว้ในรูปแล้ว
+ถ้าอยากเปลี่ยนรูป ให้แก้ไฟล์ PNG ใน assets/oled แล้วสั่ง py tools/png_to_bitmaps.py</a:t>
             </a:r>
             <a:endParaRPr lang="en-US" dirty="0"/>
           </a:p>
@@ -1194,8 +1196,8 @@
           <a:p>
             <a:r>
               <a:rPr lang="en-US" dirty="0"/>
-              <a:t>ที่แยกเซนเซอร์เป็นคอลัมน์ละดวง เพราะถ้ายุบเป็น 00100 ช่องเดียว Excel จะอ่านเป็นตัวเลขแล้วตัดศูนย์หน้าทิ้งจนเหลือ 100
-เอาคอลัมน์ Turn ไปพล็อตกราฟเทียบกับเวลา จะเห็นเลยว่าหุ่นออกแรงสู้ตรงไหนของสนามมากที่สุด</a:t>
+              <a:t>ถ้าเปิดหน้าเว็บไม่ขึ้น ให้เช็กว่ามือถือต่อ Wi-Fi ชื่อ My_Robot2 อยู่จริงไหม
+มือถือบางรุ่นเห็นว่า Wi-Fi วงนี้ไม่มีอินเทอร์เน็ตแล้วแอบสลับกลับไปใช้เน็ตมือถือเอง ต้องเข้าไปปิดการสลับอัตโนมัติก่อน</a:t>
             </a:r>
             <a:endParaRPr lang="en-US" dirty="0"/>
           </a:p>
@@ -1283,7 +1285,8 @@
           <a:p>
             <a:r>
               <a:rPr lang="en-US" dirty="0"/>
-              <a:t/>
+              <a:t>ที่แยกเซนเซอร์เป็นคอลัมน์ละดวง เพราะถ้ายุบเป็น 00100 ช่องเดียว Excel จะอ่านเป็นตัวเลขแล้วตัดศูนย์หน้าทิ้งจนเหลือ 100
+เอาคอลัมน์ Turn ไปพล็อตกราฟเทียบกับเวลา จะเห็นเลยว่าหุ่นออกแรงสู้ตรงไหนของสนามมากที่สุด</a:t>
             </a:r>
             <a:endParaRPr lang="en-US" dirty="0"/>
           </a:p>
@@ -1371,8 +1374,7 @@
           <a:p>
             <a:r>
               <a:rPr lang="en-US" dirty="0"/>
-              <a:t>ปรับทีละค่า แล้วลองวิ่งจริงทุกครั้ง อย่าปรับพร้อมกันหลายค่า เพราะจะแยกไม่ออกว่าอันไหนช่วย
-ค่า Kp กับ Kd ถูกเก็บลง CSV ทุกแถว เปิดไฟล์เก่ามาดูแล้วรู้ทันทีว่ารอบนั้นจูนด้วยค่าอะไร</a:t>
+              <a:t/>
             </a:r>
             <a:endParaRPr lang="en-US" dirty="0"/>
           </a:p>
@@ -1460,8 +1462,8 @@
           <a:p>
             <a:r>
               <a:rPr lang="en-US" dirty="0"/>
-              <a:t>การกวาดหาเส้นตั้งใจให้ช้ากว่าการเลี้ยวปกติ ถ้าหมุนเร็วเกิน เส้นจะวิ่งผ่านใต้แถวเซนเซอร์เร็วกว่าที่เซนเซอร์จะอ่านทัน แล้วหุ่นจะเลยจุดที่ข้ามเส้นไปแล้วโดยไม่รู้ตัว
-ทิศที่กวาดรอบแรกถูกเลือกครั้งเดียวตอนเริ่มหา ไม่คำนวณใหม่ระหว่างทาง ไม่งั้นจะกวาดไปทางเดิมซ้ำๆ แล้วเดินห่างจากเส้นออกไปเรื่อยๆ</a:t>
+              <a:t>ปรับทีละค่า แล้วลองวิ่งจริงทุกครั้ง อย่าปรับพร้อมกันหลายค่า เพราะจะแยกไม่ออกว่าอันไหนช่วย
+ค่า Kp กับ Kd ถูกเก็บลง CSV ทุกแถว เปิดไฟล์เก่ามาดูแล้วรู้ทันทีว่ารอบนั้นจูนด้วยค่าอะไร</a:t>
             </a:r>
             <a:endParaRPr lang="en-US" dirty="0"/>
           </a:p>
@@ -1638,8 +1640,8 @@
           <a:p>
             <a:r>
               <a:rPr lang="en-US" dirty="0"/>
-              <a:t>หน้านี้คือหน้าที่คนใหม่จะเปิดดูบ่อยที่สุด บอกให้เขาถ่ายรูปเก็บไว้ในมือถือได้เลย
-ทุกข้อในตารางนี้เคยเกิดขึ้นจริงมาแล้วทั้งหมด ไม่ใช่กรณีสมมติ</a:t>
+              <a:t>การกวาดหาเส้นตั้งใจให้ช้ากว่าการเลี้ยวปกติ ถ้าหมุนเร็วเกิน เส้นจะวิ่งผ่านใต้แถวเซนเซอร์เร็วกว่าที่เซนเซอร์จะอ่านทัน แล้วหุ่นจะเลยจุดที่ข้ามเส้นไปแล้วโดยไม่รู้ตัว
+ทิศที่กวาดรอบแรกถูกเลือกครั้งเดียวตอนเริ่มหา ไม่คำนวณใหม่ระหว่างทาง ไม่งั้นจะกวาดไปทางเดิมซ้ำๆ แล้วเดินห่างจากเส้นออกไปเรื่อยๆ</a:t>
             </a:r>
             <a:endParaRPr lang="en-US" dirty="0"/>
           </a:p>
@@ -1727,7 +1729,8 @@
           <a:p>
             <a:r>
               <a:rPr lang="en-US" dirty="0"/>
-              <a:t>แนะนำให้พิมพ์หน้านี้แปะไว้ข้างสนามทดสอบ</a:t>
+              <a:t>หน้านี้คือหน้าที่คนใหม่จะเปิดดูบ่อยที่สุด บอกให้เขาถ่ายรูปเก็บไว้ในมือถือได้เลย
+ทุกข้อในตารางนี้เคยเกิดขึ้นจริงมาแล้วทั้งหมด ไม่ใช่กรณีสมมติ</a:t>
             </a:r>
             <a:endParaRPr lang="en-US" dirty="0"/>
           </a:p>
@@ -1815,7 +1818,7 @@
           <a:p>
             <a:r>
               <a:rPr lang="en-US" dirty="0"/>
-              <a:t>ปิดท้ายด้วยการเปิด README.md ให้ดูจริงสักรอบ จะได้รู้ว่าเวลาติดปัญหาต้องไปเปิดที่ไหน</a:t>
+              <a:t>แนะนำให้พิมพ์หน้านี้แปะไว้ข้างสนามทดสอบ</a:t>
             </a:r>
             <a:endParaRPr lang="en-US" dirty="0"/>
           </a:p>
@@ -1839,6 +1842,94 @@
             <a:fld id="{F7021451-1387-4CA6-816F-3879F97B5CBC}" type="slidenum">
               <a:rPr lang="en-US"/>
               <a:t>22</a:t>
+            </a:fld>
+            <a:endParaRPr lang="en-US"/>
+          </a:p>
+        </p:txBody>
+      </p:sp>
+    </p:spTree>
+    <p:extLst>
+      <p:ext uri="{BB962C8B-B14F-4D97-AF65-F5344CB8AC3E}">
+        <p14:creationId xmlns:p14="http://schemas.microsoft.com/office/powerpoint/2010/main" val="1024086991"/>
+      </p:ext>
+    </p:extLst>
+  </p:cSld>
+  <p:clrMapOvr>
+    <a:masterClrMapping/>
+  </p:clrMapOvr>
+</p:notes>
+</file>
+
+<file path=ppt/notesSlides/notesSlide23.xml><?xml version="1.0" encoding="utf-8"?>
+<p:notes xmlns:a="http://schemas.openxmlformats.org/drawingml/2006/main" xmlns:r="http://schemas.openxmlformats.org/officeDocument/2006/relationships" xmlns:p="http://schemas.openxmlformats.org/presentationml/2006/main">
+  <p:cSld>
+    <p:spTree>
+      <p:nvGrpSpPr>
+        <p:cNvPr id="1" name=""/>
+        <p:cNvGrpSpPr/>
+        <p:nvPr/>
+      </p:nvGrpSpPr>
+      <p:grpSpPr>
+        <a:xfrm>
+          <a:off x="0" y="0"/>
+          <a:ext cx="0" cy="0"/>
+          <a:chOff x="0" y="0"/>
+          <a:chExt cx="0" cy="0"/>
+        </a:xfrm>
+      </p:grpSpPr>
+      <p:sp>
+        <p:nvSpPr>
+          <p:cNvPr id="2" name="Slide Image Placeholder 1"/>
+          <p:cNvSpPr>
+            <a:spLocks noGrp="1" noRot="1" noChangeAspect="1"/>
+          </p:cNvSpPr>
+          <p:nvPr>
+            <p:ph type="sldImg"/>
+          </p:nvPr>
+        </p:nvSpPr>
+        <p:spPr/>
+      </p:sp>
+      <p:sp>
+        <p:nvSpPr>
+          <p:cNvPr id="3" name="Notes Placeholder 2"/>
+          <p:cNvSpPr>
+            <a:spLocks noGrp="1"/>
+          </p:cNvSpPr>
+          <p:nvPr>
+            <p:ph type="body" idx="1"/>
+          </p:nvPr>
+        </p:nvSpPr>
+        <p:spPr/>
+        <p:txBody>
+          <a:bodyPr/>
+          <a:lstStyle/>
+          <a:p>
+            <a:r>
+              <a:rPr lang="en-US" dirty="0"/>
+              <a:t>ปิดท้ายด้วยการเปิด README.md ให้ดูจริงสักรอบ จะได้รู้ว่าเวลาติดปัญหาต้องไปเปิดที่ไหน</a:t>
+            </a:r>
+            <a:endParaRPr lang="en-US" dirty="0"/>
+          </a:p>
+        </p:txBody>
+      </p:sp>
+      <p:sp>
+        <p:nvSpPr>
+          <p:cNvPr id="4" name="Slide Number Placeholder 3"/>
+          <p:cNvSpPr>
+            <a:spLocks noGrp="1"/>
+          </p:cNvSpPr>
+          <p:nvPr>
+            <p:ph type="sldNum" sz="quarter" idx="10"/>
+          </p:nvPr>
+        </p:nvSpPr>
+        <p:spPr/>
+        <p:txBody>
+          <a:bodyPr/>
+          <a:lstStyle/>
+          <a:p>
+            <a:fld id="{F7021451-1387-4CA6-816F-3879F97B5CBC}" type="slidenum">
+              <a:rPr lang="en-US"/>
+              <a:t>23</a:t>
             </a:fld>
             <a:endParaRPr lang="en-US"/>
           </a:p>
@@ -5938,13 +6029,13 @@
           <p:cNvPr id="2" name="Text 0"/>
           <p:cNvSpPr/>
           <p:nvPr>
-            <p:ph idx="100" type="body" hasCustomPrompt="1"/>
+            <p:ph idx="100" type="title" hasCustomPrompt="1"/>
           </p:nvPr>
         </p:nvSpPr>
         <p:spPr>
           <a:xfrm>
-            <a:off x="548640" y="2377440"/>
-            <a:ext cx="11064240" cy="457200"/>
+            <a:off x="548640" y="384048"/>
+            <a:ext cx="11064240" cy="685800"/>
           </a:xfrm>
           <a:prstGeom prst="rect">
             <a:avLst/>
@@ -5960,29 +6051,52 @@
               <a:buNone/>
             </a:pPr>
             <a:r>
-              <a:rPr lang="en-US" sz="6000" b="1" dirty="0">
-                <a:solidFill>
-                  <a:srgbClr val="E8803A"/>
+              <a:rPr lang="en-US" sz="3200" b="1" dirty="0">
+                <a:solidFill>
+                  <a:schemeClr val="tx1"/>
                 </a:solidFill>
               </a:rPr>
-              <a:t>02</a:t>
-            </a:r>
-            <a:endParaRPr lang="en-US" sz="6000" dirty="0"/>
-          </a:p>
-        </p:txBody>
-      </p:sp>
-      <p:sp>
-        <p:nvSpPr>
-          <p:cNvPr id="3" name="Text 0"/>
+              <a:t>อัปด้วย CubeProgrammer โดยไม่ผ่าน IDE</a:t>
+            </a:r>
+            <a:endParaRPr lang="en-US" sz="3200" dirty="0"/>
+          </a:p>
+        </p:txBody>
+      </p:sp>
+      <p:sp>
+        <p:nvSpPr>
+          <p:cNvPr id="3" name="dot-1"/>
           <p:cNvSpPr/>
-          <p:nvPr>
-            <p:ph idx="101" type="title" hasCustomPrompt="1"/>
-          </p:nvPr>
-        </p:nvSpPr>
-        <p:spPr>
-          <a:xfrm>
-            <a:off x="548640" y="3200400"/>
-            <a:ext cx="11064240" cy="914400"/>
+          <p:nvPr/>
+        </p:nvSpPr>
+        <p:spPr>
+          <a:xfrm>
+            <a:off x="548640" y="1417320"/>
+            <a:ext cx="475488" cy="475488"/>
+          </a:xfrm>
+          <a:prstGeom prst="ellipse">
+            <a:avLst/>
+          </a:prstGeom>
+          <a:solidFill>
+            <a:srgbClr val="E8803A"/>
+          </a:solidFill>
+          <a:ln w="12700">
+            <a:solidFill>
+              <a:srgbClr val="E8803A"/>
+            </a:solidFill>
+            <a:prstDash val="solid"/>
+          </a:ln>
+        </p:spPr>
+      </p:sp>
+      <p:sp>
+        <p:nvSpPr>
+          <p:cNvPr id="4" name="Text 2"/>
+          <p:cNvSpPr txBox="1"/>
+          <p:nvPr/>
+        </p:nvSpPr>
+        <p:spPr>
+          <a:xfrm>
+            <a:off x="548640" y="1417320"/>
+            <a:ext cx="475488" cy="475488"/>
           </a:xfrm>
           <a:prstGeom prst="rect">
             <a:avLst/>
@@ -5991,36 +6105,70 @@
           <a:ln/>
         </p:spPr>
         <p:txBody>
-          <a:bodyPr wrap="square" rtlCol="0"/>
+          <a:bodyPr wrap="square" lIns="0" tIns="0" rIns="0" bIns="0" rtlCol="0" anchor="ctr"/>
+          <a:lstStyle/>
+          <a:p>
+            <a:pPr algn="ctr" indent="0" marL="0">
+              <a:buNone/>
+            </a:pPr>
+            <a:r>
+              <a:rPr lang="en-US" sz="1500" b="1" dirty="0">
+                <a:solidFill>
+                  <a:srgbClr val="FFFFFF"/>
+                </a:solidFill>
+              </a:rPr>
+              <a:t>1</a:t>
+            </a:r>
+            <a:endParaRPr lang="en-US" sz="1500" dirty="0"/>
+          </a:p>
+        </p:txBody>
+      </p:sp>
+      <p:sp>
+        <p:nvSpPr>
+          <p:cNvPr id="5" name="Text 3"/>
+          <p:cNvSpPr txBox="1"/>
+          <p:nvPr/>
+        </p:nvSpPr>
+        <p:spPr>
+          <a:xfrm>
+            <a:off x="1207008" y="1399032"/>
+            <a:ext cx="4553712" cy="301752"/>
+          </a:xfrm>
+          <a:prstGeom prst="rect">
+            <a:avLst/>
+          </a:prstGeom>
+          <a:noFill/>
+          <a:ln/>
+        </p:spPr>
+        <p:txBody>
+          <a:bodyPr wrap="square" lIns="0" tIns="0" rIns="0" bIns="0" rtlCol="0" anchor="t"/>
           <a:lstStyle/>
           <a:p>
             <a:pPr algn="l" indent="0" marL="0">
               <a:buNone/>
             </a:pPr>
             <a:r>
-              <a:rPr lang="en-US" sz="4000" b="1" dirty="0">
-                <a:solidFill>
-                  <a:schemeClr val="bg1"/>
+              <a:rPr lang="en-US" sz="1600" b="1" dirty="0">
+                <a:solidFill>
+                  <a:schemeClr val="tx1"/>
                 </a:solidFill>
               </a:rPr>
-              <a:t>เปิดใช้งานจริง</a:t>
-            </a:r>
-            <a:endParaRPr lang="en-US" sz="4000" dirty="0"/>
-          </a:p>
-        </p:txBody>
-      </p:sp>
-      <p:sp>
-        <p:nvSpPr>
-          <p:cNvPr id="4" name="Text 0"/>
-          <p:cNvSpPr/>
-          <p:nvPr>
-            <p:ph idx="102" type="body" hasCustomPrompt="1"/>
-          </p:nvPr>
-        </p:nvSpPr>
-        <p:spPr>
-          <a:xfrm>
-            <a:off x="548640" y="4206240"/>
-            <a:ext cx="8686800" cy="914400"/>
+              <a:t>เอาไฟล์ออกมาจาก IDE ก่อน</a:t>
+            </a:r>
+            <a:endParaRPr lang="en-US" sz="1600" dirty="0"/>
+          </a:p>
+        </p:txBody>
+      </p:sp>
+      <p:sp>
+        <p:nvSpPr>
+          <p:cNvPr id="6" name="Text 4"/>
+          <p:cNvSpPr txBox="1"/>
+          <p:nvPr/>
+        </p:nvSpPr>
+        <p:spPr>
+          <a:xfrm>
+            <a:off x="1207008" y="1728216"/>
+            <a:ext cx="4553712" cy="822960"/>
           </a:xfrm>
           <a:prstGeom prst="rect">
             <a:avLst/>
@@ -6029,21 +6177,1230 @@
           <a:ln/>
         </p:spPr>
         <p:txBody>
-          <a:bodyPr wrap="square" rtlCol="0"/>
+          <a:bodyPr wrap="square" lIns="0" tIns="0" rIns="0" bIns="0" rtlCol="0" anchor="t"/>
+          <a:lstStyle/>
+          <a:p>
+            <a:pPr algn="l" indent="0" marL="0">
+              <a:lnSpc>
+                <a:spcPct val="125000"/>
+              </a:lnSpc>
+              <a:buNone/>
+            </a:pPr>
+            <a:r>
+              <a:rPr lang="en-US" sz="1300" dirty="0">
+                <a:solidFill>
+                  <a:srgbClr val="4A5568"/>
+                </a:solidFill>
+              </a:rPr>
+              <a:t>กด Sketch &gt; Export Compiled Binary  เพราะ CubeProgrammer คอมไพล์ไม่เป็น ทำได้แค่เอาไฟล์ที่เสร็จแล้วยัดลงชิป</a:t>
+            </a:r>
+            <a:endParaRPr lang="en-US" sz="1300" dirty="0"/>
+          </a:p>
+        </p:txBody>
+      </p:sp>
+      <p:sp>
+        <p:nvSpPr>
+          <p:cNvPr id="7" name="Text 5"/>
+          <p:cNvSpPr txBox="1"/>
+          <p:nvPr/>
+        </p:nvSpPr>
+        <p:spPr>
+          <a:xfrm>
+            <a:off x="1207008" y="2606040"/>
+            <a:ext cx="4572000" cy="548640"/>
+          </a:xfrm>
+          <a:prstGeom prst="rect">
+            <a:avLst/>
+          </a:prstGeom>
+          <a:noFill/>
+          <a:ln/>
+        </p:spPr>
+        <p:txBody>
+          <a:bodyPr wrap="square" lIns="0" tIns="0" rIns="0" bIns="0" rtlCol="0" anchor="t"/>
+          <a:lstStyle/>
+          <a:p>
+            <a:pPr algn="l" indent="0" marL="0">
+              <a:lnSpc>
+                <a:spcPct val="120000"/>
+              </a:lnSpc>
+              <a:buNone/>
+            </a:pPr>
+            <a:r>
+              <a:rPr lang="en-US" sz="1050" dirty="0">
+                <a:solidFill>
+                  <a:srgbClr val="1C7293"/>
+                </a:solidFill>
+                <a:latin typeface="Courier New" pitchFamily="34" charset="0"/>
+                <a:ea typeface="Courier New" pitchFamily="34" charset="-122"/>
+                <a:cs typeface="Courier New" pitchFamily="34" charset="-120"/>
+              </a:rPr>
+              <a:t>stm32_robot_controller\build\</a:t>
+            </a:r>
+            <a:endParaRPr lang="en-US" sz="1050" dirty="0"/>
+          </a:p>
+          <a:p>
+            <a:pPr algn="l" indent="0" marL="0">
+              <a:lnSpc>
+                <a:spcPct val="120000"/>
+              </a:lnSpc>
+              <a:buNone/>
+            </a:pPr>
+            <a:r>
+              <a:rPr lang="en-US" sz="1050" dirty="0">
+                <a:solidFill>
+                  <a:srgbClr val="1C7293"/>
+                </a:solidFill>
+                <a:latin typeface="Courier New" pitchFamily="34" charset="0"/>
+                <a:ea typeface="Courier New" pitchFamily="34" charset="-122"/>
+                <a:cs typeface="Courier New" pitchFamily="34" charset="-120"/>
+              </a:rPr>
+              <a:t>STMicroelectronics.stm32.GenF1\</a:t>
+            </a:r>
+            <a:endParaRPr lang="en-US" sz="1050" dirty="0"/>
+          </a:p>
+        </p:txBody>
+      </p:sp>
+      <p:sp>
+        <p:nvSpPr>
+          <p:cNvPr id="8" name="dot-2"/>
+          <p:cNvSpPr/>
+          <p:nvPr/>
+        </p:nvSpPr>
+        <p:spPr>
+          <a:xfrm>
+            <a:off x="548640" y="3291840"/>
+            <a:ext cx="475488" cy="475488"/>
+          </a:xfrm>
+          <a:prstGeom prst="ellipse">
+            <a:avLst/>
+          </a:prstGeom>
+          <a:solidFill>
+            <a:srgbClr val="E8803A"/>
+          </a:solidFill>
+          <a:ln w="12700">
+            <a:solidFill>
+              <a:srgbClr val="E8803A"/>
+            </a:solidFill>
+            <a:prstDash val="solid"/>
+          </a:ln>
+        </p:spPr>
+      </p:sp>
+      <p:sp>
+        <p:nvSpPr>
+          <p:cNvPr id="9" name="Text 7"/>
+          <p:cNvSpPr txBox="1"/>
+          <p:nvPr/>
+        </p:nvSpPr>
+        <p:spPr>
+          <a:xfrm>
+            <a:off x="548640" y="3291840"/>
+            <a:ext cx="475488" cy="475488"/>
+          </a:xfrm>
+          <a:prstGeom prst="rect">
+            <a:avLst/>
+          </a:prstGeom>
+          <a:noFill/>
+          <a:ln/>
+        </p:spPr>
+        <p:txBody>
+          <a:bodyPr wrap="square" lIns="0" tIns="0" rIns="0" bIns="0" rtlCol="0" anchor="ctr"/>
+          <a:lstStyle/>
+          <a:p>
+            <a:pPr algn="ctr" indent="0" marL="0">
+              <a:buNone/>
+            </a:pPr>
+            <a:r>
+              <a:rPr lang="en-US" sz="1500" b="1" dirty="0">
+                <a:solidFill>
+                  <a:srgbClr val="FFFFFF"/>
+                </a:solidFill>
+              </a:rPr>
+              <a:t>2</a:t>
+            </a:r>
+            <a:endParaRPr lang="en-US" sz="1500" dirty="0"/>
+          </a:p>
+        </p:txBody>
+      </p:sp>
+      <p:sp>
+        <p:nvSpPr>
+          <p:cNvPr id="10" name="Text 8"/>
+          <p:cNvSpPr txBox="1"/>
+          <p:nvPr/>
+        </p:nvSpPr>
+        <p:spPr>
+          <a:xfrm>
+            <a:off x="1207008" y="3273552"/>
+            <a:ext cx="4553712" cy="301752"/>
+          </a:xfrm>
+          <a:prstGeom prst="rect">
+            <a:avLst/>
+          </a:prstGeom>
+          <a:noFill/>
+          <a:ln/>
+        </p:spPr>
+        <p:txBody>
+          <a:bodyPr wrap="square" lIns="0" tIns="0" rIns="0" bIns="0" rtlCol="0" anchor="t"/>
           <a:lstStyle/>
           <a:p>
             <a:pPr algn="l" indent="0" marL="0">
               <a:buNone/>
             </a:pPr>
             <a:r>
-              <a:rPr lang="en-US" sz="1600" dirty="0">
-                <a:solidFill>
-                  <a:srgbClr val="B9C6D4"/>
+              <a:rPr lang="en-US" sz="1600" b="1" dirty="0">
+                <a:solidFill>
+                  <a:schemeClr val="tx1"/>
                 </a:solidFill>
               </a:rPr>
-              <a:t>ลำดับการเปิด สิ่งที่เห็นบนจอ หน้าเว็บควบคุม และข้อมูลที่เก็บได้</a:t>
+              <a:t>แล้วสั่งเขียนลงชิป</a:t>
             </a:r>
             <a:endParaRPr lang="en-US" sz="1600" dirty="0"/>
+          </a:p>
+        </p:txBody>
+      </p:sp>
+      <p:sp>
+        <p:nvSpPr>
+          <p:cNvPr id="11" name="Text 9"/>
+          <p:cNvSpPr txBox="1"/>
+          <p:nvPr/>
+        </p:nvSpPr>
+        <p:spPr>
+          <a:xfrm>
+            <a:off x="1207008" y="3602736"/>
+            <a:ext cx="4553712" cy="822960"/>
+          </a:xfrm>
+          <a:prstGeom prst="rect">
+            <a:avLst/>
+          </a:prstGeom>
+          <a:noFill/>
+          <a:ln/>
+        </p:spPr>
+        <p:txBody>
+          <a:bodyPr wrap="square" lIns="0" tIns="0" rIns="0" bIns="0" rtlCol="0" anchor="t"/>
+          <a:lstStyle/>
+          <a:p>
+            <a:pPr algn="l" indent="0" marL="0">
+              <a:lnSpc>
+                <a:spcPct val="125000"/>
+              </a:lnSpc>
+              <a:buNone/>
+            </a:pPr>
+            <a:r>
+              <a:rPr lang="en-US" sz="1300" dirty="0">
+                <a:solidFill>
+                  <a:srgbClr val="4A5568"/>
+                </a:solidFill>
+              </a:rPr>
+              <a:t>ต่อ ST-Link ไว้เหมือนเดิม แล้วพิมพ์คำสั่งข้างล่างนี้</a:t>
+            </a:r>
+            <a:endParaRPr lang="en-US" sz="1300" dirty="0"/>
+          </a:p>
+        </p:txBody>
+      </p:sp>
+      <p:sp>
+        <p:nvSpPr>
+          <p:cNvPr id="12" name="cmd-box"/>
+          <p:cNvSpPr/>
+          <p:nvPr/>
+        </p:nvSpPr>
+        <p:spPr>
+          <a:xfrm>
+            <a:off x="548640" y="4069080"/>
+            <a:ext cx="5212080" cy="1051560"/>
+          </a:xfrm>
+          <a:prstGeom prst="roundRect">
+            <a:avLst>
+              <a:gd name="adj" fmla="val 8696"/>
+            </a:avLst>
+          </a:prstGeom>
+          <a:solidFill>
+            <a:schemeClr val="tx1"/>
+          </a:solidFill>
+          <a:ln w="12700">
+            <a:solidFill>
+              <a:schemeClr val="tx1"/>
+            </a:solidFill>
+            <a:prstDash val="solid"/>
+          </a:ln>
+        </p:spPr>
+      </p:sp>
+      <p:sp>
+        <p:nvSpPr>
+          <p:cNvPr id="13" name="Text 11"/>
+          <p:cNvSpPr txBox="1"/>
+          <p:nvPr/>
+        </p:nvSpPr>
+        <p:spPr>
+          <a:xfrm>
+            <a:off x="804672" y="4224528"/>
+            <a:ext cx="4700016" cy="822960"/>
+          </a:xfrm>
+          <a:prstGeom prst="rect">
+            <a:avLst/>
+          </a:prstGeom>
+          <a:noFill/>
+          <a:ln/>
+        </p:spPr>
+        <p:txBody>
+          <a:bodyPr wrap="square" lIns="0" tIns="0" rIns="0" bIns="0" rtlCol="0" anchor="t"/>
+          <a:lstStyle/>
+          <a:p>
+            <a:pPr algn="l" indent="0" marL="0">
+              <a:lnSpc>
+                <a:spcPct val="120000"/>
+              </a:lnSpc>
+              <a:buNone/>
+            </a:pPr>
+            <a:r>
+              <a:rPr lang="en-US" sz="1100" dirty="0">
+                <a:solidFill>
+                  <a:srgbClr val="E8803A"/>
+                </a:solidFill>
+                <a:latin typeface="Courier New" pitchFamily="34" charset="0"/>
+                <a:ea typeface="Courier New" pitchFamily="34" charset="-122"/>
+                <a:cs typeface="Courier New" pitchFamily="34" charset="-120"/>
+              </a:rPr>
+              <a:t>STM32_Programmer_CLI.exe -c port=SWD</a:t>
+            </a:r>
+            <a:endParaRPr lang="en-US" sz="1100" dirty="0"/>
+          </a:p>
+          <a:p>
+            <a:pPr algn="l" indent="0" marL="0">
+              <a:lnSpc>
+                <a:spcPct val="120000"/>
+              </a:lnSpc>
+              <a:buNone/>
+            </a:pPr>
+            <a:r>
+              <a:rPr lang="en-US" sz="1100" dirty="0">
+                <a:solidFill>
+                  <a:srgbClr val="E8803A"/>
+                </a:solidFill>
+                <a:latin typeface="Courier New" pitchFamily="34" charset="0"/>
+                <a:ea typeface="Courier New" pitchFamily="34" charset="-122"/>
+                <a:cs typeface="Courier New" pitchFamily="34" charset="-120"/>
+              </a:rPr>
+              <a:t>   mode=UR -w firmware.bin 0x08000000</a:t>
+            </a:r>
+            <a:endParaRPr lang="en-US" sz="1100" dirty="0"/>
+          </a:p>
+          <a:p>
+            <a:pPr algn="l" indent="0" marL="0">
+              <a:lnSpc>
+                <a:spcPct val="120000"/>
+              </a:lnSpc>
+              <a:buNone/>
+            </a:pPr>
+            <a:r>
+              <a:rPr lang="en-US" sz="1100" dirty="0">
+                <a:solidFill>
+                  <a:srgbClr val="E8803A"/>
+                </a:solidFill>
+                <a:latin typeface="Courier New" pitchFamily="34" charset="0"/>
+                <a:ea typeface="Courier New" pitchFamily="34" charset="-122"/>
+                <a:cs typeface="Courier New" pitchFamily="34" charset="-120"/>
+              </a:rPr>
+              <a:t>   -v -rst</a:t>
+            </a:r>
+            <a:endParaRPr lang="en-US" sz="1100" dirty="0"/>
+          </a:p>
+        </p:txBody>
+      </p:sp>
+      <p:graphicFrame>
+        <p:nvGraphicFramePr>
+          <p:cNvPr id="13" name="Table 0"/>
+          <p:cNvGraphicFramePr>
+            <a:graphicFrameLocks noGrp="1"/>
+          </p:cNvGraphicFramePr>
+          <p:nvPr>
+            <p:extLst>
+              <p:ext uri="{D42A27DB-BD31-4B8C-83A1-F6EECF244321}">
+                <p14:modId xmlns:p14="http://schemas.microsoft.com/office/powerpoint/2010/main" val="1579011935"/>
+              </p:ext>
+            </p:extLst>
+          </p:nvPr>
+        </p:nvGraphicFramePr>
+        <p:xfrm>
+          <a:off x="6309360" y="1371600"/>
+          <a:ext cx="5303520" cy="914400"/>
+        </p:xfrm>
+        <a:graphic>
+          <a:graphicData uri="http://schemas.openxmlformats.org/drawingml/2006/table">
+            <a:tbl>
+              <a:tblPr/>
+              <a:tblGrid>
+                <a:gridCol w="2377440"/>
+                <a:gridCol w="2926080"/>
+              </a:tblGrid>
+              <a:tr h="0">
+                <a:tc>
+                  <a:txBody>
+                    <a:bodyPr/>
+                    <a:lstStyle/>
+                    <a:p>
+                      <a:pPr indent="0" marL="0">
+                        <a:buNone/>
+                      </a:pPr>
+                      <a:r>
+                        <a:rPr lang="en-US" sz="1300" b="1" dirty="0">
+                          <a:solidFill>
+                            <a:srgbClr val="FFFFFF"/>
+                          </a:solidFill>
+                        </a:rPr>
+                        <a:t>ส่วนของคำสั่ง</a:t>
+                      </a:r>
+                      <a:endParaRPr lang="en-US" sz="1300" dirty="0"/>
+                    </a:p>
+                  </a:txBody>
+                  <a:tcPr marL="82296" marR="82296" marT="82296" marB="82296" anchor="ctr">
+                    <a:lnL w="12700" cap="flat" cmpd="sng" algn="ctr">
+                      <a:solidFill>
+                        <a:srgbClr val="D9E0E8"/>
+                      </a:solidFill>
+                      <a:prstDash val="solid"/>
+                      <a:round/>
+                      <a:headEnd type="none" w="med" len="med"/>
+                      <a:tailEnd type="none" w="med" len="med"/>
+                    </a:lnL>
+                    <a:lnR w="12700" cap="flat" cmpd="sng" algn="ctr">
+                      <a:solidFill>
+                        <a:srgbClr val="D9E0E8"/>
+                      </a:solidFill>
+                      <a:prstDash val="solid"/>
+                      <a:round/>
+                      <a:headEnd type="none" w="med" len="med"/>
+                      <a:tailEnd type="none" w="med" len="med"/>
+                    </a:lnR>
+                    <a:lnT w="12700" cap="flat" cmpd="sng" algn="ctr">
+                      <a:solidFill>
+                        <a:srgbClr val="D9E0E8"/>
+                      </a:solidFill>
+                      <a:prstDash val="solid"/>
+                      <a:round/>
+                      <a:headEnd type="none" w="med" len="med"/>
+                      <a:tailEnd type="none" w="med" len="med"/>
+                    </a:lnT>
+                    <a:lnB w="12700" cap="flat" cmpd="sng" algn="ctr">
+                      <a:solidFill>
+                        <a:srgbClr val="D9E0E8"/>
+                      </a:solidFill>
+                      <a:prstDash val="solid"/>
+                      <a:round/>
+                      <a:headEnd type="none" w="med" len="med"/>
+                      <a:tailEnd type="none" w="med" len="med"/>
+                    </a:lnB>
+                    <a:solidFill>
+                      <a:srgbClr val="16202E"/>
+                    </a:solidFill>
+                  </a:tcPr>
+                </a:tc>
+                <a:tc>
+                  <a:txBody>
+                    <a:bodyPr/>
+                    <a:lstStyle/>
+                    <a:p>
+                      <a:pPr indent="0" marL="0">
+                        <a:buNone/>
+                      </a:pPr>
+                      <a:r>
+                        <a:rPr lang="en-US" sz="1300" b="1" dirty="0">
+                          <a:solidFill>
+                            <a:srgbClr val="FFFFFF"/>
+                          </a:solidFill>
+                        </a:rPr>
+                        <a:t>หมายถึง</a:t>
+                      </a:r>
+                      <a:endParaRPr lang="en-US" sz="1300" dirty="0"/>
+                    </a:p>
+                  </a:txBody>
+                  <a:tcPr marL="82296" marR="82296" marT="82296" marB="82296" anchor="ctr">
+                    <a:lnL w="12700" cap="flat" cmpd="sng" algn="ctr">
+                      <a:solidFill>
+                        <a:srgbClr val="D9E0E8"/>
+                      </a:solidFill>
+                      <a:prstDash val="solid"/>
+                      <a:round/>
+                      <a:headEnd type="none" w="med" len="med"/>
+                      <a:tailEnd type="none" w="med" len="med"/>
+                    </a:lnL>
+                    <a:lnR w="12700" cap="flat" cmpd="sng" algn="ctr">
+                      <a:solidFill>
+                        <a:srgbClr val="D9E0E8"/>
+                      </a:solidFill>
+                      <a:prstDash val="solid"/>
+                      <a:round/>
+                      <a:headEnd type="none" w="med" len="med"/>
+                      <a:tailEnd type="none" w="med" len="med"/>
+                    </a:lnR>
+                    <a:lnT w="12700" cap="flat" cmpd="sng" algn="ctr">
+                      <a:solidFill>
+                        <a:srgbClr val="D9E0E8"/>
+                      </a:solidFill>
+                      <a:prstDash val="solid"/>
+                      <a:round/>
+                      <a:headEnd type="none" w="med" len="med"/>
+                      <a:tailEnd type="none" w="med" len="med"/>
+                    </a:lnT>
+                    <a:lnB w="12700" cap="flat" cmpd="sng" algn="ctr">
+                      <a:solidFill>
+                        <a:srgbClr val="D9E0E8"/>
+                      </a:solidFill>
+                      <a:prstDash val="solid"/>
+                      <a:round/>
+                      <a:headEnd type="none" w="med" len="med"/>
+                      <a:tailEnd type="none" w="med" len="med"/>
+                    </a:lnB>
+                    <a:solidFill>
+                      <a:srgbClr val="16202E"/>
+                    </a:solidFill>
+                  </a:tcPr>
+                </a:tc>
+              </a:tr>
+              <a:tr h="0">
+                <a:tc>
+                  <a:txBody>
+                    <a:bodyPr/>
+                    <a:lstStyle/>
+                    <a:p>
+                      <a:pPr indent="0" marL="0">
+                        <a:buNone/>
+                      </a:pPr>
+                      <a:r>
+                        <a:rPr lang="en-US" sz="1200" b="1" dirty="0">
+                          <a:solidFill>
+                            <a:srgbClr val="16202E"/>
+                          </a:solidFill>
+                        </a:rPr>
+                        <a:t>-c port=SWD mode=UR</a:t>
+                      </a:r>
+                      <a:endParaRPr lang="en-US" sz="1200" dirty="0"/>
+                    </a:p>
+                  </a:txBody>
+                  <a:tcPr marL="82296" marR="82296" marT="82296" marB="82296" anchor="ctr">
+                    <a:lnL w="12700" cap="flat" cmpd="sng" algn="ctr">
+                      <a:solidFill>
+                        <a:srgbClr val="D9E0E8"/>
+                      </a:solidFill>
+                      <a:prstDash val="solid"/>
+                      <a:round/>
+                      <a:headEnd type="none" w="med" len="med"/>
+                      <a:tailEnd type="none" w="med" len="med"/>
+                    </a:lnL>
+                    <a:lnR w="12700" cap="flat" cmpd="sng" algn="ctr">
+                      <a:solidFill>
+                        <a:srgbClr val="D9E0E8"/>
+                      </a:solidFill>
+                      <a:prstDash val="solid"/>
+                      <a:round/>
+                      <a:headEnd type="none" w="med" len="med"/>
+                      <a:tailEnd type="none" w="med" len="med"/>
+                    </a:lnR>
+                    <a:lnT w="12700" cap="flat" cmpd="sng" algn="ctr">
+                      <a:solidFill>
+                        <a:srgbClr val="D9E0E8"/>
+                      </a:solidFill>
+                      <a:prstDash val="solid"/>
+                      <a:round/>
+                      <a:headEnd type="none" w="med" len="med"/>
+                      <a:tailEnd type="none" w="med" len="med"/>
+                    </a:lnT>
+                    <a:lnB w="12700" cap="flat" cmpd="sng" algn="ctr">
+                      <a:solidFill>
+                        <a:srgbClr val="D9E0E8"/>
+                      </a:solidFill>
+                      <a:prstDash val="solid"/>
+                      <a:round/>
+                      <a:headEnd type="none" w="med" len="med"/>
+                      <a:tailEnd type="none" w="med" len="med"/>
+                    </a:lnB>
+                    <a:solidFill>
+                      <a:srgbClr val="FFFFFF"/>
+                    </a:solidFill>
+                  </a:tcPr>
+                </a:tc>
+                <a:tc>
+                  <a:txBody>
+                    <a:bodyPr/>
+                    <a:lstStyle/>
+                    <a:p>
+                      <a:pPr indent="0" marL="0">
+                        <a:buNone/>
+                      </a:pPr>
+                      <a:r>
+                        <a:rPr lang="en-US" sz="1200" dirty="0">
+                          <a:solidFill>
+                            <a:srgbClr val="4A5568"/>
+                          </a:solidFill>
+                        </a:rPr>
+                        <a:t>ต่อผ่าน ST-Link</a:t>
+                      </a:r>
+                      <a:endParaRPr lang="en-US" sz="1200" dirty="0"/>
+                    </a:p>
+                  </a:txBody>
+                  <a:tcPr marL="82296" marR="82296" marT="82296" marB="82296" anchor="ctr">
+                    <a:lnL w="12700" cap="flat" cmpd="sng" algn="ctr">
+                      <a:solidFill>
+                        <a:srgbClr val="D9E0E8"/>
+                      </a:solidFill>
+                      <a:prstDash val="solid"/>
+                      <a:round/>
+                      <a:headEnd type="none" w="med" len="med"/>
+                      <a:tailEnd type="none" w="med" len="med"/>
+                    </a:lnL>
+                    <a:lnR w="12700" cap="flat" cmpd="sng" algn="ctr">
+                      <a:solidFill>
+                        <a:srgbClr val="D9E0E8"/>
+                      </a:solidFill>
+                      <a:prstDash val="solid"/>
+                      <a:round/>
+                      <a:headEnd type="none" w="med" len="med"/>
+                      <a:tailEnd type="none" w="med" len="med"/>
+                    </a:lnR>
+                    <a:lnT w="12700" cap="flat" cmpd="sng" algn="ctr">
+                      <a:solidFill>
+                        <a:srgbClr val="D9E0E8"/>
+                      </a:solidFill>
+                      <a:prstDash val="solid"/>
+                      <a:round/>
+                      <a:headEnd type="none" w="med" len="med"/>
+                      <a:tailEnd type="none" w="med" len="med"/>
+                    </a:lnT>
+                    <a:lnB w="12700" cap="flat" cmpd="sng" algn="ctr">
+                      <a:solidFill>
+                        <a:srgbClr val="D9E0E8"/>
+                      </a:solidFill>
+                      <a:prstDash val="solid"/>
+                      <a:round/>
+                      <a:headEnd type="none" w="med" len="med"/>
+                      <a:tailEnd type="none" w="med" len="med"/>
+                    </a:lnB>
+                    <a:solidFill>
+                      <a:srgbClr val="FFFFFF"/>
+                    </a:solidFill>
+                  </a:tcPr>
+                </a:tc>
+              </a:tr>
+              <a:tr h="0">
+                <a:tc>
+                  <a:txBody>
+                    <a:bodyPr/>
+                    <a:lstStyle/>
+                    <a:p>
+                      <a:pPr indent="0" marL="0">
+                        <a:buNone/>
+                      </a:pPr>
+                      <a:r>
+                        <a:rPr lang="en-US" sz="1200" b="1" dirty="0">
+                          <a:solidFill>
+                            <a:srgbClr val="16202E"/>
+                          </a:solidFill>
+                        </a:rPr>
+                        <a:t>-w ไฟล์ 0x08000000</a:t>
+                      </a:r>
+                      <a:endParaRPr lang="en-US" sz="1200" dirty="0"/>
+                    </a:p>
+                  </a:txBody>
+                  <a:tcPr marL="82296" marR="82296" marT="82296" marB="82296" anchor="ctr">
+                    <a:lnL w="12700" cap="flat" cmpd="sng" algn="ctr">
+                      <a:solidFill>
+                        <a:srgbClr val="D9E0E8"/>
+                      </a:solidFill>
+                      <a:prstDash val="solid"/>
+                      <a:round/>
+                      <a:headEnd type="none" w="med" len="med"/>
+                      <a:tailEnd type="none" w="med" len="med"/>
+                    </a:lnL>
+                    <a:lnR w="12700" cap="flat" cmpd="sng" algn="ctr">
+                      <a:solidFill>
+                        <a:srgbClr val="D9E0E8"/>
+                      </a:solidFill>
+                      <a:prstDash val="solid"/>
+                      <a:round/>
+                      <a:headEnd type="none" w="med" len="med"/>
+                      <a:tailEnd type="none" w="med" len="med"/>
+                    </a:lnR>
+                    <a:lnT w="12700" cap="flat" cmpd="sng" algn="ctr">
+                      <a:solidFill>
+                        <a:srgbClr val="D9E0E8"/>
+                      </a:solidFill>
+                      <a:prstDash val="solid"/>
+                      <a:round/>
+                      <a:headEnd type="none" w="med" len="med"/>
+                      <a:tailEnd type="none" w="med" len="med"/>
+                    </a:lnT>
+                    <a:lnB w="12700" cap="flat" cmpd="sng" algn="ctr">
+                      <a:solidFill>
+                        <a:srgbClr val="D9E0E8"/>
+                      </a:solidFill>
+                      <a:prstDash val="solid"/>
+                      <a:round/>
+                      <a:headEnd type="none" w="med" len="med"/>
+                      <a:tailEnd type="none" w="med" len="med"/>
+                    </a:lnB>
+                    <a:solidFill>
+                      <a:srgbClr val="FFFFFF"/>
+                    </a:solidFill>
+                  </a:tcPr>
+                </a:tc>
+                <a:tc>
+                  <a:txBody>
+                    <a:bodyPr/>
+                    <a:lstStyle/>
+                    <a:p>
+                      <a:pPr indent="0" marL="0">
+                        <a:buNone/>
+                      </a:pPr>
+                      <a:r>
+                        <a:rPr lang="en-US" sz="1200" dirty="0">
+                          <a:solidFill>
+                            <a:srgbClr val="4A5568"/>
+                          </a:solidFill>
+                        </a:rPr>
+                        <a:t>เขียนลงที่อยู่เริ่มต้นของแฟลช</a:t>
+                      </a:r>
+                      <a:endParaRPr lang="en-US" sz="1200" dirty="0"/>
+                    </a:p>
+                  </a:txBody>
+                  <a:tcPr marL="82296" marR="82296" marT="82296" marB="82296" anchor="ctr">
+                    <a:lnL w="12700" cap="flat" cmpd="sng" algn="ctr">
+                      <a:solidFill>
+                        <a:srgbClr val="D9E0E8"/>
+                      </a:solidFill>
+                      <a:prstDash val="solid"/>
+                      <a:round/>
+                      <a:headEnd type="none" w="med" len="med"/>
+                      <a:tailEnd type="none" w="med" len="med"/>
+                    </a:lnL>
+                    <a:lnR w="12700" cap="flat" cmpd="sng" algn="ctr">
+                      <a:solidFill>
+                        <a:srgbClr val="D9E0E8"/>
+                      </a:solidFill>
+                      <a:prstDash val="solid"/>
+                      <a:round/>
+                      <a:headEnd type="none" w="med" len="med"/>
+                      <a:tailEnd type="none" w="med" len="med"/>
+                    </a:lnR>
+                    <a:lnT w="12700" cap="flat" cmpd="sng" algn="ctr">
+                      <a:solidFill>
+                        <a:srgbClr val="D9E0E8"/>
+                      </a:solidFill>
+                      <a:prstDash val="solid"/>
+                      <a:round/>
+                      <a:headEnd type="none" w="med" len="med"/>
+                      <a:tailEnd type="none" w="med" len="med"/>
+                    </a:lnT>
+                    <a:lnB w="12700" cap="flat" cmpd="sng" algn="ctr">
+                      <a:solidFill>
+                        <a:srgbClr val="D9E0E8"/>
+                      </a:solidFill>
+                      <a:prstDash val="solid"/>
+                      <a:round/>
+                      <a:headEnd type="none" w="med" len="med"/>
+                      <a:tailEnd type="none" w="med" len="med"/>
+                    </a:lnB>
+                    <a:solidFill>
+                      <a:srgbClr val="FFFFFF"/>
+                    </a:solidFill>
+                  </a:tcPr>
+                </a:tc>
+              </a:tr>
+              <a:tr h="0">
+                <a:tc>
+                  <a:txBody>
+                    <a:bodyPr/>
+                    <a:lstStyle/>
+                    <a:p>
+                      <a:pPr indent="0" marL="0">
+                        <a:buNone/>
+                      </a:pPr>
+                      <a:r>
+                        <a:rPr lang="en-US" sz="1200" b="1" dirty="0">
+                          <a:solidFill>
+                            <a:srgbClr val="16202E"/>
+                          </a:solidFill>
+                        </a:rPr>
+                        <a:t>-v</a:t>
+                      </a:r>
+                      <a:endParaRPr lang="en-US" sz="1200" dirty="0"/>
+                    </a:p>
+                  </a:txBody>
+                  <a:tcPr marL="82296" marR="82296" marT="82296" marB="82296" anchor="ctr">
+                    <a:lnL w="12700" cap="flat" cmpd="sng" algn="ctr">
+                      <a:solidFill>
+                        <a:srgbClr val="D9E0E8"/>
+                      </a:solidFill>
+                      <a:prstDash val="solid"/>
+                      <a:round/>
+                      <a:headEnd type="none" w="med" len="med"/>
+                      <a:tailEnd type="none" w="med" len="med"/>
+                    </a:lnL>
+                    <a:lnR w="12700" cap="flat" cmpd="sng" algn="ctr">
+                      <a:solidFill>
+                        <a:srgbClr val="D9E0E8"/>
+                      </a:solidFill>
+                      <a:prstDash val="solid"/>
+                      <a:round/>
+                      <a:headEnd type="none" w="med" len="med"/>
+                      <a:tailEnd type="none" w="med" len="med"/>
+                    </a:lnR>
+                    <a:lnT w="12700" cap="flat" cmpd="sng" algn="ctr">
+                      <a:solidFill>
+                        <a:srgbClr val="D9E0E8"/>
+                      </a:solidFill>
+                      <a:prstDash val="solid"/>
+                      <a:round/>
+                      <a:headEnd type="none" w="med" len="med"/>
+                      <a:tailEnd type="none" w="med" len="med"/>
+                    </a:lnT>
+                    <a:lnB w="12700" cap="flat" cmpd="sng" algn="ctr">
+                      <a:solidFill>
+                        <a:srgbClr val="D9E0E8"/>
+                      </a:solidFill>
+                      <a:prstDash val="solid"/>
+                      <a:round/>
+                      <a:headEnd type="none" w="med" len="med"/>
+                      <a:tailEnd type="none" w="med" len="med"/>
+                    </a:lnB>
+                    <a:solidFill>
+                      <a:srgbClr val="FFFFFF"/>
+                    </a:solidFill>
+                  </a:tcPr>
+                </a:tc>
+                <a:tc>
+                  <a:txBody>
+                    <a:bodyPr/>
+                    <a:lstStyle/>
+                    <a:p>
+                      <a:pPr indent="0" marL="0">
+                        <a:buNone/>
+                      </a:pPr>
+                      <a:r>
+                        <a:rPr lang="en-US" sz="1200" dirty="0">
+                          <a:solidFill>
+                            <a:srgbClr val="4A5568"/>
+                          </a:solidFill>
+                        </a:rPr>
+                        <a:t>อ่านกลับมาเทียบว่าตรงไหม</a:t>
+                      </a:r>
+                      <a:endParaRPr lang="en-US" sz="1200" dirty="0"/>
+                    </a:p>
+                  </a:txBody>
+                  <a:tcPr marL="82296" marR="82296" marT="82296" marB="82296" anchor="ctr">
+                    <a:lnL w="12700" cap="flat" cmpd="sng" algn="ctr">
+                      <a:solidFill>
+                        <a:srgbClr val="D9E0E8"/>
+                      </a:solidFill>
+                      <a:prstDash val="solid"/>
+                      <a:round/>
+                      <a:headEnd type="none" w="med" len="med"/>
+                      <a:tailEnd type="none" w="med" len="med"/>
+                    </a:lnL>
+                    <a:lnR w="12700" cap="flat" cmpd="sng" algn="ctr">
+                      <a:solidFill>
+                        <a:srgbClr val="D9E0E8"/>
+                      </a:solidFill>
+                      <a:prstDash val="solid"/>
+                      <a:round/>
+                      <a:headEnd type="none" w="med" len="med"/>
+                      <a:tailEnd type="none" w="med" len="med"/>
+                    </a:lnR>
+                    <a:lnT w="12700" cap="flat" cmpd="sng" algn="ctr">
+                      <a:solidFill>
+                        <a:srgbClr val="D9E0E8"/>
+                      </a:solidFill>
+                      <a:prstDash val="solid"/>
+                      <a:round/>
+                      <a:headEnd type="none" w="med" len="med"/>
+                      <a:tailEnd type="none" w="med" len="med"/>
+                    </a:lnT>
+                    <a:lnB w="12700" cap="flat" cmpd="sng" algn="ctr">
+                      <a:solidFill>
+                        <a:srgbClr val="D9E0E8"/>
+                      </a:solidFill>
+                      <a:prstDash val="solid"/>
+                      <a:round/>
+                      <a:headEnd type="none" w="med" len="med"/>
+                      <a:tailEnd type="none" w="med" len="med"/>
+                    </a:lnB>
+                    <a:solidFill>
+                      <a:srgbClr val="FFFFFF"/>
+                    </a:solidFill>
+                  </a:tcPr>
+                </a:tc>
+              </a:tr>
+              <a:tr h="0">
+                <a:tc>
+                  <a:txBody>
+                    <a:bodyPr/>
+                    <a:lstStyle/>
+                    <a:p>
+                      <a:pPr indent="0" marL="0">
+                        <a:buNone/>
+                      </a:pPr>
+                      <a:r>
+                        <a:rPr lang="en-US" sz="1200" b="1" dirty="0">
+                          <a:solidFill>
+                            <a:srgbClr val="16202E"/>
+                          </a:solidFill>
+                        </a:rPr>
+                        <a:t>-rst</a:t>
+                      </a:r>
+                      <a:endParaRPr lang="en-US" sz="1200" dirty="0"/>
+                    </a:p>
+                  </a:txBody>
+                  <a:tcPr marL="82296" marR="82296" marT="82296" marB="82296" anchor="ctr">
+                    <a:lnL w="12700" cap="flat" cmpd="sng" algn="ctr">
+                      <a:solidFill>
+                        <a:srgbClr val="D9E0E8"/>
+                      </a:solidFill>
+                      <a:prstDash val="solid"/>
+                      <a:round/>
+                      <a:headEnd type="none" w="med" len="med"/>
+                      <a:tailEnd type="none" w="med" len="med"/>
+                    </a:lnL>
+                    <a:lnR w="12700" cap="flat" cmpd="sng" algn="ctr">
+                      <a:solidFill>
+                        <a:srgbClr val="D9E0E8"/>
+                      </a:solidFill>
+                      <a:prstDash val="solid"/>
+                      <a:round/>
+                      <a:headEnd type="none" w="med" len="med"/>
+                      <a:tailEnd type="none" w="med" len="med"/>
+                    </a:lnR>
+                    <a:lnT w="12700" cap="flat" cmpd="sng" algn="ctr">
+                      <a:solidFill>
+                        <a:srgbClr val="D9E0E8"/>
+                      </a:solidFill>
+                      <a:prstDash val="solid"/>
+                      <a:round/>
+                      <a:headEnd type="none" w="med" len="med"/>
+                      <a:tailEnd type="none" w="med" len="med"/>
+                    </a:lnT>
+                    <a:lnB w="12700" cap="flat" cmpd="sng" algn="ctr">
+                      <a:solidFill>
+                        <a:srgbClr val="D9E0E8"/>
+                      </a:solidFill>
+                      <a:prstDash val="solid"/>
+                      <a:round/>
+                      <a:headEnd type="none" w="med" len="med"/>
+                      <a:tailEnd type="none" w="med" len="med"/>
+                    </a:lnB>
+                    <a:solidFill>
+                      <a:srgbClr val="FFFFFF"/>
+                    </a:solidFill>
+                  </a:tcPr>
+                </a:tc>
+                <a:tc>
+                  <a:txBody>
+                    <a:bodyPr/>
+                    <a:lstStyle/>
+                    <a:p>
+                      <a:pPr indent="0" marL="0">
+                        <a:buNone/>
+                      </a:pPr>
+                      <a:r>
+                        <a:rPr lang="en-US" sz="1200" dirty="0">
+                          <a:solidFill>
+                            <a:srgbClr val="4A5568"/>
+                          </a:solidFill>
+                        </a:rPr>
+                        <a:t>รีเซ็ตให้รันทันที</a:t>
+                      </a:r>
+                      <a:endParaRPr lang="en-US" sz="1200" dirty="0"/>
+                    </a:p>
+                  </a:txBody>
+                  <a:tcPr marL="82296" marR="82296" marT="82296" marB="82296" anchor="ctr">
+                    <a:lnL w="12700" cap="flat" cmpd="sng" algn="ctr">
+                      <a:solidFill>
+                        <a:srgbClr val="D9E0E8"/>
+                      </a:solidFill>
+                      <a:prstDash val="solid"/>
+                      <a:round/>
+                      <a:headEnd type="none" w="med" len="med"/>
+                      <a:tailEnd type="none" w="med" len="med"/>
+                    </a:lnL>
+                    <a:lnR w="12700" cap="flat" cmpd="sng" algn="ctr">
+                      <a:solidFill>
+                        <a:srgbClr val="D9E0E8"/>
+                      </a:solidFill>
+                      <a:prstDash val="solid"/>
+                      <a:round/>
+                      <a:headEnd type="none" w="med" len="med"/>
+                      <a:tailEnd type="none" w="med" len="med"/>
+                    </a:lnR>
+                    <a:lnT w="12700" cap="flat" cmpd="sng" algn="ctr">
+                      <a:solidFill>
+                        <a:srgbClr val="D9E0E8"/>
+                      </a:solidFill>
+                      <a:prstDash val="solid"/>
+                      <a:round/>
+                      <a:headEnd type="none" w="med" len="med"/>
+                      <a:tailEnd type="none" w="med" len="med"/>
+                    </a:lnT>
+                    <a:lnB w="12700" cap="flat" cmpd="sng" algn="ctr">
+                      <a:solidFill>
+                        <a:srgbClr val="D9E0E8"/>
+                      </a:solidFill>
+                      <a:prstDash val="solid"/>
+                      <a:round/>
+                      <a:headEnd type="none" w="med" len="med"/>
+                      <a:tailEnd type="none" w="med" len="med"/>
+                    </a:lnB>
+                    <a:solidFill>
+                      <a:srgbClr val="FFFFFF"/>
+                    </a:solidFill>
+                  </a:tcPr>
+                </a:tc>
+              </a:tr>
+            </a:tbl>
+          </a:graphicData>
+        </a:graphic>
+      </p:graphicFrame>
+      <p:sp>
+        <p:nvSpPr>
+          <p:cNvPr id="15" name="callout"/>
+          <p:cNvSpPr/>
+          <p:nvPr/>
+        </p:nvSpPr>
+        <p:spPr>
+          <a:xfrm>
+            <a:off x="6309360" y="3291840"/>
+            <a:ext cx="5303520" cy="1325880"/>
+          </a:xfrm>
+          <a:prstGeom prst="roundRect">
+            <a:avLst>
+              <a:gd name="adj" fmla="val 5517"/>
+            </a:avLst>
+          </a:prstGeom>
+          <a:solidFill>
+            <a:srgbClr val="FBEEEC"/>
+          </a:solidFill>
+          <a:ln w="12700">
+            <a:solidFill>
+              <a:srgbClr val="F0D3CE"/>
+            </a:solidFill>
+            <a:prstDash val="solid"/>
+          </a:ln>
+        </p:spPr>
+      </p:sp>
+      <p:sp>
+        <p:nvSpPr>
+          <p:cNvPr id="16" name="Text 13"/>
+          <p:cNvSpPr txBox="1"/>
+          <p:nvPr/>
+        </p:nvSpPr>
+        <p:spPr>
+          <a:xfrm>
+            <a:off x="6537960" y="3419856"/>
+            <a:ext cx="4846320" cy="274320"/>
+          </a:xfrm>
+          <a:prstGeom prst="rect">
+            <a:avLst/>
+          </a:prstGeom>
+          <a:noFill/>
+          <a:ln/>
+        </p:spPr>
+        <p:txBody>
+          <a:bodyPr wrap="square" lIns="0" tIns="0" rIns="0" bIns="0" rtlCol="0" anchor="t"/>
+          <a:lstStyle/>
+          <a:p>
+            <a:pPr algn="l" indent="0" marL="0">
+              <a:buNone/>
+            </a:pPr>
+            <a:r>
+              <a:rPr lang="en-US" sz="1400" b="1" dirty="0">
+                <a:solidFill>
+                  <a:srgbClr val="B3261E"/>
+                </a:solidFill>
+              </a:rPr>
+              <a:t>เลข 0x08000000 ใส่เฉพาะไฟล์ .bin</a:t>
+            </a:r>
+            <a:endParaRPr lang="en-US" sz="1400" dirty="0"/>
+          </a:p>
+        </p:txBody>
+      </p:sp>
+      <p:sp>
+        <p:nvSpPr>
+          <p:cNvPr id="17" name="Text 14"/>
+          <p:cNvSpPr txBox="1"/>
+          <p:nvPr/>
+        </p:nvSpPr>
+        <p:spPr>
+          <a:xfrm>
+            <a:off x="6537960" y="3730752"/>
+            <a:ext cx="4846320" cy="758952"/>
+          </a:xfrm>
+          <a:prstGeom prst="rect">
+            <a:avLst/>
+          </a:prstGeom>
+          <a:noFill/>
+          <a:ln/>
+        </p:spPr>
+        <p:txBody>
+          <a:bodyPr wrap="square" lIns="0" tIns="0" rIns="0" bIns="0" rtlCol="0" anchor="t"/>
+          <a:lstStyle/>
+          <a:p>
+            <a:pPr algn="l" indent="0" marL="0">
+              <a:lnSpc>
+                <a:spcPct val="120000"/>
+              </a:lnSpc>
+              <a:buNone/>
+            </a:pPr>
+            <a:r>
+              <a:rPr lang="en-US" sz="1250" dirty="0">
+                <a:solidFill>
+                  <a:srgbClr val="4A5568"/>
+                </a:solidFill>
+              </a:rPr>
+              <a:t>ถ้าใช้ไฟล์ .hex ไม่ต้องใส่ เพราะในไฟล์ระบุที่อยู่มาเองแล้ว เขียนแค่ -w ไฟล์.hex พอ</a:t>
+            </a:r>
+            <a:endParaRPr lang="en-US" sz="1250" dirty="0"/>
+          </a:p>
+        </p:txBody>
+      </p:sp>
+      <p:sp>
+        <p:nvSpPr>
+          <p:cNvPr id="18" name="callout"/>
+          <p:cNvSpPr/>
+          <p:nvPr/>
+        </p:nvSpPr>
+        <p:spPr>
+          <a:xfrm>
+            <a:off x="548640" y="5303520"/>
+            <a:ext cx="11064240" cy="777240"/>
+          </a:xfrm>
+          <a:prstGeom prst="roundRect">
+            <a:avLst>
+              <a:gd name="adj" fmla="val 9412"/>
+            </a:avLst>
+          </a:prstGeom>
+          <a:solidFill>
+            <a:srgbClr val="E8F1F5"/>
+          </a:solidFill>
+          <a:ln w="12700">
+            <a:solidFill>
+              <a:srgbClr val="CBE0E9"/>
+            </a:solidFill>
+            <a:prstDash val="solid"/>
+          </a:ln>
+        </p:spPr>
+      </p:sp>
+      <p:sp>
+        <p:nvSpPr>
+          <p:cNvPr id="19" name="Text 16"/>
+          <p:cNvSpPr txBox="1"/>
+          <p:nvPr/>
+        </p:nvSpPr>
+        <p:spPr>
+          <a:xfrm>
+            <a:off x="777240" y="5431536"/>
+            <a:ext cx="10607040" cy="274320"/>
+          </a:xfrm>
+          <a:prstGeom prst="rect">
+            <a:avLst/>
+          </a:prstGeom>
+          <a:noFill/>
+          <a:ln/>
+        </p:spPr>
+        <p:txBody>
+          <a:bodyPr wrap="square" lIns="0" tIns="0" rIns="0" bIns="0" rtlCol="0" anchor="t"/>
+          <a:lstStyle/>
+          <a:p>
+            <a:pPr algn="l" indent="0" marL="0">
+              <a:buNone/>
+            </a:pPr>
+            <a:r>
+              <a:rPr lang="en-US" sz="1400" b="1" dirty="0">
+                <a:solidFill>
+                  <a:srgbClr val="1C7293"/>
+                </a:solidFill>
+              </a:rPr>
+              <a:t>ใช้ตอนไหนถึงจะคุ้ม</a:t>
+            </a:r>
+            <a:endParaRPr lang="en-US" sz="1400" dirty="0"/>
+          </a:p>
+        </p:txBody>
+      </p:sp>
+      <p:sp>
+        <p:nvSpPr>
+          <p:cNvPr id="20" name="Text 17"/>
+          <p:cNvSpPr txBox="1"/>
+          <p:nvPr/>
+        </p:nvSpPr>
+        <p:spPr>
+          <a:xfrm>
+            <a:off x="777240" y="5742432"/>
+            <a:ext cx="10607040" cy="210312"/>
+          </a:xfrm>
+          <a:prstGeom prst="rect">
+            <a:avLst/>
+          </a:prstGeom>
+          <a:noFill/>
+          <a:ln/>
+        </p:spPr>
+        <p:txBody>
+          <a:bodyPr wrap="square" lIns="0" tIns="0" rIns="0" bIns="0" rtlCol="0" anchor="t"/>
+          <a:lstStyle/>
+          <a:p>
+            <a:pPr algn="l" indent="0" marL="0">
+              <a:lnSpc>
+                <a:spcPct val="120000"/>
+              </a:lnSpc>
+              <a:buNone/>
+            </a:pPr>
+            <a:r>
+              <a:rPr lang="en-US" sz="1250" dirty="0">
+                <a:solidFill>
+                  <a:srgbClr val="4A5568"/>
+                </a:solidFill>
+              </a:rPr>
+              <a:t>ตอนอัปหลายบอร์ดด้วยไฟล์เดียวกัน หรือส่งไฟล์ให้คนอื่นแฟลชโดยไม่ต้องให้เขาลง Arduino IDE ทั้งชุด  ถ้าแก้โค้ดแล้วอัปรอบเดียว กดปุ่ม Upload ใน IDE เร็วกว่า</a:t>
+            </a:r>
+            <a:endParaRPr lang="en-US" sz="1250" dirty="0"/>
+          </a:p>
+        </p:txBody>
+      </p:sp>
+      <p:sp>
+        <p:nvSpPr>
+          <p:cNvPr id="25" name="Slide Number Placeholder 0"/>
+          <p:cNvSpPr>
+            <a:spLocks noGrp="1"/>
+          </p:cNvSpPr>
+          <p:nvPr>
+            <p:ph type="sldNum" sz="quarter" idx="4294967295"/>
+          </p:nvPr>
+        </p:nvSpPr>
+        <p:spPr>
+          <a:xfrm>
+            <a:off x="11338560" y="6263640"/>
+            <a:ext cx="457200" cy="274320"/>
+          </a:xfrm>
+          <a:prstGeom prst="rect">
+            <a:avLst/>
+          </a:prstGeom>
+          <a:extLst>
+            <a:ext uri="{C572A759-6A51-4108-AA02-DFA0A04FC94B}">
+              <ma14:wrappingTextBoxFlag xmlns:ma14="http://schemas.microsoft.com/office/mac/drawingml/2011/main" val="0"/>
+            </a:ext>
+          </a:extLst>
+        </p:spPr>
+        <p:txBody>
+          <a:bodyPr/>
+          <a:lstStyle>
+            <a:lvl1pPr>
+              <a:defRPr sz="1000">
+                <a:solidFill>
+                  <a:srgbClr val="6B7E93"/>
+                </a:solidFill>
+              </a:defRPr>
+            </a:lvl1pPr>
+          </a:lstStyle>
+          <a:p>
+            <a:pPr algn="r"/>
+            <a:fld id="{F7021451-1387-4CA6-816F-3879F97B5CBC}" type="slidenum">
+              <a:rPr b="0" lang="en-US"/>
+              <a:t>12</a:t>
+            </a:fld>
+            <a:endParaRPr lang="en-US"/>
           </a:p>
         </p:txBody>
       </p:sp>
@@ -6077,13 +7434,13 @@
           <p:cNvPr id="2" name="Text 0"/>
           <p:cNvSpPr/>
           <p:nvPr>
-            <p:ph idx="100" type="title" hasCustomPrompt="1"/>
+            <p:ph idx="100" type="body" hasCustomPrompt="1"/>
           </p:nvPr>
         </p:nvSpPr>
         <p:spPr>
           <a:xfrm>
-            <a:off x="548640" y="384048"/>
-            <a:ext cx="11064240" cy="685800"/>
+            <a:off x="548640" y="2377440"/>
+            <a:ext cx="11064240" cy="457200"/>
           </a:xfrm>
           <a:prstGeom prst="rect">
             <a:avLst/>
@@ -6099,52 +7456,29 @@
               <a:buNone/>
             </a:pPr>
             <a:r>
-              <a:rPr lang="en-US" sz="3200" b="1" dirty="0">
-                <a:solidFill>
-                  <a:schemeClr val="tx1"/>
+              <a:rPr lang="en-US" sz="6000" b="1" dirty="0">
+                <a:solidFill>
+                  <a:srgbClr val="E8803A"/>
                 </a:solidFill>
               </a:rPr>
-              <a:t>เปิดใช้งาน 6 ขั้นตอน</a:t>
-            </a:r>
-            <a:endParaRPr lang="en-US" sz="3200" dirty="0"/>
-          </a:p>
-        </p:txBody>
-      </p:sp>
-      <p:sp>
-        <p:nvSpPr>
-          <p:cNvPr id="3" name="dot-1"/>
+              <a:t>02</a:t>
+            </a:r>
+            <a:endParaRPr lang="en-US" sz="6000" dirty="0"/>
+          </a:p>
+        </p:txBody>
+      </p:sp>
+      <p:sp>
+        <p:nvSpPr>
+          <p:cNvPr id="3" name="Text 0"/>
           <p:cNvSpPr/>
-          <p:nvPr/>
-        </p:nvSpPr>
-        <p:spPr>
-          <a:xfrm>
-            <a:off x="548640" y="1463040"/>
-            <a:ext cx="475488" cy="475488"/>
-          </a:xfrm>
-          <a:prstGeom prst="ellipse">
-            <a:avLst/>
-          </a:prstGeom>
-          <a:solidFill>
-            <a:srgbClr val="E8803A"/>
-          </a:solidFill>
-          <a:ln w="12700">
-            <a:solidFill>
-              <a:srgbClr val="E8803A"/>
-            </a:solidFill>
-            <a:prstDash val="solid"/>
-          </a:ln>
-        </p:spPr>
-      </p:sp>
-      <p:sp>
-        <p:nvSpPr>
-          <p:cNvPr id="4" name="Text 2"/>
-          <p:cNvSpPr txBox="1"/>
-          <p:nvPr/>
-        </p:nvSpPr>
-        <p:spPr>
-          <a:xfrm>
-            <a:off x="548640" y="1463040"/>
-            <a:ext cx="475488" cy="475488"/>
+          <p:nvPr>
+            <p:ph idx="101" type="title" hasCustomPrompt="1"/>
+          </p:nvPr>
+        </p:nvSpPr>
+        <p:spPr>
+          <a:xfrm>
+            <a:off x="548640" y="3200400"/>
+            <a:ext cx="11064240" cy="914400"/>
           </a:xfrm>
           <a:prstGeom prst="rect">
             <a:avLst/>
@@ -6153,70 +7487,36 @@
           <a:ln/>
         </p:spPr>
         <p:txBody>
-          <a:bodyPr wrap="square" lIns="0" tIns="0" rIns="0" bIns="0" rtlCol="0" anchor="ctr"/>
-          <a:lstStyle/>
-          <a:p>
-            <a:pPr algn="ctr" indent="0" marL="0">
-              <a:buNone/>
-            </a:pPr>
-            <a:r>
-              <a:rPr lang="en-US" sz="1500" b="1" dirty="0">
-                <a:solidFill>
-                  <a:srgbClr val="FFFFFF"/>
-                </a:solidFill>
-              </a:rPr>
-              <a:t>1</a:t>
-            </a:r>
-            <a:endParaRPr lang="en-US" sz="1500" dirty="0"/>
-          </a:p>
-        </p:txBody>
-      </p:sp>
-      <p:sp>
-        <p:nvSpPr>
-          <p:cNvPr id="5" name="Text 3"/>
-          <p:cNvSpPr txBox="1"/>
-          <p:nvPr/>
-        </p:nvSpPr>
-        <p:spPr>
-          <a:xfrm>
-            <a:off x="1207008" y="1444752"/>
-            <a:ext cx="4553712" cy="301752"/>
-          </a:xfrm>
-          <a:prstGeom prst="rect">
-            <a:avLst/>
-          </a:prstGeom>
-          <a:noFill/>
-          <a:ln/>
-        </p:spPr>
-        <p:txBody>
-          <a:bodyPr wrap="square" lIns="0" tIns="0" rIns="0" bIns="0" rtlCol="0" anchor="t"/>
+          <a:bodyPr wrap="square" rtlCol="0"/>
           <a:lstStyle/>
           <a:p>
             <a:pPr algn="l" indent="0" marL="0">
               <a:buNone/>
             </a:pPr>
             <a:r>
-              <a:rPr lang="en-US" sz="1600" b="1" dirty="0">
-                <a:solidFill>
-                  <a:schemeClr val="tx1"/>
+              <a:rPr lang="en-US" sz="4000" b="1" dirty="0">
+                <a:solidFill>
+                  <a:schemeClr val="bg1"/>
                 </a:solidFill>
               </a:rPr>
-              <a:t>เปิดไฟหุ่น</a:t>
-            </a:r>
-            <a:endParaRPr lang="en-US" sz="1600" dirty="0"/>
-          </a:p>
-        </p:txBody>
-      </p:sp>
-      <p:sp>
-        <p:nvSpPr>
-          <p:cNvPr id="6" name="Text 4"/>
-          <p:cNvSpPr txBox="1"/>
-          <p:nvPr/>
-        </p:nvSpPr>
-        <p:spPr>
-          <a:xfrm>
-            <a:off x="1207008" y="1773936"/>
-            <a:ext cx="4553712" cy="822960"/>
+              <a:t>เปิดใช้งานจริง</a:t>
+            </a:r>
+            <a:endParaRPr lang="en-US" sz="4000" dirty="0"/>
+          </a:p>
+        </p:txBody>
+      </p:sp>
+      <p:sp>
+        <p:nvSpPr>
+          <p:cNvPr id="4" name="Text 0"/>
+          <p:cNvSpPr/>
+          <p:nvPr>
+            <p:ph idx="102" type="body" hasCustomPrompt="1"/>
+          </p:nvPr>
+        </p:nvSpPr>
+        <p:spPr>
+          <a:xfrm>
+            <a:off x="548640" y="4206240"/>
+            <a:ext cx="8686800" cy="914400"/>
           </a:xfrm>
           <a:prstGeom prst="rect">
             <a:avLst/>
@@ -6225,851 +7525,21 @@
           <a:ln/>
         </p:spPr>
         <p:txBody>
-          <a:bodyPr wrap="square" lIns="0" tIns="0" rIns="0" bIns="0" rtlCol="0" anchor="t"/>
-          <a:lstStyle/>
-          <a:p>
-            <a:pPr algn="l" indent="0" marL="0">
-              <a:lnSpc>
-                <a:spcPct val="125000"/>
-              </a:lnSpc>
-              <a:buNone/>
-            </a:pPr>
-            <a:r>
-              <a:rPr lang="en-US" sz="1300" dirty="0">
-                <a:solidFill>
-                  <a:srgbClr val="4A5568"/>
-                </a:solidFill>
-              </a:rPr>
-              <a:t>จอจะขึ้นหน้าต้อนรับ 2.5 วินาที แล้วเปลี่ยนเป็นหน้าสถานะเอง</a:t>
-            </a:r>
-            <a:endParaRPr lang="en-US" sz="1300" dirty="0"/>
-          </a:p>
-        </p:txBody>
-      </p:sp>
-      <p:sp>
-        <p:nvSpPr>
-          <p:cNvPr id="7" name="dot-2"/>
-          <p:cNvSpPr/>
-          <p:nvPr/>
-        </p:nvSpPr>
-        <p:spPr>
-          <a:xfrm>
-            <a:off x="6400800" y="1463040"/>
-            <a:ext cx="475488" cy="475488"/>
-          </a:xfrm>
-          <a:prstGeom prst="ellipse">
-            <a:avLst/>
-          </a:prstGeom>
-          <a:solidFill>
-            <a:srgbClr val="E8803A"/>
-          </a:solidFill>
-          <a:ln w="12700">
-            <a:solidFill>
-              <a:srgbClr val="E8803A"/>
-            </a:solidFill>
-            <a:prstDash val="solid"/>
-          </a:ln>
-        </p:spPr>
-      </p:sp>
-      <p:sp>
-        <p:nvSpPr>
-          <p:cNvPr id="8" name="Text 6"/>
-          <p:cNvSpPr txBox="1"/>
-          <p:nvPr/>
-        </p:nvSpPr>
-        <p:spPr>
-          <a:xfrm>
-            <a:off x="6400800" y="1463040"/>
-            <a:ext cx="475488" cy="475488"/>
-          </a:xfrm>
-          <a:prstGeom prst="rect">
-            <a:avLst/>
-          </a:prstGeom>
-          <a:noFill/>
-          <a:ln/>
-        </p:spPr>
-        <p:txBody>
-          <a:bodyPr wrap="square" lIns="0" tIns="0" rIns="0" bIns="0" rtlCol="0" anchor="ctr"/>
-          <a:lstStyle/>
-          <a:p>
-            <a:pPr algn="ctr" indent="0" marL="0">
-              <a:buNone/>
-            </a:pPr>
-            <a:r>
-              <a:rPr lang="en-US" sz="1500" b="1" dirty="0">
-                <a:solidFill>
-                  <a:srgbClr val="FFFFFF"/>
-                </a:solidFill>
-              </a:rPr>
-              <a:t>2</a:t>
-            </a:r>
-            <a:endParaRPr lang="en-US" sz="1500" dirty="0"/>
-          </a:p>
-        </p:txBody>
-      </p:sp>
-      <p:sp>
-        <p:nvSpPr>
-          <p:cNvPr id="9" name="Text 7"/>
-          <p:cNvSpPr txBox="1"/>
-          <p:nvPr/>
-        </p:nvSpPr>
-        <p:spPr>
-          <a:xfrm>
-            <a:off x="7059168" y="1444752"/>
-            <a:ext cx="4553712" cy="301752"/>
-          </a:xfrm>
-          <a:prstGeom prst="rect">
-            <a:avLst/>
-          </a:prstGeom>
-          <a:noFill/>
-          <a:ln/>
-        </p:spPr>
-        <p:txBody>
-          <a:bodyPr wrap="square" lIns="0" tIns="0" rIns="0" bIns="0" rtlCol="0" anchor="t"/>
+          <a:bodyPr wrap="square" rtlCol="0"/>
           <a:lstStyle/>
           <a:p>
             <a:pPr algn="l" indent="0" marL="0">
               <a:buNone/>
             </a:pPr>
             <a:r>
-              <a:rPr lang="en-US" sz="1600" b="1" dirty="0">
-                <a:solidFill>
-                  <a:schemeClr val="tx1"/>
+              <a:rPr lang="en-US" sz="1600" dirty="0">
+                <a:solidFill>
+                  <a:srgbClr val="B9C6D4"/>
                 </a:solidFill>
               </a:rPr>
-              <a:t>ต่อ Wi-Fi ของหุ่น</a:t>
+              <a:t>ลำดับการเปิด สิ่งที่เห็นบนจอ หน้าเว็บควบคุม และข้อมูลที่เก็บได้</a:t>
             </a:r>
             <a:endParaRPr lang="en-US" sz="1600" dirty="0"/>
-          </a:p>
-        </p:txBody>
-      </p:sp>
-      <p:sp>
-        <p:nvSpPr>
-          <p:cNvPr id="10" name="Text 8"/>
-          <p:cNvSpPr txBox="1"/>
-          <p:nvPr/>
-        </p:nvSpPr>
-        <p:spPr>
-          <a:xfrm>
-            <a:off x="7059168" y="1773936"/>
-            <a:ext cx="4553712" cy="822960"/>
-          </a:xfrm>
-          <a:prstGeom prst="rect">
-            <a:avLst/>
-          </a:prstGeom>
-          <a:noFill/>
-          <a:ln/>
-        </p:spPr>
-        <p:txBody>
-          <a:bodyPr wrap="square" lIns="0" tIns="0" rIns="0" bIns="0" rtlCol="0" anchor="t"/>
-          <a:lstStyle/>
-          <a:p>
-            <a:pPr algn="l" indent="0" marL="0">
-              <a:lnSpc>
-                <a:spcPct val="125000"/>
-              </a:lnSpc>
-              <a:buNone/>
-            </a:pPr>
-            <a:r>
-              <a:rPr lang="en-US" sz="1300" dirty="0">
-                <a:solidFill>
-                  <a:srgbClr val="4A5568"/>
-                </a:solidFill>
-              </a:rPr>
-              <a:t>ชื่อ My_Robot2 รหัส password1234  ต่อทั้งมือถือและเครื่อง PC</a:t>
-            </a:r>
-            <a:endParaRPr lang="en-US" sz="1300" dirty="0"/>
-          </a:p>
-        </p:txBody>
-      </p:sp>
-      <p:sp>
-        <p:nvSpPr>
-          <p:cNvPr id="11" name="dot-3"/>
-          <p:cNvSpPr/>
-          <p:nvPr/>
-        </p:nvSpPr>
-        <p:spPr>
-          <a:xfrm>
-            <a:off x="548640" y="2761488"/>
-            <a:ext cx="475488" cy="475488"/>
-          </a:xfrm>
-          <a:prstGeom prst="ellipse">
-            <a:avLst/>
-          </a:prstGeom>
-          <a:solidFill>
-            <a:srgbClr val="E8803A"/>
-          </a:solidFill>
-          <a:ln w="12700">
-            <a:solidFill>
-              <a:srgbClr val="E8803A"/>
-            </a:solidFill>
-            <a:prstDash val="solid"/>
-          </a:ln>
-        </p:spPr>
-      </p:sp>
-      <p:sp>
-        <p:nvSpPr>
-          <p:cNvPr id="12" name="Text 10"/>
-          <p:cNvSpPr txBox="1"/>
-          <p:nvPr/>
-        </p:nvSpPr>
-        <p:spPr>
-          <a:xfrm>
-            <a:off x="548640" y="2761488"/>
-            <a:ext cx="475488" cy="475488"/>
-          </a:xfrm>
-          <a:prstGeom prst="rect">
-            <a:avLst/>
-          </a:prstGeom>
-          <a:noFill/>
-          <a:ln/>
-        </p:spPr>
-        <p:txBody>
-          <a:bodyPr wrap="square" lIns="0" tIns="0" rIns="0" bIns="0" rtlCol="0" anchor="ctr"/>
-          <a:lstStyle/>
-          <a:p>
-            <a:pPr algn="ctr" indent="0" marL="0">
-              <a:buNone/>
-            </a:pPr>
-            <a:r>
-              <a:rPr lang="en-US" sz="1500" b="1" dirty="0">
-                <a:solidFill>
-                  <a:srgbClr val="FFFFFF"/>
-                </a:solidFill>
-              </a:rPr>
-              <a:t>3</a:t>
-            </a:r>
-            <a:endParaRPr lang="en-US" sz="1500" dirty="0"/>
-          </a:p>
-        </p:txBody>
-      </p:sp>
-      <p:sp>
-        <p:nvSpPr>
-          <p:cNvPr id="13" name="Text 11"/>
-          <p:cNvSpPr txBox="1"/>
-          <p:nvPr/>
-        </p:nvSpPr>
-        <p:spPr>
-          <a:xfrm>
-            <a:off x="1207008" y="2743200"/>
-            <a:ext cx="4553712" cy="301752"/>
-          </a:xfrm>
-          <a:prstGeom prst="rect">
-            <a:avLst/>
-          </a:prstGeom>
-          <a:noFill/>
-          <a:ln/>
-        </p:spPr>
-        <p:txBody>
-          <a:bodyPr wrap="square" lIns="0" tIns="0" rIns="0" bIns="0" rtlCol="0" anchor="t"/>
-          <a:lstStyle/>
-          <a:p>
-            <a:pPr algn="l" indent="0" marL="0">
-              <a:buNone/>
-            </a:pPr>
-            <a:r>
-              <a:rPr lang="en-US" sz="1600" b="1" dirty="0">
-                <a:solidFill>
-                  <a:schemeClr val="tx1"/>
-                </a:solidFill>
-              </a:rPr>
-              <a:t>เปิดหน้าเว็บ</a:t>
-            </a:r>
-            <a:endParaRPr lang="en-US" sz="1600" dirty="0"/>
-          </a:p>
-        </p:txBody>
-      </p:sp>
-      <p:sp>
-        <p:nvSpPr>
-          <p:cNvPr id="14" name="Text 12"/>
-          <p:cNvSpPr txBox="1"/>
-          <p:nvPr/>
-        </p:nvSpPr>
-        <p:spPr>
-          <a:xfrm>
-            <a:off x="1207008" y="3072384"/>
-            <a:ext cx="4553712" cy="822960"/>
-          </a:xfrm>
-          <a:prstGeom prst="rect">
-            <a:avLst/>
-          </a:prstGeom>
-          <a:noFill/>
-          <a:ln/>
-        </p:spPr>
-        <p:txBody>
-          <a:bodyPr wrap="square" lIns="0" tIns="0" rIns="0" bIns="0" rtlCol="0" anchor="t"/>
-          <a:lstStyle/>
-          <a:p>
-            <a:pPr algn="l" indent="0" marL="0">
-              <a:lnSpc>
-                <a:spcPct val="125000"/>
-              </a:lnSpc>
-              <a:buNone/>
-            </a:pPr>
-            <a:r>
-              <a:rPr lang="en-US" sz="1300" dirty="0">
-                <a:solidFill>
-                  <a:srgbClr val="4A5568"/>
-                </a:solidFill>
-              </a:rPr>
-              <a:t>พิมพ์ 192.168.4.1 ในเบราว์เซอร์  ภาพกล้องจะขึ้นเองเมื่อกล้องเกาะ Wi-Fi ได้</a:t>
-            </a:r>
-            <a:endParaRPr lang="en-US" sz="1300" dirty="0"/>
-          </a:p>
-        </p:txBody>
-      </p:sp>
-      <p:sp>
-        <p:nvSpPr>
-          <p:cNvPr id="15" name="dot-4"/>
-          <p:cNvSpPr/>
-          <p:nvPr/>
-        </p:nvSpPr>
-        <p:spPr>
-          <a:xfrm>
-            <a:off x="6400800" y="2761488"/>
-            <a:ext cx="475488" cy="475488"/>
-          </a:xfrm>
-          <a:prstGeom prst="ellipse">
-            <a:avLst/>
-          </a:prstGeom>
-          <a:solidFill>
-            <a:srgbClr val="E8803A"/>
-          </a:solidFill>
-          <a:ln w="12700">
-            <a:solidFill>
-              <a:srgbClr val="E8803A"/>
-            </a:solidFill>
-            <a:prstDash val="solid"/>
-          </a:ln>
-        </p:spPr>
-      </p:sp>
-      <p:sp>
-        <p:nvSpPr>
-          <p:cNvPr id="16" name="Text 14"/>
-          <p:cNvSpPr txBox="1"/>
-          <p:nvPr/>
-        </p:nvSpPr>
-        <p:spPr>
-          <a:xfrm>
-            <a:off x="6400800" y="2761488"/>
-            <a:ext cx="475488" cy="475488"/>
-          </a:xfrm>
-          <a:prstGeom prst="rect">
-            <a:avLst/>
-          </a:prstGeom>
-          <a:noFill/>
-          <a:ln/>
-        </p:spPr>
-        <p:txBody>
-          <a:bodyPr wrap="square" lIns="0" tIns="0" rIns="0" bIns="0" rtlCol="0" anchor="ctr"/>
-          <a:lstStyle/>
-          <a:p>
-            <a:pPr algn="ctr" indent="0" marL="0">
-              <a:buNone/>
-            </a:pPr>
-            <a:r>
-              <a:rPr lang="en-US" sz="1500" b="1" dirty="0">
-                <a:solidFill>
-                  <a:srgbClr val="FFFFFF"/>
-                </a:solidFill>
-              </a:rPr>
-              <a:t>4</a:t>
-            </a:r>
-            <a:endParaRPr lang="en-US" sz="1500" dirty="0"/>
-          </a:p>
-        </p:txBody>
-      </p:sp>
-      <p:sp>
-        <p:nvSpPr>
-          <p:cNvPr id="17" name="Text 15"/>
-          <p:cNvSpPr txBox="1"/>
-          <p:nvPr/>
-        </p:nvSpPr>
-        <p:spPr>
-          <a:xfrm>
-            <a:off x="7059168" y="2743200"/>
-            <a:ext cx="4553712" cy="301752"/>
-          </a:xfrm>
-          <a:prstGeom prst="rect">
-            <a:avLst/>
-          </a:prstGeom>
-          <a:noFill/>
-          <a:ln/>
-        </p:spPr>
-        <p:txBody>
-          <a:bodyPr wrap="square" lIns="0" tIns="0" rIns="0" bIns="0" rtlCol="0" anchor="t"/>
-          <a:lstStyle/>
-          <a:p>
-            <a:pPr algn="l" indent="0" marL="0">
-              <a:buNone/>
-            </a:pPr>
-            <a:r>
-              <a:rPr lang="en-US" sz="1600" b="1" dirty="0">
-                <a:solidFill>
-                  <a:schemeClr val="tx1"/>
-                </a:solidFill>
-              </a:rPr>
-              <a:t>เลื่อนความเร็ว</a:t>
-            </a:r>
-            <a:endParaRPr lang="en-US" sz="1600" dirty="0"/>
-          </a:p>
-        </p:txBody>
-      </p:sp>
-      <p:sp>
-        <p:nvSpPr>
-          <p:cNvPr id="18" name="Text 16"/>
-          <p:cNvSpPr txBox="1"/>
-          <p:nvPr/>
-        </p:nvSpPr>
-        <p:spPr>
-          <a:xfrm>
-            <a:off x="7059168" y="3072384"/>
-            <a:ext cx="4553712" cy="822960"/>
-          </a:xfrm>
-          <a:prstGeom prst="rect">
-            <a:avLst/>
-          </a:prstGeom>
-          <a:noFill/>
-          <a:ln/>
-        </p:spPr>
-        <p:txBody>
-          <a:bodyPr wrap="square" lIns="0" tIns="0" rIns="0" bIns="0" rtlCol="0" anchor="t"/>
-          <a:lstStyle/>
-          <a:p>
-            <a:pPr algn="l" indent="0" marL="0">
-              <a:lnSpc>
-                <a:spcPct val="125000"/>
-              </a:lnSpc>
-              <a:buNone/>
-            </a:pPr>
-            <a:r>
-              <a:rPr lang="en-US" sz="1300" dirty="0">
-                <a:solidFill>
-                  <a:srgbClr val="4A5568"/>
-                </a:solidFill>
-              </a:rPr>
-              <a:t>แถบเลื่อนเริ่มที่ 0 เสมอ ถ้าไม่เลื่อนขึ้นหุ่นจะไม่ขยับแม้อยู่ในโหมด Auto</a:t>
-            </a:r>
-            <a:endParaRPr lang="en-US" sz="1300" dirty="0"/>
-          </a:p>
-        </p:txBody>
-      </p:sp>
-      <p:sp>
-        <p:nvSpPr>
-          <p:cNvPr id="19" name="dot-5"/>
-          <p:cNvSpPr/>
-          <p:nvPr/>
-        </p:nvSpPr>
-        <p:spPr>
-          <a:xfrm>
-            <a:off x="548640" y="4059936"/>
-            <a:ext cx="475488" cy="475488"/>
-          </a:xfrm>
-          <a:prstGeom prst="ellipse">
-            <a:avLst/>
-          </a:prstGeom>
-          <a:solidFill>
-            <a:srgbClr val="E8803A"/>
-          </a:solidFill>
-          <a:ln w="12700">
-            <a:solidFill>
-              <a:srgbClr val="E8803A"/>
-            </a:solidFill>
-            <a:prstDash val="solid"/>
-          </a:ln>
-        </p:spPr>
-      </p:sp>
-      <p:sp>
-        <p:nvSpPr>
-          <p:cNvPr id="20" name="Text 18"/>
-          <p:cNvSpPr txBox="1"/>
-          <p:nvPr/>
-        </p:nvSpPr>
-        <p:spPr>
-          <a:xfrm>
-            <a:off x="548640" y="4059936"/>
-            <a:ext cx="475488" cy="475488"/>
-          </a:xfrm>
-          <a:prstGeom prst="rect">
-            <a:avLst/>
-          </a:prstGeom>
-          <a:noFill/>
-          <a:ln/>
-        </p:spPr>
-        <p:txBody>
-          <a:bodyPr wrap="square" lIns="0" tIns="0" rIns="0" bIns="0" rtlCol="0" anchor="ctr"/>
-          <a:lstStyle/>
-          <a:p>
-            <a:pPr algn="ctr" indent="0" marL="0">
-              <a:buNone/>
-            </a:pPr>
-            <a:r>
-              <a:rPr lang="en-US" sz="1500" b="1" dirty="0">
-                <a:solidFill>
-                  <a:srgbClr val="FFFFFF"/>
-                </a:solidFill>
-              </a:rPr>
-              <a:t>5</a:t>
-            </a:r>
-            <a:endParaRPr lang="en-US" sz="1500" dirty="0"/>
-          </a:p>
-        </p:txBody>
-      </p:sp>
-      <p:sp>
-        <p:nvSpPr>
-          <p:cNvPr id="21" name="Text 19"/>
-          <p:cNvSpPr txBox="1"/>
-          <p:nvPr/>
-        </p:nvSpPr>
-        <p:spPr>
-          <a:xfrm>
-            <a:off x="1207008" y="4041648"/>
-            <a:ext cx="4553712" cy="301752"/>
-          </a:xfrm>
-          <a:prstGeom prst="rect">
-            <a:avLst/>
-          </a:prstGeom>
-          <a:noFill/>
-          <a:ln/>
-        </p:spPr>
-        <p:txBody>
-          <a:bodyPr wrap="square" lIns="0" tIns="0" rIns="0" bIns="0" rtlCol="0" anchor="t"/>
-          <a:lstStyle/>
-          <a:p>
-            <a:pPr algn="l" indent="0" marL="0">
-              <a:buNone/>
-            </a:pPr>
-            <a:r>
-              <a:rPr lang="en-US" sz="1600" b="1" dirty="0">
-                <a:solidFill>
-                  <a:schemeClr val="tx1"/>
-                </a:solidFill>
-              </a:rPr>
-              <a:t>รันสคริปต์บน PC</a:t>
-            </a:r>
-            <a:endParaRPr lang="en-US" sz="1600" dirty="0"/>
-          </a:p>
-        </p:txBody>
-      </p:sp>
-      <p:sp>
-        <p:nvSpPr>
-          <p:cNvPr id="22" name="Text 20"/>
-          <p:cNvSpPr txBox="1"/>
-          <p:nvPr/>
-        </p:nvSpPr>
-        <p:spPr>
-          <a:xfrm>
-            <a:off x="1207008" y="4370832"/>
-            <a:ext cx="4553712" cy="822960"/>
-          </a:xfrm>
-          <a:prstGeom prst="rect">
-            <a:avLst/>
-          </a:prstGeom>
-          <a:noFill/>
-          <a:ln/>
-        </p:spPr>
-        <p:txBody>
-          <a:bodyPr wrap="square" lIns="0" tIns="0" rIns="0" bIns="0" rtlCol="0" anchor="t"/>
-          <a:lstStyle/>
-          <a:p>
-            <a:pPr algn="l" indent="0" marL="0">
-              <a:lnSpc>
-                <a:spcPct val="125000"/>
-              </a:lnSpc>
-              <a:buNone/>
-            </a:pPr>
-            <a:r>
-              <a:rPr lang="en-US" sz="1300" dirty="0">
-                <a:solidFill>
-                  <a:srgbClr val="4A5568"/>
-                </a:solidFill>
-              </a:rPr>
-              <a:t>สั่ง py pc_qr_scanner/qr_scanner.py  สคริปต์จะไล่หากล้องเองในวง</a:t>
-            </a:r>
-            <a:endParaRPr lang="en-US" sz="1300" dirty="0"/>
-          </a:p>
-        </p:txBody>
-      </p:sp>
-      <p:sp>
-        <p:nvSpPr>
-          <p:cNvPr id="23" name="dot-6"/>
-          <p:cNvSpPr/>
-          <p:nvPr/>
-        </p:nvSpPr>
-        <p:spPr>
-          <a:xfrm>
-            <a:off x="6400800" y="4059936"/>
-            <a:ext cx="475488" cy="475488"/>
-          </a:xfrm>
-          <a:prstGeom prst="ellipse">
-            <a:avLst/>
-          </a:prstGeom>
-          <a:solidFill>
-            <a:srgbClr val="E8803A"/>
-          </a:solidFill>
-          <a:ln w="12700">
-            <a:solidFill>
-              <a:srgbClr val="E8803A"/>
-            </a:solidFill>
-            <a:prstDash val="solid"/>
-          </a:ln>
-        </p:spPr>
-      </p:sp>
-      <p:sp>
-        <p:nvSpPr>
-          <p:cNvPr id="24" name="Text 22"/>
-          <p:cNvSpPr txBox="1"/>
-          <p:nvPr/>
-        </p:nvSpPr>
-        <p:spPr>
-          <a:xfrm>
-            <a:off x="6400800" y="4059936"/>
-            <a:ext cx="475488" cy="475488"/>
-          </a:xfrm>
-          <a:prstGeom prst="rect">
-            <a:avLst/>
-          </a:prstGeom>
-          <a:noFill/>
-          <a:ln/>
-        </p:spPr>
-        <p:txBody>
-          <a:bodyPr wrap="square" lIns="0" tIns="0" rIns="0" bIns="0" rtlCol="0" anchor="ctr"/>
-          <a:lstStyle/>
-          <a:p>
-            <a:pPr algn="ctr" indent="0" marL="0">
-              <a:buNone/>
-            </a:pPr>
-            <a:r>
-              <a:rPr lang="en-US" sz="1500" b="1" dirty="0">
-                <a:solidFill>
-                  <a:srgbClr val="FFFFFF"/>
-                </a:solidFill>
-              </a:rPr>
-              <a:t>6</a:t>
-            </a:r>
-            <a:endParaRPr lang="en-US" sz="1500" dirty="0"/>
-          </a:p>
-        </p:txBody>
-      </p:sp>
-      <p:sp>
-        <p:nvSpPr>
-          <p:cNvPr id="25" name="Text 23"/>
-          <p:cNvSpPr txBox="1"/>
-          <p:nvPr/>
-        </p:nvSpPr>
-        <p:spPr>
-          <a:xfrm>
-            <a:off x="7059168" y="4041648"/>
-            <a:ext cx="4553712" cy="301752"/>
-          </a:xfrm>
-          <a:prstGeom prst="rect">
-            <a:avLst/>
-          </a:prstGeom>
-          <a:noFill/>
-          <a:ln/>
-        </p:spPr>
-        <p:txBody>
-          <a:bodyPr wrap="square" lIns="0" tIns="0" rIns="0" bIns="0" rtlCol="0" anchor="t"/>
-          <a:lstStyle/>
-          <a:p>
-            <a:pPr algn="l" indent="0" marL="0">
-              <a:buNone/>
-            </a:pPr>
-            <a:r>
-              <a:rPr lang="en-US" sz="1600" b="1" dirty="0">
-                <a:solidFill>
-                  <a:schemeClr val="tx1"/>
-                </a:solidFill>
-              </a:rPr>
-              <a:t>วางหุ่นบนเส้น</a:t>
-            </a:r>
-            <a:endParaRPr lang="en-US" sz="1600" dirty="0"/>
-          </a:p>
-        </p:txBody>
-      </p:sp>
-      <p:sp>
-        <p:nvSpPr>
-          <p:cNvPr id="26" name="Text 24"/>
-          <p:cNvSpPr txBox="1"/>
-          <p:nvPr/>
-        </p:nvSpPr>
-        <p:spPr>
-          <a:xfrm>
-            <a:off x="7059168" y="4370832"/>
-            <a:ext cx="4553712" cy="822960"/>
-          </a:xfrm>
-          <a:prstGeom prst="rect">
-            <a:avLst/>
-          </a:prstGeom>
-          <a:noFill/>
-          <a:ln/>
-        </p:spPr>
-        <p:txBody>
-          <a:bodyPr wrap="square" lIns="0" tIns="0" rIns="0" bIns="0" rtlCol="0" anchor="t"/>
-          <a:lstStyle/>
-          <a:p>
-            <a:pPr algn="l" indent="0" marL="0">
-              <a:lnSpc>
-                <a:spcPct val="125000"/>
-              </a:lnSpc>
-              <a:buNone/>
-            </a:pPr>
-            <a:r>
-              <a:rPr lang="en-US" sz="1300" dirty="0">
-                <a:solidFill>
-                  <a:srgbClr val="4A5568"/>
-                </a:solidFill>
-              </a:rPr>
-              <a:t>ให้เซนเซอร์ตัวกลางทับเส้นดำ แล้วสลับไปโหมด Auto</a:t>
-            </a:r>
-            <a:endParaRPr lang="en-US" sz="1300" dirty="0"/>
-          </a:p>
-        </p:txBody>
-      </p:sp>
-      <p:sp>
-        <p:nvSpPr>
-          <p:cNvPr id="27" name="callout"/>
-          <p:cNvSpPr/>
-          <p:nvPr/>
-        </p:nvSpPr>
-        <p:spPr>
-          <a:xfrm>
-            <a:off x="548640" y="5257800"/>
-            <a:ext cx="11064240" cy="822960"/>
-          </a:xfrm>
-          <a:prstGeom prst="roundRect">
-            <a:avLst>
-              <a:gd name="adj" fmla="val 8889"/>
-            </a:avLst>
-          </a:prstGeom>
-          <a:solidFill>
-            <a:srgbClr val="E8F1F5"/>
-          </a:solidFill>
-          <a:ln w="12700">
-            <a:solidFill>
-              <a:srgbClr val="CBE0E9"/>
-            </a:solidFill>
-            <a:prstDash val="solid"/>
-          </a:ln>
-        </p:spPr>
-      </p:sp>
-      <p:sp>
-        <p:nvSpPr>
-          <p:cNvPr id="28" name="Text 26"/>
-          <p:cNvSpPr txBox="1"/>
-          <p:nvPr/>
-        </p:nvSpPr>
-        <p:spPr>
-          <a:xfrm>
-            <a:off x="777240" y="5385816"/>
-            <a:ext cx="10607040" cy="274320"/>
-          </a:xfrm>
-          <a:prstGeom prst="rect">
-            <a:avLst/>
-          </a:prstGeom>
-          <a:noFill/>
-          <a:ln/>
-        </p:spPr>
-        <p:txBody>
-          <a:bodyPr wrap="square" lIns="0" tIns="0" rIns="0" bIns="0" rtlCol="0" anchor="t"/>
-          <a:lstStyle/>
-          <a:p>
-            <a:pPr algn="l" indent="0" marL="0">
-              <a:buNone/>
-            </a:pPr>
-            <a:r>
-              <a:rPr lang="en-US" sz="1400" b="1" dirty="0">
-                <a:solidFill>
-                  <a:srgbClr val="1C7293"/>
-                </a:solidFill>
-              </a:rPr>
-              <a:t>ไม่มีกล้องก็รันสคริปต์ได้</a:t>
-            </a:r>
-            <a:endParaRPr lang="en-US" sz="1400" dirty="0"/>
-          </a:p>
-        </p:txBody>
-      </p:sp>
-      <p:sp>
-        <p:nvSpPr>
-          <p:cNvPr id="29" name="Text 27"/>
-          <p:cNvSpPr txBox="1"/>
-          <p:nvPr/>
-        </p:nvSpPr>
-        <p:spPr>
-          <a:xfrm>
-            <a:off x="777240" y="5696712"/>
-            <a:ext cx="10607040" cy="256032"/>
-          </a:xfrm>
-          <a:prstGeom prst="rect">
-            <a:avLst/>
-          </a:prstGeom>
-          <a:noFill/>
-          <a:ln/>
-        </p:spPr>
-        <p:txBody>
-          <a:bodyPr wrap="square" lIns="0" tIns="0" rIns="0" bIns="0" rtlCol="0" anchor="t"/>
-          <a:lstStyle/>
-          <a:p>
-            <a:pPr algn="l" indent="0" marL="0">
-              <a:lnSpc>
-                <a:spcPct val="120000"/>
-              </a:lnSpc>
-              <a:buNone/>
-            </a:pPr>
-            <a:r>
-              <a:rPr lang="en-US" sz="1250" dirty="0">
-                <a:solidFill>
-                  <a:srgbClr val="4A5568"/>
-                </a:solidFill>
-              </a:rPr>
-              <a:t>ถ้าหากล้องไม่เจอ สคริปต์จะทำงานต่อโดยไม่อ่าน QR แต่ยังเก็บข้อมูลการวิ่งลง CSV ครบเหมือนเดิม</a:t>
-            </a:r>
-            <a:endParaRPr lang="en-US" sz="1250" dirty="0"/>
-          </a:p>
-        </p:txBody>
-      </p:sp>
-      <p:sp>
-        <p:nvSpPr>
-          <p:cNvPr id="25" name="Slide Number Placeholder 0"/>
-          <p:cNvSpPr>
-            <a:spLocks noGrp="1"/>
-          </p:cNvSpPr>
-          <p:nvPr>
-            <p:ph type="sldNum" sz="quarter" idx="4294967295"/>
-          </p:nvPr>
-        </p:nvSpPr>
-        <p:spPr>
-          <a:xfrm>
-            <a:off x="11338560" y="6263640"/>
-            <a:ext cx="457200" cy="274320"/>
-          </a:xfrm>
-          <a:prstGeom prst="rect">
-            <a:avLst/>
-          </a:prstGeom>
-          <a:extLst>
-            <a:ext uri="{C572A759-6A51-4108-AA02-DFA0A04FC94B}">
-              <ma14:wrappingTextBoxFlag xmlns:ma14="http://schemas.microsoft.com/office/mac/drawingml/2011/main" val="0"/>
-            </a:ext>
-          </a:extLst>
-        </p:spPr>
-        <p:txBody>
-          <a:bodyPr/>
-          <a:lstStyle>
-            <a:lvl1pPr>
-              <a:defRPr sz="1000">
-                <a:solidFill>
-                  <a:srgbClr val="6B7E93"/>
-                </a:solidFill>
-              </a:defRPr>
-            </a:lvl1pPr>
-          </a:lstStyle>
-          <a:p>
-            <a:pPr algn="r"/>
-            <a:fld id="{F7021451-1387-4CA6-816F-3879F97B5CBC}" type="slidenum">
-              <a:rPr b="0" lang="en-US"/>
-              <a:t>13</a:t>
-            </a:fld>
-            <a:endParaRPr lang="en-US"/>
           </a:p>
         </p:txBody>
       </p:sp>
@@ -7130,6 +7600,1032 @@
                   <a:schemeClr val="tx1"/>
                 </a:solidFill>
               </a:rPr>
+              <a:t>เปิดใช้งาน 6 ขั้นตอน</a:t>
+            </a:r>
+            <a:endParaRPr lang="en-US" sz="3200" dirty="0"/>
+          </a:p>
+        </p:txBody>
+      </p:sp>
+      <p:sp>
+        <p:nvSpPr>
+          <p:cNvPr id="3" name="dot-1"/>
+          <p:cNvSpPr/>
+          <p:nvPr/>
+        </p:nvSpPr>
+        <p:spPr>
+          <a:xfrm>
+            <a:off x="548640" y="1463040"/>
+            <a:ext cx="475488" cy="475488"/>
+          </a:xfrm>
+          <a:prstGeom prst="ellipse">
+            <a:avLst/>
+          </a:prstGeom>
+          <a:solidFill>
+            <a:srgbClr val="E8803A"/>
+          </a:solidFill>
+          <a:ln w="12700">
+            <a:solidFill>
+              <a:srgbClr val="E8803A"/>
+            </a:solidFill>
+            <a:prstDash val="solid"/>
+          </a:ln>
+        </p:spPr>
+      </p:sp>
+      <p:sp>
+        <p:nvSpPr>
+          <p:cNvPr id="4" name="Text 2"/>
+          <p:cNvSpPr txBox="1"/>
+          <p:nvPr/>
+        </p:nvSpPr>
+        <p:spPr>
+          <a:xfrm>
+            <a:off x="548640" y="1463040"/>
+            <a:ext cx="475488" cy="475488"/>
+          </a:xfrm>
+          <a:prstGeom prst="rect">
+            <a:avLst/>
+          </a:prstGeom>
+          <a:noFill/>
+          <a:ln/>
+        </p:spPr>
+        <p:txBody>
+          <a:bodyPr wrap="square" lIns="0" tIns="0" rIns="0" bIns="0" rtlCol="0" anchor="ctr"/>
+          <a:lstStyle/>
+          <a:p>
+            <a:pPr algn="ctr" indent="0" marL="0">
+              <a:buNone/>
+            </a:pPr>
+            <a:r>
+              <a:rPr lang="en-US" sz="1500" b="1" dirty="0">
+                <a:solidFill>
+                  <a:srgbClr val="FFFFFF"/>
+                </a:solidFill>
+              </a:rPr>
+              <a:t>1</a:t>
+            </a:r>
+            <a:endParaRPr lang="en-US" sz="1500" dirty="0"/>
+          </a:p>
+        </p:txBody>
+      </p:sp>
+      <p:sp>
+        <p:nvSpPr>
+          <p:cNvPr id="5" name="Text 3"/>
+          <p:cNvSpPr txBox="1"/>
+          <p:nvPr/>
+        </p:nvSpPr>
+        <p:spPr>
+          <a:xfrm>
+            <a:off x="1207008" y="1444752"/>
+            <a:ext cx="4553712" cy="301752"/>
+          </a:xfrm>
+          <a:prstGeom prst="rect">
+            <a:avLst/>
+          </a:prstGeom>
+          <a:noFill/>
+          <a:ln/>
+        </p:spPr>
+        <p:txBody>
+          <a:bodyPr wrap="square" lIns="0" tIns="0" rIns="0" bIns="0" rtlCol="0" anchor="t"/>
+          <a:lstStyle/>
+          <a:p>
+            <a:pPr algn="l" indent="0" marL="0">
+              <a:buNone/>
+            </a:pPr>
+            <a:r>
+              <a:rPr lang="en-US" sz="1600" b="1" dirty="0">
+                <a:solidFill>
+                  <a:schemeClr val="tx1"/>
+                </a:solidFill>
+              </a:rPr>
+              <a:t>เปิดไฟหุ่น</a:t>
+            </a:r>
+            <a:endParaRPr lang="en-US" sz="1600" dirty="0"/>
+          </a:p>
+        </p:txBody>
+      </p:sp>
+      <p:sp>
+        <p:nvSpPr>
+          <p:cNvPr id="6" name="Text 4"/>
+          <p:cNvSpPr txBox="1"/>
+          <p:nvPr/>
+        </p:nvSpPr>
+        <p:spPr>
+          <a:xfrm>
+            <a:off x="1207008" y="1773936"/>
+            <a:ext cx="4553712" cy="822960"/>
+          </a:xfrm>
+          <a:prstGeom prst="rect">
+            <a:avLst/>
+          </a:prstGeom>
+          <a:noFill/>
+          <a:ln/>
+        </p:spPr>
+        <p:txBody>
+          <a:bodyPr wrap="square" lIns="0" tIns="0" rIns="0" bIns="0" rtlCol="0" anchor="t"/>
+          <a:lstStyle/>
+          <a:p>
+            <a:pPr algn="l" indent="0" marL="0">
+              <a:lnSpc>
+                <a:spcPct val="125000"/>
+              </a:lnSpc>
+              <a:buNone/>
+            </a:pPr>
+            <a:r>
+              <a:rPr lang="en-US" sz="1300" dirty="0">
+                <a:solidFill>
+                  <a:srgbClr val="4A5568"/>
+                </a:solidFill>
+              </a:rPr>
+              <a:t>จอจะขึ้นหน้าต้อนรับ 2.5 วินาที แล้วเปลี่ยนเป็นหน้าสถานะเอง</a:t>
+            </a:r>
+            <a:endParaRPr lang="en-US" sz="1300" dirty="0"/>
+          </a:p>
+        </p:txBody>
+      </p:sp>
+      <p:sp>
+        <p:nvSpPr>
+          <p:cNvPr id="7" name="dot-2"/>
+          <p:cNvSpPr/>
+          <p:nvPr/>
+        </p:nvSpPr>
+        <p:spPr>
+          <a:xfrm>
+            <a:off x="6400800" y="1463040"/>
+            <a:ext cx="475488" cy="475488"/>
+          </a:xfrm>
+          <a:prstGeom prst="ellipse">
+            <a:avLst/>
+          </a:prstGeom>
+          <a:solidFill>
+            <a:srgbClr val="E8803A"/>
+          </a:solidFill>
+          <a:ln w="12700">
+            <a:solidFill>
+              <a:srgbClr val="E8803A"/>
+            </a:solidFill>
+            <a:prstDash val="solid"/>
+          </a:ln>
+        </p:spPr>
+      </p:sp>
+      <p:sp>
+        <p:nvSpPr>
+          <p:cNvPr id="8" name="Text 6"/>
+          <p:cNvSpPr txBox="1"/>
+          <p:nvPr/>
+        </p:nvSpPr>
+        <p:spPr>
+          <a:xfrm>
+            <a:off x="6400800" y="1463040"/>
+            <a:ext cx="475488" cy="475488"/>
+          </a:xfrm>
+          <a:prstGeom prst="rect">
+            <a:avLst/>
+          </a:prstGeom>
+          <a:noFill/>
+          <a:ln/>
+        </p:spPr>
+        <p:txBody>
+          <a:bodyPr wrap="square" lIns="0" tIns="0" rIns="0" bIns="0" rtlCol="0" anchor="ctr"/>
+          <a:lstStyle/>
+          <a:p>
+            <a:pPr algn="ctr" indent="0" marL="0">
+              <a:buNone/>
+            </a:pPr>
+            <a:r>
+              <a:rPr lang="en-US" sz="1500" b="1" dirty="0">
+                <a:solidFill>
+                  <a:srgbClr val="FFFFFF"/>
+                </a:solidFill>
+              </a:rPr>
+              <a:t>2</a:t>
+            </a:r>
+            <a:endParaRPr lang="en-US" sz="1500" dirty="0"/>
+          </a:p>
+        </p:txBody>
+      </p:sp>
+      <p:sp>
+        <p:nvSpPr>
+          <p:cNvPr id="9" name="Text 7"/>
+          <p:cNvSpPr txBox="1"/>
+          <p:nvPr/>
+        </p:nvSpPr>
+        <p:spPr>
+          <a:xfrm>
+            <a:off x="7059168" y="1444752"/>
+            <a:ext cx="4553712" cy="301752"/>
+          </a:xfrm>
+          <a:prstGeom prst="rect">
+            <a:avLst/>
+          </a:prstGeom>
+          <a:noFill/>
+          <a:ln/>
+        </p:spPr>
+        <p:txBody>
+          <a:bodyPr wrap="square" lIns="0" tIns="0" rIns="0" bIns="0" rtlCol="0" anchor="t"/>
+          <a:lstStyle/>
+          <a:p>
+            <a:pPr algn="l" indent="0" marL="0">
+              <a:buNone/>
+            </a:pPr>
+            <a:r>
+              <a:rPr lang="en-US" sz="1600" b="1" dirty="0">
+                <a:solidFill>
+                  <a:schemeClr val="tx1"/>
+                </a:solidFill>
+              </a:rPr>
+              <a:t>ต่อ Wi-Fi ของหุ่น</a:t>
+            </a:r>
+            <a:endParaRPr lang="en-US" sz="1600" dirty="0"/>
+          </a:p>
+        </p:txBody>
+      </p:sp>
+      <p:sp>
+        <p:nvSpPr>
+          <p:cNvPr id="10" name="Text 8"/>
+          <p:cNvSpPr txBox="1"/>
+          <p:nvPr/>
+        </p:nvSpPr>
+        <p:spPr>
+          <a:xfrm>
+            <a:off x="7059168" y="1773936"/>
+            <a:ext cx="4553712" cy="822960"/>
+          </a:xfrm>
+          <a:prstGeom prst="rect">
+            <a:avLst/>
+          </a:prstGeom>
+          <a:noFill/>
+          <a:ln/>
+        </p:spPr>
+        <p:txBody>
+          <a:bodyPr wrap="square" lIns="0" tIns="0" rIns="0" bIns="0" rtlCol="0" anchor="t"/>
+          <a:lstStyle/>
+          <a:p>
+            <a:pPr algn="l" indent="0" marL="0">
+              <a:lnSpc>
+                <a:spcPct val="125000"/>
+              </a:lnSpc>
+              <a:buNone/>
+            </a:pPr>
+            <a:r>
+              <a:rPr lang="en-US" sz="1300" dirty="0">
+                <a:solidFill>
+                  <a:srgbClr val="4A5568"/>
+                </a:solidFill>
+              </a:rPr>
+              <a:t>ชื่อ My_Robot2 รหัส password1234  ต่อทั้งมือถือและเครื่อง PC</a:t>
+            </a:r>
+            <a:endParaRPr lang="en-US" sz="1300" dirty="0"/>
+          </a:p>
+        </p:txBody>
+      </p:sp>
+      <p:sp>
+        <p:nvSpPr>
+          <p:cNvPr id="11" name="dot-3"/>
+          <p:cNvSpPr/>
+          <p:nvPr/>
+        </p:nvSpPr>
+        <p:spPr>
+          <a:xfrm>
+            <a:off x="548640" y="2761488"/>
+            <a:ext cx="475488" cy="475488"/>
+          </a:xfrm>
+          <a:prstGeom prst="ellipse">
+            <a:avLst/>
+          </a:prstGeom>
+          <a:solidFill>
+            <a:srgbClr val="E8803A"/>
+          </a:solidFill>
+          <a:ln w="12700">
+            <a:solidFill>
+              <a:srgbClr val="E8803A"/>
+            </a:solidFill>
+            <a:prstDash val="solid"/>
+          </a:ln>
+        </p:spPr>
+      </p:sp>
+      <p:sp>
+        <p:nvSpPr>
+          <p:cNvPr id="12" name="Text 10"/>
+          <p:cNvSpPr txBox="1"/>
+          <p:nvPr/>
+        </p:nvSpPr>
+        <p:spPr>
+          <a:xfrm>
+            <a:off x="548640" y="2761488"/>
+            <a:ext cx="475488" cy="475488"/>
+          </a:xfrm>
+          <a:prstGeom prst="rect">
+            <a:avLst/>
+          </a:prstGeom>
+          <a:noFill/>
+          <a:ln/>
+        </p:spPr>
+        <p:txBody>
+          <a:bodyPr wrap="square" lIns="0" tIns="0" rIns="0" bIns="0" rtlCol="0" anchor="ctr"/>
+          <a:lstStyle/>
+          <a:p>
+            <a:pPr algn="ctr" indent="0" marL="0">
+              <a:buNone/>
+            </a:pPr>
+            <a:r>
+              <a:rPr lang="en-US" sz="1500" b="1" dirty="0">
+                <a:solidFill>
+                  <a:srgbClr val="FFFFFF"/>
+                </a:solidFill>
+              </a:rPr>
+              <a:t>3</a:t>
+            </a:r>
+            <a:endParaRPr lang="en-US" sz="1500" dirty="0"/>
+          </a:p>
+        </p:txBody>
+      </p:sp>
+      <p:sp>
+        <p:nvSpPr>
+          <p:cNvPr id="13" name="Text 11"/>
+          <p:cNvSpPr txBox="1"/>
+          <p:nvPr/>
+        </p:nvSpPr>
+        <p:spPr>
+          <a:xfrm>
+            <a:off x="1207008" y="2743200"/>
+            <a:ext cx="4553712" cy="301752"/>
+          </a:xfrm>
+          <a:prstGeom prst="rect">
+            <a:avLst/>
+          </a:prstGeom>
+          <a:noFill/>
+          <a:ln/>
+        </p:spPr>
+        <p:txBody>
+          <a:bodyPr wrap="square" lIns="0" tIns="0" rIns="0" bIns="0" rtlCol="0" anchor="t"/>
+          <a:lstStyle/>
+          <a:p>
+            <a:pPr algn="l" indent="0" marL="0">
+              <a:buNone/>
+            </a:pPr>
+            <a:r>
+              <a:rPr lang="en-US" sz="1600" b="1" dirty="0">
+                <a:solidFill>
+                  <a:schemeClr val="tx1"/>
+                </a:solidFill>
+              </a:rPr>
+              <a:t>เปิดหน้าเว็บ</a:t>
+            </a:r>
+            <a:endParaRPr lang="en-US" sz="1600" dirty="0"/>
+          </a:p>
+        </p:txBody>
+      </p:sp>
+      <p:sp>
+        <p:nvSpPr>
+          <p:cNvPr id="14" name="Text 12"/>
+          <p:cNvSpPr txBox="1"/>
+          <p:nvPr/>
+        </p:nvSpPr>
+        <p:spPr>
+          <a:xfrm>
+            <a:off x="1207008" y="3072384"/>
+            <a:ext cx="4553712" cy="822960"/>
+          </a:xfrm>
+          <a:prstGeom prst="rect">
+            <a:avLst/>
+          </a:prstGeom>
+          <a:noFill/>
+          <a:ln/>
+        </p:spPr>
+        <p:txBody>
+          <a:bodyPr wrap="square" lIns="0" tIns="0" rIns="0" bIns="0" rtlCol="0" anchor="t"/>
+          <a:lstStyle/>
+          <a:p>
+            <a:pPr algn="l" indent="0" marL="0">
+              <a:lnSpc>
+                <a:spcPct val="125000"/>
+              </a:lnSpc>
+              <a:buNone/>
+            </a:pPr>
+            <a:r>
+              <a:rPr lang="en-US" sz="1300" dirty="0">
+                <a:solidFill>
+                  <a:srgbClr val="4A5568"/>
+                </a:solidFill>
+              </a:rPr>
+              <a:t>พิมพ์ 192.168.4.1 ในเบราว์เซอร์  ภาพกล้องจะขึ้นเองเมื่อกล้องเกาะ Wi-Fi ได้</a:t>
+            </a:r>
+            <a:endParaRPr lang="en-US" sz="1300" dirty="0"/>
+          </a:p>
+        </p:txBody>
+      </p:sp>
+      <p:sp>
+        <p:nvSpPr>
+          <p:cNvPr id="15" name="dot-4"/>
+          <p:cNvSpPr/>
+          <p:nvPr/>
+        </p:nvSpPr>
+        <p:spPr>
+          <a:xfrm>
+            <a:off x="6400800" y="2761488"/>
+            <a:ext cx="475488" cy="475488"/>
+          </a:xfrm>
+          <a:prstGeom prst="ellipse">
+            <a:avLst/>
+          </a:prstGeom>
+          <a:solidFill>
+            <a:srgbClr val="E8803A"/>
+          </a:solidFill>
+          <a:ln w="12700">
+            <a:solidFill>
+              <a:srgbClr val="E8803A"/>
+            </a:solidFill>
+            <a:prstDash val="solid"/>
+          </a:ln>
+        </p:spPr>
+      </p:sp>
+      <p:sp>
+        <p:nvSpPr>
+          <p:cNvPr id="16" name="Text 14"/>
+          <p:cNvSpPr txBox="1"/>
+          <p:nvPr/>
+        </p:nvSpPr>
+        <p:spPr>
+          <a:xfrm>
+            <a:off x="6400800" y="2761488"/>
+            <a:ext cx="475488" cy="475488"/>
+          </a:xfrm>
+          <a:prstGeom prst="rect">
+            <a:avLst/>
+          </a:prstGeom>
+          <a:noFill/>
+          <a:ln/>
+        </p:spPr>
+        <p:txBody>
+          <a:bodyPr wrap="square" lIns="0" tIns="0" rIns="0" bIns="0" rtlCol="0" anchor="ctr"/>
+          <a:lstStyle/>
+          <a:p>
+            <a:pPr algn="ctr" indent="0" marL="0">
+              <a:buNone/>
+            </a:pPr>
+            <a:r>
+              <a:rPr lang="en-US" sz="1500" b="1" dirty="0">
+                <a:solidFill>
+                  <a:srgbClr val="FFFFFF"/>
+                </a:solidFill>
+              </a:rPr>
+              <a:t>4</a:t>
+            </a:r>
+            <a:endParaRPr lang="en-US" sz="1500" dirty="0"/>
+          </a:p>
+        </p:txBody>
+      </p:sp>
+      <p:sp>
+        <p:nvSpPr>
+          <p:cNvPr id="17" name="Text 15"/>
+          <p:cNvSpPr txBox="1"/>
+          <p:nvPr/>
+        </p:nvSpPr>
+        <p:spPr>
+          <a:xfrm>
+            <a:off x="7059168" y="2743200"/>
+            <a:ext cx="4553712" cy="301752"/>
+          </a:xfrm>
+          <a:prstGeom prst="rect">
+            <a:avLst/>
+          </a:prstGeom>
+          <a:noFill/>
+          <a:ln/>
+        </p:spPr>
+        <p:txBody>
+          <a:bodyPr wrap="square" lIns="0" tIns="0" rIns="0" bIns="0" rtlCol="0" anchor="t"/>
+          <a:lstStyle/>
+          <a:p>
+            <a:pPr algn="l" indent="0" marL="0">
+              <a:buNone/>
+            </a:pPr>
+            <a:r>
+              <a:rPr lang="en-US" sz="1600" b="1" dirty="0">
+                <a:solidFill>
+                  <a:schemeClr val="tx1"/>
+                </a:solidFill>
+              </a:rPr>
+              <a:t>เลื่อนความเร็ว</a:t>
+            </a:r>
+            <a:endParaRPr lang="en-US" sz="1600" dirty="0"/>
+          </a:p>
+        </p:txBody>
+      </p:sp>
+      <p:sp>
+        <p:nvSpPr>
+          <p:cNvPr id="18" name="Text 16"/>
+          <p:cNvSpPr txBox="1"/>
+          <p:nvPr/>
+        </p:nvSpPr>
+        <p:spPr>
+          <a:xfrm>
+            <a:off x="7059168" y="3072384"/>
+            <a:ext cx="4553712" cy="822960"/>
+          </a:xfrm>
+          <a:prstGeom prst="rect">
+            <a:avLst/>
+          </a:prstGeom>
+          <a:noFill/>
+          <a:ln/>
+        </p:spPr>
+        <p:txBody>
+          <a:bodyPr wrap="square" lIns="0" tIns="0" rIns="0" bIns="0" rtlCol="0" anchor="t"/>
+          <a:lstStyle/>
+          <a:p>
+            <a:pPr algn="l" indent="0" marL="0">
+              <a:lnSpc>
+                <a:spcPct val="125000"/>
+              </a:lnSpc>
+              <a:buNone/>
+            </a:pPr>
+            <a:r>
+              <a:rPr lang="en-US" sz="1300" dirty="0">
+                <a:solidFill>
+                  <a:srgbClr val="4A5568"/>
+                </a:solidFill>
+              </a:rPr>
+              <a:t>แถบเลื่อนเริ่มที่ 0 เสมอ ถ้าไม่เลื่อนขึ้นหุ่นจะไม่ขยับแม้อยู่ในโหมด Auto</a:t>
+            </a:r>
+            <a:endParaRPr lang="en-US" sz="1300" dirty="0"/>
+          </a:p>
+        </p:txBody>
+      </p:sp>
+      <p:sp>
+        <p:nvSpPr>
+          <p:cNvPr id="19" name="dot-5"/>
+          <p:cNvSpPr/>
+          <p:nvPr/>
+        </p:nvSpPr>
+        <p:spPr>
+          <a:xfrm>
+            <a:off x="548640" y="4059936"/>
+            <a:ext cx="475488" cy="475488"/>
+          </a:xfrm>
+          <a:prstGeom prst="ellipse">
+            <a:avLst/>
+          </a:prstGeom>
+          <a:solidFill>
+            <a:srgbClr val="E8803A"/>
+          </a:solidFill>
+          <a:ln w="12700">
+            <a:solidFill>
+              <a:srgbClr val="E8803A"/>
+            </a:solidFill>
+            <a:prstDash val="solid"/>
+          </a:ln>
+        </p:spPr>
+      </p:sp>
+      <p:sp>
+        <p:nvSpPr>
+          <p:cNvPr id="20" name="Text 18"/>
+          <p:cNvSpPr txBox="1"/>
+          <p:nvPr/>
+        </p:nvSpPr>
+        <p:spPr>
+          <a:xfrm>
+            <a:off x="548640" y="4059936"/>
+            <a:ext cx="475488" cy="475488"/>
+          </a:xfrm>
+          <a:prstGeom prst="rect">
+            <a:avLst/>
+          </a:prstGeom>
+          <a:noFill/>
+          <a:ln/>
+        </p:spPr>
+        <p:txBody>
+          <a:bodyPr wrap="square" lIns="0" tIns="0" rIns="0" bIns="0" rtlCol="0" anchor="ctr"/>
+          <a:lstStyle/>
+          <a:p>
+            <a:pPr algn="ctr" indent="0" marL="0">
+              <a:buNone/>
+            </a:pPr>
+            <a:r>
+              <a:rPr lang="en-US" sz="1500" b="1" dirty="0">
+                <a:solidFill>
+                  <a:srgbClr val="FFFFFF"/>
+                </a:solidFill>
+              </a:rPr>
+              <a:t>5</a:t>
+            </a:r>
+            <a:endParaRPr lang="en-US" sz="1500" dirty="0"/>
+          </a:p>
+        </p:txBody>
+      </p:sp>
+      <p:sp>
+        <p:nvSpPr>
+          <p:cNvPr id="21" name="Text 19"/>
+          <p:cNvSpPr txBox="1"/>
+          <p:nvPr/>
+        </p:nvSpPr>
+        <p:spPr>
+          <a:xfrm>
+            <a:off x="1207008" y="4041648"/>
+            <a:ext cx="4553712" cy="301752"/>
+          </a:xfrm>
+          <a:prstGeom prst="rect">
+            <a:avLst/>
+          </a:prstGeom>
+          <a:noFill/>
+          <a:ln/>
+        </p:spPr>
+        <p:txBody>
+          <a:bodyPr wrap="square" lIns="0" tIns="0" rIns="0" bIns="0" rtlCol="0" anchor="t"/>
+          <a:lstStyle/>
+          <a:p>
+            <a:pPr algn="l" indent="0" marL="0">
+              <a:buNone/>
+            </a:pPr>
+            <a:r>
+              <a:rPr lang="en-US" sz="1600" b="1" dirty="0">
+                <a:solidFill>
+                  <a:schemeClr val="tx1"/>
+                </a:solidFill>
+              </a:rPr>
+              <a:t>รันสคริปต์บน PC</a:t>
+            </a:r>
+            <a:endParaRPr lang="en-US" sz="1600" dirty="0"/>
+          </a:p>
+        </p:txBody>
+      </p:sp>
+      <p:sp>
+        <p:nvSpPr>
+          <p:cNvPr id="22" name="Text 20"/>
+          <p:cNvSpPr txBox="1"/>
+          <p:nvPr/>
+        </p:nvSpPr>
+        <p:spPr>
+          <a:xfrm>
+            <a:off x="1207008" y="4370832"/>
+            <a:ext cx="4553712" cy="822960"/>
+          </a:xfrm>
+          <a:prstGeom prst="rect">
+            <a:avLst/>
+          </a:prstGeom>
+          <a:noFill/>
+          <a:ln/>
+        </p:spPr>
+        <p:txBody>
+          <a:bodyPr wrap="square" lIns="0" tIns="0" rIns="0" bIns="0" rtlCol="0" anchor="t"/>
+          <a:lstStyle/>
+          <a:p>
+            <a:pPr algn="l" indent="0" marL="0">
+              <a:lnSpc>
+                <a:spcPct val="125000"/>
+              </a:lnSpc>
+              <a:buNone/>
+            </a:pPr>
+            <a:r>
+              <a:rPr lang="en-US" sz="1300" dirty="0">
+                <a:solidFill>
+                  <a:srgbClr val="4A5568"/>
+                </a:solidFill>
+              </a:rPr>
+              <a:t>สั่ง py pc_qr_scanner/qr_scanner.py  สคริปต์จะไล่หากล้องเองในวง</a:t>
+            </a:r>
+            <a:endParaRPr lang="en-US" sz="1300" dirty="0"/>
+          </a:p>
+        </p:txBody>
+      </p:sp>
+      <p:sp>
+        <p:nvSpPr>
+          <p:cNvPr id="23" name="dot-6"/>
+          <p:cNvSpPr/>
+          <p:nvPr/>
+        </p:nvSpPr>
+        <p:spPr>
+          <a:xfrm>
+            <a:off x="6400800" y="4059936"/>
+            <a:ext cx="475488" cy="475488"/>
+          </a:xfrm>
+          <a:prstGeom prst="ellipse">
+            <a:avLst/>
+          </a:prstGeom>
+          <a:solidFill>
+            <a:srgbClr val="E8803A"/>
+          </a:solidFill>
+          <a:ln w="12700">
+            <a:solidFill>
+              <a:srgbClr val="E8803A"/>
+            </a:solidFill>
+            <a:prstDash val="solid"/>
+          </a:ln>
+        </p:spPr>
+      </p:sp>
+      <p:sp>
+        <p:nvSpPr>
+          <p:cNvPr id="24" name="Text 22"/>
+          <p:cNvSpPr txBox="1"/>
+          <p:nvPr/>
+        </p:nvSpPr>
+        <p:spPr>
+          <a:xfrm>
+            <a:off x="6400800" y="4059936"/>
+            <a:ext cx="475488" cy="475488"/>
+          </a:xfrm>
+          <a:prstGeom prst="rect">
+            <a:avLst/>
+          </a:prstGeom>
+          <a:noFill/>
+          <a:ln/>
+        </p:spPr>
+        <p:txBody>
+          <a:bodyPr wrap="square" lIns="0" tIns="0" rIns="0" bIns="0" rtlCol="0" anchor="ctr"/>
+          <a:lstStyle/>
+          <a:p>
+            <a:pPr algn="ctr" indent="0" marL="0">
+              <a:buNone/>
+            </a:pPr>
+            <a:r>
+              <a:rPr lang="en-US" sz="1500" b="1" dirty="0">
+                <a:solidFill>
+                  <a:srgbClr val="FFFFFF"/>
+                </a:solidFill>
+              </a:rPr>
+              <a:t>6</a:t>
+            </a:r>
+            <a:endParaRPr lang="en-US" sz="1500" dirty="0"/>
+          </a:p>
+        </p:txBody>
+      </p:sp>
+      <p:sp>
+        <p:nvSpPr>
+          <p:cNvPr id="25" name="Text 23"/>
+          <p:cNvSpPr txBox="1"/>
+          <p:nvPr/>
+        </p:nvSpPr>
+        <p:spPr>
+          <a:xfrm>
+            <a:off x="7059168" y="4041648"/>
+            <a:ext cx="4553712" cy="301752"/>
+          </a:xfrm>
+          <a:prstGeom prst="rect">
+            <a:avLst/>
+          </a:prstGeom>
+          <a:noFill/>
+          <a:ln/>
+        </p:spPr>
+        <p:txBody>
+          <a:bodyPr wrap="square" lIns="0" tIns="0" rIns="0" bIns="0" rtlCol="0" anchor="t"/>
+          <a:lstStyle/>
+          <a:p>
+            <a:pPr algn="l" indent="0" marL="0">
+              <a:buNone/>
+            </a:pPr>
+            <a:r>
+              <a:rPr lang="en-US" sz="1600" b="1" dirty="0">
+                <a:solidFill>
+                  <a:schemeClr val="tx1"/>
+                </a:solidFill>
+              </a:rPr>
+              <a:t>วางหุ่นบนเส้น</a:t>
+            </a:r>
+            <a:endParaRPr lang="en-US" sz="1600" dirty="0"/>
+          </a:p>
+        </p:txBody>
+      </p:sp>
+      <p:sp>
+        <p:nvSpPr>
+          <p:cNvPr id="26" name="Text 24"/>
+          <p:cNvSpPr txBox="1"/>
+          <p:nvPr/>
+        </p:nvSpPr>
+        <p:spPr>
+          <a:xfrm>
+            <a:off x="7059168" y="4370832"/>
+            <a:ext cx="4553712" cy="822960"/>
+          </a:xfrm>
+          <a:prstGeom prst="rect">
+            <a:avLst/>
+          </a:prstGeom>
+          <a:noFill/>
+          <a:ln/>
+        </p:spPr>
+        <p:txBody>
+          <a:bodyPr wrap="square" lIns="0" tIns="0" rIns="0" bIns="0" rtlCol="0" anchor="t"/>
+          <a:lstStyle/>
+          <a:p>
+            <a:pPr algn="l" indent="0" marL="0">
+              <a:lnSpc>
+                <a:spcPct val="125000"/>
+              </a:lnSpc>
+              <a:buNone/>
+            </a:pPr>
+            <a:r>
+              <a:rPr lang="en-US" sz="1300" dirty="0">
+                <a:solidFill>
+                  <a:srgbClr val="4A5568"/>
+                </a:solidFill>
+              </a:rPr>
+              <a:t>ให้เซนเซอร์ตัวกลางทับเส้นดำ แล้วสลับไปโหมด Auto</a:t>
+            </a:r>
+            <a:endParaRPr lang="en-US" sz="1300" dirty="0"/>
+          </a:p>
+        </p:txBody>
+      </p:sp>
+      <p:sp>
+        <p:nvSpPr>
+          <p:cNvPr id="27" name="callout"/>
+          <p:cNvSpPr/>
+          <p:nvPr/>
+        </p:nvSpPr>
+        <p:spPr>
+          <a:xfrm>
+            <a:off x="548640" y="5257800"/>
+            <a:ext cx="11064240" cy="822960"/>
+          </a:xfrm>
+          <a:prstGeom prst="roundRect">
+            <a:avLst>
+              <a:gd name="adj" fmla="val 8889"/>
+            </a:avLst>
+          </a:prstGeom>
+          <a:solidFill>
+            <a:srgbClr val="E8F1F5"/>
+          </a:solidFill>
+          <a:ln w="12700">
+            <a:solidFill>
+              <a:srgbClr val="CBE0E9"/>
+            </a:solidFill>
+            <a:prstDash val="solid"/>
+          </a:ln>
+        </p:spPr>
+      </p:sp>
+      <p:sp>
+        <p:nvSpPr>
+          <p:cNvPr id="28" name="Text 26"/>
+          <p:cNvSpPr txBox="1"/>
+          <p:nvPr/>
+        </p:nvSpPr>
+        <p:spPr>
+          <a:xfrm>
+            <a:off x="777240" y="5385816"/>
+            <a:ext cx="10607040" cy="274320"/>
+          </a:xfrm>
+          <a:prstGeom prst="rect">
+            <a:avLst/>
+          </a:prstGeom>
+          <a:noFill/>
+          <a:ln/>
+        </p:spPr>
+        <p:txBody>
+          <a:bodyPr wrap="square" lIns="0" tIns="0" rIns="0" bIns="0" rtlCol="0" anchor="t"/>
+          <a:lstStyle/>
+          <a:p>
+            <a:pPr algn="l" indent="0" marL="0">
+              <a:buNone/>
+            </a:pPr>
+            <a:r>
+              <a:rPr lang="en-US" sz="1400" b="1" dirty="0">
+                <a:solidFill>
+                  <a:srgbClr val="1C7293"/>
+                </a:solidFill>
+              </a:rPr>
+              <a:t>ไม่มีกล้องก็รันสคริปต์ได้</a:t>
+            </a:r>
+            <a:endParaRPr lang="en-US" sz="1400" dirty="0"/>
+          </a:p>
+        </p:txBody>
+      </p:sp>
+      <p:sp>
+        <p:nvSpPr>
+          <p:cNvPr id="29" name="Text 27"/>
+          <p:cNvSpPr txBox="1"/>
+          <p:nvPr/>
+        </p:nvSpPr>
+        <p:spPr>
+          <a:xfrm>
+            <a:off x="777240" y="5696712"/>
+            <a:ext cx="10607040" cy="256032"/>
+          </a:xfrm>
+          <a:prstGeom prst="rect">
+            <a:avLst/>
+          </a:prstGeom>
+          <a:noFill/>
+          <a:ln/>
+        </p:spPr>
+        <p:txBody>
+          <a:bodyPr wrap="square" lIns="0" tIns="0" rIns="0" bIns="0" rtlCol="0" anchor="t"/>
+          <a:lstStyle/>
+          <a:p>
+            <a:pPr algn="l" indent="0" marL="0">
+              <a:lnSpc>
+                <a:spcPct val="120000"/>
+              </a:lnSpc>
+              <a:buNone/>
+            </a:pPr>
+            <a:r>
+              <a:rPr lang="en-US" sz="1250" dirty="0">
+                <a:solidFill>
+                  <a:srgbClr val="4A5568"/>
+                </a:solidFill>
+              </a:rPr>
+              <a:t>ถ้าหากล้องไม่เจอ สคริปต์จะทำงานต่อโดยไม่อ่าน QR แต่ยังเก็บข้อมูลการวิ่งลง CSV ครบเหมือนเดิม</a:t>
+            </a:r>
+            <a:endParaRPr lang="en-US" sz="1250" dirty="0"/>
+          </a:p>
+        </p:txBody>
+      </p:sp>
+      <p:sp>
+        <p:nvSpPr>
+          <p:cNvPr id="25" name="Slide Number Placeholder 0"/>
+          <p:cNvSpPr>
+            <a:spLocks noGrp="1"/>
+          </p:cNvSpPr>
+          <p:nvPr>
+            <p:ph type="sldNum" sz="quarter" idx="4294967295"/>
+          </p:nvPr>
+        </p:nvSpPr>
+        <p:spPr>
+          <a:xfrm>
+            <a:off x="11338560" y="6263640"/>
+            <a:ext cx="457200" cy="274320"/>
+          </a:xfrm>
+          <a:prstGeom prst="rect">
+            <a:avLst/>
+          </a:prstGeom>
+          <a:extLst>
+            <a:ext uri="{C572A759-6A51-4108-AA02-DFA0A04FC94B}">
+              <ma14:wrappingTextBoxFlag xmlns:ma14="http://schemas.microsoft.com/office/mac/drawingml/2011/main" val="0"/>
+            </a:ext>
+          </a:extLst>
+        </p:spPr>
+        <p:txBody>
+          <a:bodyPr/>
+          <a:lstStyle>
+            <a:lvl1pPr>
+              <a:defRPr sz="1000">
+                <a:solidFill>
+                  <a:srgbClr val="6B7E93"/>
+                </a:solidFill>
+              </a:defRPr>
+            </a:lvl1pPr>
+          </a:lstStyle>
+          <a:p>
+            <a:pPr algn="r"/>
+            <a:fld id="{F7021451-1387-4CA6-816F-3879F97B5CBC}" type="slidenum">
+              <a:rPr b="0" lang="en-US"/>
+              <a:t>14</a:t>
+            </a:fld>
+            <a:endParaRPr lang="en-US"/>
+          </a:p>
+        </p:txBody>
+      </p:sp>
+    </p:spTree>
+  </p:cSld>
+  <p:clrMapOvr>
+    <a:masterClrMapping/>
+  </p:clrMapOvr>
+</p:sld>
+</file>
+
+<file path=ppt/slides/slide15.xml><?xml version="1.0" encoding="utf-8"?>
+<p:sld xmlns:a="http://schemas.openxmlformats.org/drawingml/2006/main" xmlns:r="http://schemas.openxmlformats.org/officeDocument/2006/relationships" xmlns:p="http://schemas.openxmlformats.org/presentationml/2006/main">
+  <p:cSld name="Slide 15">
+    <p:spTree>
+      <p:nvGrpSpPr>
+        <p:cNvPr id="1" name=""/>
+        <p:cNvGrpSpPr/>
+        <p:nvPr/>
+      </p:nvGrpSpPr>
+      <p:grpSpPr>
+        <a:xfrm>
+          <a:off x="0" y="0"/>
+          <a:ext cx="0" cy="0"/>
+          <a:chOff x="0" y="0"/>
+          <a:chExt cx="0" cy="0"/>
+        </a:xfrm>
+      </p:grpSpPr>
+      <p:sp>
+        <p:nvSpPr>
+          <p:cNvPr id="2" name="Text 0"/>
+          <p:cNvSpPr/>
+          <p:nvPr>
+            <p:ph idx="100" type="title" hasCustomPrompt="1"/>
+          </p:nvPr>
+        </p:nvSpPr>
+        <p:spPr>
+          <a:xfrm>
+            <a:off x="548640" y="384048"/>
+            <a:ext cx="11064240" cy="685800"/>
+          </a:xfrm>
+          <a:prstGeom prst="rect">
+            <a:avLst/>
+          </a:prstGeom>
+          <a:noFill/>
+          <a:ln/>
+        </p:spPr>
+        <p:txBody>
+          <a:bodyPr wrap="square" rtlCol="0"/>
+          <a:lstStyle/>
+          <a:p>
+            <a:pPr algn="l" indent="0" marL="0">
+              <a:buNone/>
+            </a:pPr>
+            <a:r>
+              <a:rPr lang="en-US" sz="3200" b="1" dirty="0">
+                <a:solidFill>
+                  <a:schemeClr val="tx1"/>
+                </a:solidFill>
+              </a:rPr>
               <a:t>จอบอกอะไรเราบ้าง</a:t>
             </a:r>
             <a:endParaRPr lang="en-US" sz="3200" dirty="0"/>
@@ -7138,7 +8634,7 @@
       </p:sp>
       <p:graphicFrame>
         <p:nvGraphicFramePr>
-          <p:cNvPr id="15" name="Table 0"/>
+          <p:cNvPr id="16" name="Table 0"/>
           <p:cNvGraphicFramePr>
             <a:graphicFrameLocks noGrp="1"/>
           </p:cNvGraphicFramePr>
@@ -8418,828 +9914,6 @@
             <a:pPr algn="r"/>
             <a:fld id="{F7021451-1387-4CA6-816F-3879F97B5CBC}" type="slidenum">
               <a:rPr b="0" lang="en-US"/>
-              <a:t>14</a:t>
-            </a:fld>
-            <a:endParaRPr lang="en-US"/>
-          </a:p>
-        </p:txBody>
-      </p:sp>
-    </p:spTree>
-  </p:cSld>
-  <p:clrMapOvr>
-    <a:masterClrMapping/>
-  </p:clrMapOvr>
-</p:sld>
-</file>
-
-<file path=ppt/slides/slide15.xml><?xml version="1.0" encoding="utf-8"?>
-<p:sld xmlns:a="http://schemas.openxmlformats.org/drawingml/2006/main" xmlns:r="http://schemas.openxmlformats.org/officeDocument/2006/relationships" xmlns:p="http://schemas.openxmlformats.org/presentationml/2006/main">
-  <p:cSld name="Slide 15">
-    <p:spTree>
-      <p:nvGrpSpPr>
-        <p:cNvPr id="1" name=""/>
-        <p:cNvGrpSpPr/>
-        <p:nvPr/>
-      </p:nvGrpSpPr>
-      <p:grpSpPr>
-        <a:xfrm>
-          <a:off x="0" y="0"/>
-          <a:ext cx="0" cy="0"/>
-          <a:chOff x="0" y="0"/>
-          <a:chExt cx="0" cy="0"/>
-        </a:xfrm>
-      </p:grpSpPr>
-      <p:sp>
-        <p:nvSpPr>
-          <p:cNvPr id="2" name="Text 0"/>
-          <p:cNvSpPr/>
-          <p:nvPr>
-            <p:ph idx="100" type="title" hasCustomPrompt="1"/>
-          </p:nvPr>
-        </p:nvSpPr>
-        <p:spPr>
-          <a:xfrm>
-            <a:off x="548640" y="384048"/>
-            <a:ext cx="11064240" cy="685800"/>
-          </a:xfrm>
-          <a:prstGeom prst="rect">
-            <a:avLst/>
-          </a:prstGeom>
-          <a:noFill/>
-          <a:ln/>
-        </p:spPr>
-        <p:txBody>
-          <a:bodyPr wrap="square" rtlCol="0"/>
-          <a:lstStyle/>
-          <a:p>
-            <a:pPr algn="l" indent="0" marL="0">
-              <a:buNone/>
-            </a:pPr>
-            <a:r>
-              <a:rPr lang="en-US" sz="3200" b="1" dirty="0">
-                <a:solidFill>
-                  <a:schemeClr val="tx1"/>
-                </a:solidFill>
-              </a:rPr>
-              <a:t>หน้าเว็บควบคุม</a:t>
-            </a:r>
-            <a:endParaRPr lang="en-US" sz="3200" dirty="0"/>
-          </a:p>
-        </p:txBody>
-      </p:sp>
-      <p:sp>
-        <p:nvSpPr>
-          <p:cNvPr id="3" name="card-ปุ่มทิศทาง"/>
-          <p:cNvSpPr/>
-          <p:nvPr/>
-        </p:nvSpPr>
-        <p:spPr>
-          <a:xfrm>
-            <a:off x="548640" y="1417320"/>
-            <a:ext cx="3444240" cy="1572768"/>
-          </a:xfrm>
-          <a:prstGeom prst="roundRect">
-            <a:avLst>
-              <a:gd name="adj" fmla="val 5814"/>
-            </a:avLst>
-          </a:prstGeom>
-          <a:solidFill>
-            <a:schemeClr val="bg2"/>
-          </a:solidFill>
-          <a:ln w="12700">
-            <a:solidFill>
-              <a:srgbClr val="D9E0E8"/>
-            </a:solidFill>
-            <a:prstDash val="solid"/>
-          </a:ln>
-        </p:spPr>
-      </p:sp>
-      <p:sp>
-        <p:nvSpPr>
-          <p:cNvPr id="4" name="Text 2"/>
-          <p:cNvSpPr txBox="1"/>
-          <p:nvPr/>
-        </p:nvSpPr>
-        <p:spPr>
-          <a:xfrm>
-            <a:off x="804672" y="1600200"/>
-            <a:ext cx="2932176" cy="365760"/>
-          </a:xfrm>
-          <a:prstGeom prst="rect">
-            <a:avLst/>
-          </a:prstGeom>
-          <a:noFill/>
-          <a:ln/>
-        </p:spPr>
-        <p:txBody>
-          <a:bodyPr wrap="square" lIns="0" tIns="0" rIns="0" bIns="0" rtlCol="0" anchor="t"/>
-          <a:lstStyle/>
-          <a:p>
-            <a:pPr algn="l" indent="0" marL="0">
-              <a:buNone/>
-            </a:pPr>
-            <a:r>
-              <a:rPr lang="en-US" sz="1600" b="1" dirty="0">
-                <a:solidFill>
-                  <a:srgbClr val="E8803A"/>
-                </a:solidFill>
-              </a:rPr>
-              <a:t>ปุ่มทิศทาง</a:t>
-            </a:r>
-            <a:endParaRPr lang="en-US" sz="1600" dirty="0"/>
-          </a:p>
-        </p:txBody>
-      </p:sp>
-      <p:sp>
-        <p:nvSpPr>
-          <p:cNvPr id="5" name="Text 3"/>
-          <p:cNvSpPr txBox="1"/>
-          <p:nvPr/>
-        </p:nvSpPr>
-        <p:spPr>
-          <a:xfrm>
-            <a:off x="804672" y="2075688"/>
-            <a:ext cx="2932176" cy="704088"/>
-          </a:xfrm>
-          <a:prstGeom prst="rect">
-            <a:avLst/>
-          </a:prstGeom>
-          <a:noFill/>
-          <a:ln/>
-        </p:spPr>
-        <p:txBody>
-          <a:bodyPr wrap="square" lIns="0" tIns="0" rIns="0" bIns="0" rtlCol="0" anchor="t"/>
-          <a:lstStyle/>
-          <a:p>
-            <a:pPr algn="l" indent="0" marL="0">
-              <a:lnSpc>
-                <a:spcPct val="125000"/>
-              </a:lnSpc>
-              <a:buNone/>
-            </a:pPr>
-            <a:r>
-              <a:rPr lang="en-US" sz="1300" dirty="0">
-                <a:solidFill>
-                  <a:srgbClr val="4A5568"/>
-                </a:solidFill>
-              </a:rPr>
-              <a:t>เดินหน้า ถอยหลัง เลี้ยวซ้าย เลี้ยวขวา และหยุด ใช้ได้เฉพาะในโหมด Manual</a:t>
-            </a:r>
-            <a:endParaRPr lang="en-US" sz="1300" dirty="0"/>
-          </a:p>
-        </p:txBody>
-      </p:sp>
-      <p:sp>
-        <p:nvSpPr>
-          <p:cNvPr id="6" name="card-แถบความเร็ว"/>
-          <p:cNvSpPr/>
-          <p:nvPr/>
-        </p:nvSpPr>
-        <p:spPr>
-          <a:xfrm>
-            <a:off x="4358640" y="1417320"/>
-            <a:ext cx="3444240" cy="1572768"/>
-          </a:xfrm>
-          <a:prstGeom prst="roundRect">
-            <a:avLst>
-              <a:gd name="adj" fmla="val 5814"/>
-            </a:avLst>
-          </a:prstGeom>
-          <a:solidFill>
-            <a:schemeClr val="bg2"/>
-          </a:solidFill>
-          <a:ln w="12700">
-            <a:solidFill>
-              <a:srgbClr val="D9E0E8"/>
-            </a:solidFill>
-            <a:prstDash val="solid"/>
-          </a:ln>
-        </p:spPr>
-      </p:sp>
-      <p:sp>
-        <p:nvSpPr>
-          <p:cNvPr id="7" name="Text 5"/>
-          <p:cNvSpPr txBox="1"/>
-          <p:nvPr/>
-        </p:nvSpPr>
-        <p:spPr>
-          <a:xfrm>
-            <a:off x="4614672" y="1600200"/>
-            <a:ext cx="2932176" cy="365760"/>
-          </a:xfrm>
-          <a:prstGeom prst="rect">
-            <a:avLst/>
-          </a:prstGeom>
-          <a:noFill/>
-          <a:ln/>
-        </p:spPr>
-        <p:txBody>
-          <a:bodyPr wrap="square" lIns="0" tIns="0" rIns="0" bIns="0" rtlCol="0" anchor="t"/>
-          <a:lstStyle/>
-          <a:p>
-            <a:pPr algn="l" indent="0" marL="0">
-              <a:buNone/>
-            </a:pPr>
-            <a:r>
-              <a:rPr lang="en-US" sz="1600" b="1" dirty="0">
-                <a:solidFill>
-                  <a:srgbClr val="E8803A"/>
-                </a:solidFill>
-              </a:rPr>
-              <a:t>แถบความเร็ว</a:t>
-            </a:r>
-            <a:endParaRPr lang="en-US" sz="1600" dirty="0"/>
-          </a:p>
-        </p:txBody>
-      </p:sp>
-      <p:sp>
-        <p:nvSpPr>
-          <p:cNvPr id="8" name="Text 6"/>
-          <p:cNvSpPr txBox="1"/>
-          <p:nvPr/>
-        </p:nvSpPr>
-        <p:spPr>
-          <a:xfrm>
-            <a:off x="4614672" y="2075688"/>
-            <a:ext cx="2932176" cy="704088"/>
-          </a:xfrm>
-          <a:prstGeom prst="rect">
-            <a:avLst/>
-          </a:prstGeom>
-          <a:noFill/>
-          <a:ln/>
-        </p:spPr>
-        <p:txBody>
-          <a:bodyPr wrap="square" lIns="0" tIns="0" rIns="0" bIns="0" rtlCol="0" anchor="t"/>
-          <a:lstStyle/>
-          <a:p>
-            <a:pPr algn="l" indent="0" marL="0">
-              <a:lnSpc>
-                <a:spcPct val="125000"/>
-              </a:lnSpc>
-              <a:buNone/>
-            </a:pPr>
-            <a:r>
-              <a:rPr lang="en-US" sz="1300" dirty="0">
-                <a:solidFill>
-                  <a:srgbClr val="4A5568"/>
-                </a:solidFill>
-              </a:rPr>
-              <a:t>เริ่มที่ 0 เสมอ ค่าที่ตั้งคือค่าที่มอเตอร์ได้รับจริง ไม่มีการปัดขึ้นให้</a:t>
-            </a:r>
-            <a:endParaRPr lang="en-US" sz="1300" dirty="0"/>
-          </a:p>
-        </p:txBody>
-      </p:sp>
-      <p:sp>
-        <p:nvSpPr>
-          <p:cNvPr id="9" name="card-แถบ Trim"/>
-          <p:cNvSpPr/>
-          <p:nvPr/>
-        </p:nvSpPr>
-        <p:spPr>
-          <a:xfrm>
-            <a:off x="8168640" y="1417320"/>
-            <a:ext cx="3444240" cy="1572768"/>
-          </a:xfrm>
-          <a:prstGeom prst="roundRect">
-            <a:avLst>
-              <a:gd name="adj" fmla="val 5814"/>
-            </a:avLst>
-          </a:prstGeom>
-          <a:solidFill>
-            <a:schemeClr val="bg2"/>
-          </a:solidFill>
-          <a:ln w="12700">
-            <a:solidFill>
-              <a:srgbClr val="D9E0E8"/>
-            </a:solidFill>
-            <a:prstDash val="solid"/>
-          </a:ln>
-        </p:spPr>
-      </p:sp>
-      <p:sp>
-        <p:nvSpPr>
-          <p:cNvPr id="10" name="Text 8"/>
-          <p:cNvSpPr txBox="1"/>
-          <p:nvPr/>
-        </p:nvSpPr>
-        <p:spPr>
-          <a:xfrm>
-            <a:off x="8424672" y="1600200"/>
-            <a:ext cx="2932176" cy="365760"/>
-          </a:xfrm>
-          <a:prstGeom prst="rect">
-            <a:avLst/>
-          </a:prstGeom>
-          <a:noFill/>
-          <a:ln/>
-        </p:spPr>
-        <p:txBody>
-          <a:bodyPr wrap="square" lIns="0" tIns="0" rIns="0" bIns="0" rtlCol="0" anchor="t"/>
-          <a:lstStyle/>
-          <a:p>
-            <a:pPr algn="l" indent="0" marL="0">
-              <a:buNone/>
-            </a:pPr>
-            <a:r>
-              <a:rPr lang="en-US" sz="1600" b="1" dirty="0">
-                <a:solidFill>
-                  <a:srgbClr val="E8803A"/>
-                </a:solidFill>
-              </a:rPr>
-              <a:t>แถบ Trim</a:t>
-            </a:r>
-            <a:endParaRPr lang="en-US" sz="1600" dirty="0"/>
-          </a:p>
-        </p:txBody>
-      </p:sp>
-      <p:sp>
-        <p:nvSpPr>
-          <p:cNvPr id="11" name="Text 9"/>
-          <p:cNvSpPr txBox="1"/>
-          <p:nvPr/>
-        </p:nvSpPr>
-        <p:spPr>
-          <a:xfrm>
-            <a:off x="8424672" y="2075688"/>
-            <a:ext cx="2932176" cy="704088"/>
-          </a:xfrm>
-          <a:prstGeom prst="rect">
-            <a:avLst/>
-          </a:prstGeom>
-          <a:noFill/>
-          <a:ln/>
-        </p:spPr>
-        <p:txBody>
-          <a:bodyPr wrap="square" lIns="0" tIns="0" rIns="0" bIns="0" rtlCol="0" anchor="t"/>
-          <a:lstStyle/>
-          <a:p>
-            <a:pPr algn="l" indent="0" marL="0">
-              <a:lnSpc>
-                <a:spcPct val="125000"/>
-              </a:lnSpc>
-              <a:buNone/>
-            </a:pPr>
-            <a:r>
-              <a:rPr lang="en-US" sz="1300" dirty="0">
-                <a:solidFill>
-                  <a:srgbClr val="4A5568"/>
-                </a:solidFill>
-              </a:rPr>
-              <a:t>แก้อาการหุ่นเบี่ยงข้างเดียว ปรับได้ขณะหุ่นกำลังวิ่ง ไม่ต้องอัปโค้ดใหม่</a:t>
-            </a:r>
-            <a:endParaRPr lang="en-US" sz="1300" dirty="0"/>
-          </a:p>
-        </p:txBody>
-      </p:sp>
-      <p:sp>
-        <p:nvSpPr>
-          <p:cNvPr id="12" name="card-สวิตช์ Auto / "/>
-          <p:cNvSpPr/>
-          <p:nvPr/>
-        </p:nvSpPr>
-        <p:spPr>
-          <a:xfrm>
-            <a:off x="548640" y="3282696"/>
-            <a:ext cx="3444240" cy="1572768"/>
-          </a:xfrm>
-          <a:prstGeom prst="roundRect">
-            <a:avLst>
-              <a:gd name="adj" fmla="val 5814"/>
-            </a:avLst>
-          </a:prstGeom>
-          <a:solidFill>
-            <a:schemeClr val="bg2"/>
-          </a:solidFill>
-          <a:ln w="12700">
-            <a:solidFill>
-              <a:srgbClr val="D9E0E8"/>
-            </a:solidFill>
-            <a:prstDash val="solid"/>
-          </a:ln>
-        </p:spPr>
-      </p:sp>
-      <p:sp>
-        <p:nvSpPr>
-          <p:cNvPr id="13" name="Text 11"/>
-          <p:cNvSpPr txBox="1"/>
-          <p:nvPr/>
-        </p:nvSpPr>
-        <p:spPr>
-          <a:xfrm>
-            <a:off x="804672" y="3465576"/>
-            <a:ext cx="2932176" cy="365760"/>
-          </a:xfrm>
-          <a:prstGeom prst="rect">
-            <a:avLst/>
-          </a:prstGeom>
-          <a:noFill/>
-          <a:ln/>
-        </p:spPr>
-        <p:txBody>
-          <a:bodyPr wrap="square" lIns="0" tIns="0" rIns="0" bIns="0" rtlCol="0" anchor="t"/>
-          <a:lstStyle/>
-          <a:p>
-            <a:pPr algn="l" indent="0" marL="0">
-              <a:buNone/>
-            </a:pPr>
-            <a:r>
-              <a:rPr lang="en-US" sz="1600" b="1" dirty="0">
-                <a:solidFill>
-                  <a:srgbClr val="1C7293"/>
-                </a:solidFill>
-              </a:rPr>
-              <a:t>สวิตช์ Auto / Manual</a:t>
-            </a:r>
-            <a:endParaRPr lang="en-US" sz="1600" dirty="0"/>
-          </a:p>
-        </p:txBody>
-      </p:sp>
-      <p:sp>
-        <p:nvSpPr>
-          <p:cNvPr id="14" name="Text 12"/>
-          <p:cNvSpPr txBox="1"/>
-          <p:nvPr/>
-        </p:nvSpPr>
-        <p:spPr>
-          <a:xfrm>
-            <a:off x="804672" y="3941064"/>
-            <a:ext cx="2932176" cy="704088"/>
-          </a:xfrm>
-          <a:prstGeom prst="rect">
-            <a:avLst/>
-          </a:prstGeom>
-          <a:noFill/>
-          <a:ln/>
-        </p:spPr>
-        <p:txBody>
-          <a:bodyPr wrap="square" lIns="0" tIns="0" rIns="0" bIns="0" rtlCol="0" anchor="t"/>
-          <a:lstStyle/>
-          <a:p>
-            <a:pPr algn="l" indent="0" marL="0">
-              <a:lnSpc>
-                <a:spcPct val="125000"/>
-              </a:lnSpc>
-              <a:buNone/>
-            </a:pPr>
-            <a:r>
-              <a:rPr lang="en-US" sz="1300" dirty="0">
-                <a:solidFill>
-                  <a:srgbClr val="4A5568"/>
-                </a:solidFill>
-              </a:rPr>
-              <a:t>Auto คือเดินตามเส้นเอง  Manual คือสั่งด้วยปุ่ม  สลับได้ตลอดเวลา</a:t>
-            </a:r>
-            <a:endParaRPr lang="en-US" sz="1300" dirty="0"/>
-          </a:p>
-        </p:txBody>
-      </p:sp>
-      <p:sp>
-        <p:nvSpPr>
-          <p:cNvPr id="15" name="card-ภาพจากกล้อง"/>
-          <p:cNvSpPr/>
-          <p:nvPr/>
-        </p:nvSpPr>
-        <p:spPr>
-          <a:xfrm>
-            <a:off x="4358640" y="3282696"/>
-            <a:ext cx="3444240" cy="1572768"/>
-          </a:xfrm>
-          <a:prstGeom prst="roundRect">
-            <a:avLst>
-              <a:gd name="adj" fmla="val 5814"/>
-            </a:avLst>
-          </a:prstGeom>
-          <a:solidFill>
-            <a:schemeClr val="bg2"/>
-          </a:solidFill>
-          <a:ln w="12700">
-            <a:solidFill>
-              <a:srgbClr val="D9E0E8"/>
-            </a:solidFill>
-            <a:prstDash val="solid"/>
-          </a:ln>
-        </p:spPr>
-      </p:sp>
-      <p:sp>
-        <p:nvSpPr>
-          <p:cNvPr id="16" name="Text 14"/>
-          <p:cNvSpPr txBox="1"/>
-          <p:nvPr/>
-        </p:nvSpPr>
-        <p:spPr>
-          <a:xfrm>
-            <a:off x="4614672" y="3465576"/>
-            <a:ext cx="2932176" cy="365760"/>
-          </a:xfrm>
-          <a:prstGeom prst="rect">
-            <a:avLst/>
-          </a:prstGeom>
-          <a:noFill/>
-          <a:ln/>
-        </p:spPr>
-        <p:txBody>
-          <a:bodyPr wrap="square" lIns="0" tIns="0" rIns="0" bIns="0" rtlCol="0" anchor="t"/>
-          <a:lstStyle/>
-          <a:p>
-            <a:pPr algn="l" indent="0" marL="0">
-              <a:buNone/>
-            </a:pPr>
-            <a:r>
-              <a:rPr lang="en-US" sz="1600" b="1" dirty="0">
-                <a:solidFill>
-                  <a:srgbClr val="1C7293"/>
-                </a:solidFill>
-              </a:rPr>
-              <a:t>ภาพจากกล้อง</a:t>
-            </a:r>
-            <a:endParaRPr lang="en-US" sz="1600" dirty="0"/>
-          </a:p>
-        </p:txBody>
-      </p:sp>
-      <p:sp>
-        <p:nvSpPr>
-          <p:cNvPr id="17" name="Text 15"/>
-          <p:cNvSpPr txBox="1"/>
-          <p:nvPr/>
-        </p:nvSpPr>
-        <p:spPr>
-          <a:xfrm>
-            <a:off x="4614672" y="3941064"/>
-            <a:ext cx="2932176" cy="704088"/>
-          </a:xfrm>
-          <a:prstGeom prst="rect">
-            <a:avLst/>
-          </a:prstGeom>
-          <a:noFill/>
-          <a:ln/>
-        </p:spPr>
-        <p:txBody>
-          <a:bodyPr wrap="square" lIns="0" tIns="0" rIns="0" bIns="0" rtlCol="0" anchor="t"/>
-          <a:lstStyle/>
-          <a:p>
-            <a:pPr algn="l" indent="0" marL="0">
-              <a:lnSpc>
-                <a:spcPct val="125000"/>
-              </a:lnSpc>
-              <a:buNone/>
-            </a:pPr>
-            <a:r>
-              <a:rPr lang="en-US" sz="1300" dirty="0">
-                <a:solidFill>
-                  <a:srgbClr val="4A5568"/>
-                </a:solidFill>
-              </a:rPr>
-              <a:t>ขึ้นเองเมื่อกล้องเกาะ Wi-Fi ได้แล้ว ถ้ากล้องเงียบไปนานภาพจะหายไปเอง</a:t>
-            </a:r>
-            <a:endParaRPr lang="en-US" sz="1300" dirty="0"/>
-          </a:p>
-        </p:txBody>
-      </p:sp>
-      <p:sp>
-        <p:nvSpPr>
-          <p:cNvPr id="18" name="card-ไม่มีตัวเลขสถา"/>
-          <p:cNvSpPr/>
-          <p:nvPr/>
-        </p:nvSpPr>
-        <p:spPr>
-          <a:xfrm>
-            <a:off x="8168640" y="3282696"/>
-            <a:ext cx="3444240" cy="1572768"/>
-          </a:xfrm>
-          <a:prstGeom prst="roundRect">
-            <a:avLst>
-              <a:gd name="adj" fmla="val 5814"/>
-            </a:avLst>
-          </a:prstGeom>
-          <a:solidFill>
-            <a:schemeClr val="tx1"/>
-          </a:solidFill>
-          <a:ln w="12700">
-            <a:solidFill>
-              <a:schemeClr val="tx1"/>
-            </a:solidFill>
-            <a:prstDash val="solid"/>
-          </a:ln>
-        </p:spPr>
-      </p:sp>
-      <p:sp>
-        <p:nvSpPr>
-          <p:cNvPr id="19" name="Text 17"/>
-          <p:cNvSpPr txBox="1"/>
-          <p:nvPr/>
-        </p:nvSpPr>
-        <p:spPr>
-          <a:xfrm>
-            <a:off x="8424672" y="3465576"/>
-            <a:ext cx="2932176" cy="365760"/>
-          </a:xfrm>
-          <a:prstGeom prst="rect">
-            <a:avLst/>
-          </a:prstGeom>
-          <a:noFill/>
-          <a:ln/>
-        </p:spPr>
-        <p:txBody>
-          <a:bodyPr wrap="square" lIns="0" tIns="0" rIns="0" bIns="0" rtlCol="0" anchor="t"/>
-          <a:lstStyle/>
-          <a:p>
-            <a:pPr algn="l" indent="0" marL="0">
-              <a:buNone/>
-            </a:pPr>
-            <a:r>
-              <a:rPr lang="en-US" sz="1600" b="1" dirty="0">
-                <a:solidFill>
-                  <a:srgbClr val="E8803A"/>
-                </a:solidFill>
-              </a:rPr>
-              <a:t>ไม่มีตัวเลขสถานะ</a:t>
-            </a:r>
-            <a:endParaRPr lang="en-US" sz="1600" dirty="0"/>
-          </a:p>
-        </p:txBody>
-      </p:sp>
-      <p:sp>
-        <p:nvSpPr>
-          <p:cNvPr id="20" name="Text 18"/>
-          <p:cNvSpPr txBox="1"/>
-          <p:nvPr/>
-        </p:nvSpPr>
-        <p:spPr>
-          <a:xfrm>
-            <a:off x="8424672" y="3941064"/>
-            <a:ext cx="2932176" cy="704088"/>
-          </a:xfrm>
-          <a:prstGeom prst="rect">
-            <a:avLst/>
-          </a:prstGeom>
-          <a:noFill/>
-          <a:ln/>
-        </p:spPr>
-        <p:txBody>
-          <a:bodyPr wrap="square" lIns="0" tIns="0" rIns="0" bIns="0" rtlCol="0" anchor="t"/>
-          <a:lstStyle/>
-          <a:p>
-            <a:pPr algn="l" indent="0" marL="0">
-              <a:lnSpc>
-                <a:spcPct val="125000"/>
-              </a:lnSpc>
-              <a:buNone/>
-            </a:pPr>
-            <a:r>
-              <a:rPr lang="en-US" sz="1300" dirty="0">
-                <a:solidFill>
-                  <a:srgbClr val="B9C6D4"/>
-                </a:solidFill>
-              </a:rPr>
-              <a:t>ตั้งใจไม่ใส่ เพราะหน้านี้มีไว้ขับ ส่วนตัวเลขทั้งหมดไปอยู่ในไฟล์ Excel แทน</a:t>
-            </a:r>
-            <a:endParaRPr lang="en-US" sz="1300" dirty="0"/>
-          </a:p>
-        </p:txBody>
-      </p:sp>
-      <p:sp>
-        <p:nvSpPr>
-          <p:cNvPr id="21" name="callout"/>
-          <p:cNvSpPr/>
-          <p:nvPr/>
-        </p:nvSpPr>
-        <p:spPr>
-          <a:xfrm>
-            <a:off x="548640" y="5257800"/>
-            <a:ext cx="11064240" cy="822960"/>
-          </a:xfrm>
-          <a:prstGeom prst="roundRect">
-            <a:avLst>
-              <a:gd name="adj" fmla="val 8889"/>
-            </a:avLst>
-          </a:prstGeom>
-          <a:solidFill>
-            <a:srgbClr val="FBEEEC"/>
-          </a:solidFill>
-          <a:ln w="12700">
-            <a:solidFill>
-              <a:srgbClr val="F0D3CE"/>
-            </a:solidFill>
-            <a:prstDash val="solid"/>
-          </a:ln>
-        </p:spPr>
-      </p:sp>
-      <p:sp>
-        <p:nvSpPr>
-          <p:cNvPr id="22" name="Text 20"/>
-          <p:cNvSpPr txBox="1"/>
-          <p:nvPr/>
-        </p:nvSpPr>
-        <p:spPr>
-          <a:xfrm>
-            <a:off x="777240" y="5385816"/>
-            <a:ext cx="10607040" cy="274320"/>
-          </a:xfrm>
-          <a:prstGeom prst="rect">
-            <a:avLst/>
-          </a:prstGeom>
-          <a:noFill/>
-          <a:ln/>
-        </p:spPr>
-        <p:txBody>
-          <a:bodyPr wrap="square" lIns="0" tIns="0" rIns="0" bIns="0" rtlCol="0" anchor="t"/>
-          <a:lstStyle/>
-          <a:p>
-            <a:pPr algn="l" indent="0" marL="0">
-              <a:buNone/>
-            </a:pPr>
-            <a:r>
-              <a:rPr lang="en-US" sz="1400" b="1" dirty="0">
-                <a:solidFill>
-                  <a:srgbClr val="B3261E"/>
-                </a:solidFill>
-              </a:rPr>
-              <a:t>เปิดหน้าเว็บแล้วหมุนค้าง ทั้งที่ต่อ Wi-Fi ถูกแล้ว</a:t>
-            </a:r>
-            <a:endParaRPr lang="en-US" sz="1400" dirty="0"/>
-          </a:p>
-        </p:txBody>
-      </p:sp>
-      <p:sp>
-        <p:nvSpPr>
-          <p:cNvPr id="23" name="Text 21"/>
-          <p:cNvSpPr txBox="1"/>
-          <p:nvPr/>
-        </p:nvSpPr>
-        <p:spPr>
-          <a:xfrm>
-            <a:off x="777240" y="5696712"/>
-            <a:ext cx="10607040" cy="256032"/>
-          </a:xfrm>
-          <a:prstGeom prst="rect">
-            <a:avLst/>
-          </a:prstGeom>
-          <a:noFill/>
-          <a:ln/>
-        </p:spPr>
-        <p:txBody>
-          <a:bodyPr wrap="square" lIns="0" tIns="0" rIns="0" bIns="0" rtlCol="0" anchor="t"/>
-          <a:lstStyle/>
-          <a:p>
-            <a:pPr algn="l" indent="0" marL="0">
-              <a:lnSpc>
-                <a:spcPct val="120000"/>
-              </a:lnSpc>
-              <a:buNone/>
-            </a:pPr>
-            <a:r>
-              <a:rPr lang="en-US" sz="1250" dirty="0">
-                <a:solidFill>
-                  <a:srgbClr val="4A5568"/>
-                </a:solidFill>
-              </a:rPr>
-              <a:t>มือถือบางรุ่นเห็นว่าวงนี้ไม่มีอินเทอร์เน็ตแล้วแอบสลับกลับไปใช้เน็ตมือถือเอง ต้องเข้าไปปิดการสลับอัตโนมัติก่อน</a:t>
-            </a:r>
-            <a:endParaRPr lang="en-US" sz="1250" dirty="0"/>
-          </a:p>
-        </p:txBody>
-      </p:sp>
-      <p:sp>
-        <p:nvSpPr>
-          <p:cNvPr id="25" name="Slide Number Placeholder 0"/>
-          <p:cNvSpPr>
-            <a:spLocks noGrp="1"/>
-          </p:cNvSpPr>
-          <p:nvPr>
-            <p:ph type="sldNum" sz="quarter" idx="4294967295"/>
-          </p:nvPr>
-        </p:nvSpPr>
-        <p:spPr>
-          <a:xfrm>
-            <a:off x="11338560" y="6263640"/>
-            <a:ext cx="457200" cy="274320"/>
-          </a:xfrm>
-          <a:prstGeom prst="rect">
-            <a:avLst/>
-          </a:prstGeom>
-          <a:extLst>
-            <a:ext uri="{C572A759-6A51-4108-AA02-DFA0A04FC94B}">
-              <ma14:wrappingTextBoxFlag xmlns:ma14="http://schemas.microsoft.com/office/mac/drawingml/2011/main" val="0"/>
-            </a:ext>
-          </a:extLst>
-        </p:spPr>
-        <p:txBody>
-          <a:bodyPr/>
-          <a:lstStyle>
-            <a:lvl1pPr>
-              <a:defRPr sz="1000">
-                <a:solidFill>
-                  <a:srgbClr val="6B7E93"/>
-                </a:solidFill>
-              </a:defRPr>
-            </a:lvl1pPr>
-          </a:lstStyle>
-          <a:p>
-            <a:pPr algn="r"/>
-            <a:fld id="{F7021451-1387-4CA6-816F-3879F97B5CBC}" type="slidenum">
-              <a:rPr b="0" lang="en-US"/>
               <a:t>15</a:t>
             </a:fld>
             <a:endParaRPr lang="en-US"/>
@@ -9303,6 +9977,828 @@
                   <a:schemeClr val="tx1"/>
                 </a:solidFill>
               </a:rPr>
+              <a:t>หน้าเว็บควบคุม</a:t>
+            </a:r>
+            <a:endParaRPr lang="en-US" sz="3200" dirty="0"/>
+          </a:p>
+        </p:txBody>
+      </p:sp>
+      <p:sp>
+        <p:nvSpPr>
+          <p:cNvPr id="3" name="card-ปุ่มทิศทาง"/>
+          <p:cNvSpPr/>
+          <p:nvPr/>
+        </p:nvSpPr>
+        <p:spPr>
+          <a:xfrm>
+            <a:off x="548640" y="1417320"/>
+            <a:ext cx="3444240" cy="1572768"/>
+          </a:xfrm>
+          <a:prstGeom prst="roundRect">
+            <a:avLst>
+              <a:gd name="adj" fmla="val 5814"/>
+            </a:avLst>
+          </a:prstGeom>
+          <a:solidFill>
+            <a:schemeClr val="bg2"/>
+          </a:solidFill>
+          <a:ln w="12700">
+            <a:solidFill>
+              <a:srgbClr val="D9E0E8"/>
+            </a:solidFill>
+            <a:prstDash val="solid"/>
+          </a:ln>
+        </p:spPr>
+      </p:sp>
+      <p:sp>
+        <p:nvSpPr>
+          <p:cNvPr id="4" name="Text 2"/>
+          <p:cNvSpPr txBox="1"/>
+          <p:nvPr/>
+        </p:nvSpPr>
+        <p:spPr>
+          <a:xfrm>
+            <a:off x="804672" y="1600200"/>
+            <a:ext cx="2932176" cy="365760"/>
+          </a:xfrm>
+          <a:prstGeom prst="rect">
+            <a:avLst/>
+          </a:prstGeom>
+          <a:noFill/>
+          <a:ln/>
+        </p:spPr>
+        <p:txBody>
+          <a:bodyPr wrap="square" lIns="0" tIns="0" rIns="0" bIns="0" rtlCol="0" anchor="t"/>
+          <a:lstStyle/>
+          <a:p>
+            <a:pPr algn="l" indent="0" marL="0">
+              <a:buNone/>
+            </a:pPr>
+            <a:r>
+              <a:rPr lang="en-US" sz="1600" b="1" dirty="0">
+                <a:solidFill>
+                  <a:srgbClr val="E8803A"/>
+                </a:solidFill>
+              </a:rPr>
+              <a:t>ปุ่มทิศทาง</a:t>
+            </a:r>
+            <a:endParaRPr lang="en-US" sz="1600" dirty="0"/>
+          </a:p>
+        </p:txBody>
+      </p:sp>
+      <p:sp>
+        <p:nvSpPr>
+          <p:cNvPr id="5" name="Text 3"/>
+          <p:cNvSpPr txBox="1"/>
+          <p:nvPr/>
+        </p:nvSpPr>
+        <p:spPr>
+          <a:xfrm>
+            <a:off x="804672" y="2075688"/>
+            <a:ext cx="2932176" cy="704088"/>
+          </a:xfrm>
+          <a:prstGeom prst="rect">
+            <a:avLst/>
+          </a:prstGeom>
+          <a:noFill/>
+          <a:ln/>
+        </p:spPr>
+        <p:txBody>
+          <a:bodyPr wrap="square" lIns="0" tIns="0" rIns="0" bIns="0" rtlCol="0" anchor="t"/>
+          <a:lstStyle/>
+          <a:p>
+            <a:pPr algn="l" indent="0" marL="0">
+              <a:lnSpc>
+                <a:spcPct val="125000"/>
+              </a:lnSpc>
+              <a:buNone/>
+            </a:pPr>
+            <a:r>
+              <a:rPr lang="en-US" sz="1300" dirty="0">
+                <a:solidFill>
+                  <a:srgbClr val="4A5568"/>
+                </a:solidFill>
+              </a:rPr>
+              <a:t>เดินหน้า ถอยหลัง เลี้ยวซ้าย เลี้ยวขวา และหยุด ใช้ได้เฉพาะในโหมด Manual</a:t>
+            </a:r>
+            <a:endParaRPr lang="en-US" sz="1300" dirty="0"/>
+          </a:p>
+        </p:txBody>
+      </p:sp>
+      <p:sp>
+        <p:nvSpPr>
+          <p:cNvPr id="6" name="card-แถบความเร็ว"/>
+          <p:cNvSpPr/>
+          <p:nvPr/>
+        </p:nvSpPr>
+        <p:spPr>
+          <a:xfrm>
+            <a:off x="4358640" y="1417320"/>
+            <a:ext cx="3444240" cy="1572768"/>
+          </a:xfrm>
+          <a:prstGeom prst="roundRect">
+            <a:avLst>
+              <a:gd name="adj" fmla="val 5814"/>
+            </a:avLst>
+          </a:prstGeom>
+          <a:solidFill>
+            <a:schemeClr val="bg2"/>
+          </a:solidFill>
+          <a:ln w="12700">
+            <a:solidFill>
+              <a:srgbClr val="D9E0E8"/>
+            </a:solidFill>
+            <a:prstDash val="solid"/>
+          </a:ln>
+        </p:spPr>
+      </p:sp>
+      <p:sp>
+        <p:nvSpPr>
+          <p:cNvPr id="7" name="Text 5"/>
+          <p:cNvSpPr txBox="1"/>
+          <p:nvPr/>
+        </p:nvSpPr>
+        <p:spPr>
+          <a:xfrm>
+            <a:off x="4614672" y="1600200"/>
+            <a:ext cx="2932176" cy="365760"/>
+          </a:xfrm>
+          <a:prstGeom prst="rect">
+            <a:avLst/>
+          </a:prstGeom>
+          <a:noFill/>
+          <a:ln/>
+        </p:spPr>
+        <p:txBody>
+          <a:bodyPr wrap="square" lIns="0" tIns="0" rIns="0" bIns="0" rtlCol="0" anchor="t"/>
+          <a:lstStyle/>
+          <a:p>
+            <a:pPr algn="l" indent="0" marL="0">
+              <a:buNone/>
+            </a:pPr>
+            <a:r>
+              <a:rPr lang="en-US" sz="1600" b="1" dirty="0">
+                <a:solidFill>
+                  <a:srgbClr val="E8803A"/>
+                </a:solidFill>
+              </a:rPr>
+              <a:t>แถบความเร็ว</a:t>
+            </a:r>
+            <a:endParaRPr lang="en-US" sz="1600" dirty="0"/>
+          </a:p>
+        </p:txBody>
+      </p:sp>
+      <p:sp>
+        <p:nvSpPr>
+          <p:cNvPr id="8" name="Text 6"/>
+          <p:cNvSpPr txBox="1"/>
+          <p:nvPr/>
+        </p:nvSpPr>
+        <p:spPr>
+          <a:xfrm>
+            <a:off x="4614672" y="2075688"/>
+            <a:ext cx="2932176" cy="704088"/>
+          </a:xfrm>
+          <a:prstGeom prst="rect">
+            <a:avLst/>
+          </a:prstGeom>
+          <a:noFill/>
+          <a:ln/>
+        </p:spPr>
+        <p:txBody>
+          <a:bodyPr wrap="square" lIns="0" tIns="0" rIns="0" bIns="0" rtlCol="0" anchor="t"/>
+          <a:lstStyle/>
+          <a:p>
+            <a:pPr algn="l" indent="0" marL="0">
+              <a:lnSpc>
+                <a:spcPct val="125000"/>
+              </a:lnSpc>
+              <a:buNone/>
+            </a:pPr>
+            <a:r>
+              <a:rPr lang="en-US" sz="1300" dirty="0">
+                <a:solidFill>
+                  <a:srgbClr val="4A5568"/>
+                </a:solidFill>
+              </a:rPr>
+              <a:t>เริ่มที่ 0 เสมอ ค่าที่ตั้งคือค่าที่มอเตอร์ได้รับจริง ไม่มีการปัดขึ้นให้</a:t>
+            </a:r>
+            <a:endParaRPr lang="en-US" sz="1300" dirty="0"/>
+          </a:p>
+        </p:txBody>
+      </p:sp>
+      <p:sp>
+        <p:nvSpPr>
+          <p:cNvPr id="9" name="card-แถบ Trim"/>
+          <p:cNvSpPr/>
+          <p:nvPr/>
+        </p:nvSpPr>
+        <p:spPr>
+          <a:xfrm>
+            <a:off x="8168640" y="1417320"/>
+            <a:ext cx="3444240" cy="1572768"/>
+          </a:xfrm>
+          <a:prstGeom prst="roundRect">
+            <a:avLst>
+              <a:gd name="adj" fmla="val 5814"/>
+            </a:avLst>
+          </a:prstGeom>
+          <a:solidFill>
+            <a:schemeClr val="bg2"/>
+          </a:solidFill>
+          <a:ln w="12700">
+            <a:solidFill>
+              <a:srgbClr val="D9E0E8"/>
+            </a:solidFill>
+            <a:prstDash val="solid"/>
+          </a:ln>
+        </p:spPr>
+      </p:sp>
+      <p:sp>
+        <p:nvSpPr>
+          <p:cNvPr id="10" name="Text 8"/>
+          <p:cNvSpPr txBox="1"/>
+          <p:nvPr/>
+        </p:nvSpPr>
+        <p:spPr>
+          <a:xfrm>
+            <a:off x="8424672" y="1600200"/>
+            <a:ext cx="2932176" cy="365760"/>
+          </a:xfrm>
+          <a:prstGeom prst="rect">
+            <a:avLst/>
+          </a:prstGeom>
+          <a:noFill/>
+          <a:ln/>
+        </p:spPr>
+        <p:txBody>
+          <a:bodyPr wrap="square" lIns="0" tIns="0" rIns="0" bIns="0" rtlCol="0" anchor="t"/>
+          <a:lstStyle/>
+          <a:p>
+            <a:pPr algn="l" indent="0" marL="0">
+              <a:buNone/>
+            </a:pPr>
+            <a:r>
+              <a:rPr lang="en-US" sz="1600" b="1" dirty="0">
+                <a:solidFill>
+                  <a:srgbClr val="E8803A"/>
+                </a:solidFill>
+              </a:rPr>
+              <a:t>แถบ Trim</a:t>
+            </a:r>
+            <a:endParaRPr lang="en-US" sz="1600" dirty="0"/>
+          </a:p>
+        </p:txBody>
+      </p:sp>
+      <p:sp>
+        <p:nvSpPr>
+          <p:cNvPr id="11" name="Text 9"/>
+          <p:cNvSpPr txBox="1"/>
+          <p:nvPr/>
+        </p:nvSpPr>
+        <p:spPr>
+          <a:xfrm>
+            <a:off x="8424672" y="2075688"/>
+            <a:ext cx="2932176" cy="704088"/>
+          </a:xfrm>
+          <a:prstGeom prst="rect">
+            <a:avLst/>
+          </a:prstGeom>
+          <a:noFill/>
+          <a:ln/>
+        </p:spPr>
+        <p:txBody>
+          <a:bodyPr wrap="square" lIns="0" tIns="0" rIns="0" bIns="0" rtlCol="0" anchor="t"/>
+          <a:lstStyle/>
+          <a:p>
+            <a:pPr algn="l" indent="0" marL="0">
+              <a:lnSpc>
+                <a:spcPct val="125000"/>
+              </a:lnSpc>
+              <a:buNone/>
+            </a:pPr>
+            <a:r>
+              <a:rPr lang="en-US" sz="1300" dirty="0">
+                <a:solidFill>
+                  <a:srgbClr val="4A5568"/>
+                </a:solidFill>
+              </a:rPr>
+              <a:t>แก้อาการหุ่นเบี่ยงข้างเดียว ปรับได้ขณะหุ่นกำลังวิ่ง ไม่ต้องอัปโค้ดใหม่</a:t>
+            </a:r>
+            <a:endParaRPr lang="en-US" sz="1300" dirty="0"/>
+          </a:p>
+        </p:txBody>
+      </p:sp>
+      <p:sp>
+        <p:nvSpPr>
+          <p:cNvPr id="12" name="card-สวิตช์ Auto / "/>
+          <p:cNvSpPr/>
+          <p:nvPr/>
+        </p:nvSpPr>
+        <p:spPr>
+          <a:xfrm>
+            <a:off x="548640" y="3282696"/>
+            <a:ext cx="3444240" cy="1572768"/>
+          </a:xfrm>
+          <a:prstGeom prst="roundRect">
+            <a:avLst>
+              <a:gd name="adj" fmla="val 5814"/>
+            </a:avLst>
+          </a:prstGeom>
+          <a:solidFill>
+            <a:schemeClr val="bg2"/>
+          </a:solidFill>
+          <a:ln w="12700">
+            <a:solidFill>
+              <a:srgbClr val="D9E0E8"/>
+            </a:solidFill>
+            <a:prstDash val="solid"/>
+          </a:ln>
+        </p:spPr>
+      </p:sp>
+      <p:sp>
+        <p:nvSpPr>
+          <p:cNvPr id="13" name="Text 11"/>
+          <p:cNvSpPr txBox="1"/>
+          <p:nvPr/>
+        </p:nvSpPr>
+        <p:spPr>
+          <a:xfrm>
+            <a:off x="804672" y="3465576"/>
+            <a:ext cx="2932176" cy="365760"/>
+          </a:xfrm>
+          <a:prstGeom prst="rect">
+            <a:avLst/>
+          </a:prstGeom>
+          <a:noFill/>
+          <a:ln/>
+        </p:spPr>
+        <p:txBody>
+          <a:bodyPr wrap="square" lIns="0" tIns="0" rIns="0" bIns="0" rtlCol="0" anchor="t"/>
+          <a:lstStyle/>
+          <a:p>
+            <a:pPr algn="l" indent="0" marL="0">
+              <a:buNone/>
+            </a:pPr>
+            <a:r>
+              <a:rPr lang="en-US" sz="1600" b="1" dirty="0">
+                <a:solidFill>
+                  <a:srgbClr val="1C7293"/>
+                </a:solidFill>
+              </a:rPr>
+              <a:t>สวิตช์ Auto / Manual</a:t>
+            </a:r>
+            <a:endParaRPr lang="en-US" sz="1600" dirty="0"/>
+          </a:p>
+        </p:txBody>
+      </p:sp>
+      <p:sp>
+        <p:nvSpPr>
+          <p:cNvPr id="14" name="Text 12"/>
+          <p:cNvSpPr txBox="1"/>
+          <p:nvPr/>
+        </p:nvSpPr>
+        <p:spPr>
+          <a:xfrm>
+            <a:off x="804672" y="3941064"/>
+            <a:ext cx="2932176" cy="704088"/>
+          </a:xfrm>
+          <a:prstGeom prst="rect">
+            <a:avLst/>
+          </a:prstGeom>
+          <a:noFill/>
+          <a:ln/>
+        </p:spPr>
+        <p:txBody>
+          <a:bodyPr wrap="square" lIns="0" tIns="0" rIns="0" bIns="0" rtlCol="0" anchor="t"/>
+          <a:lstStyle/>
+          <a:p>
+            <a:pPr algn="l" indent="0" marL="0">
+              <a:lnSpc>
+                <a:spcPct val="125000"/>
+              </a:lnSpc>
+              <a:buNone/>
+            </a:pPr>
+            <a:r>
+              <a:rPr lang="en-US" sz="1300" dirty="0">
+                <a:solidFill>
+                  <a:srgbClr val="4A5568"/>
+                </a:solidFill>
+              </a:rPr>
+              <a:t>Auto คือเดินตามเส้นเอง  Manual คือสั่งด้วยปุ่ม  สลับได้ตลอดเวลา</a:t>
+            </a:r>
+            <a:endParaRPr lang="en-US" sz="1300" dirty="0"/>
+          </a:p>
+        </p:txBody>
+      </p:sp>
+      <p:sp>
+        <p:nvSpPr>
+          <p:cNvPr id="15" name="card-ภาพจากกล้อง"/>
+          <p:cNvSpPr/>
+          <p:nvPr/>
+        </p:nvSpPr>
+        <p:spPr>
+          <a:xfrm>
+            <a:off x="4358640" y="3282696"/>
+            <a:ext cx="3444240" cy="1572768"/>
+          </a:xfrm>
+          <a:prstGeom prst="roundRect">
+            <a:avLst>
+              <a:gd name="adj" fmla="val 5814"/>
+            </a:avLst>
+          </a:prstGeom>
+          <a:solidFill>
+            <a:schemeClr val="bg2"/>
+          </a:solidFill>
+          <a:ln w="12700">
+            <a:solidFill>
+              <a:srgbClr val="D9E0E8"/>
+            </a:solidFill>
+            <a:prstDash val="solid"/>
+          </a:ln>
+        </p:spPr>
+      </p:sp>
+      <p:sp>
+        <p:nvSpPr>
+          <p:cNvPr id="16" name="Text 14"/>
+          <p:cNvSpPr txBox="1"/>
+          <p:nvPr/>
+        </p:nvSpPr>
+        <p:spPr>
+          <a:xfrm>
+            <a:off x="4614672" y="3465576"/>
+            <a:ext cx="2932176" cy="365760"/>
+          </a:xfrm>
+          <a:prstGeom prst="rect">
+            <a:avLst/>
+          </a:prstGeom>
+          <a:noFill/>
+          <a:ln/>
+        </p:spPr>
+        <p:txBody>
+          <a:bodyPr wrap="square" lIns="0" tIns="0" rIns="0" bIns="0" rtlCol="0" anchor="t"/>
+          <a:lstStyle/>
+          <a:p>
+            <a:pPr algn="l" indent="0" marL="0">
+              <a:buNone/>
+            </a:pPr>
+            <a:r>
+              <a:rPr lang="en-US" sz="1600" b="1" dirty="0">
+                <a:solidFill>
+                  <a:srgbClr val="1C7293"/>
+                </a:solidFill>
+              </a:rPr>
+              <a:t>ภาพจากกล้อง</a:t>
+            </a:r>
+            <a:endParaRPr lang="en-US" sz="1600" dirty="0"/>
+          </a:p>
+        </p:txBody>
+      </p:sp>
+      <p:sp>
+        <p:nvSpPr>
+          <p:cNvPr id="17" name="Text 15"/>
+          <p:cNvSpPr txBox="1"/>
+          <p:nvPr/>
+        </p:nvSpPr>
+        <p:spPr>
+          <a:xfrm>
+            <a:off x="4614672" y="3941064"/>
+            <a:ext cx="2932176" cy="704088"/>
+          </a:xfrm>
+          <a:prstGeom prst="rect">
+            <a:avLst/>
+          </a:prstGeom>
+          <a:noFill/>
+          <a:ln/>
+        </p:spPr>
+        <p:txBody>
+          <a:bodyPr wrap="square" lIns="0" tIns="0" rIns="0" bIns="0" rtlCol="0" anchor="t"/>
+          <a:lstStyle/>
+          <a:p>
+            <a:pPr algn="l" indent="0" marL="0">
+              <a:lnSpc>
+                <a:spcPct val="125000"/>
+              </a:lnSpc>
+              <a:buNone/>
+            </a:pPr>
+            <a:r>
+              <a:rPr lang="en-US" sz="1300" dirty="0">
+                <a:solidFill>
+                  <a:srgbClr val="4A5568"/>
+                </a:solidFill>
+              </a:rPr>
+              <a:t>ขึ้นเองเมื่อกล้องเกาะ Wi-Fi ได้แล้ว ถ้ากล้องเงียบไปนานภาพจะหายไปเอง</a:t>
+            </a:r>
+            <a:endParaRPr lang="en-US" sz="1300" dirty="0"/>
+          </a:p>
+        </p:txBody>
+      </p:sp>
+      <p:sp>
+        <p:nvSpPr>
+          <p:cNvPr id="18" name="card-ไม่มีตัวเลขสถา"/>
+          <p:cNvSpPr/>
+          <p:nvPr/>
+        </p:nvSpPr>
+        <p:spPr>
+          <a:xfrm>
+            <a:off x="8168640" y="3282696"/>
+            <a:ext cx="3444240" cy="1572768"/>
+          </a:xfrm>
+          <a:prstGeom prst="roundRect">
+            <a:avLst>
+              <a:gd name="adj" fmla="val 5814"/>
+            </a:avLst>
+          </a:prstGeom>
+          <a:solidFill>
+            <a:schemeClr val="tx1"/>
+          </a:solidFill>
+          <a:ln w="12700">
+            <a:solidFill>
+              <a:schemeClr val="tx1"/>
+            </a:solidFill>
+            <a:prstDash val="solid"/>
+          </a:ln>
+        </p:spPr>
+      </p:sp>
+      <p:sp>
+        <p:nvSpPr>
+          <p:cNvPr id="19" name="Text 17"/>
+          <p:cNvSpPr txBox="1"/>
+          <p:nvPr/>
+        </p:nvSpPr>
+        <p:spPr>
+          <a:xfrm>
+            <a:off x="8424672" y="3465576"/>
+            <a:ext cx="2932176" cy="365760"/>
+          </a:xfrm>
+          <a:prstGeom prst="rect">
+            <a:avLst/>
+          </a:prstGeom>
+          <a:noFill/>
+          <a:ln/>
+        </p:spPr>
+        <p:txBody>
+          <a:bodyPr wrap="square" lIns="0" tIns="0" rIns="0" bIns="0" rtlCol="0" anchor="t"/>
+          <a:lstStyle/>
+          <a:p>
+            <a:pPr algn="l" indent="0" marL="0">
+              <a:buNone/>
+            </a:pPr>
+            <a:r>
+              <a:rPr lang="en-US" sz="1600" b="1" dirty="0">
+                <a:solidFill>
+                  <a:srgbClr val="E8803A"/>
+                </a:solidFill>
+              </a:rPr>
+              <a:t>ไม่มีตัวเลขสถานะ</a:t>
+            </a:r>
+            <a:endParaRPr lang="en-US" sz="1600" dirty="0"/>
+          </a:p>
+        </p:txBody>
+      </p:sp>
+      <p:sp>
+        <p:nvSpPr>
+          <p:cNvPr id="20" name="Text 18"/>
+          <p:cNvSpPr txBox="1"/>
+          <p:nvPr/>
+        </p:nvSpPr>
+        <p:spPr>
+          <a:xfrm>
+            <a:off x="8424672" y="3941064"/>
+            <a:ext cx="2932176" cy="704088"/>
+          </a:xfrm>
+          <a:prstGeom prst="rect">
+            <a:avLst/>
+          </a:prstGeom>
+          <a:noFill/>
+          <a:ln/>
+        </p:spPr>
+        <p:txBody>
+          <a:bodyPr wrap="square" lIns="0" tIns="0" rIns="0" bIns="0" rtlCol="0" anchor="t"/>
+          <a:lstStyle/>
+          <a:p>
+            <a:pPr algn="l" indent="0" marL="0">
+              <a:lnSpc>
+                <a:spcPct val="125000"/>
+              </a:lnSpc>
+              <a:buNone/>
+            </a:pPr>
+            <a:r>
+              <a:rPr lang="en-US" sz="1300" dirty="0">
+                <a:solidFill>
+                  <a:srgbClr val="B9C6D4"/>
+                </a:solidFill>
+              </a:rPr>
+              <a:t>ตั้งใจไม่ใส่ เพราะหน้านี้มีไว้ขับ ส่วนตัวเลขทั้งหมดไปอยู่ในไฟล์ Excel แทน</a:t>
+            </a:r>
+            <a:endParaRPr lang="en-US" sz="1300" dirty="0"/>
+          </a:p>
+        </p:txBody>
+      </p:sp>
+      <p:sp>
+        <p:nvSpPr>
+          <p:cNvPr id="21" name="callout"/>
+          <p:cNvSpPr/>
+          <p:nvPr/>
+        </p:nvSpPr>
+        <p:spPr>
+          <a:xfrm>
+            <a:off x="548640" y="5257800"/>
+            <a:ext cx="11064240" cy="822960"/>
+          </a:xfrm>
+          <a:prstGeom prst="roundRect">
+            <a:avLst>
+              <a:gd name="adj" fmla="val 8889"/>
+            </a:avLst>
+          </a:prstGeom>
+          <a:solidFill>
+            <a:srgbClr val="FBEEEC"/>
+          </a:solidFill>
+          <a:ln w="12700">
+            <a:solidFill>
+              <a:srgbClr val="F0D3CE"/>
+            </a:solidFill>
+            <a:prstDash val="solid"/>
+          </a:ln>
+        </p:spPr>
+      </p:sp>
+      <p:sp>
+        <p:nvSpPr>
+          <p:cNvPr id="22" name="Text 20"/>
+          <p:cNvSpPr txBox="1"/>
+          <p:nvPr/>
+        </p:nvSpPr>
+        <p:spPr>
+          <a:xfrm>
+            <a:off x="777240" y="5385816"/>
+            <a:ext cx="10607040" cy="274320"/>
+          </a:xfrm>
+          <a:prstGeom prst="rect">
+            <a:avLst/>
+          </a:prstGeom>
+          <a:noFill/>
+          <a:ln/>
+        </p:spPr>
+        <p:txBody>
+          <a:bodyPr wrap="square" lIns="0" tIns="0" rIns="0" bIns="0" rtlCol="0" anchor="t"/>
+          <a:lstStyle/>
+          <a:p>
+            <a:pPr algn="l" indent="0" marL="0">
+              <a:buNone/>
+            </a:pPr>
+            <a:r>
+              <a:rPr lang="en-US" sz="1400" b="1" dirty="0">
+                <a:solidFill>
+                  <a:srgbClr val="B3261E"/>
+                </a:solidFill>
+              </a:rPr>
+              <a:t>เปิดหน้าเว็บแล้วหมุนค้าง ทั้งที่ต่อ Wi-Fi ถูกแล้ว</a:t>
+            </a:r>
+            <a:endParaRPr lang="en-US" sz="1400" dirty="0"/>
+          </a:p>
+        </p:txBody>
+      </p:sp>
+      <p:sp>
+        <p:nvSpPr>
+          <p:cNvPr id="23" name="Text 21"/>
+          <p:cNvSpPr txBox="1"/>
+          <p:nvPr/>
+        </p:nvSpPr>
+        <p:spPr>
+          <a:xfrm>
+            <a:off x="777240" y="5696712"/>
+            <a:ext cx="10607040" cy="256032"/>
+          </a:xfrm>
+          <a:prstGeom prst="rect">
+            <a:avLst/>
+          </a:prstGeom>
+          <a:noFill/>
+          <a:ln/>
+        </p:spPr>
+        <p:txBody>
+          <a:bodyPr wrap="square" lIns="0" tIns="0" rIns="0" bIns="0" rtlCol="0" anchor="t"/>
+          <a:lstStyle/>
+          <a:p>
+            <a:pPr algn="l" indent="0" marL="0">
+              <a:lnSpc>
+                <a:spcPct val="120000"/>
+              </a:lnSpc>
+              <a:buNone/>
+            </a:pPr>
+            <a:r>
+              <a:rPr lang="en-US" sz="1250" dirty="0">
+                <a:solidFill>
+                  <a:srgbClr val="4A5568"/>
+                </a:solidFill>
+              </a:rPr>
+              <a:t>มือถือบางรุ่นเห็นว่าวงนี้ไม่มีอินเทอร์เน็ตแล้วแอบสลับกลับไปใช้เน็ตมือถือเอง ต้องเข้าไปปิดการสลับอัตโนมัติก่อน</a:t>
+            </a:r>
+            <a:endParaRPr lang="en-US" sz="1250" dirty="0"/>
+          </a:p>
+        </p:txBody>
+      </p:sp>
+      <p:sp>
+        <p:nvSpPr>
+          <p:cNvPr id="25" name="Slide Number Placeholder 0"/>
+          <p:cNvSpPr>
+            <a:spLocks noGrp="1"/>
+          </p:cNvSpPr>
+          <p:nvPr>
+            <p:ph type="sldNum" sz="quarter" idx="4294967295"/>
+          </p:nvPr>
+        </p:nvSpPr>
+        <p:spPr>
+          <a:xfrm>
+            <a:off x="11338560" y="6263640"/>
+            <a:ext cx="457200" cy="274320"/>
+          </a:xfrm>
+          <a:prstGeom prst="rect">
+            <a:avLst/>
+          </a:prstGeom>
+          <a:extLst>
+            <a:ext uri="{C572A759-6A51-4108-AA02-DFA0A04FC94B}">
+              <ma14:wrappingTextBoxFlag xmlns:ma14="http://schemas.microsoft.com/office/mac/drawingml/2011/main" val="0"/>
+            </a:ext>
+          </a:extLst>
+        </p:spPr>
+        <p:txBody>
+          <a:bodyPr/>
+          <a:lstStyle>
+            <a:lvl1pPr>
+              <a:defRPr sz="1000">
+                <a:solidFill>
+                  <a:srgbClr val="6B7E93"/>
+                </a:solidFill>
+              </a:defRPr>
+            </a:lvl1pPr>
+          </a:lstStyle>
+          <a:p>
+            <a:pPr algn="r"/>
+            <a:fld id="{F7021451-1387-4CA6-816F-3879F97B5CBC}" type="slidenum">
+              <a:rPr b="0" lang="en-US"/>
+              <a:t>16</a:t>
+            </a:fld>
+            <a:endParaRPr lang="en-US"/>
+          </a:p>
+        </p:txBody>
+      </p:sp>
+    </p:spTree>
+  </p:cSld>
+  <p:clrMapOvr>
+    <a:masterClrMapping/>
+  </p:clrMapOvr>
+</p:sld>
+</file>
+
+<file path=ppt/slides/slide17.xml><?xml version="1.0" encoding="utf-8"?>
+<p:sld xmlns:a="http://schemas.openxmlformats.org/drawingml/2006/main" xmlns:r="http://schemas.openxmlformats.org/officeDocument/2006/relationships" xmlns:p="http://schemas.openxmlformats.org/presentationml/2006/main">
+  <p:cSld name="Slide 17">
+    <p:spTree>
+      <p:nvGrpSpPr>
+        <p:cNvPr id="1" name=""/>
+        <p:cNvGrpSpPr/>
+        <p:nvPr/>
+      </p:nvGrpSpPr>
+      <p:grpSpPr>
+        <a:xfrm>
+          <a:off x="0" y="0"/>
+          <a:ext cx="0" cy="0"/>
+          <a:chOff x="0" y="0"/>
+          <a:chExt cx="0" cy="0"/>
+        </a:xfrm>
+      </p:grpSpPr>
+      <p:sp>
+        <p:nvSpPr>
+          <p:cNvPr id="2" name="Text 0"/>
+          <p:cNvSpPr/>
+          <p:nvPr>
+            <p:ph idx="100" type="title" hasCustomPrompt="1"/>
+          </p:nvPr>
+        </p:nvSpPr>
+        <p:spPr>
+          <a:xfrm>
+            <a:off x="548640" y="384048"/>
+            <a:ext cx="11064240" cy="685800"/>
+          </a:xfrm>
+          <a:prstGeom prst="rect">
+            <a:avLst/>
+          </a:prstGeom>
+          <a:noFill/>
+          <a:ln/>
+        </p:spPr>
+        <p:txBody>
+          <a:bodyPr wrap="square" rtlCol="0"/>
+          <a:lstStyle/>
+          <a:p>
+            <a:pPr algn="l" indent="0" marL="0">
+              <a:buNone/>
+            </a:pPr>
+            <a:r>
+              <a:rPr lang="en-US" sz="3200" b="1" dirty="0">
+                <a:solidFill>
+                  <a:schemeClr val="tx1"/>
+                </a:solidFill>
+              </a:rPr>
               <a:t>ข้อมูลที่เก็บลง Excel</a:t>
             </a:r>
             <a:endParaRPr lang="en-US" sz="3200" dirty="0"/>
@@ -9311,7 +10807,7 @@
       </p:sp>
       <p:graphicFrame>
         <p:nvGraphicFramePr>
-          <p:cNvPr id="17" name="Table 0"/>
+          <p:cNvPr id="18" name="Table 0"/>
           <p:cNvGraphicFramePr>
             <a:graphicFrameLocks noGrp="1"/>
           </p:cNvGraphicFramePr>
@@ -10613,148 +12109,9 @@
             <a:pPr algn="r"/>
             <a:fld id="{F7021451-1387-4CA6-816F-3879F97B5CBC}" type="slidenum">
               <a:rPr b="0" lang="en-US"/>
-              <a:t>16</a:t>
+              <a:t>17</a:t>
             </a:fld>
             <a:endParaRPr lang="en-US"/>
-          </a:p>
-        </p:txBody>
-      </p:sp>
-    </p:spTree>
-  </p:cSld>
-  <p:clrMapOvr>
-    <a:masterClrMapping/>
-  </p:clrMapOvr>
-</p:sld>
-</file>
-
-<file path=ppt/slides/slide17.xml><?xml version="1.0" encoding="utf-8"?>
-<p:sld xmlns:a="http://schemas.openxmlformats.org/drawingml/2006/main" xmlns:r="http://schemas.openxmlformats.org/officeDocument/2006/relationships" xmlns:p="http://schemas.openxmlformats.org/presentationml/2006/main">
-  <p:cSld name="Slide 17">
-    <p:spTree>
-      <p:nvGrpSpPr>
-        <p:cNvPr id="1" name=""/>
-        <p:cNvGrpSpPr/>
-        <p:nvPr/>
-      </p:nvGrpSpPr>
-      <p:grpSpPr>
-        <a:xfrm>
-          <a:off x="0" y="0"/>
-          <a:ext cx="0" cy="0"/>
-          <a:chOff x="0" y="0"/>
-          <a:chExt cx="0" cy="0"/>
-        </a:xfrm>
-      </p:grpSpPr>
-      <p:sp>
-        <p:nvSpPr>
-          <p:cNvPr id="2" name="Text 0"/>
-          <p:cNvSpPr/>
-          <p:nvPr>
-            <p:ph idx="100" type="body" hasCustomPrompt="1"/>
-          </p:nvPr>
-        </p:nvSpPr>
-        <p:spPr>
-          <a:xfrm>
-            <a:off x="548640" y="2377440"/>
-            <a:ext cx="11064240" cy="457200"/>
-          </a:xfrm>
-          <a:prstGeom prst="rect">
-            <a:avLst/>
-          </a:prstGeom>
-          <a:noFill/>
-          <a:ln/>
-        </p:spPr>
-        <p:txBody>
-          <a:bodyPr wrap="square" rtlCol="0"/>
-          <a:lstStyle/>
-          <a:p>
-            <a:pPr algn="l" indent="0" marL="0">
-              <a:buNone/>
-            </a:pPr>
-            <a:r>
-              <a:rPr lang="en-US" sz="6000" b="1" dirty="0">
-                <a:solidFill>
-                  <a:srgbClr val="E8803A"/>
-                </a:solidFill>
-              </a:rPr>
-              <a:t>03</a:t>
-            </a:r>
-            <a:endParaRPr lang="en-US" sz="6000" dirty="0"/>
-          </a:p>
-        </p:txBody>
-      </p:sp>
-      <p:sp>
-        <p:nvSpPr>
-          <p:cNvPr id="3" name="Text 0"/>
-          <p:cNvSpPr/>
-          <p:nvPr>
-            <p:ph idx="101" type="title" hasCustomPrompt="1"/>
-          </p:nvPr>
-        </p:nvSpPr>
-        <p:spPr>
-          <a:xfrm>
-            <a:off x="548640" y="3200400"/>
-            <a:ext cx="11064240" cy="914400"/>
-          </a:xfrm>
-          <a:prstGeom prst="rect">
-            <a:avLst/>
-          </a:prstGeom>
-          <a:noFill/>
-          <a:ln/>
-        </p:spPr>
-        <p:txBody>
-          <a:bodyPr wrap="square" rtlCol="0"/>
-          <a:lstStyle/>
-          <a:p>
-            <a:pPr algn="l" indent="0" marL="0">
-              <a:buNone/>
-            </a:pPr>
-            <a:r>
-              <a:rPr lang="en-US" sz="4000" b="1" dirty="0">
-                <a:solidFill>
-                  <a:schemeClr val="bg1"/>
-                </a:solidFill>
-              </a:rPr>
-              <a:t>ปรับแต่งและแก้ปัญหา</a:t>
-            </a:r>
-            <a:endParaRPr lang="en-US" sz="4000" dirty="0"/>
-          </a:p>
-        </p:txBody>
-      </p:sp>
-      <p:sp>
-        <p:nvSpPr>
-          <p:cNvPr id="4" name="Text 0"/>
-          <p:cNvSpPr/>
-          <p:nvPr>
-            <p:ph idx="102" type="body" hasCustomPrompt="1"/>
-          </p:nvPr>
-        </p:nvSpPr>
-        <p:spPr>
-          <a:xfrm>
-            <a:off x="548640" y="4206240"/>
-            <a:ext cx="8686800" cy="914400"/>
-          </a:xfrm>
-          <a:prstGeom prst="rect">
-            <a:avLst/>
-          </a:prstGeom>
-          <a:noFill/>
-          <a:ln/>
-        </p:spPr>
-        <p:txBody>
-          <a:bodyPr wrap="square" rtlCol="0"/>
-          <a:lstStyle/>
-          <a:p>
-            <a:pPr algn="l" indent="0" marL="0">
-              <a:buNone/>
-            </a:pPr>
-            <a:r>
-              <a:rPr lang="en-US" sz="1600" dirty="0">
-                <a:solidFill>
-                  <a:srgbClr val="B9C6D4"/>
-                </a:solidFill>
-              </a:rPr>
-              <a:t>ค่าที่ปรับบ่อย วิธีที่หุ่นใช้หาเส้น และอาการเสียที่เจอซ้ำๆ</a:t>
-            </a:r>
-            <a:endParaRPr lang="en-US" sz="1600" dirty="0"/>
           </a:p>
         </p:txBody>
       </p:sp>
@@ -10788,13 +12145,13 @@
           <p:cNvPr id="2" name="Text 0"/>
           <p:cNvSpPr/>
           <p:nvPr>
-            <p:ph idx="100" type="title" hasCustomPrompt="1"/>
+            <p:ph idx="100" type="body" hasCustomPrompt="1"/>
           </p:nvPr>
         </p:nvSpPr>
         <p:spPr>
           <a:xfrm>
-            <a:off x="548640" y="384048"/>
-            <a:ext cx="11064240" cy="685800"/>
+            <a:off x="548640" y="2377440"/>
+            <a:ext cx="11064240" cy="457200"/>
           </a:xfrm>
           <a:prstGeom prst="rect">
             <a:avLst/>
@@ -10810,6 +12167,145 @@
               <a:buNone/>
             </a:pPr>
             <a:r>
+              <a:rPr lang="en-US" sz="6000" b="1" dirty="0">
+                <a:solidFill>
+                  <a:srgbClr val="E8803A"/>
+                </a:solidFill>
+              </a:rPr>
+              <a:t>03</a:t>
+            </a:r>
+            <a:endParaRPr lang="en-US" sz="6000" dirty="0"/>
+          </a:p>
+        </p:txBody>
+      </p:sp>
+      <p:sp>
+        <p:nvSpPr>
+          <p:cNvPr id="3" name="Text 0"/>
+          <p:cNvSpPr/>
+          <p:nvPr>
+            <p:ph idx="101" type="title" hasCustomPrompt="1"/>
+          </p:nvPr>
+        </p:nvSpPr>
+        <p:spPr>
+          <a:xfrm>
+            <a:off x="548640" y="3200400"/>
+            <a:ext cx="11064240" cy="914400"/>
+          </a:xfrm>
+          <a:prstGeom prst="rect">
+            <a:avLst/>
+          </a:prstGeom>
+          <a:noFill/>
+          <a:ln/>
+        </p:spPr>
+        <p:txBody>
+          <a:bodyPr wrap="square" rtlCol="0"/>
+          <a:lstStyle/>
+          <a:p>
+            <a:pPr algn="l" indent="0" marL="0">
+              <a:buNone/>
+            </a:pPr>
+            <a:r>
+              <a:rPr lang="en-US" sz="4000" b="1" dirty="0">
+                <a:solidFill>
+                  <a:schemeClr val="bg1"/>
+                </a:solidFill>
+              </a:rPr>
+              <a:t>ปรับแต่งและแก้ปัญหา</a:t>
+            </a:r>
+            <a:endParaRPr lang="en-US" sz="4000" dirty="0"/>
+          </a:p>
+        </p:txBody>
+      </p:sp>
+      <p:sp>
+        <p:nvSpPr>
+          <p:cNvPr id="4" name="Text 0"/>
+          <p:cNvSpPr/>
+          <p:nvPr>
+            <p:ph idx="102" type="body" hasCustomPrompt="1"/>
+          </p:nvPr>
+        </p:nvSpPr>
+        <p:spPr>
+          <a:xfrm>
+            <a:off x="548640" y="4206240"/>
+            <a:ext cx="8686800" cy="914400"/>
+          </a:xfrm>
+          <a:prstGeom prst="rect">
+            <a:avLst/>
+          </a:prstGeom>
+          <a:noFill/>
+          <a:ln/>
+        </p:spPr>
+        <p:txBody>
+          <a:bodyPr wrap="square" rtlCol="0"/>
+          <a:lstStyle/>
+          <a:p>
+            <a:pPr algn="l" indent="0" marL="0">
+              <a:buNone/>
+            </a:pPr>
+            <a:r>
+              <a:rPr lang="en-US" sz="1600" dirty="0">
+                <a:solidFill>
+                  <a:srgbClr val="B9C6D4"/>
+                </a:solidFill>
+              </a:rPr>
+              <a:t>ค่าที่ปรับบ่อย วิธีที่หุ่นใช้หาเส้น และอาการเสียที่เจอซ้ำๆ</a:t>
+            </a:r>
+            <a:endParaRPr lang="en-US" sz="1600" dirty="0"/>
+          </a:p>
+        </p:txBody>
+      </p:sp>
+    </p:spTree>
+  </p:cSld>
+  <p:clrMapOvr>
+    <a:masterClrMapping/>
+  </p:clrMapOvr>
+</p:sld>
+</file>
+
+<file path=ppt/slides/slide19.xml><?xml version="1.0" encoding="utf-8"?>
+<p:sld xmlns:a="http://schemas.openxmlformats.org/drawingml/2006/main" xmlns:r="http://schemas.openxmlformats.org/officeDocument/2006/relationships" xmlns:p="http://schemas.openxmlformats.org/presentationml/2006/main">
+  <p:cSld name="Slide 19">
+    <p:spTree>
+      <p:nvGrpSpPr>
+        <p:cNvPr id="1" name=""/>
+        <p:cNvGrpSpPr/>
+        <p:nvPr/>
+      </p:nvGrpSpPr>
+      <p:grpSpPr>
+        <a:xfrm>
+          <a:off x="0" y="0"/>
+          <a:ext cx="0" cy="0"/>
+          <a:chOff x="0" y="0"/>
+          <a:chExt cx="0" cy="0"/>
+        </a:xfrm>
+      </p:grpSpPr>
+      <p:sp>
+        <p:nvSpPr>
+          <p:cNvPr id="2" name="Text 0"/>
+          <p:cNvSpPr/>
+          <p:nvPr>
+            <p:ph idx="100" type="title" hasCustomPrompt="1"/>
+          </p:nvPr>
+        </p:nvSpPr>
+        <p:spPr>
+          <a:xfrm>
+            <a:off x="548640" y="384048"/>
+            <a:ext cx="11064240" cy="685800"/>
+          </a:xfrm>
+          <a:prstGeom prst="rect">
+            <a:avLst/>
+          </a:prstGeom>
+          <a:noFill/>
+          <a:ln/>
+        </p:spPr>
+        <p:txBody>
+          <a:bodyPr wrap="square" rtlCol="0"/>
+          <a:lstStyle/>
+          <a:p>
+            <a:pPr algn="l" indent="0" marL="0">
+              <a:buNone/>
+            </a:pPr>
+            <a:r>
               <a:rPr lang="en-US" sz="3200" b="1" dirty="0">
                 <a:solidFill>
                   <a:schemeClr val="tx1"/>
@@ -10823,7 +12319,7 @@
       </p:sp>
       <p:graphicFrame>
         <p:nvGraphicFramePr>
-          <p:cNvPr id="19" name="Table 0"/>
+          <p:cNvPr id="20" name="Table 0"/>
           <p:cNvGraphicFramePr>
             <a:graphicFrameLocks noGrp="1"/>
           </p:cNvGraphicFramePr>
@@ -12288,741 +13784,6 @@
             <a:pPr algn="r"/>
             <a:fld id="{F7021451-1387-4CA6-816F-3879F97B5CBC}" type="slidenum">
               <a:rPr b="0" lang="en-US"/>
-              <a:t>18</a:t>
-            </a:fld>
-            <a:endParaRPr lang="en-US"/>
-          </a:p>
-        </p:txBody>
-      </p:sp>
-    </p:spTree>
-  </p:cSld>
-  <p:clrMapOvr>
-    <a:masterClrMapping/>
-  </p:clrMapOvr>
-</p:sld>
-</file>
-
-<file path=ppt/slides/slide19.xml><?xml version="1.0" encoding="utf-8"?>
-<p:sld xmlns:a="http://schemas.openxmlformats.org/drawingml/2006/main" xmlns:r="http://schemas.openxmlformats.org/officeDocument/2006/relationships" xmlns:p="http://schemas.openxmlformats.org/presentationml/2006/main">
-  <p:cSld name="Slide 19">
-    <p:spTree>
-      <p:nvGrpSpPr>
-        <p:cNvPr id="1" name=""/>
-        <p:cNvGrpSpPr/>
-        <p:nvPr/>
-      </p:nvGrpSpPr>
-      <p:grpSpPr>
-        <a:xfrm>
-          <a:off x="0" y="0"/>
-          <a:ext cx="0" cy="0"/>
-          <a:chOff x="0" y="0"/>
-          <a:chExt cx="0" cy="0"/>
-        </a:xfrm>
-      </p:grpSpPr>
-      <p:sp>
-        <p:nvSpPr>
-          <p:cNvPr id="2" name="Text 0"/>
-          <p:cNvSpPr/>
-          <p:nvPr>
-            <p:ph idx="100" type="title" hasCustomPrompt="1"/>
-          </p:nvPr>
-        </p:nvSpPr>
-        <p:spPr>
-          <a:xfrm>
-            <a:off x="548640" y="384048"/>
-            <a:ext cx="11064240" cy="685800"/>
-          </a:xfrm>
-          <a:prstGeom prst="rect">
-            <a:avLst/>
-          </a:prstGeom>
-          <a:noFill/>
-          <a:ln/>
-        </p:spPr>
-        <p:txBody>
-          <a:bodyPr wrap="square" rtlCol="0"/>
-          <a:lstStyle/>
-          <a:p>
-            <a:pPr algn="l" indent="0" marL="0">
-              <a:buNone/>
-            </a:pPr>
-            <a:r>
-              <a:rPr lang="en-US" sz="3200" b="1" dirty="0">
-                <a:solidFill>
-                  <a:schemeClr val="tx1"/>
-                </a:solidFill>
-              </a:rPr>
-              <a:t>หุ่นหาเส้นที่หลุดไปยังไง</a:t>
-            </a:r>
-            <a:endParaRPr lang="en-US" sz="3200" dirty="0"/>
-          </a:p>
-        </p:txBody>
-      </p:sp>
-      <p:sp>
-        <p:nvSpPr>
-          <p:cNvPr id="3" name="Text 1"/>
-          <p:cNvSpPr txBox="1"/>
-          <p:nvPr/>
-        </p:nvSpPr>
-        <p:spPr>
-          <a:xfrm>
-            <a:off x="548640" y="1234440"/>
-            <a:ext cx="11064240" cy="411480"/>
-          </a:xfrm>
-          <a:prstGeom prst="rect">
-            <a:avLst/>
-          </a:prstGeom>
-          <a:noFill/>
-          <a:ln/>
-        </p:spPr>
-        <p:txBody>
-          <a:bodyPr wrap="square" lIns="0" tIns="0" rIns="0" bIns="0" rtlCol="0" anchor="ctr"/>
-          <a:lstStyle/>
-          <a:p>
-            <a:pPr algn="l" indent="0" marL="0">
-              <a:buNone/>
-            </a:pPr>
-            <a:r>
-              <a:rPr lang="en-US" sz="1400" dirty="0">
-                <a:solidFill>
-                  <a:srgbClr val="4A5568"/>
-                </a:solidFill>
-              </a:rPr>
-              <a:t>เซนเซอร์ไม่เจอเส้นเลย ไม่ได้แปลว่าหลงทาง  ทางโค้งแคบจะเหวี่ยงเส้นออกนอกแถวเซนเซอร์ชั่วครู่เป็นเรื่องปกติ</a:t>
-            </a:r>
-            <a:endParaRPr lang="en-US" sz="1400" dirty="0"/>
-          </a:p>
-        </p:txBody>
-      </p:sp>
-      <p:sp>
-        <p:nvSpPr>
-          <p:cNvPr id="4" name="stage-0"/>
-          <p:cNvSpPr/>
-          <p:nvPr/>
-        </p:nvSpPr>
-        <p:spPr>
-          <a:xfrm>
-            <a:off x="548640" y="1828800"/>
-            <a:ext cx="3444240" cy="2286000"/>
-          </a:xfrm>
-          <a:prstGeom prst="roundRect">
-            <a:avLst>
-              <a:gd name="adj" fmla="val 4000"/>
-            </a:avLst>
-          </a:prstGeom>
-          <a:solidFill>
-            <a:schemeClr val="bg2"/>
-          </a:solidFill>
-          <a:ln w="12700">
-            <a:solidFill>
-              <a:srgbClr val="D9E0E8"/>
-            </a:solidFill>
-            <a:prstDash val="solid"/>
-          </a:ln>
-        </p:spPr>
-      </p:sp>
-      <p:sp>
-        <p:nvSpPr>
-          <p:cNvPr id="5" name="dot-1"/>
-          <p:cNvSpPr/>
-          <p:nvPr/>
-        </p:nvSpPr>
-        <p:spPr>
-          <a:xfrm>
-            <a:off x="804672" y="2057400"/>
-            <a:ext cx="475488" cy="475488"/>
-          </a:xfrm>
-          <a:prstGeom prst="ellipse">
-            <a:avLst/>
-          </a:prstGeom>
-          <a:solidFill>
-            <a:srgbClr val="E8803A"/>
-          </a:solidFill>
-          <a:ln w="12700">
-            <a:solidFill>
-              <a:srgbClr val="E8803A"/>
-            </a:solidFill>
-            <a:prstDash val="solid"/>
-          </a:ln>
-        </p:spPr>
-      </p:sp>
-      <p:sp>
-        <p:nvSpPr>
-          <p:cNvPr id="6" name="Text 4"/>
-          <p:cNvSpPr txBox="1"/>
-          <p:nvPr/>
-        </p:nvSpPr>
-        <p:spPr>
-          <a:xfrm>
-            <a:off x="804672" y="2057400"/>
-            <a:ext cx="475488" cy="475488"/>
-          </a:xfrm>
-          <a:prstGeom prst="rect">
-            <a:avLst/>
-          </a:prstGeom>
-          <a:noFill/>
-          <a:ln/>
-        </p:spPr>
-        <p:txBody>
-          <a:bodyPr wrap="square" lIns="0" tIns="0" rIns="0" bIns="0" rtlCol="0" anchor="ctr"/>
-          <a:lstStyle/>
-          <a:p>
-            <a:pPr algn="ctr" indent="0" marL="0">
-              <a:buNone/>
-            </a:pPr>
-            <a:r>
-              <a:rPr lang="en-US" sz="1500" b="1" dirty="0">
-                <a:solidFill>
-                  <a:srgbClr val="FFFFFF"/>
-                </a:solidFill>
-              </a:rPr>
-              <a:t>1</a:t>
-            </a:r>
-            <a:endParaRPr lang="en-US" sz="1500" dirty="0"/>
-          </a:p>
-        </p:txBody>
-      </p:sp>
-      <p:sp>
-        <p:nvSpPr>
-          <p:cNvPr id="7" name="Text 5"/>
-          <p:cNvSpPr txBox="1"/>
-          <p:nvPr/>
-        </p:nvSpPr>
-        <p:spPr>
-          <a:xfrm>
-            <a:off x="804672" y="2670048"/>
-            <a:ext cx="2932176" cy="365760"/>
-          </a:xfrm>
-          <a:prstGeom prst="rect">
-            <a:avLst/>
-          </a:prstGeom>
-          <a:noFill/>
-          <a:ln/>
-        </p:spPr>
-        <p:txBody>
-          <a:bodyPr wrap="square" lIns="0" tIns="0" rIns="0" bIns="0" rtlCol="0" anchor="t"/>
-          <a:lstStyle/>
-          <a:p>
-            <a:pPr algn="l" indent="0" marL="0">
-              <a:buNone/>
-            </a:pPr>
-            <a:r>
-              <a:rPr lang="en-US" sz="1600" b="1" dirty="0">
-                <a:solidFill>
-                  <a:schemeClr val="tx1"/>
-                </a:solidFill>
-              </a:rPr>
-              <a:t>รอก่อน  150 ms</a:t>
-            </a:r>
-            <a:endParaRPr lang="en-US" sz="1600" dirty="0"/>
-          </a:p>
-        </p:txBody>
-      </p:sp>
-      <p:sp>
-        <p:nvSpPr>
-          <p:cNvPr id="8" name="Text 6"/>
-          <p:cNvSpPr txBox="1"/>
-          <p:nvPr/>
-        </p:nvSpPr>
-        <p:spPr>
-          <a:xfrm>
-            <a:off x="804672" y="3090672"/>
-            <a:ext cx="2932176" cy="914400"/>
-          </a:xfrm>
-          <a:prstGeom prst="rect">
-            <a:avLst/>
-          </a:prstGeom>
-          <a:noFill/>
-          <a:ln/>
-        </p:spPr>
-        <p:txBody>
-          <a:bodyPr wrap="square" lIns="0" tIns="0" rIns="0" bIns="0" rtlCol="0" anchor="t"/>
-          <a:lstStyle/>
-          <a:p>
-            <a:pPr algn="l" indent="0" marL="0">
-              <a:lnSpc>
-                <a:spcPct val="125000"/>
-              </a:lnSpc>
-              <a:buNone/>
-            </a:pPr>
-            <a:r>
-              <a:rPr lang="en-US" sz="1250" dirty="0">
-                <a:solidFill>
-                  <a:srgbClr val="4A5568"/>
-                </a:solidFill>
-              </a:rPr>
-              <a:t>ยังไม่ตัดสินใจอะไรทั้งนั้น เลี้ยวค้างไปทางเดิมต่อ ซึ่งเป็นทิศที่ไล่ตามเส้นอยู่แล้ว ทางโค้งส่วนใหญ่จบก่อนเวลานี้</a:t>
-            </a:r>
-            <a:endParaRPr lang="en-US" sz="1250" dirty="0"/>
-          </a:p>
-        </p:txBody>
-      </p:sp>
-      <p:sp>
-        <p:nvSpPr>
-          <p:cNvPr id="9" name="stage-1"/>
-          <p:cNvSpPr/>
-          <p:nvPr/>
-        </p:nvSpPr>
-        <p:spPr>
-          <a:xfrm>
-            <a:off x="4358640" y="1828800"/>
-            <a:ext cx="3444240" cy="2286000"/>
-          </a:xfrm>
-          <a:prstGeom prst="roundRect">
-            <a:avLst>
-              <a:gd name="adj" fmla="val 4000"/>
-            </a:avLst>
-          </a:prstGeom>
-          <a:solidFill>
-            <a:schemeClr val="bg2"/>
-          </a:solidFill>
-          <a:ln w="12700">
-            <a:solidFill>
-              <a:srgbClr val="D9E0E8"/>
-            </a:solidFill>
-            <a:prstDash val="solid"/>
-          </a:ln>
-        </p:spPr>
-      </p:sp>
-      <p:sp>
-        <p:nvSpPr>
-          <p:cNvPr id="10" name="dot-2"/>
-          <p:cNvSpPr/>
-          <p:nvPr/>
-        </p:nvSpPr>
-        <p:spPr>
-          <a:xfrm>
-            <a:off x="4614672" y="2057400"/>
-            <a:ext cx="475488" cy="475488"/>
-          </a:xfrm>
-          <a:prstGeom prst="ellipse">
-            <a:avLst/>
-          </a:prstGeom>
-          <a:solidFill>
-            <a:srgbClr val="E8803A"/>
-          </a:solidFill>
-          <a:ln w="12700">
-            <a:solidFill>
-              <a:srgbClr val="E8803A"/>
-            </a:solidFill>
-            <a:prstDash val="solid"/>
-          </a:ln>
-        </p:spPr>
-      </p:sp>
-      <p:sp>
-        <p:nvSpPr>
-          <p:cNvPr id="11" name="Text 9"/>
-          <p:cNvSpPr txBox="1"/>
-          <p:nvPr/>
-        </p:nvSpPr>
-        <p:spPr>
-          <a:xfrm>
-            <a:off x="4614672" y="2057400"/>
-            <a:ext cx="475488" cy="475488"/>
-          </a:xfrm>
-          <a:prstGeom prst="rect">
-            <a:avLst/>
-          </a:prstGeom>
-          <a:noFill/>
-          <a:ln/>
-        </p:spPr>
-        <p:txBody>
-          <a:bodyPr wrap="square" lIns="0" tIns="0" rIns="0" bIns="0" rtlCol="0" anchor="ctr"/>
-          <a:lstStyle/>
-          <a:p>
-            <a:pPr algn="ctr" indent="0" marL="0">
-              <a:buNone/>
-            </a:pPr>
-            <a:r>
-              <a:rPr lang="en-US" sz="1500" b="1" dirty="0">
-                <a:solidFill>
-                  <a:srgbClr val="FFFFFF"/>
-                </a:solidFill>
-              </a:rPr>
-              <a:t>2</a:t>
-            </a:r>
-            <a:endParaRPr lang="en-US" sz="1500" dirty="0"/>
-          </a:p>
-        </p:txBody>
-      </p:sp>
-      <p:sp>
-        <p:nvSpPr>
-          <p:cNvPr id="12" name="Text 10"/>
-          <p:cNvSpPr txBox="1"/>
-          <p:nvPr/>
-        </p:nvSpPr>
-        <p:spPr>
-          <a:xfrm>
-            <a:off x="4614672" y="2670048"/>
-            <a:ext cx="2932176" cy="365760"/>
-          </a:xfrm>
-          <a:prstGeom prst="rect">
-            <a:avLst/>
-          </a:prstGeom>
-          <a:noFill/>
-          <a:ln/>
-        </p:spPr>
-        <p:txBody>
-          <a:bodyPr wrap="square" lIns="0" tIns="0" rIns="0" bIns="0" rtlCol="0" anchor="t"/>
-          <a:lstStyle/>
-          <a:p>
-            <a:pPr algn="l" indent="0" marL="0">
-              <a:buNone/>
-            </a:pPr>
-            <a:r>
-              <a:rPr lang="en-US" sz="1600" b="1" dirty="0">
-                <a:solidFill>
-                  <a:schemeClr val="tx1"/>
-                </a:solidFill>
-              </a:rPr>
-              <a:t>ถอยหลัง  400 ms</a:t>
-            </a:r>
-            <a:endParaRPr lang="en-US" sz="1600" dirty="0"/>
-          </a:p>
-        </p:txBody>
-      </p:sp>
-      <p:sp>
-        <p:nvSpPr>
-          <p:cNvPr id="13" name="Text 11"/>
-          <p:cNvSpPr txBox="1"/>
-          <p:nvPr/>
-        </p:nvSpPr>
-        <p:spPr>
-          <a:xfrm>
-            <a:off x="4614672" y="3090672"/>
-            <a:ext cx="2932176" cy="914400"/>
-          </a:xfrm>
-          <a:prstGeom prst="rect">
-            <a:avLst/>
-          </a:prstGeom>
-          <a:noFill/>
-          <a:ln/>
-        </p:spPr>
-        <p:txBody>
-          <a:bodyPr wrap="square" lIns="0" tIns="0" rIns="0" bIns="0" rtlCol="0" anchor="t"/>
-          <a:lstStyle/>
-          <a:p>
-            <a:pPr algn="l" indent="0" marL="0">
-              <a:lnSpc>
-                <a:spcPct val="125000"/>
-              </a:lnSpc>
-              <a:buNone/>
-            </a:pPr>
-            <a:r>
-              <a:rPr lang="en-US" sz="1250" dirty="0">
-                <a:solidFill>
-                  <a:srgbClr val="4A5568"/>
-                </a:solidFill>
-              </a:rPr>
-              <a:t>ถอยเอียงไปทางที่เพิ่งเห็นเส้นครั้งสุดท้าย แก้กรณีเข้าโค้งเร็วเกินจนหลุด</a:t>
-            </a:r>
-            <a:endParaRPr lang="en-US" sz="1250" dirty="0"/>
-          </a:p>
-        </p:txBody>
-      </p:sp>
-      <p:sp>
-        <p:nvSpPr>
-          <p:cNvPr id="14" name="stage-2"/>
-          <p:cNvSpPr/>
-          <p:nvPr/>
-        </p:nvSpPr>
-        <p:spPr>
-          <a:xfrm>
-            <a:off x="8168640" y="1828800"/>
-            <a:ext cx="3444240" cy="2286000"/>
-          </a:xfrm>
-          <a:prstGeom prst="roundRect">
-            <a:avLst>
-              <a:gd name="adj" fmla="val 4000"/>
-            </a:avLst>
-          </a:prstGeom>
-          <a:solidFill>
-            <a:schemeClr val="bg2"/>
-          </a:solidFill>
-          <a:ln w="12700">
-            <a:solidFill>
-              <a:srgbClr val="D9E0E8"/>
-            </a:solidFill>
-            <a:prstDash val="solid"/>
-          </a:ln>
-        </p:spPr>
-      </p:sp>
-      <p:sp>
-        <p:nvSpPr>
-          <p:cNvPr id="15" name="dot-3"/>
-          <p:cNvSpPr/>
-          <p:nvPr/>
-        </p:nvSpPr>
-        <p:spPr>
-          <a:xfrm>
-            <a:off x="8424672" y="2057400"/>
-            <a:ext cx="475488" cy="475488"/>
-          </a:xfrm>
-          <a:prstGeom prst="ellipse">
-            <a:avLst/>
-          </a:prstGeom>
-          <a:solidFill>
-            <a:srgbClr val="E8803A"/>
-          </a:solidFill>
-          <a:ln w="12700">
-            <a:solidFill>
-              <a:srgbClr val="E8803A"/>
-            </a:solidFill>
-            <a:prstDash val="solid"/>
-          </a:ln>
-        </p:spPr>
-      </p:sp>
-      <p:sp>
-        <p:nvSpPr>
-          <p:cNvPr id="16" name="Text 14"/>
-          <p:cNvSpPr txBox="1"/>
-          <p:nvPr/>
-        </p:nvSpPr>
-        <p:spPr>
-          <a:xfrm>
-            <a:off x="8424672" y="2057400"/>
-            <a:ext cx="475488" cy="475488"/>
-          </a:xfrm>
-          <a:prstGeom prst="rect">
-            <a:avLst/>
-          </a:prstGeom>
-          <a:noFill/>
-          <a:ln/>
-        </p:spPr>
-        <p:txBody>
-          <a:bodyPr wrap="square" lIns="0" tIns="0" rIns="0" bIns="0" rtlCol="0" anchor="ctr"/>
-          <a:lstStyle/>
-          <a:p>
-            <a:pPr algn="ctr" indent="0" marL="0">
-              <a:buNone/>
-            </a:pPr>
-            <a:r>
-              <a:rPr lang="en-US" sz="1500" b="1" dirty="0">
-                <a:solidFill>
-                  <a:srgbClr val="FFFFFF"/>
-                </a:solidFill>
-              </a:rPr>
-              <a:t>3</a:t>
-            </a:r>
-            <a:endParaRPr lang="en-US" sz="1500" dirty="0"/>
-          </a:p>
-        </p:txBody>
-      </p:sp>
-      <p:sp>
-        <p:nvSpPr>
-          <p:cNvPr id="17" name="Text 15"/>
-          <p:cNvSpPr txBox="1"/>
-          <p:nvPr/>
-        </p:nvSpPr>
-        <p:spPr>
-          <a:xfrm>
-            <a:off x="8424672" y="2670048"/>
-            <a:ext cx="2932176" cy="365760"/>
-          </a:xfrm>
-          <a:prstGeom prst="rect">
-            <a:avLst/>
-          </a:prstGeom>
-          <a:noFill/>
-          <a:ln/>
-        </p:spPr>
-        <p:txBody>
-          <a:bodyPr wrap="square" lIns="0" tIns="0" rIns="0" bIns="0" rtlCol="0" anchor="t"/>
-          <a:lstStyle/>
-          <a:p>
-            <a:pPr algn="l" indent="0" marL="0">
-              <a:buNone/>
-            </a:pPr>
-            <a:r>
-              <a:rPr lang="en-US" sz="1600" b="1" dirty="0">
-                <a:solidFill>
-                  <a:schemeClr val="tx1"/>
-                </a:solidFill>
-              </a:rPr>
-              <a:t>กวาดหา  ถึง 6 วินาที</a:t>
-            </a:r>
-            <a:endParaRPr lang="en-US" sz="1600" dirty="0"/>
-          </a:p>
-        </p:txBody>
-      </p:sp>
-      <p:sp>
-        <p:nvSpPr>
-          <p:cNvPr id="18" name="Text 16"/>
-          <p:cNvSpPr txBox="1"/>
-          <p:nvPr/>
-        </p:nvSpPr>
-        <p:spPr>
-          <a:xfrm>
-            <a:off x="8424672" y="3090672"/>
-            <a:ext cx="2932176" cy="914400"/>
-          </a:xfrm>
-          <a:prstGeom prst="rect">
-            <a:avLst/>
-          </a:prstGeom>
-          <a:noFill/>
-          <a:ln/>
-        </p:spPr>
-        <p:txBody>
-          <a:bodyPr wrap="square" lIns="0" tIns="0" rIns="0" bIns="0" rtlCol="0" anchor="t"/>
-          <a:lstStyle/>
-          <a:p>
-            <a:pPr algn="l" indent="0" marL="0">
-              <a:lnSpc>
-                <a:spcPct val="125000"/>
-              </a:lnSpc>
-              <a:buNone/>
-            </a:pPr>
-            <a:r>
-              <a:rPr lang="en-US" sz="1250" dirty="0">
-                <a:solidFill>
-                  <a:srgbClr val="4A5568"/>
-                </a:solidFill>
-              </a:rPr>
-              <a:t>หมุนอยู่กับที่ด้วยความเร็ว 55% สลับซ้ายขวา แต่ละรอบกว้างขึ้นเรื่อยๆ ครบ 6 วินาทีแล้วไม่เจอถึงจะยอมแพ้</a:t>
-            </a:r>
-            <a:endParaRPr lang="en-US" sz="1250" dirty="0"/>
-          </a:p>
-        </p:txBody>
-      </p:sp>
-      <p:sp>
-        <p:nvSpPr>
-          <p:cNvPr id="19" name="callout"/>
-          <p:cNvSpPr/>
-          <p:nvPr/>
-        </p:nvSpPr>
-        <p:spPr>
-          <a:xfrm>
-            <a:off x="548640" y="4343400"/>
-            <a:ext cx="11064240" cy="1234440"/>
-          </a:xfrm>
-          <a:prstGeom prst="roundRect">
-            <a:avLst>
-              <a:gd name="adj" fmla="val 5926"/>
-            </a:avLst>
-          </a:prstGeom>
-          <a:solidFill>
-            <a:srgbClr val="E8F1F5"/>
-          </a:solidFill>
-          <a:ln w="12700">
-            <a:solidFill>
-              <a:srgbClr val="CBE0E9"/>
-            </a:solidFill>
-            <a:prstDash val="solid"/>
-          </a:ln>
-        </p:spPr>
-      </p:sp>
-      <p:sp>
-        <p:nvSpPr>
-          <p:cNvPr id="20" name="Text 18"/>
-          <p:cNvSpPr txBox="1"/>
-          <p:nvPr/>
-        </p:nvSpPr>
-        <p:spPr>
-          <a:xfrm>
-            <a:off x="777240" y="4471416"/>
-            <a:ext cx="10607040" cy="274320"/>
-          </a:xfrm>
-          <a:prstGeom prst="rect">
-            <a:avLst/>
-          </a:prstGeom>
-          <a:noFill/>
-          <a:ln/>
-        </p:spPr>
-        <p:txBody>
-          <a:bodyPr wrap="square" lIns="0" tIns="0" rIns="0" bIns="0" rtlCol="0" anchor="t"/>
-          <a:lstStyle/>
-          <a:p>
-            <a:pPr algn="l" indent="0" marL="0">
-              <a:buNone/>
-            </a:pPr>
-            <a:r>
-              <a:rPr lang="en-US" sz="1400" b="1" dirty="0">
-                <a:solidFill>
-                  <a:srgbClr val="1C7293"/>
-                </a:solidFill>
-              </a:rPr>
-              <a:t>ขาวหมดกับดำหมด คนละความหมายกันคนละขั้ว</a:t>
-            </a:r>
-            <a:endParaRPr lang="en-US" sz="1400" dirty="0"/>
-          </a:p>
-        </p:txBody>
-      </p:sp>
-      <p:sp>
-        <p:nvSpPr>
-          <p:cNvPr id="21" name="Text 19"/>
-          <p:cNvSpPr txBox="1"/>
-          <p:nvPr/>
-        </p:nvSpPr>
-        <p:spPr>
-          <a:xfrm>
-            <a:off x="777240" y="4782312"/>
-            <a:ext cx="10607040" cy="667512"/>
-          </a:xfrm>
-          <a:prstGeom prst="rect">
-            <a:avLst/>
-          </a:prstGeom>
-          <a:noFill/>
-          <a:ln/>
-        </p:spPr>
-        <p:txBody>
-          <a:bodyPr wrap="square" lIns="0" tIns="0" rIns="0" bIns="0" rtlCol="0" anchor="t"/>
-          <a:lstStyle/>
-          <a:p>
-            <a:pPr algn="l" indent="0" marL="0">
-              <a:lnSpc>
-                <a:spcPct val="120000"/>
-              </a:lnSpc>
-              <a:buNone/>
-            </a:pPr>
-            <a:r>
-              <a:rPr lang="en-US" sz="1250" dirty="0">
-                <a:solidFill>
-                  <a:srgbClr val="4A5568"/>
-                </a:solidFill>
-              </a:rPr>
-              <a:t>ไม่เจอเส้นเลยแปลว่าเส้นอยู่นอกแถวเซนเซอร์ หุ่นต้องดันตัวเองไปหาจนกว่าจะมีดวงใดดวงหนึ่งเจอ  ส่วนที่สั่งให้หยุดคือตรงข้ามกันพอดี คือดำครบทั้ง 5 ดวง ซึ่งแปลว่าถึงเส้นชัยแล้ว</a:t>
-            </a:r>
-            <a:endParaRPr lang="en-US" sz="1250" dirty="0"/>
-          </a:p>
-        </p:txBody>
-      </p:sp>
-      <p:sp>
-        <p:nvSpPr>
-          <p:cNvPr id="25" name="Slide Number Placeholder 0"/>
-          <p:cNvSpPr>
-            <a:spLocks noGrp="1"/>
-          </p:cNvSpPr>
-          <p:nvPr>
-            <p:ph type="sldNum" sz="quarter" idx="4294967295"/>
-          </p:nvPr>
-        </p:nvSpPr>
-        <p:spPr>
-          <a:xfrm>
-            <a:off x="11338560" y="6263640"/>
-            <a:ext cx="457200" cy="274320"/>
-          </a:xfrm>
-          <a:prstGeom prst="rect">
-            <a:avLst/>
-          </a:prstGeom>
-          <a:extLst>
-            <a:ext uri="{C572A759-6A51-4108-AA02-DFA0A04FC94B}">
-              <ma14:wrappingTextBoxFlag xmlns:ma14="http://schemas.microsoft.com/office/mac/drawingml/2011/main" val="0"/>
-            </a:ext>
-          </a:extLst>
-        </p:spPr>
-        <p:txBody>
-          <a:bodyPr/>
-          <a:lstStyle>
-            <a:lvl1pPr>
-              <a:defRPr sz="1000">
-                <a:solidFill>
-                  <a:srgbClr val="6B7E93"/>
-                </a:solidFill>
-              </a:defRPr>
-            </a:lvl1pPr>
-          </a:lstStyle>
-          <a:p>
-            <a:pPr algn="r"/>
-            <a:fld id="{F7021451-1387-4CA6-816F-3879F97B5CBC}" type="slidenum">
-              <a:rPr b="0" lang="en-US"/>
               <a:t>19</a:t>
             </a:fld>
             <a:endParaRPr lang="en-US"/>
@@ -13925,6 +14686,741 @@
                   <a:schemeClr val="tx1"/>
                 </a:solidFill>
               </a:rPr>
+              <a:t>หุ่นหาเส้นที่หลุดไปยังไง</a:t>
+            </a:r>
+            <a:endParaRPr lang="en-US" sz="3200" dirty="0"/>
+          </a:p>
+        </p:txBody>
+      </p:sp>
+      <p:sp>
+        <p:nvSpPr>
+          <p:cNvPr id="3" name="Text 1"/>
+          <p:cNvSpPr txBox="1"/>
+          <p:nvPr/>
+        </p:nvSpPr>
+        <p:spPr>
+          <a:xfrm>
+            <a:off x="548640" y="1234440"/>
+            <a:ext cx="11064240" cy="411480"/>
+          </a:xfrm>
+          <a:prstGeom prst="rect">
+            <a:avLst/>
+          </a:prstGeom>
+          <a:noFill/>
+          <a:ln/>
+        </p:spPr>
+        <p:txBody>
+          <a:bodyPr wrap="square" lIns="0" tIns="0" rIns="0" bIns="0" rtlCol="0" anchor="ctr"/>
+          <a:lstStyle/>
+          <a:p>
+            <a:pPr algn="l" indent="0" marL="0">
+              <a:buNone/>
+            </a:pPr>
+            <a:r>
+              <a:rPr lang="en-US" sz="1400" dirty="0">
+                <a:solidFill>
+                  <a:srgbClr val="4A5568"/>
+                </a:solidFill>
+              </a:rPr>
+              <a:t>เซนเซอร์ไม่เจอเส้นเลย ไม่ได้แปลว่าหลงทาง  ทางโค้งแคบจะเหวี่ยงเส้นออกนอกแถวเซนเซอร์ชั่วครู่เป็นเรื่องปกติ</a:t>
+            </a:r>
+            <a:endParaRPr lang="en-US" sz="1400" dirty="0"/>
+          </a:p>
+        </p:txBody>
+      </p:sp>
+      <p:sp>
+        <p:nvSpPr>
+          <p:cNvPr id="4" name="stage-0"/>
+          <p:cNvSpPr/>
+          <p:nvPr/>
+        </p:nvSpPr>
+        <p:spPr>
+          <a:xfrm>
+            <a:off x="548640" y="1828800"/>
+            <a:ext cx="3444240" cy="2286000"/>
+          </a:xfrm>
+          <a:prstGeom prst="roundRect">
+            <a:avLst>
+              <a:gd name="adj" fmla="val 4000"/>
+            </a:avLst>
+          </a:prstGeom>
+          <a:solidFill>
+            <a:schemeClr val="bg2"/>
+          </a:solidFill>
+          <a:ln w="12700">
+            <a:solidFill>
+              <a:srgbClr val="D9E0E8"/>
+            </a:solidFill>
+            <a:prstDash val="solid"/>
+          </a:ln>
+        </p:spPr>
+      </p:sp>
+      <p:sp>
+        <p:nvSpPr>
+          <p:cNvPr id="5" name="dot-1"/>
+          <p:cNvSpPr/>
+          <p:nvPr/>
+        </p:nvSpPr>
+        <p:spPr>
+          <a:xfrm>
+            <a:off x="804672" y="2057400"/>
+            <a:ext cx="475488" cy="475488"/>
+          </a:xfrm>
+          <a:prstGeom prst="ellipse">
+            <a:avLst/>
+          </a:prstGeom>
+          <a:solidFill>
+            <a:srgbClr val="E8803A"/>
+          </a:solidFill>
+          <a:ln w="12700">
+            <a:solidFill>
+              <a:srgbClr val="E8803A"/>
+            </a:solidFill>
+            <a:prstDash val="solid"/>
+          </a:ln>
+        </p:spPr>
+      </p:sp>
+      <p:sp>
+        <p:nvSpPr>
+          <p:cNvPr id="6" name="Text 4"/>
+          <p:cNvSpPr txBox="1"/>
+          <p:nvPr/>
+        </p:nvSpPr>
+        <p:spPr>
+          <a:xfrm>
+            <a:off x="804672" y="2057400"/>
+            <a:ext cx="475488" cy="475488"/>
+          </a:xfrm>
+          <a:prstGeom prst="rect">
+            <a:avLst/>
+          </a:prstGeom>
+          <a:noFill/>
+          <a:ln/>
+        </p:spPr>
+        <p:txBody>
+          <a:bodyPr wrap="square" lIns="0" tIns="0" rIns="0" bIns="0" rtlCol="0" anchor="ctr"/>
+          <a:lstStyle/>
+          <a:p>
+            <a:pPr algn="ctr" indent="0" marL="0">
+              <a:buNone/>
+            </a:pPr>
+            <a:r>
+              <a:rPr lang="en-US" sz="1500" b="1" dirty="0">
+                <a:solidFill>
+                  <a:srgbClr val="FFFFFF"/>
+                </a:solidFill>
+              </a:rPr>
+              <a:t>1</a:t>
+            </a:r>
+            <a:endParaRPr lang="en-US" sz="1500" dirty="0"/>
+          </a:p>
+        </p:txBody>
+      </p:sp>
+      <p:sp>
+        <p:nvSpPr>
+          <p:cNvPr id="7" name="Text 5"/>
+          <p:cNvSpPr txBox="1"/>
+          <p:nvPr/>
+        </p:nvSpPr>
+        <p:spPr>
+          <a:xfrm>
+            <a:off x="804672" y="2670048"/>
+            <a:ext cx="2932176" cy="365760"/>
+          </a:xfrm>
+          <a:prstGeom prst="rect">
+            <a:avLst/>
+          </a:prstGeom>
+          <a:noFill/>
+          <a:ln/>
+        </p:spPr>
+        <p:txBody>
+          <a:bodyPr wrap="square" lIns="0" tIns="0" rIns="0" bIns="0" rtlCol="0" anchor="t"/>
+          <a:lstStyle/>
+          <a:p>
+            <a:pPr algn="l" indent="0" marL="0">
+              <a:buNone/>
+            </a:pPr>
+            <a:r>
+              <a:rPr lang="en-US" sz="1600" b="1" dirty="0">
+                <a:solidFill>
+                  <a:schemeClr val="tx1"/>
+                </a:solidFill>
+              </a:rPr>
+              <a:t>รอก่อน  150 ms</a:t>
+            </a:r>
+            <a:endParaRPr lang="en-US" sz="1600" dirty="0"/>
+          </a:p>
+        </p:txBody>
+      </p:sp>
+      <p:sp>
+        <p:nvSpPr>
+          <p:cNvPr id="8" name="Text 6"/>
+          <p:cNvSpPr txBox="1"/>
+          <p:nvPr/>
+        </p:nvSpPr>
+        <p:spPr>
+          <a:xfrm>
+            <a:off x="804672" y="3090672"/>
+            <a:ext cx="2932176" cy="914400"/>
+          </a:xfrm>
+          <a:prstGeom prst="rect">
+            <a:avLst/>
+          </a:prstGeom>
+          <a:noFill/>
+          <a:ln/>
+        </p:spPr>
+        <p:txBody>
+          <a:bodyPr wrap="square" lIns="0" tIns="0" rIns="0" bIns="0" rtlCol="0" anchor="t"/>
+          <a:lstStyle/>
+          <a:p>
+            <a:pPr algn="l" indent="0" marL="0">
+              <a:lnSpc>
+                <a:spcPct val="125000"/>
+              </a:lnSpc>
+              <a:buNone/>
+            </a:pPr>
+            <a:r>
+              <a:rPr lang="en-US" sz="1250" dirty="0">
+                <a:solidFill>
+                  <a:srgbClr val="4A5568"/>
+                </a:solidFill>
+              </a:rPr>
+              <a:t>ยังไม่ตัดสินใจอะไรทั้งนั้น เลี้ยวค้างไปทางเดิมต่อ ซึ่งเป็นทิศที่ไล่ตามเส้นอยู่แล้ว ทางโค้งส่วนใหญ่จบก่อนเวลานี้</a:t>
+            </a:r>
+            <a:endParaRPr lang="en-US" sz="1250" dirty="0"/>
+          </a:p>
+        </p:txBody>
+      </p:sp>
+      <p:sp>
+        <p:nvSpPr>
+          <p:cNvPr id="9" name="stage-1"/>
+          <p:cNvSpPr/>
+          <p:nvPr/>
+        </p:nvSpPr>
+        <p:spPr>
+          <a:xfrm>
+            <a:off x="4358640" y="1828800"/>
+            <a:ext cx="3444240" cy="2286000"/>
+          </a:xfrm>
+          <a:prstGeom prst="roundRect">
+            <a:avLst>
+              <a:gd name="adj" fmla="val 4000"/>
+            </a:avLst>
+          </a:prstGeom>
+          <a:solidFill>
+            <a:schemeClr val="bg2"/>
+          </a:solidFill>
+          <a:ln w="12700">
+            <a:solidFill>
+              <a:srgbClr val="D9E0E8"/>
+            </a:solidFill>
+            <a:prstDash val="solid"/>
+          </a:ln>
+        </p:spPr>
+      </p:sp>
+      <p:sp>
+        <p:nvSpPr>
+          <p:cNvPr id="10" name="dot-2"/>
+          <p:cNvSpPr/>
+          <p:nvPr/>
+        </p:nvSpPr>
+        <p:spPr>
+          <a:xfrm>
+            <a:off x="4614672" y="2057400"/>
+            <a:ext cx="475488" cy="475488"/>
+          </a:xfrm>
+          <a:prstGeom prst="ellipse">
+            <a:avLst/>
+          </a:prstGeom>
+          <a:solidFill>
+            <a:srgbClr val="E8803A"/>
+          </a:solidFill>
+          <a:ln w="12700">
+            <a:solidFill>
+              <a:srgbClr val="E8803A"/>
+            </a:solidFill>
+            <a:prstDash val="solid"/>
+          </a:ln>
+        </p:spPr>
+      </p:sp>
+      <p:sp>
+        <p:nvSpPr>
+          <p:cNvPr id="11" name="Text 9"/>
+          <p:cNvSpPr txBox="1"/>
+          <p:nvPr/>
+        </p:nvSpPr>
+        <p:spPr>
+          <a:xfrm>
+            <a:off x="4614672" y="2057400"/>
+            <a:ext cx="475488" cy="475488"/>
+          </a:xfrm>
+          <a:prstGeom prst="rect">
+            <a:avLst/>
+          </a:prstGeom>
+          <a:noFill/>
+          <a:ln/>
+        </p:spPr>
+        <p:txBody>
+          <a:bodyPr wrap="square" lIns="0" tIns="0" rIns="0" bIns="0" rtlCol="0" anchor="ctr"/>
+          <a:lstStyle/>
+          <a:p>
+            <a:pPr algn="ctr" indent="0" marL="0">
+              <a:buNone/>
+            </a:pPr>
+            <a:r>
+              <a:rPr lang="en-US" sz="1500" b="1" dirty="0">
+                <a:solidFill>
+                  <a:srgbClr val="FFFFFF"/>
+                </a:solidFill>
+              </a:rPr>
+              <a:t>2</a:t>
+            </a:r>
+            <a:endParaRPr lang="en-US" sz="1500" dirty="0"/>
+          </a:p>
+        </p:txBody>
+      </p:sp>
+      <p:sp>
+        <p:nvSpPr>
+          <p:cNvPr id="12" name="Text 10"/>
+          <p:cNvSpPr txBox="1"/>
+          <p:nvPr/>
+        </p:nvSpPr>
+        <p:spPr>
+          <a:xfrm>
+            <a:off x="4614672" y="2670048"/>
+            <a:ext cx="2932176" cy="365760"/>
+          </a:xfrm>
+          <a:prstGeom prst="rect">
+            <a:avLst/>
+          </a:prstGeom>
+          <a:noFill/>
+          <a:ln/>
+        </p:spPr>
+        <p:txBody>
+          <a:bodyPr wrap="square" lIns="0" tIns="0" rIns="0" bIns="0" rtlCol="0" anchor="t"/>
+          <a:lstStyle/>
+          <a:p>
+            <a:pPr algn="l" indent="0" marL="0">
+              <a:buNone/>
+            </a:pPr>
+            <a:r>
+              <a:rPr lang="en-US" sz="1600" b="1" dirty="0">
+                <a:solidFill>
+                  <a:schemeClr val="tx1"/>
+                </a:solidFill>
+              </a:rPr>
+              <a:t>ถอยหลัง  400 ms</a:t>
+            </a:r>
+            <a:endParaRPr lang="en-US" sz="1600" dirty="0"/>
+          </a:p>
+        </p:txBody>
+      </p:sp>
+      <p:sp>
+        <p:nvSpPr>
+          <p:cNvPr id="13" name="Text 11"/>
+          <p:cNvSpPr txBox="1"/>
+          <p:nvPr/>
+        </p:nvSpPr>
+        <p:spPr>
+          <a:xfrm>
+            <a:off x="4614672" y="3090672"/>
+            <a:ext cx="2932176" cy="914400"/>
+          </a:xfrm>
+          <a:prstGeom prst="rect">
+            <a:avLst/>
+          </a:prstGeom>
+          <a:noFill/>
+          <a:ln/>
+        </p:spPr>
+        <p:txBody>
+          <a:bodyPr wrap="square" lIns="0" tIns="0" rIns="0" bIns="0" rtlCol="0" anchor="t"/>
+          <a:lstStyle/>
+          <a:p>
+            <a:pPr algn="l" indent="0" marL="0">
+              <a:lnSpc>
+                <a:spcPct val="125000"/>
+              </a:lnSpc>
+              <a:buNone/>
+            </a:pPr>
+            <a:r>
+              <a:rPr lang="en-US" sz="1250" dirty="0">
+                <a:solidFill>
+                  <a:srgbClr val="4A5568"/>
+                </a:solidFill>
+              </a:rPr>
+              <a:t>ถอยเอียงไปทางที่เพิ่งเห็นเส้นครั้งสุดท้าย แก้กรณีเข้าโค้งเร็วเกินจนหลุด</a:t>
+            </a:r>
+            <a:endParaRPr lang="en-US" sz="1250" dirty="0"/>
+          </a:p>
+        </p:txBody>
+      </p:sp>
+      <p:sp>
+        <p:nvSpPr>
+          <p:cNvPr id="14" name="stage-2"/>
+          <p:cNvSpPr/>
+          <p:nvPr/>
+        </p:nvSpPr>
+        <p:spPr>
+          <a:xfrm>
+            <a:off x="8168640" y="1828800"/>
+            <a:ext cx="3444240" cy="2286000"/>
+          </a:xfrm>
+          <a:prstGeom prst="roundRect">
+            <a:avLst>
+              <a:gd name="adj" fmla="val 4000"/>
+            </a:avLst>
+          </a:prstGeom>
+          <a:solidFill>
+            <a:schemeClr val="bg2"/>
+          </a:solidFill>
+          <a:ln w="12700">
+            <a:solidFill>
+              <a:srgbClr val="D9E0E8"/>
+            </a:solidFill>
+            <a:prstDash val="solid"/>
+          </a:ln>
+        </p:spPr>
+      </p:sp>
+      <p:sp>
+        <p:nvSpPr>
+          <p:cNvPr id="15" name="dot-3"/>
+          <p:cNvSpPr/>
+          <p:nvPr/>
+        </p:nvSpPr>
+        <p:spPr>
+          <a:xfrm>
+            <a:off x="8424672" y="2057400"/>
+            <a:ext cx="475488" cy="475488"/>
+          </a:xfrm>
+          <a:prstGeom prst="ellipse">
+            <a:avLst/>
+          </a:prstGeom>
+          <a:solidFill>
+            <a:srgbClr val="E8803A"/>
+          </a:solidFill>
+          <a:ln w="12700">
+            <a:solidFill>
+              <a:srgbClr val="E8803A"/>
+            </a:solidFill>
+            <a:prstDash val="solid"/>
+          </a:ln>
+        </p:spPr>
+      </p:sp>
+      <p:sp>
+        <p:nvSpPr>
+          <p:cNvPr id="16" name="Text 14"/>
+          <p:cNvSpPr txBox="1"/>
+          <p:nvPr/>
+        </p:nvSpPr>
+        <p:spPr>
+          <a:xfrm>
+            <a:off x="8424672" y="2057400"/>
+            <a:ext cx="475488" cy="475488"/>
+          </a:xfrm>
+          <a:prstGeom prst="rect">
+            <a:avLst/>
+          </a:prstGeom>
+          <a:noFill/>
+          <a:ln/>
+        </p:spPr>
+        <p:txBody>
+          <a:bodyPr wrap="square" lIns="0" tIns="0" rIns="0" bIns="0" rtlCol="0" anchor="ctr"/>
+          <a:lstStyle/>
+          <a:p>
+            <a:pPr algn="ctr" indent="0" marL="0">
+              <a:buNone/>
+            </a:pPr>
+            <a:r>
+              <a:rPr lang="en-US" sz="1500" b="1" dirty="0">
+                <a:solidFill>
+                  <a:srgbClr val="FFFFFF"/>
+                </a:solidFill>
+              </a:rPr>
+              <a:t>3</a:t>
+            </a:r>
+            <a:endParaRPr lang="en-US" sz="1500" dirty="0"/>
+          </a:p>
+        </p:txBody>
+      </p:sp>
+      <p:sp>
+        <p:nvSpPr>
+          <p:cNvPr id="17" name="Text 15"/>
+          <p:cNvSpPr txBox="1"/>
+          <p:nvPr/>
+        </p:nvSpPr>
+        <p:spPr>
+          <a:xfrm>
+            <a:off x="8424672" y="2670048"/>
+            <a:ext cx="2932176" cy="365760"/>
+          </a:xfrm>
+          <a:prstGeom prst="rect">
+            <a:avLst/>
+          </a:prstGeom>
+          <a:noFill/>
+          <a:ln/>
+        </p:spPr>
+        <p:txBody>
+          <a:bodyPr wrap="square" lIns="0" tIns="0" rIns="0" bIns="0" rtlCol="0" anchor="t"/>
+          <a:lstStyle/>
+          <a:p>
+            <a:pPr algn="l" indent="0" marL="0">
+              <a:buNone/>
+            </a:pPr>
+            <a:r>
+              <a:rPr lang="en-US" sz="1600" b="1" dirty="0">
+                <a:solidFill>
+                  <a:schemeClr val="tx1"/>
+                </a:solidFill>
+              </a:rPr>
+              <a:t>กวาดหา  ถึง 6 วินาที</a:t>
+            </a:r>
+            <a:endParaRPr lang="en-US" sz="1600" dirty="0"/>
+          </a:p>
+        </p:txBody>
+      </p:sp>
+      <p:sp>
+        <p:nvSpPr>
+          <p:cNvPr id="18" name="Text 16"/>
+          <p:cNvSpPr txBox="1"/>
+          <p:nvPr/>
+        </p:nvSpPr>
+        <p:spPr>
+          <a:xfrm>
+            <a:off x="8424672" y="3090672"/>
+            <a:ext cx="2932176" cy="914400"/>
+          </a:xfrm>
+          <a:prstGeom prst="rect">
+            <a:avLst/>
+          </a:prstGeom>
+          <a:noFill/>
+          <a:ln/>
+        </p:spPr>
+        <p:txBody>
+          <a:bodyPr wrap="square" lIns="0" tIns="0" rIns="0" bIns="0" rtlCol="0" anchor="t"/>
+          <a:lstStyle/>
+          <a:p>
+            <a:pPr algn="l" indent="0" marL="0">
+              <a:lnSpc>
+                <a:spcPct val="125000"/>
+              </a:lnSpc>
+              <a:buNone/>
+            </a:pPr>
+            <a:r>
+              <a:rPr lang="en-US" sz="1250" dirty="0">
+                <a:solidFill>
+                  <a:srgbClr val="4A5568"/>
+                </a:solidFill>
+              </a:rPr>
+              <a:t>หมุนอยู่กับที่ด้วยความเร็ว 55% สลับซ้ายขวา แต่ละรอบกว้างขึ้นเรื่อยๆ ครบ 6 วินาทีแล้วไม่เจอถึงจะยอมแพ้</a:t>
+            </a:r>
+            <a:endParaRPr lang="en-US" sz="1250" dirty="0"/>
+          </a:p>
+        </p:txBody>
+      </p:sp>
+      <p:sp>
+        <p:nvSpPr>
+          <p:cNvPr id="19" name="callout"/>
+          <p:cNvSpPr/>
+          <p:nvPr/>
+        </p:nvSpPr>
+        <p:spPr>
+          <a:xfrm>
+            <a:off x="548640" y="4343400"/>
+            <a:ext cx="11064240" cy="1234440"/>
+          </a:xfrm>
+          <a:prstGeom prst="roundRect">
+            <a:avLst>
+              <a:gd name="adj" fmla="val 5926"/>
+            </a:avLst>
+          </a:prstGeom>
+          <a:solidFill>
+            <a:srgbClr val="E8F1F5"/>
+          </a:solidFill>
+          <a:ln w="12700">
+            <a:solidFill>
+              <a:srgbClr val="CBE0E9"/>
+            </a:solidFill>
+            <a:prstDash val="solid"/>
+          </a:ln>
+        </p:spPr>
+      </p:sp>
+      <p:sp>
+        <p:nvSpPr>
+          <p:cNvPr id="20" name="Text 18"/>
+          <p:cNvSpPr txBox="1"/>
+          <p:nvPr/>
+        </p:nvSpPr>
+        <p:spPr>
+          <a:xfrm>
+            <a:off x="777240" y="4471416"/>
+            <a:ext cx="10607040" cy="274320"/>
+          </a:xfrm>
+          <a:prstGeom prst="rect">
+            <a:avLst/>
+          </a:prstGeom>
+          <a:noFill/>
+          <a:ln/>
+        </p:spPr>
+        <p:txBody>
+          <a:bodyPr wrap="square" lIns="0" tIns="0" rIns="0" bIns="0" rtlCol="0" anchor="t"/>
+          <a:lstStyle/>
+          <a:p>
+            <a:pPr algn="l" indent="0" marL="0">
+              <a:buNone/>
+            </a:pPr>
+            <a:r>
+              <a:rPr lang="en-US" sz="1400" b="1" dirty="0">
+                <a:solidFill>
+                  <a:srgbClr val="1C7293"/>
+                </a:solidFill>
+              </a:rPr>
+              <a:t>ขาวหมดกับดำหมด คนละความหมายกันคนละขั้ว</a:t>
+            </a:r>
+            <a:endParaRPr lang="en-US" sz="1400" dirty="0"/>
+          </a:p>
+        </p:txBody>
+      </p:sp>
+      <p:sp>
+        <p:nvSpPr>
+          <p:cNvPr id="21" name="Text 19"/>
+          <p:cNvSpPr txBox="1"/>
+          <p:nvPr/>
+        </p:nvSpPr>
+        <p:spPr>
+          <a:xfrm>
+            <a:off x="777240" y="4782312"/>
+            <a:ext cx="10607040" cy="667512"/>
+          </a:xfrm>
+          <a:prstGeom prst="rect">
+            <a:avLst/>
+          </a:prstGeom>
+          <a:noFill/>
+          <a:ln/>
+        </p:spPr>
+        <p:txBody>
+          <a:bodyPr wrap="square" lIns="0" tIns="0" rIns="0" bIns="0" rtlCol="0" anchor="t"/>
+          <a:lstStyle/>
+          <a:p>
+            <a:pPr algn="l" indent="0" marL="0">
+              <a:lnSpc>
+                <a:spcPct val="120000"/>
+              </a:lnSpc>
+              <a:buNone/>
+            </a:pPr>
+            <a:r>
+              <a:rPr lang="en-US" sz="1250" dirty="0">
+                <a:solidFill>
+                  <a:srgbClr val="4A5568"/>
+                </a:solidFill>
+              </a:rPr>
+              <a:t>ไม่เจอเส้นเลยแปลว่าเส้นอยู่นอกแถวเซนเซอร์ หุ่นต้องดันตัวเองไปหาจนกว่าจะมีดวงใดดวงหนึ่งเจอ  ส่วนที่สั่งให้หยุดคือตรงข้ามกันพอดี คือดำครบทั้ง 5 ดวง ซึ่งแปลว่าถึงเส้นชัยแล้ว</a:t>
+            </a:r>
+            <a:endParaRPr lang="en-US" sz="1250" dirty="0"/>
+          </a:p>
+        </p:txBody>
+      </p:sp>
+      <p:sp>
+        <p:nvSpPr>
+          <p:cNvPr id="25" name="Slide Number Placeholder 0"/>
+          <p:cNvSpPr>
+            <a:spLocks noGrp="1"/>
+          </p:cNvSpPr>
+          <p:nvPr>
+            <p:ph type="sldNum" sz="quarter" idx="4294967295"/>
+          </p:nvPr>
+        </p:nvSpPr>
+        <p:spPr>
+          <a:xfrm>
+            <a:off x="11338560" y="6263640"/>
+            <a:ext cx="457200" cy="274320"/>
+          </a:xfrm>
+          <a:prstGeom prst="rect">
+            <a:avLst/>
+          </a:prstGeom>
+          <a:extLst>
+            <a:ext uri="{C572A759-6A51-4108-AA02-DFA0A04FC94B}">
+              <ma14:wrappingTextBoxFlag xmlns:ma14="http://schemas.microsoft.com/office/mac/drawingml/2011/main" val="0"/>
+            </a:ext>
+          </a:extLst>
+        </p:spPr>
+        <p:txBody>
+          <a:bodyPr/>
+          <a:lstStyle>
+            <a:lvl1pPr>
+              <a:defRPr sz="1000">
+                <a:solidFill>
+                  <a:srgbClr val="6B7E93"/>
+                </a:solidFill>
+              </a:defRPr>
+            </a:lvl1pPr>
+          </a:lstStyle>
+          <a:p>
+            <a:pPr algn="r"/>
+            <a:fld id="{F7021451-1387-4CA6-816F-3879F97B5CBC}" type="slidenum">
+              <a:rPr b="0" lang="en-US"/>
+              <a:t>20</a:t>
+            </a:fld>
+            <a:endParaRPr lang="en-US"/>
+          </a:p>
+        </p:txBody>
+      </p:sp>
+    </p:spTree>
+  </p:cSld>
+  <p:clrMapOvr>
+    <a:masterClrMapping/>
+  </p:clrMapOvr>
+</p:sld>
+</file>
+
+<file path=ppt/slides/slide21.xml><?xml version="1.0" encoding="utf-8"?>
+<p:sld xmlns:a="http://schemas.openxmlformats.org/drawingml/2006/main" xmlns:r="http://schemas.openxmlformats.org/officeDocument/2006/relationships" xmlns:p="http://schemas.openxmlformats.org/presentationml/2006/main">
+  <p:cSld name="Slide 21">
+    <p:spTree>
+      <p:nvGrpSpPr>
+        <p:cNvPr id="1" name=""/>
+        <p:cNvGrpSpPr/>
+        <p:nvPr/>
+      </p:nvGrpSpPr>
+      <p:grpSpPr>
+        <a:xfrm>
+          <a:off x="0" y="0"/>
+          <a:ext cx="0" cy="0"/>
+          <a:chOff x="0" y="0"/>
+          <a:chExt cx="0" cy="0"/>
+        </a:xfrm>
+      </p:grpSpPr>
+      <p:sp>
+        <p:nvSpPr>
+          <p:cNvPr id="2" name="Text 0"/>
+          <p:cNvSpPr/>
+          <p:nvPr>
+            <p:ph idx="100" type="title" hasCustomPrompt="1"/>
+          </p:nvPr>
+        </p:nvSpPr>
+        <p:spPr>
+          <a:xfrm>
+            <a:off x="548640" y="384048"/>
+            <a:ext cx="11064240" cy="685800"/>
+          </a:xfrm>
+          <a:prstGeom prst="rect">
+            <a:avLst/>
+          </a:prstGeom>
+          <a:noFill/>
+          <a:ln/>
+        </p:spPr>
+        <p:txBody>
+          <a:bodyPr wrap="square" rtlCol="0"/>
+          <a:lstStyle/>
+          <a:p>
+            <a:pPr algn="l" indent="0" marL="0">
+              <a:buNone/>
+            </a:pPr>
+            <a:r>
+              <a:rPr lang="en-US" sz="3200" b="1" dirty="0">
+                <a:solidFill>
+                  <a:schemeClr val="tx1"/>
+                </a:solidFill>
+              </a:rPr>
               <a:t>อาการที่เจอบ่อยและวิธีแก้</a:t>
             </a:r>
             <a:endParaRPr lang="en-US" sz="3200" dirty="0"/>
@@ -13933,7 +15429,7 @@
       </p:sp>
       <p:graphicFrame>
         <p:nvGraphicFramePr>
-          <p:cNvPr id="21" name="Table 0"/>
+          <p:cNvPr id="22" name="Table 0"/>
           <p:cNvGraphicFramePr>
             <a:graphicFrameLocks noGrp="1"/>
           </p:cNvGraphicFramePr>
@@ -16036,7 +17532,7 @@
             <a:pPr algn="r"/>
             <a:fld id="{F7021451-1387-4CA6-816F-3879F97B5CBC}" type="slidenum">
               <a:rPr b="0" lang="en-US"/>
-              <a:t>20</a:t>
+              <a:t>21</a:t>
             </a:fld>
             <a:endParaRPr lang="en-US"/>
           </a:p>
@@ -16050,9 +17546,9 @@
 </p:sld>
 </file>
 
-<file path=ppt/slides/slide21.xml><?xml version="1.0" encoding="utf-8"?>
+<file path=ppt/slides/slide22.xml><?xml version="1.0" encoding="utf-8"?>
 <p:sld xmlns:a="http://schemas.openxmlformats.org/drawingml/2006/main" xmlns:r="http://schemas.openxmlformats.org/officeDocument/2006/relationships" xmlns:p="http://schemas.openxmlformats.org/presentationml/2006/main">
-  <p:cSld name="Slide 21">
+  <p:cSld name="Slide 22">
     <p:spTree>
       <p:nvGrpSpPr>
         <p:cNvPr id="1" name=""/>
@@ -16774,7 +18270,7 @@
             <a:pPr algn="r"/>
             <a:fld id="{F7021451-1387-4CA6-816F-3879F97B5CBC}" type="slidenum">
               <a:rPr b="0" lang="en-US"/>
-              <a:t>21</a:t>
+              <a:t>22</a:t>
             </a:fld>
             <a:endParaRPr lang="en-US"/>
           </a:p>
@@ -16788,9 +18284,9 @@
 </p:sld>
 </file>
 
-<file path=ppt/slides/slide22.xml><?xml version="1.0" encoding="utf-8"?>
+<file path=ppt/slides/slide23.xml><?xml version="1.0" encoding="utf-8"?>
 <p:sld xmlns:a="http://schemas.openxmlformats.org/drawingml/2006/main" xmlns:r="http://schemas.openxmlformats.org/officeDocument/2006/relationships" xmlns:p="http://schemas.openxmlformats.org/presentationml/2006/main">
-  <p:cSld name="Slide 22">
+  <p:cSld name="Slide 23">
     <p:spTree>
       <p:nvGrpSpPr>
         <p:cNvPr id="1" name=""/>

--- a/docs/Tiny-Robot-Setup-Guide-TH.pptx
+++ b/docs/Tiny-Robot-Setup-Guide-TH.pptx
@@ -129,7 +129,7 @@
   <p:extLst>
     <p:ext uri="{521415D9-36F7-43E2-AB2F-B90AF26B5E84}">
       <p14:sectionLst xmlns:p14="http://schemas.microsoft.com/office/powerpoint/2010/main">
-        <p14:section name="ภาพรวม" id="{dcc12fe2-db61-3415-c8d5-3e1a5905f846}">
+        <p14:section name="ภาพรวม" id="{cfb3adf3-770d-bdf2-8246-6952c2819416}">
           <p14:sldIdLst>
             <p14:sldId id="256"/>
             <p14:sldId id="257"/>
@@ -137,7 +137,7 @@
             <p14:sldId id="259"/>
           </p14:sldIdLst>
         </p14:section>
-        <p14:section name="ติดตั้ง" id="{220aae83-f0d2-28bc-b3dd-c3c13539b529}">
+        <p14:section name="ติดตั้ง" id="{32fe05de-509a-93e4-9c53-948b2ea4f8bd}">
           <p14:sldIdLst>
             <p14:sldId id="260"/>
             <p14:sldId id="261"/>
@@ -149,7 +149,7 @@
             <p14:sldId id="267"/>
           </p14:sldIdLst>
         </p14:section>
-        <p14:section name="ใช้งานจริง" id="{a7b8c6e9-7926-c1cf-0f45-2c5ab4cdaef0}">
+        <p14:section name="ใช้งานจริง" id="{3a39b87e-4b9e-c495-5c34-b3847d8d6241}">
           <p14:sldIdLst>
             <p14:sldId id="268"/>
             <p14:sldId id="269"/>
@@ -158,7 +158,7 @@
             <p14:sldId id="272"/>
           </p14:sldIdLst>
         </p14:section>
-        <p14:section name="ปรับแต่งและแก้ปัญหา" id="{f7ccbec8-38f1-b99a-1d37-3c94eaff4960}">
+        <p14:section name="ปรับแต่งและแก้ปัญหา" id="{678bfed0-21e2-334b-ceb4-b43b5df3c393}">
           <p14:sldIdLst>
             <p14:sldId id="273"/>
             <p14:sldId id="274"/>
